--- a/assets/结构图/中心辐射关系-001/example.pptx
+++ b/assets/结构图/中心辐射关系-001/example.pptx
@@ -2,13 +2,18 @@
 <file path=ppt/presentation.xml><?xml version="1.0" encoding="utf-8"?>
 <p:presentation xmlns:p="http://schemas.openxmlformats.org/presentationml/2006/main">
   <p:sldMasterIdLst>
-    <p:sldMasterId xmlns:r="http://schemas.openxmlformats.org/officeDocument/2006/relationships" id="2147483648" r:id="R8684548bf640483b"/>
+    <p:sldMasterId xmlns:r="http://schemas.openxmlformats.org/officeDocument/2006/relationships" id="2147483648" r:id="R9c8b528739f84d2b"/>
   </p:sldMasterIdLst>
   <p:notesMasterIdLst>
-    <p:notesMasterId xmlns:r="http://schemas.openxmlformats.org/officeDocument/2006/relationships" r:id="R33c62356fc014ea2"/>
+    <p:notesMasterId xmlns:r="http://schemas.openxmlformats.org/officeDocument/2006/relationships" r:id="R87a827a3d60345f9"/>
   </p:notesMasterIdLst>
   <p:sldIdLst>
-    <p:sldId xmlns:r="http://schemas.openxmlformats.org/officeDocument/2006/relationships" id="256" r:id="Rd6656a83297342e7"/>
+    <p:sldId xmlns:r="http://schemas.openxmlformats.org/officeDocument/2006/relationships" id="256" r:id="R0663188380274578"/>
+    <p:sldId xmlns:r="http://schemas.openxmlformats.org/officeDocument/2006/relationships" id="257" r:id="R42cc93ee1e8d4edf"/>
+    <p:sldId xmlns:r="http://schemas.openxmlformats.org/officeDocument/2006/relationships" id="258" r:id="R0d57e26df2914f82"/>
+    <p:sldId xmlns:r="http://schemas.openxmlformats.org/officeDocument/2006/relationships" id="259" r:id="R08ae9bb3c82c44e0"/>
+    <p:sldId xmlns:r="http://schemas.openxmlformats.org/officeDocument/2006/relationships" id="260" r:id="Rce7c7be909134568"/>
+    <p:sldId xmlns:r="http://schemas.openxmlformats.org/officeDocument/2006/relationships" id="261" r:id="R7ecc66ffc0ff47fb"/>
   </p:sldIdLst>
   <p:sldSz cx="12192000" cy="6858000"/>
   <p:notesSz cx="6858000" cy="9144000"/>
@@ -468,6 +473,336 @@
 </p:notes>
 </file>
 
+<file path=ppt/notesSlides/notesSlide2.xml><?xml version="1.0" encoding="utf-8"?>
+<p:notes xmlns:p="http://schemas.openxmlformats.org/presentationml/2006/main">
+  <p:cSld>
+    <p:spTree>
+      <p:nvGrpSpPr>
+        <p:cNvPr id="1" name=""/>
+        <p:cNvGrpSpPr/>
+        <p:nvPr/>
+      </p:nvGrpSpPr>
+      <p:grpSpPr>
+        <a:xfrm xmlns:a="http://schemas.openxmlformats.org/drawingml/2006/main"/>
+      </p:grpSpPr>
+      <p:sp>
+        <p:nvSpPr>
+          <p:cNvPr id="2" name="Slide Image Placeholder 1"/>
+          <p:cNvSpPr>
+            <a:spLocks xmlns:a="http://schemas.openxmlformats.org/drawingml/2006/main" noGrp="1"/>
+          </p:cNvSpPr>
+          <p:nvPr>
+            <p:ph type="sldImg" idx="0"/>
+          </p:nvPr>
+        </p:nvSpPr>
+        <p:spPr/>
+      </p:sp>
+      <p:sp>
+        <p:nvSpPr>
+          <p:cNvPr id="3" name="Notes Placeholder 2"/>
+          <p:cNvSpPr>
+            <a:spLocks xmlns:a="http://schemas.openxmlformats.org/drawingml/2006/main" noGrp="1"/>
+          </p:cNvSpPr>
+          <p:nvPr>
+            <p:ph type="body" idx="1"/>
+          </p:nvPr>
+        </p:nvSpPr>
+        <p:spPr/>
+        <p:txBody>
+          <a:bodyPr xmlns:a="http://schemas.openxmlformats.org/drawingml/2006/main"/>
+          <a:lstStyle xmlns:a="http://schemas.openxmlformats.org/drawingml/2006/main"/>
+          <a:p xmlns:a="http://schemas.openxmlformats.org/drawingml/2006/main"/>
+        </p:txBody>
+      </p:sp>
+      <p:sp>
+        <p:nvSpPr>
+          <p:cNvPr id="4" name="Slide Number Placeholder 3"/>
+          <p:cNvSpPr>
+            <a:spLocks xmlns:a="http://schemas.openxmlformats.org/drawingml/2006/main" noGrp="1"/>
+          </p:cNvSpPr>
+          <p:nvPr>
+            <p:ph type="sldNum" idx="5"/>
+          </p:nvPr>
+        </p:nvSpPr>
+        <p:spPr/>
+        <p:txBody>
+          <a:bodyPr xmlns:a="http://schemas.openxmlformats.org/drawingml/2006/main"/>
+          <a:lstStyle xmlns:a="http://schemas.openxmlformats.org/drawingml/2006/main"/>
+          <a:p xmlns:a="http://schemas.openxmlformats.org/drawingml/2006/main"/>
+        </p:txBody>
+      </p:sp>
+    </p:spTree>
+  </p:cSld>
+  <p:clrMapOvr>
+    <a:masterClrMapping xmlns:a="http://schemas.openxmlformats.org/drawingml/2006/main"/>
+  </p:clrMapOvr>
+</p:notes>
+</file>
+
+<file path=ppt/notesSlides/notesSlide3.xml><?xml version="1.0" encoding="utf-8"?>
+<p:notes xmlns:p="http://schemas.openxmlformats.org/presentationml/2006/main">
+  <p:cSld>
+    <p:spTree>
+      <p:nvGrpSpPr>
+        <p:cNvPr id="1" name=""/>
+        <p:cNvGrpSpPr/>
+        <p:nvPr/>
+      </p:nvGrpSpPr>
+      <p:grpSpPr>
+        <a:xfrm xmlns:a="http://schemas.openxmlformats.org/drawingml/2006/main"/>
+      </p:grpSpPr>
+      <p:sp>
+        <p:nvSpPr>
+          <p:cNvPr id="2" name="Slide Image Placeholder 1"/>
+          <p:cNvSpPr>
+            <a:spLocks xmlns:a="http://schemas.openxmlformats.org/drawingml/2006/main" noGrp="1"/>
+          </p:cNvSpPr>
+          <p:nvPr>
+            <p:ph type="sldImg" idx="0"/>
+          </p:nvPr>
+        </p:nvSpPr>
+        <p:spPr/>
+      </p:sp>
+      <p:sp>
+        <p:nvSpPr>
+          <p:cNvPr id="3" name="Notes Placeholder 2"/>
+          <p:cNvSpPr>
+            <a:spLocks xmlns:a="http://schemas.openxmlformats.org/drawingml/2006/main" noGrp="1"/>
+          </p:cNvSpPr>
+          <p:nvPr>
+            <p:ph type="body" idx="1"/>
+          </p:nvPr>
+        </p:nvSpPr>
+        <p:spPr/>
+        <p:txBody>
+          <a:bodyPr xmlns:a="http://schemas.openxmlformats.org/drawingml/2006/main"/>
+          <a:lstStyle xmlns:a="http://schemas.openxmlformats.org/drawingml/2006/main"/>
+          <a:p xmlns:a="http://schemas.openxmlformats.org/drawingml/2006/main"/>
+        </p:txBody>
+      </p:sp>
+      <p:sp>
+        <p:nvSpPr>
+          <p:cNvPr id="4" name="Slide Number Placeholder 3"/>
+          <p:cNvSpPr>
+            <a:spLocks xmlns:a="http://schemas.openxmlformats.org/drawingml/2006/main" noGrp="1"/>
+          </p:cNvSpPr>
+          <p:nvPr>
+            <p:ph type="sldNum" idx="5"/>
+          </p:nvPr>
+        </p:nvSpPr>
+        <p:spPr/>
+        <p:txBody>
+          <a:bodyPr xmlns:a="http://schemas.openxmlformats.org/drawingml/2006/main"/>
+          <a:lstStyle xmlns:a="http://schemas.openxmlformats.org/drawingml/2006/main"/>
+          <a:p xmlns:a="http://schemas.openxmlformats.org/drawingml/2006/main"/>
+        </p:txBody>
+      </p:sp>
+    </p:spTree>
+  </p:cSld>
+  <p:clrMapOvr>
+    <a:masterClrMapping xmlns:a="http://schemas.openxmlformats.org/drawingml/2006/main"/>
+  </p:clrMapOvr>
+</p:notes>
+</file>
+
+<file path=ppt/notesSlides/notesSlide4.xml><?xml version="1.0" encoding="utf-8"?>
+<p:notes xmlns:p="http://schemas.openxmlformats.org/presentationml/2006/main">
+  <p:cSld>
+    <p:spTree>
+      <p:nvGrpSpPr>
+        <p:cNvPr id="1" name=""/>
+        <p:cNvGrpSpPr/>
+        <p:nvPr/>
+      </p:nvGrpSpPr>
+      <p:grpSpPr>
+        <a:xfrm xmlns:a="http://schemas.openxmlformats.org/drawingml/2006/main"/>
+      </p:grpSpPr>
+      <p:sp>
+        <p:nvSpPr>
+          <p:cNvPr id="2" name="Slide Image Placeholder 1"/>
+          <p:cNvSpPr>
+            <a:spLocks xmlns:a="http://schemas.openxmlformats.org/drawingml/2006/main" noGrp="1"/>
+          </p:cNvSpPr>
+          <p:nvPr>
+            <p:ph type="sldImg" idx="0"/>
+          </p:nvPr>
+        </p:nvSpPr>
+        <p:spPr/>
+      </p:sp>
+      <p:sp>
+        <p:nvSpPr>
+          <p:cNvPr id="3" name="Notes Placeholder 2"/>
+          <p:cNvSpPr>
+            <a:spLocks xmlns:a="http://schemas.openxmlformats.org/drawingml/2006/main" noGrp="1"/>
+          </p:cNvSpPr>
+          <p:nvPr>
+            <p:ph type="body" idx="1"/>
+          </p:nvPr>
+        </p:nvSpPr>
+        <p:spPr/>
+        <p:txBody>
+          <a:bodyPr xmlns:a="http://schemas.openxmlformats.org/drawingml/2006/main"/>
+          <a:lstStyle xmlns:a="http://schemas.openxmlformats.org/drawingml/2006/main"/>
+          <a:p xmlns:a="http://schemas.openxmlformats.org/drawingml/2006/main"/>
+        </p:txBody>
+      </p:sp>
+      <p:sp>
+        <p:nvSpPr>
+          <p:cNvPr id="4" name="Slide Number Placeholder 3"/>
+          <p:cNvSpPr>
+            <a:spLocks xmlns:a="http://schemas.openxmlformats.org/drawingml/2006/main" noGrp="1"/>
+          </p:cNvSpPr>
+          <p:nvPr>
+            <p:ph type="sldNum" idx="5"/>
+          </p:nvPr>
+        </p:nvSpPr>
+        <p:spPr/>
+        <p:txBody>
+          <a:bodyPr xmlns:a="http://schemas.openxmlformats.org/drawingml/2006/main"/>
+          <a:lstStyle xmlns:a="http://schemas.openxmlformats.org/drawingml/2006/main"/>
+          <a:p xmlns:a="http://schemas.openxmlformats.org/drawingml/2006/main"/>
+        </p:txBody>
+      </p:sp>
+    </p:spTree>
+  </p:cSld>
+  <p:clrMapOvr>
+    <a:masterClrMapping xmlns:a="http://schemas.openxmlformats.org/drawingml/2006/main"/>
+  </p:clrMapOvr>
+</p:notes>
+</file>
+
+<file path=ppt/notesSlides/notesSlide5.xml><?xml version="1.0" encoding="utf-8"?>
+<p:notes xmlns:p="http://schemas.openxmlformats.org/presentationml/2006/main">
+  <p:cSld>
+    <p:spTree>
+      <p:nvGrpSpPr>
+        <p:cNvPr id="1" name=""/>
+        <p:cNvGrpSpPr/>
+        <p:nvPr/>
+      </p:nvGrpSpPr>
+      <p:grpSpPr>
+        <a:xfrm xmlns:a="http://schemas.openxmlformats.org/drawingml/2006/main"/>
+      </p:grpSpPr>
+      <p:sp>
+        <p:nvSpPr>
+          <p:cNvPr id="2" name="Slide Image Placeholder 1"/>
+          <p:cNvSpPr>
+            <a:spLocks xmlns:a="http://schemas.openxmlformats.org/drawingml/2006/main" noGrp="1"/>
+          </p:cNvSpPr>
+          <p:nvPr>
+            <p:ph type="sldImg" idx="0"/>
+          </p:nvPr>
+        </p:nvSpPr>
+        <p:spPr/>
+      </p:sp>
+      <p:sp>
+        <p:nvSpPr>
+          <p:cNvPr id="3" name="Notes Placeholder 2"/>
+          <p:cNvSpPr>
+            <a:spLocks xmlns:a="http://schemas.openxmlformats.org/drawingml/2006/main" noGrp="1"/>
+          </p:cNvSpPr>
+          <p:nvPr>
+            <p:ph type="body" idx="1"/>
+          </p:nvPr>
+        </p:nvSpPr>
+        <p:spPr/>
+        <p:txBody>
+          <a:bodyPr xmlns:a="http://schemas.openxmlformats.org/drawingml/2006/main"/>
+          <a:lstStyle xmlns:a="http://schemas.openxmlformats.org/drawingml/2006/main"/>
+          <a:p xmlns:a="http://schemas.openxmlformats.org/drawingml/2006/main"/>
+        </p:txBody>
+      </p:sp>
+      <p:sp>
+        <p:nvSpPr>
+          <p:cNvPr id="4" name="Slide Number Placeholder 3"/>
+          <p:cNvSpPr>
+            <a:spLocks xmlns:a="http://schemas.openxmlformats.org/drawingml/2006/main" noGrp="1"/>
+          </p:cNvSpPr>
+          <p:nvPr>
+            <p:ph type="sldNum" idx="5"/>
+          </p:nvPr>
+        </p:nvSpPr>
+        <p:spPr/>
+        <p:txBody>
+          <a:bodyPr xmlns:a="http://schemas.openxmlformats.org/drawingml/2006/main"/>
+          <a:lstStyle xmlns:a="http://schemas.openxmlformats.org/drawingml/2006/main"/>
+          <a:p xmlns:a="http://schemas.openxmlformats.org/drawingml/2006/main"/>
+        </p:txBody>
+      </p:sp>
+    </p:spTree>
+  </p:cSld>
+  <p:clrMapOvr>
+    <a:masterClrMapping xmlns:a="http://schemas.openxmlformats.org/drawingml/2006/main"/>
+  </p:clrMapOvr>
+</p:notes>
+</file>
+
+<file path=ppt/notesSlides/notesSlide6.xml><?xml version="1.0" encoding="utf-8"?>
+<p:notes xmlns:p="http://schemas.openxmlformats.org/presentationml/2006/main">
+  <p:cSld>
+    <p:spTree>
+      <p:nvGrpSpPr>
+        <p:cNvPr id="1" name=""/>
+        <p:cNvGrpSpPr/>
+        <p:nvPr/>
+      </p:nvGrpSpPr>
+      <p:grpSpPr>
+        <a:xfrm xmlns:a="http://schemas.openxmlformats.org/drawingml/2006/main"/>
+      </p:grpSpPr>
+      <p:sp>
+        <p:nvSpPr>
+          <p:cNvPr id="2" name="Slide Image Placeholder 1"/>
+          <p:cNvSpPr>
+            <a:spLocks xmlns:a="http://schemas.openxmlformats.org/drawingml/2006/main" noGrp="1"/>
+          </p:cNvSpPr>
+          <p:nvPr>
+            <p:ph type="sldImg" idx="0"/>
+          </p:nvPr>
+        </p:nvSpPr>
+        <p:spPr/>
+      </p:sp>
+      <p:sp>
+        <p:nvSpPr>
+          <p:cNvPr id="3" name="Notes Placeholder 2"/>
+          <p:cNvSpPr>
+            <a:spLocks xmlns:a="http://schemas.openxmlformats.org/drawingml/2006/main" noGrp="1"/>
+          </p:cNvSpPr>
+          <p:nvPr>
+            <p:ph type="body" idx="1"/>
+          </p:nvPr>
+        </p:nvSpPr>
+        <p:spPr/>
+        <p:txBody>
+          <a:bodyPr xmlns:a="http://schemas.openxmlformats.org/drawingml/2006/main"/>
+          <a:lstStyle xmlns:a="http://schemas.openxmlformats.org/drawingml/2006/main"/>
+          <a:p xmlns:a="http://schemas.openxmlformats.org/drawingml/2006/main"/>
+        </p:txBody>
+      </p:sp>
+      <p:sp>
+        <p:nvSpPr>
+          <p:cNvPr id="4" name="Slide Number Placeholder 3"/>
+          <p:cNvSpPr>
+            <a:spLocks xmlns:a="http://schemas.openxmlformats.org/drawingml/2006/main" noGrp="1"/>
+          </p:cNvSpPr>
+          <p:nvPr>
+            <p:ph type="sldNum" idx="5"/>
+          </p:nvPr>
+        </p:nvSpPr>
+        <p:spPr/>
+        <p:txBody>
+          <a:bodyPr xmlns:a="http://schemas.openxmlformats.org/drawingml/2006/main"/>
+          <a:lstStyle xmlns:a="http://schemas.openxmlformats.org/drawingml/2006/main"/>
+          <a:p xmlns:a="http://schemas.openxmlformats.org/drawingml/2006/main"/>
+        </p:txBody>
+      </p:sp>
+    </p:spTree>
+  </p:cSld>
+  <p:clrMapOvr>
+    <a:masterClrMapping xmlns:a="http://schemas.openxmlformats.org/drawingml/2006/main"/>
+  </p:clrMapOvr>
+</p:notes>
+</file>
+
 <file path=ppt/slideLayouts/slideLayout1.xml><?xml version="1.0" encoding="utf-8"?>
 <p:sldLayout xmlns:p="http://schemas.openxmlformats.org/presentationml/2006/main" type="title">
   <p:cSld name="Title Slide">
@@ -506,7 +841,7 @@
   </p:cSld>
   <p:clrMap bg1="lt1" tx1="dk1" bg2="lt2" tx2="dk2" accent1="accent1" accent2="accent2" accent3="accent3" accent4="accent4" accent5="accent5" accent6="accent6" hlink="hlink" folHlink="folHlink"/>
   <p:sldLayoutIdLst>
-    <p:sldLayoutId xmlns:r="http://schemas.openxmlformats.org/officeDocument/2006/relationships" id="2147483649" r:id="Rdce9d2fa72784a76"/>
+    <p:sldLayoutId xmlns:r="http://schemas.openxmlformats.org/officeDocument/2006/relationships" id="2147483649" r:id="R65e14956980547aa"/>
   </p:sldLayoutIdLst>
   <p:txStyles>
     <p:titleStyle>
@@ -1054,10 +1389,10 @@
       </p:grpSpPr>
       <p:sp>
         <p:nvSpPr>
-          <p:cNvPr id="26" name="">
-            <a:extLst xmlns:a="http://schemas.openxmlformats.org/drawingml/2006/main">
-              <a:ext uri="{FF2B5EF4-FFF2-40B4-BE49-F238E27FC236}">
-                <a16:creationId xmlns:a16="http://schemas.microsoft.com/office/drawing/2014/main" id="{D6DDD04D-C77E-4807-9EFD-354CC25D18F2}"/>
+          <p:cNvPr id="18" name="">
+            <a:extLst xmlns:a="http://schemas.openxmlformats.org/drawingml/2006/main">
+              <a:ext uri="{FF2B5EF4-FFF2-40B4-BE49-F238E27FC236}">
+                <a16:creationId xmlns:a16="http://schemas.microsoft.com/office/drawing/2014/main" id="{8505A97D-C194-4018-BD27-4F190FF1B4DA}"/>
               </a:ext>
             </a:extLst>
           </p:cNvPr>
@@ -1115,7 +1450,7 @@
           <p:cNvPr id="2" name="">
             <a:extLst xmlns:a="http://schemas.openxmlformats.org/drawingml/2006/main">
               <a:ext uri="{FF2B5EF4-FFF2-40B4-BE49-F238E27FC236}">
-                <a16:creationId xmlns:a16="http://schemas.microsoft.com/office/drawing/2014/main" id="{1360AD40-E17A-47A2-8D9D-E2783DA72D5E}"/>
+                <a16:creationId xmlns:a16="http://schemas.microsoft.com/office/drawing/2014/main" id="{33C95182-DBCF-4774-959C-D536EA018610}"/>
               </a:ext>
             </a:extLst>
           </p:cNvPr>
@@ -1173,7 +1508,7 @@
           <p:cNvPr id="3" name="">
             <a:extLst xmlns:a="http://schemas.openxmlformats.org/drawingml/2006/main">
               <a:ext uri="{FF2B5EF4-FFF2-40B4-BE49-F238E27FC236}">
-                <a16:creationId xmlns:a16="http://schemas.microsoft.com/office/drawing/2014/main" id="{552CA61C-6F69-4BA7-9F0C-C8AA16DE6D4D}"/>
+                <a16:creationId xmlns:a16="http://schemas.microsoft.com/office/drawing/2014/main" id="{1F06F5CD-7A83-47BC-AAEC-BB6E26843692}"/>
               </a:ext>
             </a:extLst>
           </p:cNvPr>
@@ -1204,7 +1539,7 @@
           <p:cNvPr id="4" name="">
             <a:extLst xmlns:a="http://schemas.openxmlformats.org/drawingml/2006/main">
               <a:ext uri="{FF2B5EF4-FFF2-40B4-BE49-F238E27FC236}">
-                <a16:creationId xmlns:a16="http://schemas.microsoft.com/office/drawing/2014/main" id="{35AAF5EE-1EC6-4334-9D5B-56DF81F8A80D}"/>
+                <a16:creationId xmlns:a16="http://schemas.microsoft.com/office/drawing/2014/main" id="{DA8FA3AC-5D97-40ED-B58E-FDDB958B2BCA}"/>
               </a:ext>
             </a:extLst>
           </p:cNvPr>
@@ -1243,7 +1578,7 @@
           <p:cNvPr id="5" name="PPAGENT_QA|parent=radial-center|domains=radial-shape,radial-content">
             <a:extLst xmlns:a="http://schemas.openxmlformats.org/drawingml/2006/main">
               <a:ext uri="{FF2B5EF4-FFF2-40B4-BE49-F238E27FC236}">
-                <a16:creationId xmlns:a16="http://schemas.microsoft.com/office/drawing/2014/main" id="{E030A16F-85FD-4E71-842C-F4F72689AA37}"/>
+                <a16:creationId xmlns:a16="http://schemas.microsoft.com/office/drawing/2014/main" id="{847FBD58-30D9-41BA-B8CC-21D527593CA1}"/>
               </a:ext>
             </a:extLst>
           </p:cNvPr>
@@ -1311,18 +1646,18 @@
           <p:cNvPr id="6" name="PPAGENT_QA|parent=radial-node-0|domains=radial-shape">
             <a:extLst xmlns:a="http://schemas.openxmlformats.org/drawingml/2006/main">
               <a:ext uri="{FF2B5EF4-FFF2-40B4-BE49-F238E27FC236}">
-                <a16:creationId xmlns:a16="http://schemas.microsoft.com/office/drawing/2014/main" id="{BB71ED1C-95B4-46CC-91D3-293E1E4562FA}"/>
-              </a:ext>
-            </a:extLst>
-          </p:cNvPr>
-          <p:cNvSpPr>
-            <a:spLocks xmlns:a="http://schemas.openxmlformats.org/drawingml/2006/main" noGrp="1"/>
-          </p:cNvSpPr>
-          <p:nvPr/>
-        </p:nvSpPr>
-        <p:spPr>
-          <a:xfrm xmlns:a="http://schemas.openxmlformats.org/drawingml/2006/main">
-            <a:off x="3638550" y="2400300"/>
+                <a16:creationId xmlns:a16="http://schemas.microsoft.com/office/drawing/2014/main" id="{F9DC724B-BE93-41DA-B39E-34DAD3BE3D90}"/>
+              </a:ext>
+            </a:extLst>
+          </p:cNvPr>
+          <p:cNvSpPr>
+            <a:spLocks xmlns:a="http://schemas.openxmlformats.org/drawingml/2006/main" noGrp="1"/>
+          </p:cNvSpPr>
+          <p:nvPr/>
+        </p:nvSpPr>
+        <p:spPr>
+          <a:xfrm xmlns:a="http://schemas.openxmlformats.org/drawingml/2006/main">
+            <a:off x="5876925" y="1590675"/>
             <a:ext cx="438150" cy="438150"/>
           </a:xfrm>
           <a:prstGeom xmlns:a="http://schemas.openxmlformats.org/drawingml/2006/main" prst="ellipse">
@@ -1379,23 +1714,23 @@
           <p:cNvPr id="7" name="PPAGENT_QA|parent=radial-card-0|domains=radial-content">
             <a:extLst xmlns:a="http://schemas.openxmlformats.org/drawingml/2006/main">
               <a:ext uri="{FF2B5EF4-FFF2-40B4-BE49-F238E27FC236}">
-                <a16:creationId xmlns:a16="http://schemas.microsoft.com/office/drawing/2014/main" id="{90B1C291-67F8-4B51-92B4-F1816932FC13}"/>
-              </a:ext>
-            </a:extLst>
-          </p:cNvPr>
-          <p:cNvSpPr>
-            <a:spLocks xmlns:a="http://schemas.openxmlformats.org/drawingml/2006/main" noGrp="1"/>
-          </p:cNvSpPr>
-          <p:nvPr/>
-        </p:nvSpPr>
-        <p:spPr>
-          <a:xfrm xmlns:a="http://schemas.openxmlformats.org/drawingml/2006/main">
-            <a:off x="647700" y="2238375"/>
-            <a:ext cx="2857500" cy="762000"/>
+                <a16:creationId xmlns:a16="http://schemas.microsoft.com/office/drawing/2014/main" id="{976FDBA0-3124-4B3A-B02C-F3B17626B88B}"/>
+              </a:ext>
+            </a:extLst>
+          </p:cNvPr>
+          <p:cNvSpPr>
+            <a:spLocks xmlns:a="http://schemas.openxmlformats.org/drawingml/2006/main" noGrp="1"/>
+          </p:cNvSpPr>
+          <p:nvPr/>
+        </p:nvSpPr>
+        <p:spPr>
+          <a:xfrm xmlns:a="http://schemas.openxmlformats.org/drawingml/2006/main">
+            <a:off x="4762500" y="1285875"/>
+            <a:ext cx="2667000" cy="457200"/>
           </a:xfrm>
           <a:prstGeom xmlns:a="http://schemas.openxmlformats.org/drawingml/2006/main" prst="roundRect">
             <a:avLst>
-              <a:gd name="adj" fmla="val 15000"/>
+              <a:gd name="adj" fmla="val 25000"/>
             </a:avLst>
           </a:prstGeom>
           <a:noFill xmlns:a="http://schemas.openxmlformats.org/drawingml/2006/main"/>
@@ -1410,19 +1745,19 @@
           <p:cNvPr id="8" name="PPAGENT_QA|within=radial-card-0|role=title">
             <a:extLst xmlns:a="http://schemas.openxmlformats.org/drawingml/2006/main">
               <a:ext uri="{FF2B5EF4-FFF2-40B4-BE49-F238E27FC236}">
-                <a16:creationId xmlns:a16="http://schemas.microsoft.com/office/drawing/2014/main" id="{969E96B8-15E3-452A-82EB-DF82BDE00878}"/>
-              </a:ext>
-            </a:extLst>
-          </p:cNvPr>
-          <p:cNvSpPr>
-            <a:spLocks xmlns:a="http://schemas.openxmlformats.org/drawingml/2006/main" noGrp="1"/>
-          </p:cNvSpPr>
-          <p:nvPr/>
-        </p:nvSpPr>
-        <p:spPr>
-          <a:xfrm xmlns:a="http://schemas.openxmlformats.org/drawingml/2006/main">
-            <a:off x="647700" y="2238375"/>
-            <a:ext cx="2857500" cy="285750"/>
+                <a16:creationId xmlns:a16="http://schemas.microsoft.com/office/drawing/2014/main" id="{D5F4294E-6F21-4DE6-BF8A-7202BFEFA51F}"/>
+              </a:ext>
+            </a:extLst>
+          </p:cNvPr>
+          <p:cNvSpPr>
+            <a:spLocks xmlns:a="http://schemas.openxmlformats.org/drawingml/2006/main" noGrp="1"/>
+          </p:cNvSpPr>
+          <p:nvPr/>
+        </p:nvSpPr>
+        <p:spPr>
+          <a:xfrm xmlns:a="http://schemas.openxmlformats.org/drawingml/2006/main">
+            <a:off x="4762500" y="1285875"/>
+            <a:ext cx="2667000" cy="285750"/>
           </a:xfrm>
           <a:prstGeom xmlns:a="http://schemas.openxmlformats.org/drawingml/2006/main" prst="rect">
             <a:avLst/>
@@ -1439,7 +1774,7 @@
           </a:bodyPr>
           <a:lstStyle xmlns:a="http://schemas.openxmlformats.org/drawingml/2006/main"/>
           <a:p xmlns:a="http://schemas.openxmlformats.org/drawingml/2006/main">
-            <a:pPr algn="r">
+            <a:pPr algn="ctr">
               <a:defRPr sz="1425" b="1">
                 <a:solidFill>
                   <a:srgbClr val="1677C8"/>
@@ -1465,80 +1800,22 @@
       </p:sp>
       <p:sp>
         <p:nvSpPr>
-          <p:cNvPr id="9" name="PPAGENT_QA|within=radial-card-0|role=body">
-            <a:extLst xmlns:a="http://schemas.openxmlformats.org/drawingml/2006/main">
-              <a:ext uri="{FF2B5EF4-FFF2-40B4-BE49-F238E27FC236}">
-                <a16:creationId xmlns:a16="http://schemas.microsoft.com/office/drawing/2014/main" id="{BCF37FA1-BF34-4E2A-A100-4F7DB9FE47E2}"/>
-              </a:ext>
-            </a:extLst>
-          </p:cNvPr>
-          <p:cNvSpPr>
-            <a:spLocks xmlns:a="http://schemas.openxmlformats.org/drawingml/2006/main" noGrp="1"/>
-          </p:cNvSpPr>
-          <p:nvPr/>
-        </p:nvSpPr>
-        <p:spPr>
-          <a:xfrm xmlns:a="http://schemas.openxmlformats.org/drawingml/2006/main">
-            <a:off x="647700" y="2552700"/>
-            <a:ext cx="2857500" cy="447675"/>
-          </a:xfrm>
-          <a:prstGeom xmlns:a="http://schemas.openxmlformats.org/drawingml/2006/main" prst="rect">
-            <a:avLst/>
-          </a:prstGeom>
-          <a:noFill xmlns:a="http://schemas.openxmlformats.org/drawingml/2006/main"/>
-          <a:ln xmlns:a="http://schemas.openxmlformats.org/drawingml/2006/main" w="0">
-            <a:noFill/>
-            <a:prstDash val="solid"/>
-          </a:ln>
-        </p:spPr>
-        <p:txBody>
-          <a:bodyPr xmlns:a="http://schemas.openxmlformats.org/drawingml/2006/main" lIns="0" tIns="0" rIns="0" bIns="0" anchor="t">
-            <a:normAutofit fontScale="100000"/>
-          </a:bodyPr>
-          <a:lstStyle xmlns:a="http://schemas.openxmlformats.org/drawingml/2006/main"/>
-          <a:p xmlns:a="http://schemas.openxmlformats.org/drawingml/2006/main">
-            <a:pPr algn="r">
-              <a:defRPr sz="1200" b="0">
-                <a:solidFill>
-                  <a:srgbClr val="475569"/>
-                </a:solidFill>
-                <a:latin typeface="Microsoft YaHei"/>
-                <a:ea typeface="Microsoft YaHei"/>
-                <a:cs typeface="Microsoft YaHei"/>
-              </a:defRPr>
-            </a:pPr>
-            <a:r>
-              <a:rPr sz="1200" b="0">
-                <a:solidFill>
-                  <a:srgbClr val="475569"/>
-                </a:solidFill>
-                <a:latin typeface="Microsoft YaHei"/>
-                <a:ea typeface="Microsoft YaHei"/>
-                <a:cs typeface="Microsoft YaHei"/>
-              </a:rPr>
-              <a:t>将共同原则转成稳定、可执行的规则</a:t>
-            </a:r>
-          </a:p>
-        </p:txBody>
-      </p:sp>
-      <p:sp>
-        <p:nvSpPr>
-          <p:cNvPr id="10" name="PPAGENT_CONNECTOR|from=radial-center|fromSide=left|to=radial-node-0|toSide=right">
-            <a:extLst xmlns:a="http://schemas.openxmlformats.org/drawingml/2006/main">
-              <a:ext uri="{FF2B5EF4-FFF2-40B4-BE49-F238E27FC236}">
-                <a16:creationId xmlns:a16="http://schemas.microsoft.com/office/drawing/2014/main" id="{6FDE4008-ACE7-4F48-B5A3-81C65A1D04E9}"/>
-              </a:ext>
-            </a:extLst>
-          </p:cNvPr>
-          <p:cNvSpPr>
-            <a:spLocks xmlns:a="http://schemas.openxmlformats.org/drawingml/2006/main" noGrp="1"/>
-          </p:cNvSpPr>
-          <p:nvPr/>
-        </p:nvSpPr>
-        <p:spPr>
-          <a:xfrm xmlns:a="http://schemas.openxmlformats.org/drawingml/2006/main" flipH="1" flipV="1">
-            <a:off x="4076700" y="2619375"/>
-            <a:ext cx="781050" cy="1047750"/>
+          <p:cNvPr id="9" name="PPAGENT_CONNECTOR|from=radial-center|fromSide=top|to=radial-node-0|toSide=bottom">
+            <a:extLst xmlns:a="http://schemas.openxmlformats.org/drawingml/2006/main">
+              <a:ext uri="{FF2B5EF4-FFF2-40B4-BE49-F238E27FC236}">
+                <a16:creationId xmlns:a16="http://schemas.microsoft.com/office/drawing/2014/main" id="{894A7630-656E-49BD-8E89-976D99754E9A}"/>
+              </a:ext>
+            </a:extLst>
+          </p:cNvPr>
+          <p:cNvSpPr>
+            <a:spLocks xmlns:a="http://schemas.openxmlformats.org/drawingml/2006/main" noGrp="1"/>
+          </p:cNvSpPr>
+          <p:nvPr/>
+        </p:nvSpPr>
+        <p:spPr>
+          <a:xfrm xmlns:a="http://schemas.openxmlformats.org/drawingml/2006/main" flipH="0" flipV="1">
+            <a:off x="6096000" y="2028825"/>
+            <a:ext cx="0" cy="400050"/>
           </a:xfrm>
           <a:prstGeom xmlns:a="http://schemas.openxmlformats.org/drawingml/2006/main" prst="line">
             <a:avLst/>
@@ -1554,21 +1831,21 @@
       </p:sp>
       <p:sp>
         <p:nvSpPr>
-          <p:cNvPr id="11" name="PPAGENT_QA|parent=radial-node-1|domains=radial-shape">
-            <a:extLst xmlns:a="http://schemas.openxmlformats.org/drawingml/2006/main">
-              <a:ext uri="{FF2B5EF4-FFF2-40B4-BE49-F238E27FC236}">
-                <a16:creationId xmlns:a16="http://schemas.microsoft.com/office/drawing/2014/main" id="{4BF639C4-9985-4862-96DE-AC7B6AFAEAC6}"/>
-              </a:ext>
-            </a:extLst>
-          </p:cNvPr>
-          <p:cNvSpPr>
-            <a:spLocks xmlns:a="http://schemas.openxmlformats.org/drawingml/2006/main" noGrp="1"/>
-          </p:cNvSpPr>
-          <p:nvPr/>
-        </p:nvSpPr>
-        <p:spPr>
-          <a:xfrm xmlns:a="http://schemas.openxmlformats.org/drawingml/2006/main">
-            <a:off x="8115300" y="2400300"/>
+          <p:cNvPr id="10" name="PPAGENT_QA|parent=radial-node-1|domains=radial-shape">
+            <a:extLst xmlns:a="http://schemas.openxmlformats.org/drawingml/2006/main">
+              <a:ext uri="{FF2B5EF4-FFF2-40B4-BE49-F238E27FC236}">
+                <a16:creationId xmlns:a16="http://schemas.microsoft.com/office/drawing/2014/main" id="{C1B63905-EC4A-4094-8A18-02346B61CE10}"/>
+              </a:ext>
+            </a:extLst>
+          </p:cNvPr>
+          <p:cNvSpPr>
+            <a:spLocks xmlns:a="http://schemas.openxmlformats.org/drawingml/2006/main" noGrp="1"/>
+          </p:cNvSpPr>
+          <p:nvPr/>
+        </p:nvSpPr>
+        <p:spPr>
+          <a:xfrm xmlns:a="http://schemas.openxmlformats.org/drawingml/2006/main">
+            <a:off x="3638550" y="3448050"/>
             <a:ext cx="438150" cy="438150"/>
           </a:xfrm>
           <a:prstGeom xmlns:a="http://schemas.openxmlformats.org/drawingml/2006/main" prst="ellipse">
@@ -1622,21 +1899,21 @@
       </p:sp>
       <p:sp>
         <p:nvSpPr>
-          <p:cNvPr id="12" name="PPAGENT_QA|parent=radial-card-1|domains=radial-content">
-            <a:extLst xmlns:a="http://schemas.openxmlformats.org/drawingml/2006/main">
-              <a:ext uri="{FF2B5EF4-FFF2-40B4-BE49-F238E27FC236}">
-                <a16:creationId xmlns:a16="http://schemas.microsoft.com/office/drawing/2014/main" id="{7E17D9BD-C87E-4B91-8093-5489460EB3C7}"/>
-              </a:ext>
-            </a:extLst>
-          </p:cNvPr>
-          <p:cNvSpPr>
-            <a:spLocks xmlns:a="http://schemas.openxmlformats.org/drawingml/2006/main" noGrp="1"/>
-          </p:cNvSpPr>
-          <p:nvPr/>
-        </p:nvSpPr>
-        <p:spPr>
-          <a:xfrm xmlns:a="http://schemas.openxmlformats.org/drawingml/2006/main">
-            <a:off x="8686800" y="2238375"/>
+          <p:cNvPr id="11" name="PPAGENT_QA|parent=radial-card-1|domains=radial-content">
+            <a:extLst xmlns:a="http://schemas.openxmlformats.org/drawingml/2006/main">
+              <a:ext uri="{FF2B5EF4-FFF2-40B4-BE49-F238E27FC236}">
+                <a16:creationId xmlns:a16="http://schemas.microsoft.com/office/drawing/2014/main" id="{6D33309A-497C-47E8-AD26-878F25F52EBB}"/>
+              </a:ext>
+            </a:extLst>
+          </p:cNvPr>
+          <p:cNvSpPr>
+            <a:spLocks xmlns:a="http://schemas.openxmlformats.org/drawingml/2006/main" noGrp="1"/>
+          </p:cNvSpPr>
+          <p:nvPr/>
+        </p:nvSpPr>
+        <p:spPr>
+          <a:xfrm xmlns:a="http://schemas.openxmlformats.org/drawingml/2006/main">
+            <a:off x="647700" y="3286125"/>
             <a:ext cx="2857500" cy="762000"/>
           </a:xfrm>
           <a:prstGeom xmlns:a="http://schemas.openxmlformats.org/drawingml/2006/main" prst="roundRect">
@@ -1653,21 +1930,21 @@
       </p:sp>
       <p:sp>
         <p:nvSpPr>
-          <p:cNvPr id="13" name="PPAGENT_QA|within=radial-card-1|role=title">
-            <a:extLst xmlns:a="http://schemas.openxmlformats.org/drawingml/2006/main">
-              <a:ext uri="{FF2B5EF4-FFF2-40B4-BE49-F238E27FC236}">
-                <a16:creationId xmlns:a16="http://schemas.microsoft.com/office/drawing/2014/main" id="{B5ED5C46-C137-4ECB-ABB4-7995A3996000}"/>
-              </a:ext>
-            </a:extLst>
-          </p:cNvPr>
-          <p:cNvSpPr>
-            <a:spLocks xmlns:a="http://schemas.openxmlformats.org/drawingml/2006/main" noGrp="1"/>
-          </p:cNvSpPr>
-          <p:nvPr/>
-        </p:nvSpPr>
-        <p:spPr>
-          <a:xfrm xmlns:a="http://schemas.openxmlformats.org/drawingml/2006/main">
-            <a:off x="8686800" y="2238375"/>
+          <p:cNvPr id="12" name="PPAGENT_QA|within=radial-card-1|role=title">
+            <a:extLst xmlns:a="http://schemas.openxmlformats.org/drawingml/2006/main">
+              <a:ext uri="{FF2B5EF4-FFF2-40B4-BE49-F238E27FC236}">
+                <a16:creationId xmlns:a16="http://schemas.microsoft.com/office/drawing/2014/main" id="{119C4F14-18FA-416F-8079-5C37B3F6B7CB}"/>
+              </a:ext>
+            </a:extLst>
+          </p:cNvPr>
+          <p:cNvSpPr>
+            <a:spLocks xmlns:a="http://schemas.openxmlformats.org/drawingml/2006/main" noGrp="1"/>
+          </p:cNvSpPr>
+          <p:nvPr/>
+        </p:nvSpPr>
+        <p:spPr>
+          <a:xfrm xmlns:a="http://schemas.openxmlformats.org/drawingml/2006/main">
+            <a:off x="647700" y="3286125"/>
             <a:ext cx="2857500" cy="285750"/>
           </a:xfrm>
           <a:prstGeom xmlns:a="http://schemas.openxmlformats.org/drawingml/2006/main" prst="rect">
@@ -1685,7 +1962,7 @@
           </a:bodyPr>
           <a:lstStyle xmlns:a="http://schemas.openxmlformats.org/drawingml/2006/main"/>
           <a:p xmlns:a="http://schemas.openxmlformats.org/drawingml/2006/main">
-            <a:pPr algn="l">
+            <a:pPr algn="r">
               <a:defRPr sz="1425" b="1">
                 <a:solidFill>
                   <a:srgbClr val="1677C8"/>
@@ -1711,80 +1988,22 @@
       </p:sp>
       <p:sp>
         <p:nvSpPr>
-          <p:cNvPr id="14" name="PPAGENT_QA|within=radial-card-1|role=body">
-            <a:extLst xmlns:a="http://schemas.openxmlformats.org/drawingml/2006/main">
-              <a:ext uri="{FF2B5EF4-FFF2-40B4-BE49-F238E27FC236}">
-                <a16:creationId xmlns:a16="http://schemas.microsoft.com/office/drawing/2014/main" id="{431DB254-BB54-41F3-936E-F29848F3C67F}"/>
-              </a:ext>
-            </a:extLst>
-          </p:cNvPr>
-          <p:cNvSpPr>
-            <a:spLocks xmlns:a="http://schemas.openxmlformats.org/drawingml/2006/main" noGrp="1"/>
-          </p:cNvSpPr>
-          <p:nvPr/>
-        </p:nvSpPr>
-        <p:spPr>
-          <a:xfrm xmlns:a="http://schemas.openxmlformats.org/drawingml/2006/main">
-            <a:off x="8686800" y="2552700"/>
-            <a:ext cx="2857500" cy="447675"/>
-          </a:xfrm>
-          <a:prstGeom xmlns:a="http://schemas.openxmlformats.org/drawingml/2006/main" prst="rect">
-            <a:avLst/>
-          </a:prstGeom>
-          <a:noFill xmlns:a="http://schemas.openxmlformats.org/drawingml/2006/main"/>
-          <a:ln xmlns:a="http://schemas.openxmlformats.org/drawingml/2006/main" w="0">
-            <a:noFill/>
-            <a:prstDash val="solid"/>
-          </a:ln>
-        </p:spPr>
-        <p:txBody>
-          <a:bodyPr xmlns:a="http://schemas.openxmlformats.org/drawingml/2006/main" lIns="0" tIns="0" rIns="0" bIns="0" anchor="t">
-            <a:normAutofit fontScale="100000"/>
-          </a:bodyPr>
-          <a:lstStyle xmlns:a="http://schemas.openxmlformats.org/drawingml/2006/main"/>
-          <a:p xmlns:a="http://schemas.openxmlformats.org/drawingml/2006/main">
-            <a:pPr algn="l">
-              <a:defRPr sz="1200" b="0">
-                <a:solidFill>
-                  <a:srgbClr val="475569"/>
-                </a:solidFill>
-                <a:latin typeface="Microsoft YaHei"/>
-                <a:ea typeface="Microsoft YaHei"/>
-                <a:cs typeface="Microsoft YaHei"/>
-              </a:defRPr>
-            </a:pPr>
-            <a:r>
-              <a:rPr sz="1200" b="0">
-                <a:solidFill>
-                  <a:srgbClr val="475569"/>
-                </a:solidFill>
-                <a:latin typeface="Microsoft YaHei"/>
-                <a:ea typeface="Microsoft YaHei"/>
-                <a:cs typeface="Microsoft YaHei"/>
-              </a:rPr>
-              <a:t>减少重复判断，让常见需求直接复用</a:t>
-            </a:r>
-          </a:p>
-        </p:txBody>
-      </p:sp>
-      <p:sp>
-        <p:nvSpPr>
-          <p:cNvPr id="15" name="PPAGENT_CONNECTOR|from=radial-center|fromSide=right|to=radial-node-1|toSide=left">
-            <a:extLst xmlns:a="http://schemas.openxmlformats.org/drawingml/2006/main">
-              <a:ext uri="{FF2B5EF4-FFF2-40B4-BE49-F238E27FC236}">
-                <a16:creationId xmlns:a16="http://schemas.microsoft.com/office/drawing/2014/main" id="{520B8254-77A9-4AEA-91C2-AE5C82F77221}"/>
-              </a:ext>
-            </a:extLst>
-          </p:cNvPr>
-          <p:cNvSpPr>
-            <a:spLocks xmlns:a="http://schemas.openxmlformats.org/drawingml/2006/main" noGrp="1"/>
-          </p:cNvSpPr>
-          <p:nvPr/>
-        </p:nvSpPr>
-        <p:spPr>
-          <a:xfrm xmlns:a="http://schemas.openxmlformats.org/drawingml/2006/main" flipH="0" flipV="1">
-            <a:off x="7334250" y="2619375"/>
-            <a:ext cx="781050" cy="1047750"/>
+          <p:cNvPr id="13" name="PPAGENT_CONNECTOR|from=radial-center|fromSide=left|to=radial-node-1|toSide=right">
+            <a:extLst xmlns:a="http://schemas.openxmlformats.org/drawingml/2006/main">
+              <a:ext uri="{FF2B5EF4-FFF2-40B4-BE49-F238E27FC236}">
+                <a16:creationId xmlns:a16="http://schemas.microsoft.com/office/drawing/2014/main" id="{2E5930B9-EC1C-466E-B2DE-B12352C3A2C8}"/>
+              </a:ext>
+            </a:extLst>
+          </p:cNvPr>
+          <p:cNvSpPr>
+            <a:spLocks xmlns:a="http://schemas.openxmlformats.org/drawingml/2006/main" noGrp="1"/>
+          </p:cNvSpPr>
+          <p:nvPr/>
+        </p:nvSpPr>
+        <p:spPr>
+          <a:xfrm xmlns:a="http://schemas.openxmlformats.org/drawingml/2006/main" flipH="1" flipV="0">
+            <a:off x="4076700" y="3667125"/>
+            <a:ext cx="781050" cy="0"/>
           </a:xfrm>
           <a:prstGeom xmlns:a="http://schemas.openxmlformats.org/drawingml/2006/main" prst="line">
             <a:avLst/>
@@ -1800,21 +2019,21 @@
       </p:sp>
       <p:sp>
         <p:nvSpPr>
-          <p:cNvPr id="16" name="PPAGENT_QA|parent=radial-node-2|domains=radial-shape">
-            <a:extLst xmlns:a="http://schemas.openxmlformats.org/drawingml/2006/main">
-              <a:ext uri="{FF2B5EF4-FFF2-40B4-BE49-F238E27FC236}">
-                <a16:creationId xmlns:a16="http://schemas.microsoft.com/office/drawing/2014/main" id="{830E21D3-3A86-489B-B6EF-E65BA52D0F1E}"/>
-              </a:ext>
-            </a:extLst>
-          </p:cNvPr>
-          <p:cNvSpPr>
-            <a:spLocks xmlns:a="http://schemas.openxmlformats.org/drawingml/2006/main" noGrp="1"/>
-          </p:cNvSpPr>
-          <p:nvPr/>
-        </p:nvSpPr>
-        <p:spPr>
-          <a:xfrm xmlns:a="http://schemas.openxmlformats.org/drawingml/2006/main">
-            <a:off x="3638550" y="4495800"/>
+          <p:cNvPr id="14" name="PPAGENT_QA|parent=radial-node-2|domains=radial-shape">
+            <a:extLst xmlns:a="http://schemas.openxmlformats.org/drawingml/2006/main">
+              <a:ext uri="{FF2B5EF4-FFF2-40B4-BE49-F238E27FC236}">
+                <a16:creationId xmlns:a16="http://schemas.microsoft.com/office/drawing/2014/main" id="{BE610DD5-AD86-4CAE-89D4-260692495C57}"/>
+              </a:ext>
+            </a:extLst>
+          </p:cNvPr>
+          <p:cNvSpPr>
+            <a:spLocks xmlns:a="http://schemas.openxmlformats.org/drawingml/2006/main" noGrp="1"/>
+          </p:cNvSpPr>
+          <p:nvPr/>
+        </p:nvSpPr>
+        <p:spPr>
+          <a:xfrm xmlns:a="http://schemas.openxmlformats.org/drawingml/2006/main">
+            <a:off x="8115300" y="3448050"/>
             <a:ext cx="438150" cy="438150"/>
           </a:xfrm>
           <a:prstGeom xmlns:a="http://schemas.openxmlformats.org/drawingml/2006/main" prst="ellipse">
@@ -1868,21 +2087,21 @@
       </p:sp>
       <p:sp>
         <p:nvSpPr>
-          <p:cNvPr id="17" name="PPAGENT_QA|parent=radial-card-2|domains=radial-content">
-            <a:extLst xmlns:a="http://schemas.openxmlformats.org/drawingml/2006/main">
-              <a:ext uri="{FF2B5EF4-FFF2-40B4-BE49-F238E27FC236}">
-                <a16:creationId xmlns:a16="http://schemas.microsoft.com/office/drawing/2014/main" id="{0390A31E-4326-4D7E-92E5-3DA65CF2A9AD}"/>
-              </a:ext>
-            </a:extLst>
-          </p:cNvPr>
-          <p:cNvSpPr>
-            <a:spLocks xmlns:a="http://schemas.openxmlformats.org/drawingml/2006/main" noGrp="1"/>
-          </p:cNvSpPr>
-          <p:nvPr/>
-        </p:nvSpPr>
-        <p:spPr>
-          <a:xfrm xmlns:a="http://schemas.openxmlformats.org/drawingml/2006/main">
-            <a:off x="647700" y="4333875"/>
+          <p:cNvPr id="15" name="PPAGENT_QA|parent=radial-card-2|domains=radial-content">
+            <a:extLst xmlns:a="http://schemas.openxmlformats.org/drawingml/2006/main">
+              <a:ext uri="{FF2B5EF4-FFF2-40B4-BE49-F238E27FC236}">
+                <a16:creationId xmlns:a16="http://schemas.microsoft.com/office/drawing/2014/main" id="{FA39E64B-D27F-4CC2-A27C-6D5F450F3A52}"/>
+              </a:ext>
+            </a:extLst>
+          </p:cNvPr>
+          <p:cNvSpPr>
+            <a:spLocks xmlns:a="http://schemas.openxmlformats.org/drawingml/2006/main" noGrp="1"/>
+          </p:cNvSpPr>
+          <p:nvPr/>
+        </p:nvSpPr>
+        <p:spPr>
+          <a:xfrm xmlns:a="http://schemas.openxmlformats.org/drawingml/2006/main">
+            <a:off x="8686800" y="3286125"/>
             <a:ext cx="2857500" cy="762000"/>
           </a:xfrm>
           <a:prstGeom xmlns:a="http://schemas.openxmlformats.org/drawingml/2006/main" prst="roundRect">
@@ -1899,21 +2118,21 @@
       </p:sp>
       <p:sp>
         <p:nvSpPr>
-          <p:cNvPr id="18" name="PPAGENT_QA|within=radial-card-2|role=title">
-            <a:extLst xmlns:a="http://schemas.openxmlformats.org/drawingml/2006/main">
-              <a:ext uri="{FF2B5EF4-FFF2-40B4-BE49-F238E27FC236}">
-                <a16:creationId xmlns:a16="http://schemas.microsoft.com/office/drawing/2014/main" id="{458248E6-4EF9-490D-B5FA-92E85A2C55B1}"/>
-              </a:ext>
-            </a:extLst>
-          </p:cNvPr>
-          <p:cNvSpPr>
-            <a:spLocks xmlns:a="http://schemas.openxmlformats.org/drawingml/2006/main" noGrp="1"/>
-          </p:cNvSpPr>
-          <p:nvPr/>
-        </p:nvSpPr>
-        <p:spPr>
-          <a:xfrm xmlns:a="http://schemas.openxmlformats.org/drawingml/2006/main">
-            <a:off x="647700" y="4333875"/>
+          <p:cNvPr id="16" name="PPAGENT_QA|within=radial-card-2|role=title">
+            <a:extLst xmlns:a="http://schemas.openxmlformats.org/drawingml/2006/main">
+              <a:ext uri="{FF2B5EF4-FFF2-40B4-BE49-F238E27FC236}">
+                <a16:creationId xmlns:a16="http://schemas.microsoft.com/office/drawing/2014/main" id="{68169ADD-17EC-4946-A606-92445185F30E}"/>
+              </a:ext>
+            </a:extLst>
+          </p:cNvPr>
+          <p:cNvSpPr>
+            <a:spLocks xmlns:a="http://schemas.openxmlformats.org/drawingml/2006/main" noGrp="1"/>
+          </p:cNvSpPr>
+          <p:nvPr/>
+        </p:nvSpPr>
+        <p:spPr>
+          <a:xfrm xmlns:a="http://schemas.openxmlformats.org/drawingml/2006/main">
+            <a:off x="8686800" y="3286125"/>
             <a:ext cx="2857500" cy="285750"/>
           </a:xfrm>
           <a:prstGeom xmlns:a="http://schemas.openxmlformats.org/drawingml/2006/main" prst="rect">
@@ -1931,7 +2150,7 @@
           </a:bodyPr>
           <a:lstStyle xmlns:a="http://schemas.openxmlformats.org/drawingml/2006/main"/>
           <a:p xmlns:a="http://schemas.openxmlformats.org/drawingml/2006/main">
-            <a:pPr algn="r">
+            <a:pPr algn="l">
               <a:defRPr sz="1425" b="1">
                 <a:solidFill>
                   <a:srgbClr val="1677C8"/>
@@ -1957,22 +2176,82 @@
       </p:sp>
       <p:sp>
         <p:nvSpPr>
-          <p:cNvPr id="19" name="PPAGENT_QA|within=radial-card-2|role=body">
-            <a:extLst xmlns:a="http://schemas.openxmlformats.org/drawingml/2006/main">
-              <a:ext uri="{FF2B5EF4-FFF2-40B4-BE49-F238E27FC236}">
-                <a16:creationId xmlns:a16="http://schemas.microsoft.com/office/drawing/2014/main" id="{3F871FD9-36D4-42C6-83C1-DC62301A4D18}"/>
-              </a:ext>
-            </a:extLst>
-          </p:cNvPr>
-          <p:cNvSpPr>
-            <a:spLocks xmlns:a="http://schemas.openxmlformats.org/drawingml/2006/main" noGrp="1"/>
-          </p:cNvSpPr>
-          <p:nvPr/>
-        </p:nvSpPr>
-        <p:spPr>
-          <a:xfrm xmlns:a="http://schemas.openxmlformats.org/drawingml/2006/main">
-            <a:off x="647700" y="4648200"/>
-            <a:ext cx="2857500" cy="447675"/>
+          <p:cNvPr id="17" name="PPAGENT_CONNECTOR|from=radial-center|fromSide=right|to=radial-node-2|toSide=left">
+            <a:extLst xmlns:a="http://schemas.openxmlformats.org/drawingml/2006/main">
+              <a:ext uri="{FF2B5EF4-FFF2-40B4-BE49-F238E27FC236}">
+                <a16:creationId xmlns:a16="http://schemas.microsoft.com/office/drawing/2014/main" id="{D32CFF4D-9C78-4FF4-AC02-24D642AE5AE9}"/>
+              </a:ext>
+            </a:extLst>
+          </p:cNvPr>
+          <p:cNvSpPr>
+            <a:spLocks xmlns:a="http://schemas.openxmlformats.org/drawingml/2006/main" noGrp="1"/>
+          </p:cNvSpPr>
+          <p:nvPr/>
+        </p:nvSpPr>
+        <p:spPr>
+          <a:xfrm xmlns:a="http://schemas.openxmlformats.org/drawingml/2006/main" flipH="0" flipV="0">
+            <a:off x="7334250" y="3667125"/>
+            <a:ext cx="781050" cy="0"/>
+          </a:xfrm>
+          <a:prstGeom xmlns:a="http://schemas.openxmlformats.org/drawingml/2006/main" prst="line">
+            <a:avLst/>
+          </a:prstGeom>
+          <a:noFill xmlns:a="http://schemas.openxmlformats.org/drawingml/2006/main"/>
+          <a:ln xmlns:a="http://schemas.openxmlformats.org/drawingml/2006/main" w="14288">
+            <a:solidFill>
+              <a:srgbClr val="B7CCE0"/>
+            </a:solidFill>
+            <a:prstDash val="solid"/>
+          </a:ln>
+        </p:spPr>
+      </p:sp>
+    </p:spTree>
+    <p:extLst>
+      <p:ext uri="{BB962C8B-B14F-4D97-AF65-F5344CB8AC3E}">
+        <p14:creationId xmlns:p14="http://schemas.microsoft.com/office/powerpoint/2010/main" val="1507651262"/>
+      </p:ext>
+    </p:extLst>
+  </p:cSld>
+</p:sld>
+</file>
+
+<file path=ppt/slides/slide2.xml><?xml version="1.0" encoding="utf-8"?>
+<p:sld xmlns:p="http://schemas.openxmlformats.org/presentationml/2006/main">
+  <p:cSld>
+    <p:bg>
+      <p:bgPr>
+        <a:solidFill xmlns:a="http://schemas.openxmlformats.org/drawingml/2006/main">
+          <a:srgbClr val="F7FAFC"/>
+        </a:solidFill>
+      </p:bgPr>
+    </p:bg>
+    <p:spTree>
+      <p:nvGrpSpPr>
+        <p:cNvPr id="1" name=""/>
+        <p:cNvGrpSpPr/>
+        <p:nvPr/>
+      </p:nvGrpSpPr>
+      <p:grpSpPr>
+        <a:xfrm xmlns:a="http://schemas.openxmlformats.org/drawingml/2006/main"/>
+      </p:grpSpPr>
+      <p:sp>
+        <p:nvSpPr>
+          <p:cNvPr id="22" name="">
+            <a:extLst xmlns:a="http://schemas.openxmlformats.org/drawingml/2006/main">
+              <a:ext uri="{FF2B5EF4-FFF2-40B4-BE49-F238E27FC236}">
+                <a16:creationId xmlns:a16="http://schemas.microsoft.com/office/drawing/2014/main" id="{03593336-2DCC-47C9-9F80-FCA3093C53A9}"/>
+              </a:ext>
+            </a:extLst>
+          </p:cNvPr>
+          <p:cNvSpPr>
+            <a:spLocks xmlns:a="http://schemas.openxmlformats.org/drawingml/2006/main" noGrp="1"/>
+          </p:cNvSpPr>
+          <p:nvPr/>
+        </p:nvSpPr>
+        <p:spPr>
+          <a:xfrm xmlns:a="http://schemas.openxmlformats.org/drawingml/2006/main">
+            <a:off x="685800" y="400050"/>
+            <a:ext cx="8382000" cy="457200"/>
           </a:xfrm>
           <a:prstGeom xmlns:a="http://schemas.openxmlformats.org/drawingml/2006/main" prst="rect">
             <a:avLst/>
@@ -1984,15 +2263,73 @@
           </a:ln>
         </p:spPr>
         <p:txBody>
-          <a:bodyPr xmlns:a="http://schemas.openxmlformats.org/drawingml/2006/main" lIns="0" tIns="0" rIns="0" bIns="0" anchor="t">
+          <a:bodyPr xmlns:a="http://schemas.openxmlformats.org/drawingml/2006/main" lIns="0" tIns="0" rIns="0" bIns="0" anchor="ctr">
             <a:normAutofit fontScale="100000"/>
           </a:bodyPr>
           <a:lstStyle xmlns:a="http://schemas.openxmlformats.org/drawingml/2006/main"/>
           <a:p xmlns:a="http://schemas.openxmlformats.org/drawingml/2006/main">
-            <a:pPr algn="r">
+            <a:pPr algn="l">
+              <a:defRPr sz="2700" b="1">
+                <a:solidFill>
+                  <a:srgbClr val="1677C8"/>
+                </a:solidFill>
+                <a:latin typeface="Microsoft YaHei"/>
+                <a:ea typeface="Microsoft YaHei"/>
+                <a:cs typeface="Microsoft YaHei"/>
+              </a:defRPr>
+            </a:pPr>
+            <a:r>
+              <a:rPr sz="2700" b="1">
+                <a:solidFill>
+                  <a:srgbClr val="1677C8"/>
+                </a:solidFill>
+                <a:latin typeface="Microsoft YaHei"/>
+                <a:ea typeface="Microsoft YaHei"/>
+                <a:cs typeface="Microsoft YaHei"/>
+              </a:rPr>
+              <a:t>中心辐射关系</a:t>
+            </a:r>
+          </a:p>
+        </p:txBody>
+      </p:sp>
+      <p:sp>
+        <p:nvSpPr>
+          <p:cNvPr id="2" name="">
+            <a:extLst xmlns:a="http://schemas.openxmlformats.org/drawingml/2006/main">
+              <a:ext uri="{FF2B5EF4-FFF2-40B4-BE49-F238E27FC236}">
+                <a16:creationId xmlns:a16="http://schemas.microsoft.com/office/drawing/2014/main" id="{9C5ACB20-20FB-4AC8-BC33-4BA43320EDE7}"/>
+              </a:ext>
+            </a:extLst>
+          </p:cNvPr>
+          <p:cNvSpPr>
+            <a:spLocks xmlns:a="http://schemas.openxmlformats.org/drawingml/2006/main" noGrp="1"/>
+          </p:cNvSpPr>
+          <p:nvPr/>
+        </p:nvSpPr>
+        <p:spPr>
+          <a:xfrm xmlns:a="http://schemas.openxmlformats.org/drawingml/2006/main">
+            <a:off x="704850" y="876300"/>
+            <a:ext cx="4953000" cy="247650"/>
+          </a:xfrm>
+          <a:prstGeom xmlns:a="http://schemas.openxmlformats.org/drawingml/2006/main" prst="rect">
+            <a:avLst/>
+          </a:prstGeom>
+          <a:noFill xmlns:a="http://schemas.openxmlformats.org/drawingml/2006/main"/>
+          <a:ln xmlns:a="http://schemas.openxmlformats.org/drawingml/2006/main" w="0">
+            <a:noFill/>
+            <a:prstDash val="solid"/>
+          </a:ln>
+        </p:spPr>
+        <p:txBody>
+          <a:bodyPr xmlns:a="http://schemas.openxmlformats.org/drawingml/2006/main" lIns="0" tIns="0" rIns="0" bIns="0" anchor="ctr">
+            <a:normAutofit fontScale="100000"/>
+          </a:bodyPr>
+          <a:lstStyle xmlns:a="http://schemas.openxmlformats.org/drawingml/2006/main"/>
+          <a:p xmlns:a="http://schemas.openxmlformats.org/drawingml/2006/main">
+            <a:pPr algn="l">
               <a:defRPr sz="1200" b="0">
                 <a:solidFill>
-                  <a:srgbClr val="475569"/>
+                  <a:srgbClr val="7C8A9A"/>
                 </a:solidFill>
                 <a:latin typeface="Microsoft YaHei"/>
                 <a:ea typeface="Microsoft YaHei"/>
@@ -2002,34 +2339,329 @@
             <a:r>
               <a:rPr sz="1200" b="0">
                 <a:solidFill>
-                  <a:srgbClr val="475569"/>
+                  <a:srgbClr val="7C8A9A"/>
                 </a:solidFill>
                 <a:latin typeface="Microsoft YaHei"/>
                 <a:ea typeface="Microsoft YaHei"/>
                 <a:cs typeface="Microsoft YaHei"/>
               </a:rPr>
-              <a:t>在交付之前识别容量和几何风险</a:t>
+              <a:t>中心主题 · 多向展开</a:t>
             </a:r>
           </a:p>
         </p:txBody>
       </p:sp>
       <p:sp>
         <p:nvSpPr>
-          <p:cNvPr id="20" name="PPAGENT_CONNECTOR|from=radial-center|fromSide=left|to=radial-node-2|toSide=right">
-            <a:extLst xmlns:a="http://schemas.openxmlformats.org/drawingml/2006/main">
-              <a:ext uri="{FF2B5EF4-FFF2-40B4-BE49-F238E27FC236}">
-                <a16:creationId xmlns:a16="http://schemas.microsoft.com/office/drawing/2014/main" id="{CCD41D10-072F-400D-BA6B-5E931ED45556}"/>
-              </a:ext>
-            </a:extLst>
-          </p:cNvPr>
-          <p:cNvSpPr>
-            <a:spLocks xmlns:a="http://schemas.openxmlformats.org/drawingml/2006/main" noGrp="1"/>
-          </p:cNvSpPr>
-          <p:nvPr/>
-        </p:nvSpPr>
-        <p:spPr>
-          <a:xfrm xmlns:a="http://schemas.openxmlformats.org/drawingml/2006/main" flipH="1" flipV="0">
-            <a:off x="4076700" y="3667125"/>
+          <p:cNvPr id="3" name="">
+            <a:extLst xmlns:a="http://schemas.openxmlformats.org/drawingml/2006/main">
+              <a:ext uri="{FF2B5EF4-FFF2-40B4-BE49-F238E27FC236}">
+                <a16:creationId xmlns:a16="http://schemas.microsoft.com/office/drawing/2014/main" id="{7D7195A0-D740-4A98-8C42-E25C3361C3EE}"/>
+              </a:ext>
+            </a:extLst>
+          </p:cNvPr>
+          <p:cNvSpPr>
+            <a:spLocks xmlns:a="http://schemas.openxmlformats.org/drawingml/2006/main" noGrp="1"/>
+          </p:cNvSpPr>
+          <p:nvPr/>
+        </p:nvSpPr>
+        <p:spPr>
+          <a:xfrm xmlns:a="http://schemas.openxmlformats.org/drawingml/2006/main">
+            <a:off x="4400550" y="1971675"/>
+            <a:ext cx="3390900" cy="3390900"/>
+          </a:xfrm>
+          <a:prstGeom xmlns:a="http://schemas.openxmlformats.org/drawingml/2006/main" prst="ellipse">
+            <a:avLst/>
+          </a:prstGeom>
+          <a:solidFill xmlns:a="http://schemas.openxmlformats.org/drawingml/2006/main">
+            <a:srgbClr val="DCEEFF"/>
+          </a:solidFill>
+          <a:ln xmlns:a="http://schemas.openxmlformats.org/drawingml/2006/main" w="0">
+            <a:noFill/>
+            <a:prstDash val="solid"/>
+          </a:ln>
+        </p:spPr>
+      </p:sp>
+      <p:sp>
+        <p:nvSpPr>
+          <p:cNvPr id="4" name="">
+            <a:extLst xmlns:a="http://schemas.openxmlformats.org/drawingml/2006/main">
+              <a:ext uri="{FF2B5EF4-FFF2-40B4-BE49-F238E27FC236}">
+                <a16:creationId xmlns:a16="http://schemas.microsoft.com/office/drawing/2014/main" id="{7D8A4CBB-E92C-468E-AD12-BD288B689A5B}"/>
+              </a:ext>
+            </a:extLst>
+          </p:cNvPr>
+          <p:cNvSpPr>
+            <a:spLocks xmlns:a="http://schemas.openxmlformats.org/drawingml/2006/main" noGrp="1"/>
+          </p:cNvSpPr>
+          <p:nvPr/>
+        </p:nvSpPr>
+        <p:spPr>
+          <a:xfrm xmlns:a="http://schemas.openxmlformats.org/drawingml/2006/main">
+            <a:off x="4629150" y="2200275"/>
+            <a:ext cx="2933700" cy="2933700"/>
+          </a:xfrm>
+          <a:prstGeom xmlns:a="http://schemas.openxmlformats.org/drawingml/2006/main" prst="ellipse">
+            <a:avLst/>
+          </a:prstGeom>
+          <a:solidFill xmlns:a="http://schemas.openxmlformats.org/drawingml/2006/main">
+            <a:srgbClr val="FFFFFF"/>
+          </a:solidFill>
+          <a:ln xmlns:a="http://schemas.openxmlformats.org/drawingml/2006/main" w="19050">
+            <a:solidFill>
+              <a:srgbClr val="B7D8F3"/>
+            </a:solidFill>
+            <a:prstDash val="solid"/>
+          </a:ln>
+        </p:spPr>
+        <p:style>
+          <a:lnRef xmlns:a="http://schemas.openxmlformats.org/drawingml/2006/main" idx="0"/>
+          <a:fillRef xmlns:a="http://schemas.openxmlformats.org/drawingml/2006/main" idx="0"/>
+          <a:effectRef xmlns:a="http://schemas.openxmlformats.org/drawingml/2006/main" idx="6"/>
+          <a:fontRef xmlns:a="http://schemas.openxmlformats.org/drawingml/2006/main" idx="major"/>
+        </p:style>
+      </p:sp>
+      <p:sp>
+        <p:nvSpPr>
+          <p:cNvPr id="5" name="PPAGENT_QA|parent=radial-center|domains=radial-shape,radial-content">
+            <a:extLst xmlns:a="http://schemas.openxmlformats.org/drawingml/2006/main">
+              <a:ext uri="{FF2B5EF4-FFF2-40B4-BE49-F238E27FC236}">
+                <a16:creationId xmlns:a16="http://schemas.microsoft.com/office/drawing/2014/main" id="{2FB57D05-80B5-4830-8919-3FF5BC4435B1}"/>
+              </a:ext>
+            </a:extLst>
+          </p:cNvPr>
+          <p:cNvSpPr>
+            <a:spLocks xmlns:a="http://schemas.openxmlformats.org/drawingml/2006/main" noGrp="1"/>
+          </p:cNvSpPr>
+          <p:nvPr/>
+        </p:nvSpPr>
+        <p:spPr>
+          <a:xfrm xmlns:a="http://schemas.openxmlformats.org/drawingml/2006/main">
+            <a:off x="4857750" y="2428875"/>
+            <a:ext cx="2476500" cy="2476500"/>
+          </a:xfrm>
+          <a:prstGeom xmlns:a="http://schemas.openxmlformats.org/drawingml/2006/main" prst="ellipse">
+            <a:avLst/>
+          </a:prstGeom>
+          <a:solidFill xmlns:a="http://schemas.openxmlformats.org/drawingml/2006/main">
+            <a:srgbClr val="1677C8"/>
+          </a:solidFill>
+          <a:ln xmlns:a="http://schemas.openxmlformats.org/drawingml/2006/main" w="38100">
+            <a:solidFill>
+              <a:srgbClr val="FFFFFF"/>
+            </a:solidFill>
+            <a:prstDash val="solid"/>
+          </a:ln>
+        </p:spPr>
+        <p:style>
+          <a:lnRef xmlns:a="http://schemas.openxmlformats.org/drawingml/2006/main" idx="0"/>
+          <a:fillRef xmlns:a="http://schemas.openxmlformats.org/drawingml/2006/main" idx="0"/>
+          <a:effectRef xmlns:a="http://schemas.openxmlformats.org/drawingml/2006/main" idx="7"/>
+          <a:fontRef xmlns:a="http://schemas.openxmlformats.org/drawingml/2006/main" idx="major"/>
+        </p:style>
+        <p:txBody>
+          <a:bodyPr xmlns:a="http://schemas.openxmlformats.org/drawingml/2006/main" lIns="114300" tIns="76200" rIns="114300" bIns="76200" anchor="ctr">
+            <a:normAutofit fontScale="100000"/>
+          </a:bodyPr>
+          <a:lstStyle xmlns:a="http://schemas.openxmlformats.org/drawingml/2006/main"/>
+          <a:p xmlns:a="http://schemas.openxmlformats.org/drawingml/2006/main">
+            <a:pPr algn="ctr">
+              <a:defRPr sz="2175" b="1">
+                <a:solidFill>
+                  <a:srgbClr val="FFFFFF"/>
+                </a:solidFill>
+                <a:latin typeface="Microsoft YaHei"/>
+                <a:ea typeface="Microsoft YaHei"/>
+                <a:cs typeface="Microsoft YaHei"/>
+              </a:defRPr>
+            </a:pPr>
+            <a:r>
+              <a:rPr sz="2175" b="1">
+                <a:solidFill>
+                  <a:srgbClr val="FFFFFF"/>
+                </a:solidFill>
+                <a:latin typeface="Microsoft YaHei"/>
+                <a:ea typeface="Microsoft YaHei"/>
+                <a:cs typeface="Microsoft YaHei"/>
+              </a:rPr>
+              <a:t>协同能力</a:t>
+            </a:r>
+          </a:p>
+        </p:txBody>
+      </p:sp>
+      <p:sp>
+        <p:nvSpPr>
+          <p:cNvPr id="6" name="PPAGENT_QA|parent=radial-node-0|domains=radial-shape">
+            <a:extLst xmlns:a="http://schemas.openxmlformats.org/drawingml/2006/main">
+              <a:ext uri="{FF2B5EF4-FFF2-40B4-BE49-F238E27FC236}">
+                <a16:creationId xmlns:a16="http://schemas.microsoft.com/office/drawing/2014/main" id="{FAF0F382-9BDA-4CCC-95B1-C83DF900363B}"/>
+              </a:ext>
+            </a:extLst>
+          </p:cNvPr>
+          <p:cNvSpPr>
+            <a:spLocks xmlns:a="http://schemas.openxmlformats.org/drawingml/2006/main" noGrp="1"/>
+          </p:cNvSpPr>
+          <p:nvPr/>
+        </p:nvSpPr>
+        <p:spPr>
+          <a:xfrm xmlns:a="http://schemas.openxmlformats.org/drawingml/2006/main">
+            <a:off x="3638550" y="2400300"/>
+            <a:ext cx="438150" cy="438150"/>
+          </a:xfrm>
+          <a:prstGeom xmlns:a="http://schemas.openxmlformats.org/drawingml/2006/main" prst="ellipse">
+            <a:avLst/>
+          </a:prstGeom>
+          <a:solidFill xmlns:a="http://schemas.openxmlformats.org/drawingml/2006/main">
+            <a:srgbClr val="14CBD1"/>
+          </a:solidFill>
+          <a:ln xmlns:a="http://schemas.openxmlformats.org/drawingml/2006/main" w="28575">
+            <a:solidFill>
+              <a:srgbClr val="FFFFFF"/>
+            </a:solidFill>
+            <a:prstDash val="solid"/>
+          </a:ln>
+        </p:spPr>
+        <p:style>
+          <a:lnRef xmlns:a="http://schemas.openxmlformats.org/drawingml/2006/main" idx="0"/>
+          <a:fillRef xmlns:a="http://schemas.openxmlformats.org/drawingml/2006/main" idx="0"/>
+          <a:effectRef xmlns:a="http://schemas.openxmlformats.org/drawingml/2006/main" idx="4"/>
+          <a:fontRef xmlns:a="http://schemas.openxmlformats.org/drawingml/2006/main" idx="major"/>
+        </p:style>
+        <p:txBody>
+          <a:bodyPr xmlns:a="http://schemas.openxmlformats.org/drawingml/2006/main" lIns="0" tIns="0" rIns="0" bIns="0" anchor="ctr">
+            <a:normAutofit fontScale="100000"/>
+          </a:bodyPr>
+          <a:lstStyle xmlns:a="http://schemas.openxmlformats.org/drawingml/2006/main"/>
+          <a:p xmlns:a="http://schemas.openxmlformats.org/drawingml/2006/main">
+            <a:pPr algn="ctr">
+              <a:defRPr sz="1200" b="1">
+                <a:solidFill>
+                  <a:srgbClr val="FFFFFF"/>
+                </a:solidFill>
+                <a:latin typeface="Microsoft YaHei"/>
+                <a:ea typeface="Microsoft YaHei"/>
+                <a:cs typeface="Microsoft YaHei"/>
+              </a:defRPr>
+            </a:pPr>
+            <a:r>
+              <a:rPr sz="1200" b="1">
+                <a:solidFill>
+                  <a:srgbClr val="FFFFFF"/>
+                </a:solidFill>
+                <a:latin typeface="Microsoft YaHei"/>
+                <a:ea typeface="Microsoft YaHei"/>
+                <a:cs typeface="Microsoft YaHei"/>
+              </a:rPr>
+              <a:t>01</a:t>
+            </a:r>
+          </a:p>
+        </p:txBody>
+      </p:sp>
+      <p:sp>
+        <p:nvSpPr>
+          <p:cNvPr id="7" name="PPAGENT_QA|parent=radial-card-0|domains=radial-content">
+            <a:extLst xmlns:a="http://schemas.openxmlformats.org/drawingml/2006/main">
+              <a:ext uri="{FF2B5EF4-FFF2-40B4-BE49-F238E27FC236}">
+                <a16:creationId xmlns:a16="http://schemas.microsoft.com/office/drawing/2014/main" id="{8ED7B65C-24F7-4CCA-929D-8395E8642FA8}"/>
+              </a:ext>
+            </a:extLst>
+          </p:cNvPr>
+          <p:cNvSpPr>
+            <a:spLocks xmlns:a="http://schemas.openxmlformats.org/drawingml/2006/main" noGrp="1"/>
+          </p:cNvSpPr>
+          <p:nvPr/>
+        </p:nvSpPr>
+        <p:spPr>
+          <a:xfrm xmlns:a="http://schemas.openxmlformats.org/drawingml/2006/main">
+            <a:off x="647700" y="2238375"/>
+            <a:ext cx="2857500" cy="762000"/>
+          </a:xfrm>
+          <a:prstGeom xmlns:a="http://schemas.openxmlformats.org/drawingml/2006/main" prst="roundRect">
+            <a:avLst>
+              <a:gd name="adj" fmla="val 15000"/>
+            </a:avLst>
+          </a:prstGeom>
+          <a:noFill xmlns:a="http://schemas.openxmlformats.org/drawingml/2006/main"/>
+          <a:ln xmlns:a="http://schemas.openxmlformats.org/drawingml/2006/main" w="0">
+            <a:noFill/>
+            <a:prstDash val="solid"/>
+          </a:ln>
+        </p:spPr>
+      </p:sp>
+      <p:sp>
+        <p:nvSpPr>
+          <p:cNvPr id="8" name="PPAGENT_QA|within=radial-card-0|role=title">
+            <a:extLst xmlns:a="http://schemas.openxmlformats.org/drawingml/2006/main">
+              <a:ext uri="{FF2B5EF4-FFF2-40B4-BE49-F238E27FC236}">
+                <a16:creationId xmlns:a16="http://schemas.microsoft.com/office/drawing/2014/main" id="{D79EDE65-2803-4FB4-9820-37F1B7071901}"/>
+              </a:ext>
+            </a:extLst>
+          </p:cNvPr>
+          <p:cNvSpPr>
+            <a:spLocks xmlns:a="http://schemas.openxmlformats.org/drawingml/2006/main" noGrp="1"/>
+          </p:cNvSpPr>
+          <p:nvPr/>
+        </p:nvSpPr>
+        <p:spPr>
+          <a:xfrm xmlns:a="http://schemas.openxmlformats.org/drawingml/2006/main">
+            <a:off x="647700" y="2238375"/>
+            <a:ext cx="2857500" cy="285750"/>
+          </a:xfrm>
+          <a:prstGeom xmlns:a="http://schemas.openxmlformats.org/drawingml/2006/main" prst="rect">
+            <a:avLst/>
+          </a:prstGeom>
+          <a:noFill xmlns:a="http://schemas.openxmlformats.org/drawingml/2006/main"/>
+          <a:ln xmlns:a="http://schemas.openxmlformats.org/drawingml/2006/main" w="0">
+            <a:noFill/>
+            <a:prstDash val="solid"/>
+          </a:ln>
+        </p:spPr>
+        <p:txBody>
+          <a:bodyPr xmlns:a="http://schemas.openxmlformats.org/drawingml/2006/main" lIns="0" tIns="0" rIns="0" bIns="0" anchor="ctr">
+            <a:normAutofit fontScale="100000"/>
+          </a:bodyPr>
+          <a:lstStyle xmlns:a="http://schemas.openxmlformats.org/drawingml/2006/main"/>
+          <a:p xmlns:a="http://schemas.openxmlformats.org/drawingml/2006/main">
+            <a:pPr algn="r">
+              <a:defRPr sz="1425" b="1">
+                <a:solidFill>
+                  <a:srgbClr val="1677C8"/>
+                </a:solidFill>
+                <a:latin typeface="Microsoft YaHei"/>
+                <a:ea typeface="Microsoft YaHei"/>
+                <a:cs typeface="Microsoft YaHei"/>
+              </a:defRPr>
+            </a:pPr>
+            <a:r>
+              <a:rPr sz="1425" b="1">
+                <a:solidFill>
+                  <a:srgbClr val="1677C8"/>
+                </a:solidFill>
+                <a:latin typeface="Microsoft YaHei"/>
+                <a:ea typeface="Microsoft YaHei"/>
+                <a:cs typeface="Microsoft YaHei"/>
+              </a:rPr>
+              <a:t>统一标准</a:t>
+            </a:r>
+          </a:p>
+        </p:txBody>
+      </p:sp>
+      <p:sp>
+        <p:nvSpPr>
+          <p:cNvPr id="9" name="PPAGENT_CONNECTOR|from=radial-center|fromSide=left|to=radial-node-0|toSide=right">
+            <a:extLst xmlns:a="http://schemas.openxmlformats.org/drawingml/2006/main">
+              <a:ext uri="{FF2B5EF4-FFF2-40B4-BE49-F238E27FC236}">
+                <a16:creationId xmlns:a16="http://schemas.microsoft.com/office/drawing/2014/main" id="{38F12C55-AAE8-481D-864C-0EE9A61ED1DB}"/>
+              </a:ext>
+            </a:extLst>
+          </p:cNvPr>
+          <p:cNvSpPr>
+            <a:spLocks xmlns:a="http://schemas.openxmlformats.org/drawingml/2006/main" noGrp="1"/>
+          </p:cNvSpPr>
+          <p:nvPr/>
+        </p:nvSpPr>
+        <p:spPr>
+          <a:xfrm xmlns:a="http://schemas.openxmlformats.org/drawingml/2006/main" flipH="1" flipV="1">
+            <a:off x="4076700" y="2619375"/>
             <a:ext cx="781050" cy="1047750"/>
           </a:xfrm>
           <a:prstGeom xmlns:a="http://schemas.openxmlformats.org/drawingml/2006/main" prst="line">
@@ -2046,21 +2678,21 @@
       </p:sp>
       <p:sp>
         <p:nvSpPr>
-          <p:cNvPr id="21" name="PPAGENT_QA|parent=radial-node-3|domains=radial-shape">
-            <a:extLst xmlns:a="http://schemas.openxmlformats.org/drawingml/2006/main">
-              <a:ext uri="{FF2B5EF4-FFF2-40B4-BE49-F238E27FC236}">
-                <a16:creationId xmlns:a16="http://schemas.microsoft.com/office/drawing/2014/main" id="{C14EA1DC-6666-4AA2-8E81-0433859DDA14}"/>
-              </a:ext>
-            </a:extLst>
-          </p:cNvPr>
-          <p:cNvSpPr>
-            <a:spLocks xmlns:a="http://schemas.openxmlformats.org/drawingml/2006/main" noGrp="1"/>
-          </p:cNvSpPr>
-          <p:nvPr/>
-        </p:nvSpPr>
-        <p:spPr>
-          <a:xfrm xmlns:a="http://schemas.openxmlformats.org/drawingml/2006/main">
-            <a:off x="8115300" y="4495800"/>
+          <p:cNvPr id="10" name="PPAGENT_QA|parent=radial-node-1|domains=radial-shape">
+            <a:extLst xmlns:a="http://schemas.openxmlformats.org/drawingml/2006/main">
+              <a:ext uri="{FF2B5EF4-FFF2-40B4-BE49-F238E27FC236}">
+                <a16:creationId xmlns:a16="http://schemas.microsoft.com/office/drawing/2014/main" id="{25AB5664-64A9-4EED-915D-0733F9849AA3}"/>
+              </a:ext>
+            </a:extLst>
+          </p:cNvPr>
+          <p:cNvSpPr>
+            <a:spLocks xmlns:a="http://schemas.openxmlformats.org/drawingml/2006/main" noGrp="1"/>
+          </p:cNvSpPr>
+          <p:nvPr/>
+        </p:nvSpPr>
+        <p:spPr>
+          <a:xfrm xmlns:a="http://schemas.openxmlformats.org/drawingml/2006/main">
+            <a:off x="8115300" y="2400300"/>
             <a:ext cx="438150" cy="438150"/>
           </a:xfrm>
           <a:prstGeom xmlns:a="http://schemas.openxmlformats.org/drawingml/2006/main" prst="ellipse">
@@ -2107,28 +2739,28 @@
                 <a:ea typeface="Microsoft YaHei"/>
                 <a:cs typeface="Microsoft YaHei"/>
               </a:rPr>
-              <a:t>04</a:t>
+              <a:t>02</a:t>
             </a:r>
           </a:p>
         </p:txBody>
       </p:sp>
       <p:sp>
         <p:nvSpPr>
-          <p:cNvPr id="22" name="PPAGENT_QA|parent=radial-card-3|domains=radial-content">
-            <a:extLst xmlns:a="http://schemas.openxmlformats.org/drawingml/2006/main">
-              <a:ext uri="{FF2B5EF4-FFF2-40B4-BE49-F238E27FC236}">
-                <a16:creationId xmlns:a16="http://schemas.microsoft.com/office/drawing/2014/main" id="{80B6DA1F-121A-4601-9641-64057A4B7295}"/>
-              </a:ext>
-            </a:extLst>
-          </p:cNvPr>
-          <p:cNvSpPr>
-            <a:spLocks xmlns:a="http://schemas.openxmlformats.org/drawingml/2006/main" noGrp="1"/>
-          </p:cNvSpPr>
-          <p:nvPr/>
-        </p:nvSpPr>
-        <p:spPr>
-          <a:xfrm xmlns:a="http://schemas.openxmlformats.org/drawingml/2006/main">
-            <a:off x="8686800" y="4333875"/>
+          <p:cNvPr id="11" name="PPAGENT_QA|parent=radial-card-1|domains=radial-content">
+            <a:extLst xmlns:a="http://schemas.openxmlformats.org/drawingml/2006/main">
+              <a:ext uri="{FF2B5EF4-FFF2-40B4-BE49-F238E27FC236}">
+                <a16:creationId xmlns:a16="http://schemas.microsoft.com/office/drawing/2014/main" id="{C20279EB-1377-4A0E-976D-82F813B0F29D}"/>
+              </a:ext>
+            </a:extLst>
+          </p:cNvPr>
+          <p:cNvSpPr>
+            <a:spLocks xmlns:a="http://schemas.openxmlformats.org/drawingml/2006/main" noGrp="1"/>
+          </p:cNvSpPr>
+          <p:nvPr/>
+        </p:nvSpPr>
+        <p:spPr>
+          <a:xfrm xmlns:a="http://schemas.openxmlformats.org/drawingml/2006/main">
+            <a:off x="8686800" y="2238375"/>
             <a:ext cx="2857500" cy="762000"/>
           </a:xfrm>
           <a:prstGeom xmlns:a="http://schemas.openxmlformats.org/drawingml/2006/main" prst="roundRect">
@@ -2145,21 +2777,21 @@
       </p:sp>
       <p:sp>
         <p:nvSpPr>
-          <p:cNvPr id="23" name="PPAGENT_QA|within=radial-card-3|role=title">
-            <a:extLst xmlns:a="http://schemas.openxmlformats.org/drawingml/2006/main">
-              <a:ext uri="{FF2B5EF4-FFF2-40B4-BE49-F238E27FC236}">
-                <a16:creationId xmlns:a16="http://schemas.microsoft.com/office/drawing/2014/main" id="{A01475E7-A392-4D28-951C-A5881402C1E0}"/>
-              </a:ext>
-            </a:extLst>
-          </p:cNvPr>
-          <p:cNvSpPr>
-            <a:spLocks xmlns:a="http://schemas.openxmlformats.org/drawingml/2006/main" noGrp="1"/>
-          </p:cNvSpPr>
-          <p:nvPr/>
-        </p:nvSpPr>
-        <p:spPr>
-          <a:xfrm xmlns:a="http://schemas.openxmlformats.org/drawingml/2006/main">
-            <a:off x="8686800" y="4333875"/>
+          <p:cNvPr id="12" name="PPAGENT_QA|within=radial-card-1|role=title">
+            <a:extLst xmlns:a="http://schemas.openxmlformats.org/drawingml/2006/main">
+              <a:ext uri="{FF2B5EF4-FFF2-40B4-BE49-F238E27FC236}">
+                <a16:creationId xmlns:a16="http://schemas.microsoft.com/office/drawing/2014/main" id="{A156C233-6D66-4EBB-A3C4-D25AE365B389}"/>
+              </a:ext>
+            </a:extLst>
+          </p:cNvPr>
+          <p:cNvSpPr>
+            <a:spLocks xmlns:a="http://schemas.openxmlformats.org/drawingml/2006/main" noGrp="1"/>
+          </p:cNvSpPr>
+          <p:nvPr/>
+        </p:nvSpPr>
+        <p:spPr>
+          <a:xfrm xmlns:a="http://schemas.openxmlformats.org/drawingml/2006/main">
+            <a:off x="8686800" y="2238375"/>
             <a:ext cx="2857500" cy="285750"/>
           </a:xfrm>
           <a:prstGeom xmlns:a="http://schemas.openxmlformats.org/drawingml/2006/main" prst="rect">
@@ -2196,6 +2828,382 @@
                 <a:ea typeface="Microsoft YaHei"/>
                 <a:cs typeface="Microsoft YaHei"/>
               </a:rPr>
+              <a:t>快速响应</a:t>
+            </a:r>
+          </a:p>
+        </p:txBody>
+      </p:sp>
+      <p:sp>
+        <p:nvSpPr>
+          <p:cNvPr id="13" name="PPAGENT_CONNECTOR|from=radial-center|fromSide=right|to=radial-node-1|toSide=left">
+            <a:extLst xmlns:a="http://schemas.openxmlformats.org/drawingml/2006/main">
+              <a:ext uri="{FF2B5EF4-FFF2-40B4-BE49-F238E27FC236}">
+                <a16:creationId xmlns:a16="http://schemas.microsoft.com/office/drawing/2014/main" id="{663B4FBC-497F-4BEE-AC76-4CC3E952BB4D}"/>
+              </a:ext>
+            </a:extLst>
+          </p:cNvPr>
+          <p:cNvSpPr>
+            <a:spLocks xmlns:a="http://schemas.openxmlformats.org/drawingml/2006/main" noGrp="1"/>
+          </p:cNvSpPr>
+          <p:nvPr/>
+        </p:nvSpPr>
+        <p:spPr>
+          <a:xfrm xmlns:a="http://schemas.openxmlformats.org/drawingml/2006/main" flipH="0" flipV="1">
+            <a:off x="7334250" y="2619375"/>
+            <a:ext cx="781050" cy="1047750"/>
+          </a:xfrm>
+          <a:prstGeom xmlns:a="http://schemas.openxmlformats.org/drawingml/2006/main" prst="line">
+            <a:avLst/>
+          </a:prstGeom>
+          <a:noFill xmlns:a="http://schemas.openxmlformats.org/drawingml/2006/main"/>
+          <a:ln xmlns:a="http://schemas.openxmlformats.org/drawingml/2006/main" w="14288">
+            <a:solidFill>
+              <a:srgbClr val="B7CCE0"/>
+            </a:solidFill>
+            <a:prstDash val="solid"/>
+          </a:ln>
+        </p:spPr>
+      </p:sp>
+      <p:sp>
+        <p:nvSpPr>
+          <p:cNvPr id="14" name="PPAGENT_QA|parent=radial-node-2|domains=radial-shape">
+            <a:extLst xmlns:a="http://schemas.openxmlformats.org/drawingml/2006/main">
+              <a:ext uri="{FF2B5EF4-FFF2-40B4-BE49-F238E27FC236}">
+                <a16:creationId xmlns:a16="http://schemas.microsoft.com/office/drawing/2014/main" id="{6114831F-5F5B-446D-B474-33A05955CB9C}"/>
+              </a:ext>
+            </a:extLst>
+          </p:cNvPr>
+          <p:cNvSpPr>
+            <a:spLocks xmlns:a="http://schemas.openxmlformats.org/drawingml/2006/main" noGrp="1"/>
+          </p:cNvSpPr>
+          <p:nvPr/>
+        </p:nvSpPr>
+        <p:spPr>
+          <a:xfrm xmlns:a="http://schemas.openxmlformats.org/drawingml/2006/main">
+            <a:off x="3638550" y="4495800"/>
+            <a:ext cx="438150" cy="438150"/>
+          </a:xfrm>
+          <a:prstGeom xmlns:a="http://schemas.openxmlformats.org/drawingml/2006/main" prst="ellipse">
+            <a:avLst/>
+          </a:prstGeom>
+          <a:solidFill xmlns:a="http://schemas.openxmlformats.org/drawingml/2006/main">
+            <a:srgbClr val="14CBD1"/>
+          </a:solidFill>
+          <a:ln xmlns:a="http://schemas.openxmlformats.org/drawingml/2006/main" w="28575">
+            <a:solidFill>
+              <a:srgbClr val="FFFFFF"/>
+            </a:solidFill>
+            <a:prstDash val="solid"/>
+          </a:ln>
+        </p:spPr>
+        <p:style>
+          <a:lnRef xmlns:a="http://schemas.openxmlformats.org/drawingml/2006/main" idx="0"/>
+          <a:fillRef xmlns:a="http://schemas.openxmlformats.org/drawingml/2006/main" idx="0"/>
+          <a:effectRef xmlns:a="http://schemas.openxmlformats.org/drawingml/2006/main" idx="4"/>
+          <a:fontRef xmlns:a="http://schemas.openxmlformats.org/drawingml/2006/main" idx="major"/>
+        </p:style>
+        <p:txBody>
+          <a:bodyPr xmlns:a="http://schemas.openxmlformats.org/drawingml/2006/main" lIns="0" tIns="0" rIns="0" bIns="0" anchor="ctr">
+            <a:normAutofit fontScale="100000"/>
+          </a:bodyPr>
+          <a:lstStyle xmlns:a="http://schemas.openxmlformats.org/drawingml/2006/main"/>
+          <a:p xmlns:a="http://schemas.openxmlformats.org/drawingml/2006/main">
+            <a:pPr algn="ctr">
+              <a:defRPr sz="1200" b="1">
+                <a:solidFill>
+                  <a:srgbClr val="FFFFFF"/>
+                </a:solidFill>
+                <a:latin typeface="Microsoft YaHei"/>
+                <a:ea typeface="Microsoft YaHei"/>
+                <a:cs typeface="Microsoft YaHei"/>
+              </a:defRPr>
+            </a:pPr>
+            <a:r>
+              <a:rPr sz="1200" b="1">
+                <a:solidFill>
+                  <a:srgbClr val="FFFFFF"/>
+                </a:solidFill>
+                <a:latin typeface="Microsoft YaHei"/>
+                <a:ea typeface="Microsoft YaHei"/>
+                <a:cs typeface="Microsoft YaHei"/>
+              </a:rPr>
+              <a:t>03</a:t>
+            </a:r>
+          </a:p>
+        </p:txBody>
+      </p:sp>
+      <p:sp>
+        <p:nvSpPr>
+          <p:cNvPr id="15" name="PPAGENT_QA|parent=radial-card-2|domains=radial-content">
+            <a:extLst xmlns:a="http://schemas.openxmlformats.org/drawingml/2006/main">
+              <a:ext uri="{FF2B5EF4-FFF2-40B4-BE49-F238E27FC236}">
+                <a16:creationId xmlns:a16="http://schemas.microsoft.com/office/drawing/2014/main" id="{AE11AF1E-76BE-4D5E-9AF4-099104B940AE}"/>
+              </a:ext>
+            </a:extLst>
+          </p:cNvPr>
+          <p:cNvSpPr>
+            <a:spLocks xmlns:a="http://schemas.openxmlformats.org/drawingml/2006/main" noGrp="1"/>
+          </p:cNvSpPr>
+          <p:nvPr/>
+        </p:nvSpPr>
+        <p:spPr>
+          <a:xfrm xmlns:a="http://schemas.openxmlformats.org/drawingml/2006/main">
+            <a:off x="647700" y="4333875"/>
+            <a:ext cx="2857500" cy="762000"/>
+          </a:xfrm>
+          <a:prstGeom xmlns:a="http://schemas.openxmlformats.org/drawingml/2006/main" prst="roundRect">
+            <a:avLst>
+              <a:gd name="adj" fmla="val 15000"/>
+            </a:avLst>
+          </a:prstGeom>
+          <a:noFill xmlns:a="http://schemas.openxmlformats.org/drawingml/2006/main"/>
+          <a:ln xmlns:a="http://schemas.openxmlformats.org/drawingml/2006/main" w="0">
+            <a:noFill/>
+            <a:prstDash val="solid"/>
+          </a:ln>
+        </p:spPr>
+      </p:sp>
+      <p:sp>
+        <p:nvSpPr>
+          <p:cNvPr id="16" name="PPAGENT_QA|within=radial-card-2|role=title">
+            <a:extLst xmlns:a="http://schemas.openxmlformats.org/drawingml/2006/main">
+              <a:ext uri="{FF2B5EF4-FFF2-40B4-BE49-F238E27FC236}">
+                <a16:creationId xmlns:a16="http://schemas.microsoft.com/office/drawing/2014/main" id="{6B7818BC-FFD4-411E-93EE-0B7ABC1CCEB4}"/>
+              </a:ext>
+            </a:extLst>
+          </p:cNvPr>
+          <p:cNvSpPr>
+            <a:spLocks xmlns:a="http://schemas.openxmlformats.org/drawingml/2006/main" noGrp="1"/>
+          </p:cNvSpPr>
+          <p:nvPr/>
+        </p:nvSpPr>
+        <p:spPr>
+          <a:xfrm xmlns:a="http://schemas.openxmlformats.org/drawingml/2006/main">
+            <a:off x="647700" y="4333875"/>
+            <a:ext cx="2857500" cy="285750"/>
+          </a:xfrm>
+          <a:prstGeom xmlns:a="http://schemas.openxmlformats.org/drawingml/2006/main" prst="rect">
+            <a:avLst/>
+          </a:prstGeom>
+          <a:noFill xmlns:a="http://schemas.openxmlformats.org/drawingml/2006/main"/>
+          <a:ln xmlns:a="http://schemas.openxmlformats.org/drawingml/2006/main" w="0">
+            <a:noFill/>
+            <a:prstDash val="solid"/>
+          </a:ln>
+        </p:spPr>
+        <p:txBody>
+          <a:bodyPr xmlns:a="http://schemas.openxmlformats.org/drawingml/2006/main" lIns="0" tIns="0" rIns="0" bIns="0" anchor="ctr">
+            <a:normAutofit fontScale="100000"/>
+          </a:bodyPr>
+          <a:lstStyle xmlns:a="http://schemas.openxmlformats.org/drawingml/2006/main"/>
+          <a:p xmlns:a="http://schemas.openxmlformats.org/drawingml/2006/main">
+            <a:pPr algn="r">
+              <a:defRPr sz="1425" b="1">
+                <a:solidFill>
+                  <a:srgbClr val="1677C8"/>
+                </a:solidFill>
+                <a:latin typeface="Microsoft YaHei"/>
+                <a:ea typeface="Microsoft YaHei"/>
+                <a:cs typeface="Microsoft YaHei"/>
+              </a:defRPr>
+            </a:pPr>
+            <a:r>
+              <a:rPr sz="1425" b="1">
+                <a:solidFill>
+                  <a:srgbClr val="1677C8"/>
+                </a:solidFill>
+                <a:latin typeface="Microsoft YaHei"/>
+                <a:ea typeface="Microsoft YaHei"/>
+                <a:cs typeface="Microsoft YaHei"/>
+              </a:rPr>
+              <a:t>质量可控</a:t>
+            </a:r>
+          </a:p>
+        </p:txBody>
+      </p:sp>
+      <p:sp>
+        <p:nvSpPr>
+          <p:cNvPr id="17" name="PPAGENT_CONNECTOR|from=radial-center|fromSide=left|to=radial-node-2|toSide=right">
+            <a:extLst xmlns:a="http://schemas.openxmlformats.org/drawingml/2006/main">
+              <a:ext uri="{FF2B5EF4-FFF2-40B4-BE49-F238E27FC236}">
+                <a16:creationId xmlns:a16="http://schemas.microsoft.com/office/drawing/2014/main" id="{BAD8A21A-D046-4DF2-9C16-DC1939253C72}"/>
+              </a:ext>
+            </a:extLst>
+          </p:cNvPr>
+          <p:cNvSpPr>
+            <a:spLocks xmlns:a="http://schemas.openxmlformats.org/drawingml/2006/main" noGrp="1"/>
+          </p:cNvSpPr>
+          <p:nvPr/>
+        </p:nvSpPr>
+        <p:spPr>
+          <a:xfrm xmlns:a="http://schemas.openxmlformats.org/drawingml/2006/main" flipH="1" flipV="0">
+            <a:off x="4076700" y="3667125"/>
+            <a:ext cx="781050" cy="1047750"/>
+          </a:xfrm>
+          <a:prstGeom xmlns:a="http://schemas.openxmlformats.org/drawingml/2006/main" prst="line">
+            <a:avLst/>
+          </a:prstGeom>
+          <a:noFill xmlns:a="http://schemas.openxmlformats.org/drawingml/2006/main"/>
+          <a:ln xmlns:a="http://schemas.openxmlformats.org/drawingml/2006/main" w="14288">
+            <a:solidFill>
+              <a:srgbClr val="B7CCE0"/>
+            </a:solidFill>
+            <a:prstDash val="solid"/>
+          </a:ln>
+        </p:spPr>
+      </p:sp>
+      <p:sp>
+        <p:nvSpPr>
+          <p:cNvPr id="18" name="PPAGENT_QA|parent=radial-node-3|domains=radial-shape">
+            <a:extLst xmlns:a="http://schemas.openxmlformats.org/drawingml/2006/main">
+              <a:ext uri="{FF2B5EF4-FFF2-40B4-BE49-F238E27FC236}">
+                <a16:creationId xmlns:a16="http://schemas.microsoft.com/office/drawing/2014/main" id="{63704C8C-7A2C-4AEE-9D74-885FAE251E39}"/>
+              </a:ext>
+            </a:extLst>
+          </p:cNvPr>
+          <p:cNvSpPr>
+            <a:spLocks xmlns:a="http://schemas.openxmlformats.org/drawingml/2006/main" noGrp="1"/>
+          </p:cNvSpPr>
+          <p:nvPr/>
+        </p:nvSpPr>
+        <p:spPr>
+          <a:xfrm xmlns:a="http://schemas.openxmlformats.org/drawingml/2006/main">
+            <a:off x="8115300" y="4495800"/>
+            <a:ext cx="438150" cy="438150"/>
+          </a:xfrm>
+          <a:prstGeom xmlns:a="http://schemas.openxmlformats.org/drawingml/2006/main" prst="ellipse">
+            <a:avLst/>
+          </a:prstGeom>
+          <a:solidFill xmlns:a="http://schemas.openxmlformats.org/drawingml/2006/main">
+            <a:srgbClr val="00A8D8"/>
+          </a:solidFill>
+          <a:ln xmlns:a="http://schemas.openxmlformats.org/drawingml/2006/main" w="28575">
+            <a:solidFill>
+              <a:srgbClr val="FFFFFF"/>
+            </a:solidFill>
+            <a:prstDash val="solid"/>
+          </a:ln>
+        </p:spPr>
+        <p:style>
+          <a:lnRef xmlns:a="http://schemas.openxmlformats.org/drawingml/2006/main" idx="0"/>
+          <a:fillRef xmlns:a="http://schemas.openxmlformats.org/drawingml/2006/main" idx="0"/>
+          <a:effectRef xmlns:a="http://schemas.openxmlformats.org/drawingml/2006/main" idx="4"/>
+          <a:fontRef xmlns:a="http://schemas.openxmlformats.org/drawingml/2006/main" idx="major"/>
+        </p:style>
+        <p:txBody>
+          <a:bodyPr xmlns:a="http://schemas.openxmlformats.org/drawingml/2006/main" lIns="0" tIns="0" rIns="0" bIns="0" anchor="ctr">
+            <a:normAutofit fontScale="100000"/>
+          </a:bodyPr>
+          <a:lstStyle xmlns:a="http://schemas.openxmlformats.org/drawingml/2006/main"/>
+          <a:p xmlns:a="http://schemas.openxmlformats.org/drawingml/2006/main">
+            <a:pPr algn="ctr">
+              <a:defRPr sz="1200" b="1">
+                <a:solidFill>
+                  <a:srgbClr val="FFFFFF"/>
+                </a:solidFill>
+                <a:latin typeface="Microsoft YaHei"/>
+                <a:ea typeface="Microsoft YaHei"/>
+                <a:cs typeface="Microsoft YaHei"/>
+              </a:defRPr>
+            </a:pPr>
+            <a:r>
+              <a:rPr sz="1200" b="1">
+                <a:solidFill>
+                  <a:srgbClr val="FFFFFF"/>
+                </a:solidFill>
+                <a:latin typeface="Microsoft YaHei"/>
+                <a:ea typeface="Microsoft YaHei"/>
+                <a:cs typeface="Microsoft YaHei"/>
+              </a:rPr>
+              <a:t>04</a:t>
+            </a:r>
+          </a:p>
+        </p:txBody>
+      </p:sp>
+      <p:sp>
+        <p:nvSpPr>
+          <p:cNvPr id="19" name="PPAGENT_QA|parent=radial-card-3|domains=radial-content">
+            <a:extLst xmlns:a="http://schemas.openxmlformats.org/drawingml/2006/main">
+              <a:ext uri="{FF2B5EF4-FFF2-40B4-BE49-F238E27FC236}">
+                <a16:creationId xmlns:a16="http://schemas.microsoft.com/office/drawing/2014/main" id="{04489963-5FCE-44AC-AE14-25EB2692D1D9}"/>
+              </a:ext>
+            </a:extLst>
+          </p:cNvPr>
+          <p:cNvSpPr>
+            <a:spLocks xmlns:a="http://schemas.openxmlformats.org/drawingml/2006/main" noGrp="1"/>
+          </p:cNvSpPr>
+          <p:nvPr/>
+        </p:nvSpPr>
+        <p:spPr>
+          <a:xfrm xmlns:a="http://schemas.openxmlformats.org/drawingml/2006/main">
+            <a:off x="8686800" y="4333875"/>
+            <a:ext cx="2857500" cy="762000"/>
+          </a:xfrm>
+          <a:prstGeom xmlns:a="http://schemas.openxmlformats.org/drawingml/2006/main" prst="roundRect">
+            <a:avLst>
+              <a:gd name="adj" fmla="val 15000"/>
+            </a:avLst>
+          </a:prstGeom>
+          <a:noFill xmlns:a="http://schemas.openxmlformats.org/drawingml/2006/main"/>
+          <a:ln xmlns:a="http://schemas.openxmlformats.org/drawingml/2006/main" w="0">
+            <a:noFill/>
+            <a:prstDash val="solid"/>
+          </a:ln>
+        </p:spPr>
+      </p:sp>
+      <p:sp>
+        <p:nvSpPr>
+          <p:cNvPr id="20" name="PPAGENT_QA|within=radial-card-3|role=title">
+            <a:extLst xmlns:a="http://schemas.openxmlformats.org/drawingml/2006/main">
+              <a:ext uri="{FF2B5EF4-FFF2-40B4-BE49-F238E27FC236}">
+                <a16:creationId xmlns:a16="http://schemas.microsoft.com/office/drawing/2014/main" id="{40CCFCFF-D44B-4268-9727-7FF181035E03}"/>
+              </a:ext>
+            </a:extLst>
+          </p:cNvPr>
+          <p:cNvSpPr>
+            <a:spLocks xmlns:a="http://schemas.openxmlformats.org/drawingml/2006/main" noGrp="1"/>
+          </p:cNvSpPr>
+          <p:nvPr/>
+        </p:nvSpPr>
+        <p:spPr>
+          <a:xfrm xmlns:a="http://schemas.openxmlformats.org/drawingml/2006/main">
+            <a:off x="8686800" y="4333875"/>
+            <a:ext cx="2857500" cy="285750"/>
+          </a:xfrm>
+          <a:prstGeom xmlns:a="http://schemas.openxmlformats.org/drawingml/2006/main" prst="rect">
+            <a:avLst/>
+          </a:prstGeom>
+          <a:noFill xmlns:a="http://schemas.openxmlformats.org/drawingml/2006/main"/>
+          <a:ln xmlns:a="http://schemas.openxmlformats.org/drawingml/2006/main" w="0">
+            <a:noFill/>
+            <a:prstDash val="solid"/>
+          </a:ln>
+        </p:spPr>
+        <p:txBody>
+          <a:bodyPr xmlns:a="http://schemas.openxmlformats.org/drawingml/2006/main" lIns="0" tIns="0" rIns="0" bIns="0" anchor="ctr">
+            <a:normAutofit fontScale="100000"/>
+          </a:bodyPr>
+          <a:lstStyle xmlns:a="http://schemas.openxmlformats.org/drawingml/2006/main"/>
+          <a:p xmlns:a="http://schemas.openxmlformats.org/drawingml/2006/main">
+            <a:pPr algn="l">
+              <a:defRPr sz="1425" b="1">
+                <a:solidFill>
+                  <a:srgbClr val="1677C8"/>
+                </a:solidFill>
+                <a:latin typeface="Microsoft YaHei"/>
+                <a:ea typeface="Microsoft YaHei"/>
+                <a:cs typeface="Microsoft YaHei"/>
+              </a:defRPr>
+            </a:pPr>
+            <a:r>
+              <a:rPr sz="1425" b="1">
+                <a:solidFill>
+                  <a:srgbClr val="1677C8"/>
+                </a:solidFill>
+                <a:latin typeface="Microsoft YaHei"/>
+                <a:ea typeface="Microsoft YaHei"/>
+                <a:cs typeface="Microsoft YaHei"/>
+              </a:rPr>
               <a:t>持续积累</a:t>
             </a:r>
           </a:p>
@@ -2203,22 +3211,82 @@
       </p:sp>
       <p:sp>
         <p:nvSpPr>
-          <p:cNvPr id="24" name="PPAGENT_QA|within=radial-card-3|role=body">
-            <a:extLst xmlns:a="http://schemas.openxmlformats.org/drawingml/2006/main">
-              <a:ext uri="{FF2B5EF4-FFF2-40B4-BE49-F238E27FC236}">
-                <a16:creationId xmlns:a16="http://schemas.microsoft.com/office/drawing/2014/main" id="{A4AB5482-0C66-44D4-B75B-67DD02F7D0E4}"/>
-              </a:ext>
-            </a:extLst>
-          </p:cNvPr>
-          <p:cNvSpPr>
-            <a:spLocks xmlns:a="http://schemas.openxmlformats.org/drawingml/2006/main" noGrp="1"/>
-          </p:cNvSpPr>
-          <p:nvPr/>
-        </p:nvSpPr>
-        <p:spPr>
-          <a:xfrm xmlns:a="http://schemas.openxmlformats.org/drawingml/2006/main">
-            <a:off x="8686800" y="4648200"/>
-            <a:ext cx="2857500" cy="447675"/>
+          <p:cNvPr id="21" name="PPAGENT_CONNECTOR|from=radial-center|fromSide=right|to=radial-node-3|toSide=left">
+            <a:extLst xmlns:a="http://schemas.openxmlformats.org/drawingml/2006/main">
+              <a:ext uri="{FF2B5EF4-FFF2-40B4-BE49-F238E27FC236}">
+                <a16:creationId xmlns:a16="http://schemas.microsoft.com/office/drawing/2014/main" id="{02B61839-482F-46C7-86D9-0F047C705A9E}"/>
+              </a:ext>
+            </a:extLst>
+          </p:cNvPr>
+          <p:cNvSpPr>
+            <a:spLocks xmlns:a="http://schemas.openxmlformats.org/drawingml/2006/main" noGrp="1"/>
+          </p:cNvSpPr>
+          <p:nvPr/>
+        </p:nvSpPr>
+        <p:spPr>
+          <a:xfrm xmlns:a="http://schemas.openxmlformats.org/drawingml/2006/main" flipH="0" flipV="0">
+            <a:off x="7334250" y="3667125"/>
+            <a:ext cx="781050" cy="1047750"/>
+          </a:xfrm>
+          <a:prstGeom xmlns:a="http://schemas.openxmlformats.org/drawingml/2006/main" prst="line">
+            <a:avLst/>
+          </a:prstGeom>
+          <a:noFill xmlns:a="http://schemas.openxmlformats.org/drawingml/2006/main"/>
+          <a:ln xmlns:a="http://schemas.openxmlformats.org/drawingml/2006/main" w="14288">
+            <a:solidFill>
+              <a:srgbClr val="B7CCE0"/>
+            </a:solidFill>
+            <a:prstDash val="solid"/>
+          </a:ln>
+        </p:spPr>
+      </p:sp>
+    </p:spTree>
+    <p:extLst>
+      <p:ext uri="{BB962C8B-B14F-4D97-AF65-F5344CB8AC3E}">
+        <p14:creationId xmlns:p14="http://schemas.microsoft.com/office/powerpoint/2010/main" val="2067384893"/>
+      </p:ext>
+    </p:extLst>
+  </p:cSld>
+</p:sld>
+</file>
+
+<file path=ppt/slides/slide3.xml><?xml version="1.0" encoding="utf-8"?>
+<p:sld xmlns:p="http://schemas.openxmlformats.org/presentationml/2006/main">
+  <p:cSld>
+    <p:bg>
+      <p:bgPr>
+        <a:solidFill xmlns:a="http://schemas.openxmlformats.org/drawingml/2006/main">
+          <a:srgbClr val="F7FAFC"/>
+        </a:solidFill>
+      </p:bgPr>
+    </p:bg>
+    <p:spTree>
+      <p:nvGrpSpPr>
+        <p:cNvPr id="1" name=""/>
+        <p:cNvGrpSpPr/>
+        <p:nvPr/>
+      </p:nvGrpSpPr>
+      <p:grpSpPr>
+        <a:xfrm xmlns:a="http://schemas.openxmlformats.org/drawingml/2006/main"/>
+      </p:grpSpPr>
+      <p:sp>
+        <p:nvSpPr>
+          <p:cNvPr id="26" name="">
+            <a:extLst xmlns:a="http://schemas.openxmlformats.org/drawingml/2006/main">
+              <a:ext uri="{FF2B5EF4-FFF2-40B4-BE49-F238E27FC236}">
+                <a16:creationId xmlns:a16="http://schemas.microsoft.com/office/drawing/2014/main" id="{CA5CA466-5140-4CB6-9E4F-ED0BA157D740}"/>
+              </a:ext>
+            </a:extLst>
+          </p:cNvPr>
+          <p:cNvSpPr>
+            <a:spLocks xmlns:a="http://schemas.openxmlformats.org/drawingml/2006/main" noGrp="1"/>
+          </p:cNvSpPr>
+          <p:nvPr/>
+        </p:nvSpPr>
+        <p:spPr>
+          <a:xfrm xmlns:a="http://schemas.openxmlformats.org/drawingml/2006/main">
+            <a:off x="685800" y="400050"/>
+            <a:ext cx="8382000" cy="457200"/>
           </a:xfrm>
           <a:prstGeom xmlns:a="http://schemas.openxmlformats.org/drawingml/2006/main" prst="rect">
             <a:avLst/>
@@ -2230,7 +3298,65 @@
           </a:ln>
         </p:spPr>
         <p:txBody>
-          <a:bodyPr xmlns:a="http://schemas.openxmlformats.org/drawingml/2006/main" lIns="0" tIns="0" rIns="0" bIns="0" anchor="t">
+          <a:bodyPr xmlns:a="http://schemas.openxmlformats.org/drawingml/2006/main" lIns="0" tIns="0" rIns="0" bIns="0" anchor="ctr">
+            <a:normAutofit fontScale="100000"/>
+          </a:bodyPr>
+          <a:lstStyle xmlns:a="http://schemas.openxmlformats.org/drawingml/2006/main"/>
+          <a:p xmlns:a="http://schemas.openxmlformats.org/drawingml/2006/main">
+            <a:pPr algn="l">
+              <a:defRPr sz="2700" b="1">
+                <a:solidFill>
+                  <a:srgbClr val="1677C8"/>
+                </a:solidFill>
+                <a:latin typeface="Microsoft YaHei"/>
+                <a:ea typeface="Microsoft YaHei"/>
+                <a:cs typeface="Microsoft YaHei"/>
+              </a:defRPr>
+            </a:pPr>
+            <a:r>
+              <a:rPr sz="2700" b="1">
+                <a:solidFill>
+                  <a:srgbClr val="1677C8"/>
+                </a:solidFill>
+                <a:latin typeface="Microsoft YaHei"/>
+                <a:ea typeface="Microsoft YaHei"/>
+                <a:cs typeface="Microsoft YaHei"/>
+              </a:rPr>
+              <a:t>中心辐射关系</a:t>
+            </a:r>
+          </a:p>
+        </p:txBody>
+      </p:sp>
+      <p:sp>
+        <p:nvSpPr>
+          <p:cNvPr id="2" name="">
+            <a:extLst xmlns:a="http://schemas.openxmlformats.org/drawingml/2006/main">
+              <a:ext uri="{FF2B5EF4-FFF2-40B4-BE49-F238E27FC236}">
+                <a16:creationId xmlns:a16="http://schemas.microsoft.com/office/drawing/2014/main" id="{DBB2C808-C1C9-42B6-ACC5-3B9ECB019468}"/>
+              </a:ext>
+            </a:extLst>
+          </p:cNvPr>
+          <p:cNvSpPr>
+            <a:spLocks xmlns:a="http://schemas.openxmlformats.org/drawingml/2006/main" noGrp="1"/>
+          </p:cNvSpPr>
+          <p:nvPr/>
+        </p:nvSpPr>
+        <p:spPr>
+          <a:xfrm xmlns:a="http://schemas.openxmlformats.org/drawingml/2006/main">
+            <a:off x="704850" y="876300"/>
+            <a:ext cx="4953000" cy="247650"/>
+          </a:xfrm>
+          <a:prstGeom xmlns:a="http://schemas.openxmlformats.org/drawingml/2006/main" prst="rect">
+            <a:avLst/>
+          </a:prstGeom>
+          <a:noFill xmlns:a="http://schemas.openxmlformats.org/drawingml/2006/main"/>
+          <a:ln xmlns:a="http://schemas.openxmlformats.org/drawingml/2006/main" w="0">
+            <a:noFill/>
+            <a:prstDash val="solid"/>
+          </a:ln>
+        </p:spPr>
+        <p:txBody>
+          <a:bodyPr xmlns:a="http://schemas.openxmlformats.org/drawingml/2006/main" lIns="0" tIns="0" rIns="0" bIns="0" anchor="ctr">
             <a:normAutofit fontScale="100000"/>
           </a:bodyPr>
           <a:lstStyle xmlns:a="http://schemas.openxmlformats.org/drawingml/2006/main"/>
@@ -2238,7 +3364,7 @@
             <a:pPr algn="l">
               <a:defRPr sz="1200" b="0">
                 <a:solidFill>
-                  <a:srgbClr val="475569"/>
+                  <a:srgbClr val="7C8A9A"/>
                 </a:solidFill>
                 <a:latin typeface="Microsoft YaHei"/>
                 <a:ea typeface="Microsoft YaHei"/>
@@ -2248,35 +3374,330 @@
             <a:r>
               <a:rPr sz="1200" b="0">
                 <a:solidFill>
-                  <a:srgbClr val="475569"/>
+                  <a:srgbClr val="7C8A9A"/>
                 </a:solidFill>
                 <a:latin typeface="Microsoft YaHei"/>
                 <a:ea typeface="Microsoft YaHei"/>
                 <a:cs typeface="Microsoft YaHei"/>
               </a:rPr>
-              <a:t>把一次作品沉淀为下一次可调用能力</a:t>
+              <a:t>中心主题 · 多向展开</a:t>
             </a:r>
           </a:p>
         </p:txBody>
       </p:sp>
       <p:sp>
         <p:nvSpPr>
-          <p:cNvPr id="25" name="PPAGENT_CONNECTOR|from=radial-center|fromSide=right|to=radial-node-3|toSide=left">
-            <a:extLst xmlns:a="http://schemas.openxmlformats.org/drawingml/2006/main">
-              <a:ext uri="{FF2B5EF4-FFF2-40B4-BE49-F238E27FC236}">
-                <a16:creationId xmlns:a16="http://schemas.microsoft.com/office/drawing/2014/main" id="{089199B7-58D4-4473-B986-FE60AB3DACC1}"/>
-              </a:ext>
-            </a:extLst>
-          </p:cNvPr>
-          <p:cNvSpPr>
-            <a:spLocks xmlns:a="http://schemas.openxmlformats.org/drawingml/2006/main" noGrp="1"/>
-          </p:cNvSpPr>
-          <p:nvPr/>
-        </p:nvSpPr>
-        <p:spPr>
-          <a:xfrm xmlns:a="http://schemas.openxmlformats.org/drawingml/2006/main" flipH="0" flipV="0">
-            <a:off x="7334250" y="3667125"/>
-            <a:ext cx="781050" cy="1047750"/>
+          <p:cNvPr id="3" name="">
+            <a:extLst xmlns:a="http://schemas.openxmlformats.org/drawingml/2006/main">
+              <a:ext uri="{FF2B5EF4-FFF2-40B4-BE49-F238E27FC236}">
+                <a16:creationId xmlns:a16="http://schemas.microsoft.com/office/drawing/2014/main" id="{50F59CAE-B4C0-401B-A723-A0BC221FF5DA}"/>
+              </a:ext>
+            </a:extLst>
+          </p:cNvPr>
+          <p:cNvSpPr>
+            <a:spLocks xmlns:a="http://schemas.openxmlformats.org/drawingml/2006/main" noGrp="1"/>
+          </p:cNvSpPr>
+          <p:nvPr/>
+        </p:nvSpPr>
+        <p:spPr>
+          <a:xfrm xmlns:a="http://schemas.openxmlformats.org/drawingml/2006/main">
+            <a:off x="4400550" y="1971675"/>
+            <a:ext cx="3390900" cy="3390900"/>
+          </a:xfrm>
+          <a:prstGeom xmlns:a="http://schemas.openxmlformats.org/drawingml/2006/main" prst="ellipse">
+            <a:avLst/>
+          </a:prstGeom>
+          <a:solidFill xmlns:a="http://schemas.openxmlformats.org/drawingml/2006/main">
+            <a:srgbClr val="DCEEFF"/>
+          </a:solidFill>
+          <a:ln xmlns:a="http://schemas.openxmlformats.org/drawingml/2006/main" w="0">
+            <a:noFill/>
+            <a:prstDash val="solid"/>
+          </a:ln>
+        </p:spPr>
+      </p:sp>
+      <p:sp>
+        <p:nvSpPr>
+          <p:cNvPr id="4" name="">
+            <a:extLst xmlns:a="http://schemas.openxmlformats.org/drawingml/2006/main">
+              <a:ext uri="{FF2B5EF4-FFF2-40B4-BE49-F238E27FC236}">
+                <a16:creationId xmlns:a16="http://schemas.microsoft.com/office/drawing/2014/main" id="{C369DC84-1773-4E7B-A39E-C65DC5AAF899}"/>
+              </a:ext>
+            </a:extLst>
+          </p:cNvPr>
+          <p:cNvSpPr>
+            <a:spLocks xmlns:a="http://schemas.openxmlformats.org/drawingml/2006/main" noGrp="1"/>
+          </p:cNvSpPr>
+          <p:nvPr/>
+        </p:nvSpPr>
+        <p:spPr>
+          <a:xfrm xmlns:a="http://schemas.openxmlformats.org/drawingml/2006/main">
+            <a:off x="4629150" y="2200275"/>
+            <a:ext cx="2933700" cy="2933700"/>
+          </a:xfrm>
+          <a:prstGeom xmlns:a="http://schemas.openxmlformats.org/drawingml/2006/main" prst="ellipse">
+            <a:avLst/>
+          </a:prstGeom>
+          <a:solidFill xmlns:a="http://schemas.openxmlformats.org/drawingml/2006/main">
+            <a:srgbClr val="FFFFFF"/>
+          </a:solidFill>
+          <a:ln xmlns:a="http://schemas.openxmlformats.org/drawingml/2006/main" w="19050">
+            <a:solidFill>
+              <a:srgbClr val="B7D8F3"/>
+            </a:solidFill>
+            <a:prstDash val="solid"/>
+          </a:ln>
+        </p:spPr>
+        <p:style>
+          <a:lnRef xmlns:a="http://schemas.openxmlformats.org/drawingml/2006/main" idx="0"/>
+          <a:fillRef xmlns:a="http://schemas.openxmlformats.org/drawingml/2006/main" idx="0"/>
+          <a:effectRef xmlns:a="http://schemas.openxmlformats.org/drawingml/2006/main" idx="6"/>
+          <a:fontRef xmlns:a="http://schemas.openxmlformats.org/drawingml/2006/main" idx="major"/>
+        </p:style>
+      </p:sp>
+      <p:sp>
+        <p:nvSpPr>
+          <p:cNvPr id="5" name="PPAGENT_QA|parent=radial-center|domains=radial-shape,radial-content">
+            <a:extLst xmlns:a="http://schemas.openxmlformats.org/drawingml/2006/main">
+              <a:ext uri="{FF2B5EF4-FFF2-40B4-BE49-F238E27FC236}">
+                <a16:creationId xmlns:a16="http://schemas.microsoft.com/office/drawing/2014/main" id="{CE3997B3-BD82-4F70-83C2-F0894CAEA312}"/>
+              </a:ext>
+            </a:extLst>
+          </p:cNvPr>
+          <p:cNvSpPr>
+            <a:spLocks xmlns:a="http://schemas.openxmlformats.org/drawingml/2006/main" noGrp="1"/>
+          </p:cNvSpPr>
+          <p:nvPr/>
+        </p:nvSpPr>
+        <p:spPr>
+          <a:xfrm xmlns:a="http://schemas.openxmlformats.org/drawingml/2006/main">
+            <a:off x="4857750" y="2428875"/>
+            <a:ext cx="2476500" cy="2476500"/>
+          </a:xfrm>
+          <a:prstGeom xmlns:a="http://schemas.openxmlformats.org/drawingml/2006/main" prst="ellipse">
+            <a:avLst/>
+          </a:prstGeom>
+          <a:solidFill xmlns:a="http://schemas.openxmlformats.org/drawingml/2006/main">
+            <a:srgbClr val="1677C8"/>
+          </a:solidFill>
+          <a:ln xmlns:a="http://schemas.openxmlformats.org/drawingml/2006/main" w="38100">
+            <a:solidFill>
+              <a:srgbClr val="FFFFFF"/>
+            </a:solidFill>
+            <a:prstDash val="solid"/>
+          </a:ln>
+        </p:spPr>
+        <p:style>
+          <a:lnRef xmlns:a="http://schemas.openxmlformats.org/drawingml/2006/main" idx="0"/>
+          <a:fillRef xmlns:a="http://schemas.openxmlformats.org/drawingml/2006/main" idx="0"/>
+          <a:effectRef xmlns:a="http://schemas.openxmlformats.org/drawingml/2006/main" idx="7"/>
+          <a:fontRef xmlns:a="http://schemas.openxmlformats.org/drawingml/2006/main" idx="major"/>
+        </p:style>
+        <p:txBody>
+          <a:bodyPr xmlns:a="http://schemas.openxmlformats.org/drawingml/2006/main" lIns="114300" tIns="76200" rIns="114300" bIns="76200" anchor="ctr">
+            <a:normAutofit fontScale="100000"/>
+          </a:bodyPr>
+          <a:lstStyle xmlns:a="http://schemas.openxmlformats.org/drawingml/2006/main"/>
+          <a:p xmlns:a="http://schemas.openxmlformats.org/drawingml/2006/main">
+            <a:pPr algn="ctr">
+              <a:defRPr sz="2175" b="1">
+                <a:solidFill>
+                  <a:srgbClr val="FFFFFF"/>
+                </a:solidFill>
+                <a:latin typeface="Microsoft YaHei"/>
+                <a:ea typeface="Microsoft YaHei"/>
+                <a:cs typeface="Microsoft YaHei"/>
+              </a:defRPr>
+            </a:pPr>
+            <a:r>
+              <a:rPr sz="2175" b="1">
+                <a:solidFill>
+                  <a:srgbClr val="FFFFFF"/>
+                </a:solidFill>
+                <a:latin typeface="Microsoft YaHei"/>
+                <a:ea typeface="Microsoft YaHei"/>
+                <a:cs typeface="Microsoft YaHei"/>
+              </a:rPr>
+              <a:t>协同能力</a:t>
+            </a:r>
+          </a:p>
+        </p:txBody>
+      </p:sp>
+      <p:sp>
+        <p:nvSpPr>
+          <p:cNvPr id="6" name="PPAGENT_QA|parent=radial-node-0|domains=radial-shape">
+            <a:extLst xmlns:a="http://schemas.openxmlformats.org/drawingml/2006/main">
+              <a:ext uri="{FF2B5EF4-FFF2-40B4-BE49-F238E27FC236}">
+                <a16:creationId xmlns:a16="http://schemas.microsoft.com/office/drawing/2014/main" id="{70999109-9DF3-4C90-89D8-051A5D2052B3}"/>
+              </a:ext>
+            </a:extLst>
+          </p:cNvPr>
+          <p:cNvSpPr>
+            <a:spLocks xmlns:a="http://schemas.openxmlformats.org/drawingml/2006/main" noGrp="1"/>
+          </p:cNvSpPr>
+          <p:nvPr/>
+        </p:nvSpPr>
+        <p:spPr>
+          <a:xfrm xmlns:a="http://schemas.openxmlformats.org/drawingml/2006/main">
+            <a:off x="5876925" y="1590675"/>
+            <a:ext cx="438150" cy="438150"/>
+          </a:xfrm>
+          <a:prstGeom xmlns:a="http://schemas.openxmlformats.org/drawingml/2006/main" prst="ellipse">
+            <a:avLst/>
+          </a:prstGeom>
+          <a:solidFill xmlns:a="http://schemas.openxmlformats.org/drawingml/2006/main">
+            <a:srgbClr val="14CBD1"/>
+          </a:solidFill>
+          <a:ln xmlns:a="http://schemas.openxmlformats.org/drawingml/2006/main" w="28575">
+            <a:solidFill>
+              <a:srgbClr val="FFFFFF"/>
+            </a:solidFill>
+            <a:prstDash val="solid"/>
+          </a:ln>
+        </p:spPr>
+        <p:style>
+          <a:lnRef xmlns:a="http://schemas.openxmlformats.org/drawingml/2006/main" idx="0"/>
+          <a:fillRef xmlns:a="http://schemas.openxmlformats.org/drawingml/2006/main" idx="0"/>
+          <a:effectRef xmlns:a="http://schemas.openxmlformats.org/drawingml/2006/main" idx="4"/>
+          <a:fontRef xmlns:a="http://schemas.openxmlformats.org/drawingml/2006/main" idx="major"/>
+        </p:style>
+        <p:txBody>
+          <a:bodyPr xmlns:a="http://schemas.openxmlformats.org/drawingml/2006/main" lIns="0" tIns="0" rIns="0" bIns="0" anchor="ctr">
+            <a:normAutofit fontScale="100000"/>
+          </a:bodyPr>
+          <a:lstStyle xmlns:a="http://schemas.openxmlformats.org/drawingml/2006/main"/>
+          <a:p xmlns:a="http://schemas.openxmlformats.org/drawingml/2006/main">
+            <a:pPr algn="ctr">
+              <a:defRPr sz="1200" b="1">
+                <a:solidFill>
+                  <a:srgbClr val="FFFFFF"/>
+                </a:solidFill>
+                <a:latin typeface="Microsoft YaHei"/>
+                <a:ea typeface="Microsoft YaHei"/>
+                <a:cs typeface="Microsoft YaHei"/>
+              </a:defRPr>
+            </a:pPr>
+            <a:r>
+              <a:rPr sz="1200" b="1">
+                <a:solidFill>
+                  <a:srgbClr val="FFFFFF"/>
+                </a:solidFill>
+                <a:latin typeface="Microsoft YaHei"/>
+                <a:ea typeface="Microsoft YaHei"/>
+                <a:cs typeface="Microsoft YaHei"/>
+              </a:rPr>
+              <a:t>01</a:t>
+            </a:r>
+          </a:p>
+        </p:txBody>
+      </p:sp>
+      <p:sp>
+        <p:nvSpPr>
+          <p:cNvPr id="7" name="PPAGENT_QA|parent=radial-card-0|domains=radial-content">
+            <a:extLst xmlns:a="http://schemas.openxmlformats.org/drawingml/2006/main">
+              <a:ext uri="{FF2B5EF4-FFF2-40B4-BE49-F238E27FC236}">
+                <a16:creationId xmlns:a16="http://schemas.microsoft.com/office/drawing/2014/main" id="{58229657-9B74-44F5-B842-49FB6C891C4B}"/>
+              </a:ext>
+            </a:extLst>
+          </p:cNvPr>
+          <p:cNvSpPr>
+            <a:spLocks xmlns:a="http://schemas.openxmlformats.org/drawingml/2006/main" noGrp="1"/>
+          </p:cNvSpPr>
+          <p:nvPr/>
+        </p:nvSpPr>
+        <p:spPr>
+          <a:xfrm xmlns:a="http://schemas.openxmlformats.org/drawingml/2006/main">
+            <a:off x="4762500" y="1285875"/>
+            <a:ext cx="2667000" cy="457200"/>
+          </a:xfrm>
+          <a:prstGeom xmlns:a="http://schemas.openxmlformats.org/drawingml/2006/main" prst="roundRect">
+            <a:avLst>
+              <a:gd name="adj" fmla="val 25000"/>
+            </a:avLst>
+          </a:prstGeom>
+          <a:noFill xmlns:a="http://schemas.openxmlformats.org/drawingml/2006/main"/>
+          <a:ln xmlns:a="http://schemas.openxmlformats.org/drawingml/2006/main" w="0">
+            <a:noFill/>
+            <a:prstDash val="solid"/>
+          </a:ln>
+        </p:spPr>
+      </p:sp>
+      <p:sp>
+        <p:nvSpPr>
+          <p:cNvPr id="8" name="PPAGENT_QA|within=radial-card-0|role=title">
+            <a:extLst xmlns:a="http://schemas.openxmlformats.org/drawingml/2006/main">
+              <a:ext uri="{FF2B5EF4-FFF2-40B4-BE49-F238E27FC236}">
+                <a16:creationId xmlns:a16="http://schemas.microsoft.com/office/drawing/2014/main" id="{EF72BC8F-27BC-4BB3-8346-8B2D629BBB7F}"/>
+              </a:ext>
+            </a:extLst>
+          </p:cNvPr>
+          <p:cNvSpPr>
+            <a:spLocks xmlns:a="http://schemas.openxmlformats.org/drawingml/2006/main" noGrp="1"/>
+          </p:cNvSpPr>
+          <p:nvPr/>
+        </p:nvSpPr>
+        <p:spPr>
+          <a:xfrm xmlns:a="http://schemas.openxmlformats.org/drawingml/2006/main">
+            <a:off x="4762500" y="1285875"/>
+            <a:ext cx="2667000" cy="285750"/>
+          </a:xfrm>
+          <a:prstGeom xmlns:a="http://schemas.openxmlformats.org/drawingml/2006/main" prst="rect">
+            <a:avLst/>
+          </a:prstGeom>
+          <a:noFill xmlns:a="http://schemas.openxmlformats.org/drawingml/2006/main"/>
+          <a:ln xmlns:a="http://schemas.openxmlformats.org/drawingml/2006/main" w="0">
+            <a:noFill/>
+            <a:prstDash val="solid"/>
+          </a:ln>
+        </p:spPr>
+        <p:txBody>
+          <a:bodyPr xmlns:a="http://schemas.openxmlformats.org/drawingml/2006/main" lIns="0" tIns="0" rIns="0" bIns="0" anchor="ctr">
+            <a:normAutofit fontScale="100000"/>
+          </a:bodyPr>
+          <a:lstStyle xmlns:a="http://schemas.openxmlformats.org/drawingml/2006/main"/>
+          <a:p xmlns:a="http://schemas.openxmlformats.org/drawingml/2006/main">
+            <a:pPr algn="ctr">
+              <a:defRPr sz="1425" b="1">
+                <a:solidFill>
+                  <a:srgbClr val="1677C8"/>
+                </a:solidFill>
+                <a:latin typeface="Microsoft YaHei"/>
+                <a:ea typeface="Microsoft YaHei"/>
+                <a:cs typeface="Microsoft YaHei"/>
+              </a:defRPr>
+            </a:pPr>
+            <a:r>
+              <a:rPr sz="1425" b="1">
+                <a:solidFill>
+                  <a:srgbClr val="1677C8"/>
+                </a:solidFill>
+                <a:latin typeface="Microsoft YaHei"/>
+                <a:ea typeface="Microsoft YaHei"/>
+                <a:cs typeface="Microsoft YaHei"/>
+              </a:rPr>
+              <a:t>统一标准</a:t>
+            </a:r>
+          </a:p>
+        </p:txBody>
+      </p:sp>
+      <p:sp>
+        <p:nvSpPr>
+          <p:cNvPr id="9" name="PPAGENT_CONNECTOR|from=radial-center|fromSide=top|to=radial-node-0|toSide=bottom">
+            <a:extLst xmlns:a="http://schemas.openxmlformats.org/drawingml/2006/main">
+              <a:ext uri="{FF2B5EF4-FFF2-40B4-BE49-F238E27FC236}">
+                <a16:creationId xmlns:a16="http://schemas.microsoft.com/office/drawing/2014/main" id="{2A8F4D94-9117-4C5B-8695-325142DF7CC8}"/>
+              </a:ext>
+            </a:extLst>
+          </p:cNvPr>
+          <p:cNvSpPr>
+            <a:spLocks xmlns:a="http://schemas.openxmlformats.org/drawingml/2006/main" noGrp="1"/>
+          </p:cNvSpPr>
+          <p:nvPr/>
+        </p:nvSpPr>
+        <p:spPr>
+          <a:xfrm xmlns:a="http://schemas.openxmlformats.org/drawingml/2006/main" flipH="0" flipV="1">
+            <a:off x="6096000" y="2028825"/>
+            <a:ext cx="0" cy="400050"/>
           </a:xfrm>
           <a:prstGeom xmlns:a="http://schemas.openxmlformats.org/drawingml/2006/main" prst="line">
             <a:avLst/>
@@ -2290,10 +3711,5559 @@
           </a:ln>
         </p:spPr>
       </p:sp>
+      <p:sp>
+        <p:nvSpPr>
+          <p:cNvPr id="10" name="PPAGENT_QA|parent=radial-node-1|domains=radial-shape">
+            <a:extLst xmlns:a="http://schemas.openxmlformats.org/drawingml/2006/main">
+              <a:ext uri="{FF2B5EF4-FFF2-40B4-BE49-F238E27FC236}">
+                <a16:creationId xmlns:a16="http://schemas.microsoft.com/office/drawing/2014/main" id="{FDD752B4-E062-46FB-AE74-D6D2465420B9}"/>
+              </a:ext>
+            </a:extLst>
+          </p:cNvPr>
+          <p:cNvSpPr>
+            <a:spLocks xmlns:a="http://schemas.openxmlformats.org/drawingml/2006/main" noGrp="1"/>
+          </p:cNvSpPr>
+          <p:nvPr/>
+        </p:nvSpPr>
+        <p:spPr>
+          <a:xfrm xmlns:a="http://schemas.openxmlformats.org/drawingml/2006/main">
+            <a:off x="3638550" y="2400300"/>
+            <a:ext cx="438150" cy="438150"/>
+          </a:xfrm>
+          <a:prstGeom xmlns:a="http://schemas.openxmlformats.org/drawingml/2006/main" prst="ellipse">
+            <a:avLst/>
+          </a:prstGeom>
+          <a:solidFill xmlns:a="http://schemas.openxmlformats.org/drawingml/2006/main">
+            <a:srgbClr val="00A8D8"/>
+          </a:solidFill>
+          <a:ln xmlns:a="http://schemas.openxmlformats.org/drawingml/2006/main" w="28575">
+            <a:solidFill>
+              <a:srgbClr val="FFFFFF"/>
+            </a:solidFill>
+            <a:prstDash val="solid"/>
+          </a:ln>
+        </p:spPr>
+        <p:style>
+          <a:lnRef xmlns:a="http://schemas.openxmlformats.org/drawingml/2006/main" idx="0"/>
+          <a:fillRef xmlns:a="http://schemas.openxmlformats.org/drawingml/2006/main" idx="0"/>
+          <a:effectRef xmlns:a="http://schemas.openxmlformats.org/drawingml/2006/main" idx="4"/>
+          <a:fontRef xmlns:a="http://schemas.openxmlformats.org/drawingml/2006/main" idx="major"/>
+        </p:style>
+        <p:txBody>
+          <a:bodyPr xmlns:a="http://schemas.openxmlformats.org/drawingml/2006/main" lIns="0" tIns="0" rIns="0" bIns="0" anchor="ctr">
+            <a:normAutofit fontScale="100000"/>
+          </a:bodyPr>
+          <a:lstStyle xmlns:a="http://schemas.openxmlformats.org/drawingml/2006/main"/>
+          <a:p xmlns:a="http://schemas.openxmlformats.org/drawingml/2006/main">
+            <a:pPr algn="ctr">
+              <a:defRPr sz="1200" b="1">
+                <a:solidFill>
+                  <a:srgbClr val="FFFFFF"/>
+                </a:solidFill>
+                <a:latin typeface="Microsoft YaHei"/>
+                <a:ea typeface="Microsoft YaHei"/>
+                <a:cs typeface="Microsoft YaHei"/>
+              </a:defRPr>
+            </a:pPr>
+            <a:r>
+              <a:rPr sz="1200" b="1">
+                <a:solidFill>
+                  <a:srgbClr val="FFFFFF"/>
+                </a:solidFill>
+                <a:latin typeface="Microsoft YaHei"/>
+                <a:ea typeface="Microsoft YaHei"/>
+                <a:cs typeface="Microsoft YaHei"/>
+              </a:rPr>
+              <a:t>02</a:t>
+            </a:r>
+          </a:p>
+        </p:txBody>
+      </p:sp>
+      <p:sp>
+        <p:nvSpPr>
+          <p:cNvPr id="11" name="PPAGENT_QA|parent=radial-card-1|domains=radial-content">
+            <a:extLst xmlns:a="http://schemas.openxmlformats.org/drawingml/2006/main">
+              <a:ext uri="{FF2B5EF4-FFF2-40B4-BE49-F238E27FC236}">
+                <a16:creationId xmlns:a16="http://schemas.microsoft.com/office/drawing/2014/main" id="{49FCA7A3-EE46-4225-BF88-8ECAFBAAB125}"/>
+              </a:ext>
+            </a:extLst>
+          </p:cNvPr>
+          <p:cNvSpPr>
+            <a:spLocks xmlns:a="http://schemas.openxmlformats.org/drawingml/2006/main" noGrp="1"/>
+          </p:cNvSpPr>
+          <p:nvPr/>
+        </p:nvSpPr>
+        <p:spPr>
+          <a:xfrm xmlns:a="http://schemas.openxmlformats.org/drawingml/2006/main">
+            <a:off x="647700" y="2238375"/>
+            <a:ext cx="2857500" cy="762000"/>
+          </a:xfrm>
+          <a:prstGeom xmlns:a="http://schemas.openxmlformats.org/drawingml/2006/main" prst="roundRect">
+            <a:avLst>
+              <a:gd name="adj" fmla="val 15000"/>
+            </a:avLst>
+          </a:prstGeom>
+          <a:noFill xmlns:a="http://schemas.openxmlformats.org/drawingml/2006/main"/>
+          <a:ln xmlns:a="http://schemas.openxmlformats.org/drawingml/2006/main" w="0">
+            <a:noFill/>
+            <a:prstDash val="solid"/>
+          </a:ln>
+        </p:spPr>
+      </p:sp>
+      <p:sp>
+        <p:nvSpPr>
+          <p:cNvPr id="12" name="PPAGENT_QA|within=radial-card-1|role=title">
+            <a:extLst xmlns:a="http://schemas.openxmlformats.org/drawingml/2006/main">
+              <a:ext uri="{FF2B5EF4-FFF2-40B4-BE49-F238E27FC236}">
+                <a16:creationId xmlns:a16="http://schemas.microsoft.com/office/drawing/2014/main" id="{BF02598E-3D02-4EBC-98E4-F78B20261E3D}"/>
+              </a:ext>
+            </a:extLst>
+          </p:cNvPr>
+          <p:cNvSpPr>
+            <a:spLocks xmlns:a="http://schemas.openxmlformats.org/drawingml/2006/main" noGrp="1"/>
+          </p:cNvSpPr>
+          <p:nvPr/>
+        </p:nvSpPr>
+        <p:spPr>
+          <a:xfrm xmlns:a="http://schemas.openxmlformats.org/drawingml/2006/main">
+            <a:off x="647700" y="2238375"/>
+            <a:ext cx="2857500" cy="285750"/>
+          </a:xfrm>
+          <a:prstGeom xmlns:a="http://schemas.openxmlformats.org/drawingml/2006/main" prst="rect">
+            <a:avLst/>
+          </a:prstGeom>
+          <a:noFill xmlns:a="http://schemas.openxmlformats.org/drawingml/2006/main"/>
+          <a:ln xmlns:a="http://schemas.openxmlformats.org/drawingml/2006/main" w="0">
+            <a:noFill/>
+            <a:prstDash val="solid"/>
+          </a:ln>
+        </p:spPr>
+        <p:txBody>
+          <a:bodyPr xmlns:a="http://schemas.openxmlformats.org/drawingml/2006/main" lIns="0" tIns="0" rIns="0" bIns="0" anchor="ctr">
+            <a:normAutofit fontScale="100000"/>
+          </a:bodyPr>
+          <a:lstStyle xmlns:a="http://schemas.openxmlformats.org/drawingml/2006/main"/>
+          <a:p xmlns:a="http://schemas.openxmlformats.org/drawingml/2006/main">
+            <a:pPr algn="r">
+              <a:defRPr sz="1425" b="1">
+                <a:solidFill>
+                  <a:srgbClr val="1677C8"/>
+                </a:solidFill>
+                <a:latin typeface="Microsoft YaHei"/>
+                <a:ea typeface="Microsoft YaHei"/>
+                <a:cs typeface="Microsoft YaHei"/>
+              </a:defRPr>
+            </a:pPr>
+            <a:r>
+              <a:rPr sz="1425" b="1">
+                <a:solidFill>
+                  <a:srgbClr val="1677C8"/>
+                </a:solidFill>
+                <a:latin typeface="Microsoft YaHei"/>
+                <a:ea typeface="Microsoft YaHei"/>
+                <a:cs typeface="Microsoft YaHei"/>
+              </a:rPr>
+              <a:t>快速响应</a:t>
+            </a:r>
+          </a:p>
+        </p:txBody>
+      </p:sp>
+      <p:sp>
+        <p:nvSpPr>
+          <p:cNvPr id="13" name="PPAGENT_CONNECTOR|from=radial-center|fromSide=left|to=radial-node-1|toSide=right">
+            <a:extLst xmlns:a="http://schemas.openxmlformats.org/drawingml/2006/main">
+              <a:ext uri="{FF2B5EF4-FFF2-40B4-BE49-F238E27FC236}">
+                <a16:creationId xmlns:a16="http://schemas.microsoft.com/office/drawing/2014/main" id="{4D014263-21F1-492B-8402-BD0A27A5D8E0}"/>
+              </a:ext>
+            </a:extLst>
+          </p:cNvPr>
+          <p:cNvSpPr>
+            <a:spLocks xmlns:a="http://schemas.openxmlformats.org/drawingml/2006/main" noGrp="1"/>
+          </p:cNvSpPr>
+          <p:nvPr/>
+        </p:nvSpPr>
+        <p:spPr>
+          <a:xfrm xmlns:a="http://schemas.openxmlformats.org/drawingml/2006/main" flipH="1" flipV="1">
+            <a:off x="4076700" y="2619375"/>
+            <a:ext cx="781050" cy="1047750"/>
+          </a:xfrm>
+          <a:prstGeom xmlns:a="http://schemas.openxmlformats.org/drawingml/2006/main" prst="line">
+            <a:avLst/>
+          </a:prstGeom>
+          <a:noFill xmlns:a="http://schemas.openxmlformats.org/drawingml/2006/main"/>
+          <a:ln xmlns:a="http://schemas.openxmlformats.org/drawingml/2006/main" w="14288">
+            <a:solidFill>
+              <a:srgbClr val="B7CCE0"/>
+            </a:solidFill>
+            <a:prstDash val="solid"/>
+          </a:ln>
+        </p:spPr>
+      </p:sp>
+      <p:sp>
+        <p:nvSpPr>
+          <p:cNvPr id="14" name="PPAGENT_QA|parent=radial-node-2|domains=radial-shape">
+            <a:extLst xmlns:a="http://schemas.openxmlformats.org/drawingml/2006/main">
+              <a:ext uri="{FF2B5EF4-FFF2-40B4-BE49-F238E27FC236}">
+                <a16:creationId xmlns:a16="http://schemas.microsoft.com/office/drawing/2014/main" id="{C20FD848-BC32-4BCE-820E-D5FD143E876C}"/>
+              </a:ext>
+            </a:extLst>
+          </p:cNvPr>
+          <p:cNvSpPr>
+            <a:spLocks xmlns:a="http://schemas.openxmlformats.org/drawingml/2006/main" noGrp="1"/>
+          </p:cNvSpPr>
+          <p:nvPr/>
+        </p:nvSpPr>
+        <p:spPr>
+          <a:xfrm xmlns:a="http://schemas.openxmlformats.org/drawingml/2006/main">
+            <a:off x="8115300" y="2400300"/>
+            <a:ext cx="438150" cy="438150"/>
+          </a:xfrm>
+          <a:prstGeom xmlns:a="http://schemas.openxmlformats.org/drawingml/2006/main" prst="ellipse">
+            <a:avLst/>
+          </a:prstGeom>
+          <a:solidFill xmlns:a="http://schemas.openxmlformats.org/drawingml/2006/main">
+            <a:srgbClr val="14CBD1"/>
+          </a:solidFill>
+          <a:ln xmlns:a="http://schemas.openxmlformats.org/drawingml/2006/main" w="28575">
+            <a:solidFill>
+              <a:srgbClr val="FFFFFF"/>
+            </a:solidFill>
+            <a:prstDash val="solid"/>
+          </a:ln>
+        </p:spPr>
+        <p:style>
+          <a:lnRef xmlns:a="http://schemas.openxmlformats.org/drawingml/2006/main" idx="0"/>
+          <a:fillRef xmlns:a="http://schemas.openxmlformats.org/drawingml/2006/main" idx="0"/>
+          <a:effectRef xmlns:a="http://schemas.openxmlformats.org/drawingml/2006/main" idx="4"/>
+          <a:fontRef xmlns:a="http://schemas.openxmlformats.org/drawingml/2006/main" idx="major"/>
+        </p:style>
+        <p:txBody>
+          <a:bodyPr xmlns:a="http://schemas.openxmlformats.org/drawingml/2006/main" lIns="0" tIns="0" rIns="0" bIns="0" anchor="ctr">
+            <a:normAutofit fontScale="100000"/>
+          </a:bodyPr>
+          <a:lstStyle xmlns:a="http://schemas.openxmlformats.org/drawingml/2006/main"/>
+          <a:p xmlns:a="http://schemas.openxmlformats.org/drawingml/2006/main">
+            <a:pPr algn="ctr">
+              <a:defRPr sz="1200" b="1">
+                <a:solidFill>
+                  <a:srgbClr val="FFFFFF"/>
+                </a:solidFill>
+                <a:latin typeface="Microsoft YaHei"/>
+                <a:ea typeface="Microsoft YaHei"/>
+                <a:cs typeface="Microsoft YaHei"/>
+              </a:defRPr>
+            </a:pPr>
+            <a:r>
+              <a:rPr sz="1200" b="1">
+                <a:solidFill>
+                  <a:srgbClr val="FFFFFF"/>
+                </a:solidFill>
+                <a:latin typeface="Microsoft YaHei"/>
+                <a:ea typeface="Microsoft YaHei"/>
+                <a:cs typeface="Microsoft YaHei"/>
+              </a:rPr>
+              <a:t>03</a:t>
+            </a:r>
+          </a:p>
+        </p:txBody>
+      </p:sp>
+      <p:sp>
+        <p:nvSpPr>
+          <p:cNvPr id="15" name="PPAGENT_QA|parent=radial-card-2|domains=radial-content">
+            <a:extLst xmlns:a="http://schemas.openxmlformats.org/drawingml/2006/main">
+              <a:ext uri="{FF2B5EF4-FFF2-40B4-BE49-F238E27FC236}">
+                <a16:creationId xmlns:a16="http://schemas.microsoft.com/office/drawing/2014/main" id="{6BC46062-B2C8-4D80-8576-B1DD9D773EDC}"/>
+              </a:ext>
+            </a:extLst>
+          </p:cNvPr>
+          <p:cNvSpPr>
+            <a:spLocks xmlns:a="http://schemas.openxmlformats.org/drawingml/2006/main" noGrp="1"/>
+          </p:cNvSpPr>
+          <p:nvPr/>
+        </p:nvSpPr>
+        <p:spPr>
+          <a:xfrm xmlns:a="http://schemas.openxmlformats.org/drawingml/2006/main">
+            <a:off x="8686800" y="2238375"/>
+            <a:ext cx="2857500" cy="762000"/>
+          </a:xfrm>
+          <a:prstGeom xmlns:a="http://schemas.openxmlformats.org/drawingml/2006/main" prst="roundRect">
+            <a:avLst>
+              <a:gd name="adj" fmla="val 15000"/>
+            </a:avLst>
+          </a:prstGeom>
+          <a:noFill xmlns:a="http://schemas.openxmlformats.org/drawingml/2006/main"/>
+          <a:ln xmlns:a="http://schemas.openxmlformats.org/drawingml/2006/main" w="0">
+            <a:noFill/>
+            <a:prstDash val="solid"/>
+          </a:ln>
+        </p:spPr>
+      </p:sp>
+      <p:sp>
+        <p:nvSpPr>
+          <p:cNvPr id="16" name="PPAGENT_QA|within=radial-card-2|role=title">
+            <a:extLst xmlns:a="http://schemas.openxmlformats.org/drawingml/2006/main">
+              <a:ext uri="{FF2B5EF4-FFF2-40B4-BE49-F238E27FC236}">
+                <a16:creationId xmlns:a16="http://schemas.microsoft.com/office/drawing/2014/main" id="{9105BFFB-2A25-4B36-A98B-01809EB8CE35}"/>
+              </a:ext>
+            </a:extLst>
+          </p:cNvPr>
+          <p:cNvSpPr>
+            <a:spLocks xmlns:a="http://schemas.openxmlformats.org/drawingml/2006/main" noGrp="1"/>
+          </p:cNvSpPr>
+          <p:nvPr/>
+        </p:nvSpPr>
+        <p:spPr>
+          <a:xfrm xmlns:a="http://schemas.openxmlformats.org/drawingml/2006/main">
+            <a:off x="8686800" y="2238375"/>
+            <a:ext cx="2857500" cy="285750"/>
+          </a:xfrm>
+          <a:prstGeom xmlns:a="http://schemas.openxmlformats.org/drawingml/2006/main" prst="rect">
+            <a:avLst/>
+          </a:prstGeom>
+          <a:noFill xmlns:a="http://schemas.openxmlformats.org/drawingml/2006/main"/>
+          <a:ln xmlns:a="http://schemas.openxmlformats.org/drawingml/2006/main" w="0">
+            <a:noFill/>
+            <a:prstDash val="solid"/>
+          </a:ln>
+        </p:spPr>
+        <p:txBody>
+          <a:bodyPr xmlns:a="http://schemas.openxmlformats.org/drawingml/2006/main" lIns="0" tIns="0" rIns="0" bIns="0" anchor="ctr">
+            <a:normAutofit fontScale="100000"/>
+          </a:bodyPr>
+          <a:lstStyle xmlns:a="http://schemas.openxmlformats.org/drawingml/2006/main"/>
+          <a:p xmlns:a="http://schemas.openxmlformats.org/drawingml/2006/main">
+            <a:pPr algn="l">
+              <a:defRPr sz="1425" b="1">
+                <a:solidFill>
+                  <a:srgbClr val="1677C8"/>
+                </a:solidFill>
+                <a:latin typeface="Microsoft YaHei"/>
+                <a:ea typeface="Microsoft YaHei"/>
+                <a:cs typeface="Microsoft YaHei"/>
+              </a:defRPr>
+            </a:pPr>
+            <a:r>
+              <a:rPr sz="1425" b="1">
+                <a:solidFill>
+                  <a:srgbClr val="1677C8"/>
+                </a:solidFill>
+                <a:latin typeface="Microsoft YaHei"/>
+                <a:ea typeface="Microsoft YaHei"/>
+                <a:cs typeface="Microsoft YaHei"/>
+              </a:rPr>
+              <a:t>质量可控</a:t>
+            </a:r>
+          </a:p>
+        </p:txBody>
+      </p:sp>
+      <p:sp>
+        <p:nvSpPr>
+          <p:cNvPr id="17" name="PPAGENT_CONNECTOR|from=radial-center|fromSide=right|to=radial-node-2|toSide=left">
+            <a:extLst xmlns:a="http://schemas.openxmlformats.org/drawingml/2006/main">
+              <a:ext uri="{FF2B5EF4-FFF2-40B4-BE49-F238E27FC236}">
+                <a16:creationId xmlns:a16="http://schemas.microsoft.com/office/drawing/2014/main" id="{98E3C92D-CF77-4FB1-B02B-CB3BC8798AED}"/>
+              </a:ext>
+            </a:extLst>
+          </p:cNvPr>
+          <p:cNvSpPr>
+            <a:spLocks xmlns:a="http://schemas.openxmlformats.org/drawingml/2006/main" noGrp="1"/>
+          </p:cNvSpPr>
+          <p:nvPr/>
+        </p:nvSpPr>
+        <p:spPr>
+          <a:xfrm xmlns:a="http://schemas.openxmlformats.org/drawingml/2006/main" flipH="0" flipV="1">
+            <a:off x="7334250" y="2619375"/>
+            <a:ext cx="781050" cy="1047750"/>
+          </a:xfrm>
+          <a:prstGeom xmlns:a="http://schemas.openxmlformats.org/drawingml/2006/main" prst="line">
+            <a:avLst/>
+          </a:prstGeom>
+          <a:noFill xmlns:a="http://schemas.openxmlformats.org/drawingml/2006/main"/>
+          <a:ln xmlns:a="http://schemas.openxmlformats.org/drawingml/2006/main" w="14288">
+            <a:solidFill>
+              <a:srgbClr val="B7CCE0"/>
+            </a:solidFill>
+            <a:prstDash val="solid"/>
+          </a:ln>
+        </p:spPr>
+      </p:sp>
+      <p:sp>
+        <p:nvSpPr>
+          <p:cNvPr id="18" name="PPAGENT_QA|parent=radial-node-3|domains=radial-shape">
+            <a:extLst xmlns:a="http://schemas.openxmlformats.org/drawingml/2006/main">
+              <a:ext uri="{FF2B5EF4-FFF2-40B4-BE49-F238E27FC236}">
+                <a16:creationId xmlns:a16="http://schemas.microsoft.com/office/drawing/2014/main" id="{15DE4A5A-9C8C-4314-8906-06385BE13FDB}"/>
+              </a:ext>
+            </a:extLst>
+          </p:cNvPr>
+          <p:cNvSpPr>
+            <a:spLocks xmlns:a="http://schemas.openxmlformats.org/drawingml/2006/main" noGrp="1"/>
+          </p:cNvSpPr>
+          <p:nvPr/>
+        </p:nvSpPr>
+        <p:spPr>
+          <a:xfrm xmlns:a="http://schemas.openxmlformats.org/drawingml/2006/main">
+            <a:off x="3638550" y="4495800"/>
+            <a:ext cx="438150" cy="438150"/>
+          </a:xfrm>
+          <a:prstGeom xmlns:a="http://schemas.openxmlformats.org/drawingml/2006/main" prst="ellipse">
+            <a:avLst/>
+          </a:prstGeom>
+          <a:solidFill xmlns:a="http://schemas.openxmlformats.org/drawingml/2006/main">
+            <a:srgbClr val="00A8D8"/>
+          </a:solidFill>
+          <a:ln xmlns:a="http://schemas.openxmlformats.org/drawingml/2006/main" w="28575">
+            <a:solidFill>
+              <a:srgbClr val="FFFFFF"/>
+            </a:solidFill>
+            <a:prstDash val="solid"/>
+          </a:ln>
+        </p:spPr>
+        <p:style>
+          <a:lnRef xmlns:a="http://schemas.openxmlformats.org/drawingml/2006/main" idx="0"/>
+          <a:fillRef xmlns:a="http://schemas.openxmlformats.org/drawingml/2006/main" idx="0"/>
+          <a:effectRef xmlns:a="http://schemas.openxmlformats.org/drawingml/2006/main" idx="4"/>
+          <a:fontRef xmlns:a="http://schemas.openxmlformats.org/drawingml/2006/main" idx="major"/>
+        </p:style>
+        <p:txBody>
+          <a:bodyPr xmlns:a="http://schemas.openxmlformats.org/drawingml/2006/main" lIns="0" tIns="0" rIns="0" bIns="0" anchor="ctr">
+            <a:normAutofit fontScale="100000"/>
+          </a:bodyPr>
+          <a:lstStyle xmlns:a="http://schemas.openxmlformats.org/drawingml/2006/main"/>
+          <a:p xmlns:a="http://schemas.openxmlformats.org/drawingml/2006/main">
+            <a:pPr algn="ctr">
+              <a:defRPr sz="1200" b="1">
+                <a:solidFill>
+                  <a:srgbClr val="FFFFFF"/>
+                </a:solidFill>
+                <a:latin typeface="Microsoft YaHei"/>
+                <a:ea typeface="Microsoft YaHei"/>
+                <a:cs typeface="Microsoft YaHei"/>
+              </a:defRPr>
+            </a:pPr>
+            <a:r>
+              <a:rPr sz="1200" b="1">
+                <a:solidFill>
+                  <a:srgbClr val="FFFFFF"/>
+                </a:solidFill>
+                <a:latin typeface="Microsoft YaHei"/>
+                <a:ea typeface="Microsoft YaHei"/>
+                <a:cs typeface="Microsoft YaHei"/>
+              </a:rPr>
+              <a:t>04</a:t>
+            </a:r>
+          </a:p>
+        </p:txBody>
+      </p:sp>
+      <p:sp>
+        <p:nvSpPr>
+          <p:cNvPr id="19" name="PPAGENT_QA|parent=radial-card-3|domains=radial-content">
+            <a:extLst xmlns:a="http://schemas.openxmlformats.org/drawingml/2006/main">
+              <a:ext uri="{FF2B5EF4-FFF2-40B4-BE49-F238E27FC236}">
+                <a16:creationId xmlns:a16="http://schemas.microsoft.com/office/drawing/2014/main" id="{5BC4599F-ABD0-47B0-BB88-52D793ADCC3A}"/>
+              </a:ext>
+            </a:extLst>
+          </p:cNvPr>
+          <p:cNvSpPr>
+            <a:spLocks xmlns:a="http://schemas.openxmlformats.org/drawingml/2006/main" noGrp="1"/>
+          </p:cNvSpPr>
+          <p:nvPr/>
+        </p:nvSpPr>
+        <p:spPr>
+          <a:xfrm xmlns:a="http://schemas.openxmlformats.org/drawingml/2006/main">
+            <a:off x="647700" y="4333875"/>
+            <a:ext cx="2857500" cy="762000"/>
+          </a:xfrm>
+          <a:prstGeom xmlns:a="http://schemas.openxmlformats.org/drawingml/2006/main" prst="roundRect">
+            <a:avLst>
+              <a:gd name="adj" fmla="val 15000"/>
+            </a:avLst>
+          </a:prstGeom>
+          <a:noFill xmlns:a="http://schemas.openxmlformats.org/drawingml/2006/main"/>
+          <a:ln xmlns:a="http://schemas.openxmlformats.org/drawingml/2006/main" w="0">
+            <a:noFill/>
+            <a:prstDash val="solid"/>
+          </a:ln>
+        </p:spPr>
+      </p:sp>
+      <p:sp>
+        <p:nvSpPr>
+          <p:cNvPr id="20" name="PPAGENT_QA|within=radial-card-3|role=title">
+            <a:extLst xmlns:a="http://schemas.openxmlformats.org/drawingml/2006/main">
+              <a:ext uri="{FF2B5EF4-FFF2-40B4-BE49-F238E27FC236}">
+                <a16:creationId xmlns:a16="http://schemas.microsoft.com/office/drawing/2014/main" id="{99AFC847-CCE1-4ED7-A0D3-2FBF52A07F21}"/>
+              </a:ext>
+            </a:extLst>
+          </p:cNvPr>
+          <p:cNvSpPr>
+            <a:spLocks xmlns:a="http://schemas.openxmlformats.org/drawingml/2006/main" noGrp="1"/>
+          </p:cNvSpPr>
+          <p:nvPr/>
+        </p:nvSpPr>
+        <p:spPr>
+          <a:xfrm xmlns:a="http://schemas.openxmlformats.org/drawingml/2006/main">
+            <a:off x="647700" y="4333875"/>
+            <a:ext cx="2857500" cy="285750"/>
+          </a:xfrm>
+          <a:prstGeom xmlns:a="http://schemas.openxmlformats.org/drawingml/2006/main" prst="rect">
+            <a:avLst/>
+          </a:prstGeom>
+          <a:noFill xmlns:a="http://schemas.openxmlformats.org/drawingml/2006/main"/>
+          <a:ln xmlns:a="http://schemas.openxmlformats.org/drawingml/2006/main" w="0">
+            <a:noFill/>
+            <a:prstDash val="solid"/>
+          </a:ln>
+        </p:spPr>
+        <p:txBody>
+          <a:bodyPr xmlns:a="http://schemas.openxmlformats.org/drawingml/2006/main" lIns="0" tIns="0" rIns="0" bIns="0" anchor="ctr">
+            <a:normAutofit fontScale="100000"/>
+          </a:bodyPr>
+          <a:lstStyle xmlns:a="http://schemas.openxmlformats.org/drawingml/2006/main"/>
+          <a:p xmlns:a="http://schemas.openxmlformats.org/drawingml/2006/main">
+            <a:pPr algn="r">
+              <a:defRPr sz="1425" b="1">
+                <a:solidFill>
+                  <a:srgbClr val="1677C8"/>
+                </a:solidFill>
+                <a:latin typeface="Microsoft YaHei"/>
+                <a:ea typeface="Microsoft YaHei"/>
+                <a:cs typeface="Microsoft YaHei"/>
+              </a:defRPr>
+            </a:pPr>
+            <a:r>
+              <a:rPr sz="1425" b="1">
+                <a:solidFill>
+                  <a:srgbClr val="1677C8"/>
+                </a:solidFill>
+                <a:latin typeface="Microsoft YaHei"/>
+                <a:ea typeface="Microsoft YaHei"/>
+                <a:cs typeface="Microsoft YaHei"/>
+              </a:rPr>
+              <a:t>持续积累</a:t>
+            </a:r>
+          </a:p>
+        </p:txBody>
+      </p:sp>
+      <p:sp>
+        <p:nvSpPr>
+          <p:cNvPr id="21" name="PPAGENT_CONNECTOR|from=radial-center|fromSide=left|to=radial-node-3|toSide=right">
+            <a:extLst xmlns:a="http://schemas.openxmlformats.org/drawingml/2006/main">
+              <a:ext uri="{FF2B5EF4-FFF2-40B4-BE49-F238E27FC236}">
+                <a16:creationId xmlns:a16="http://schemas.microsoft.com/office/drawing/2014/main" id="{0BF818E1-3B03-4270-96E8-EFA9104A2827}"/>
+              </a:ext>
+            </a:extLst>
+          </p:cNvPr>
+          <p:cNvSpPr>
+            <a:spLocks xmlns:a="http://schemas.openxmlformats.org/drawingml/2006/main" noGrp="1"/>
+          </p:cNvSpPr>
+          <p:nvPr/>
+        </p:nvSpPr>
+        <p:spPr>
+          <a:xfrm xmlns:a="http://schemas.openxmlformats.org/drawingml/2006/main" flipH="1" flipV="0">
+            <a:off x="4076700" y="3667125"/>
+            <a:ext cx="781050" cy="1047750"/>
+          </a:xfrm>
+          <a:prstGeom xmlns:a="http://schemas.openxmlformats.org/drawingml/2006/main" prst="line">
+            <a:avLst/>
+          </a:prstGeom>
+          <a:noFill xmlns:a="http://schemas.openxmlformats.org/drawingml/2006/main"/>
+          <a:ln xmlns:a="http://schemas.openxmlformats.org/drawingml/2006/main" w="14288">
+            <a:solidFill>
+              <a:srgbClr val="B7CCE0"/>
+            </a:solidFill>
+            <a:prstDash val="solid"/>
+          </a:ln>
+        </p:spPr>
+      </p:sp>
+      <p:sp>
+        <p:nvSpPr>
+          <p:cNvPr id="22" name="PPAGENT_QA|parent=radial-node-4|domains=radial-shape">
+            <a:extLst xmlns:a="http://schemas.openxmlformats.org/drawingml/2006/main">
+              <a:ext uri="{FF2B5EF4-FFF2-40B4-BE49-F238E27FC236}">
+                <a16:creationId xmlns:a16="http://schemas.microsoft.com/office/drawing/2014/main" id="{89769191-0344-45DF-9F53-CB1CFD46CE39}"/>
+              </a:ext>
+            </a:extLst>
+          </p:cNvPr>
+          <p:cNvSpPr>
+            <a:spLocks xmlns:a="http://schemas.openxmlformats.org/drawingml/2006/main" noGrp="1"/>
+          </p:cNvSpPr>
+          <p:nvPr/>
+        </p:nvSpPr>
+        <p:spPr>
+          <a:xfrm xmlns:a="http://schemas.openxmlformats.org/drawingml/2006/main">
+            <a:off x="8115300" y="4495800"/>
+            <a:ext cx="438150" cy="438150"/>
+          </a:xfrm>
+          <a:prstGeom xmlns:a="http://schemas.openxmlformats.org/drawingml/2006/main" prst="ellipse">
+            <a:avLst/>
+          </a:prstGeom>
+          <a:solidFill xmlns:a="http://schemas.openxmlformats.org/drawingml/2006/main">
+            <a:srgbClr val="14CBD1"/>
+          </a:solidFill>
+          <a:ln xmlns:a="http://schemas.openxmlformats.org/drawingml/2006/main" w="28575">
+            <a:solidFill>
+              <a:srgbClr val="FFFFFF"/>
+            </a:solidFill>
+            <a:prstDash val="solid"/>
+          </a:ln>
+        </p:spPr>
+        <p:style>
+          <a:lnRef xmlns:a="http://schemas.openxmlformats.org/drawingml/2006/main" idx="0"/>
+          <a:fillRef xmlns:a="http://schemas.openxmlformats.org/drawingml/2006/main" idx="0"/>
+          <a:effectRef xmlns:a="http://schemas.openxmlformats.org/drawingml/2006/main" idx="4"/>
+          <a:fontRef xmlns:a="http://schemas.openxmlformats.org/drawingml/2006/main" idx="major"/>
+        </p:style>
+        <p:txBody>
+          <a:bodyPr xmlns:a="http://schemas.openxmlformats.org/drawingml/2006/main" lIns="0" tIns="0" rIns="0" bIns="0" anchor="ctr">
+            <a:normAutofit fontScale="100000"/>
+          </a:bodyPr>
+          <a:lstStyle xmlns:a="http://schemas.openxmlformats.org/drawingml/2006/main"/>
+          <a:p xmlns:a="http://schemas.openxmlformats.org/drawingml/2006/main">
+            <a:pPr algn="ctr">
+              <a:defRPr sz="1200" b="1">
+                <a:solidFill>
+                  <a:srgbClr val="FFFFFF"/>
+                </a:solidFill>
+                <a:latin typeface="Microsoft YaHei"/>
+                <a:ea typeface="Microsoft YaHei"/>
+                <a:cs typeface="Microsoft YaHei"/>
+              </a:defRPr>
+            </a:pPr>
+            <a:r>
+              <a:rPr sz="1200" b="1">
+                <a:solidFill>
+                  <a:srgbClr val="FFFFFF"/>
+                </a:solidFill>
+                <a:latin typeface="Microsoft YaHei"/>
+                <a:ea typeface="Microsoft YaHei"/>
+                <a:cs typeface="Microsoft YaHei"/>
+              </a:rPr>
+              <a:t>05</a:t>
+            </a:r>
+          </a:p>
+        </p:txBody>
+      </p:sp>
+      <p:sp>
+        <p:nvSpPr>
+          <p:cNvPr id="23" name="PPAGENT_QA|parent=radial-card-4|domains=radial-content">
+            <a:extLst xmlns:a="http://schemas.openxmlformats.org/drawingml/2006/main">
+              <a:ext uri="{FF2B5EF4-FFF2-40B4-BE49-F238E27FC236}">
+                <a16:creationId xmlns:a16="http://schemas.microsoft.com/office/drawing/2014/main" id="{6D0189BA-3423-47BE-8873-140F637755C3}"/>
+              </a:ext>
+            </a:extLst>
+          </p:cNvPr>
+          <p:cNvSpPr>
+            <a:spLocks xmlns:a="http://schemas.openxmlformats.org/drawingml/2006/main" noGrp="1"/>
+          </p:cNvSpPr>
+          <p:nvPr/>
+        </p:nvSpPr>
+        <p:spPr>
+          <a:xfrm xmlns:a="http://schemas.openxmlformats.org/drawingml/2006/main">
+            <a:off x="8686800" y="4333875"/>
+            <a:ext cx="2857500" cy="762000"/>
+          </a:xfrm>
+          <a:prstGeom xmlns:a="http://schemas.openxmlformats.org/drawingml/2006/main" prst="roundRect">
+            <a:avLst>
+              <a:gd name="adj" fmla="val 15000"/>
+            </a:avLst>
+          </a:prstGeom>
+          <a:noFill xmlns:a="http://schemas.openxmlformats.org/drawingml/2006/main"/>
+          <a:ln xmlns:a="http://schemas.openxmlformats.org/drawingml/2006/main" w="0">
+            <a:noFill/>
+            <a:prstDash val="solid"/>
+          </a:ln>
+        </p:spPr>
+      </p:sp>
+      <p:sp>
+        <p:nvSpPr>
+          <p:cNvPr id="24" name="PPAGENT_QA|within=radial-card-4|role=title">
+            <a:extLst xmlns:a="http://schemas.openxmlformats.org/drawingml/2006/main">
+              <a:ext uri="{FF2B5EF4-FFF2-40B4-BE49-F238E27FC236}">
+                <a16:creationId xmlns:a16="http://schemas.microsoft.com/office/drawing/2014/main" id="{D79296FB-0369-4C5E-BED8-90263A55703D}"/>
+              </a:ext>
+            </a:extLst>
+          </p:cNvPr>
+          <p:cNvSpPr>
+            <a:spLocks xmlns:a="http://schemas.openxmlformats.org/drawingml/2006/main" noGrp="1"/>
+          </p:cNvSpPr>
+          <p:nvPr/>
+        </p:nvSpPr>
+        <p:spPr>
+          <a:xfrm xmlns:a="http://schemas.openxmlformats.org/drawingml/2006/main">
+            <a:off x="8686800" y="4333875"/>
+            <a:ext cx="2857500" cy="285750"/>
+          </a:xfrm>
+          <a:prstGeom xmlns:a="http://schemas.openxmlformats.org/drawingml/2006/main" prst="rect">
+            <a:avLst/>
+          </a:prstGeom>
+          <a:noFill xmlns:a="http://schemas.openxmlformats.org/drawingml/2006/main"/>
+          <a:ln xmlns:a="http://schemas.openxmlformats.org/drawingml/2006/main" w="0">
+            <a:noFill/>
+            <a:prstDash val="solid"/>
+          </a:ln>
+        </p:spPr>
+        <p:txBody>
+          <a:bodyPr xmlns:a="http://schemas.openxmlformats.org/drawingml/2006/main" lIns="0" tIns="0" rIns="0" bIns="0" anchor="ctr">
+            <a:normAutofit fontScale="100000"/>
+          </a:bodyPr>
+          <a:lstStyle xmlns:a="http://schemas.openxmlformats.org/drawingml/2006/main"/>
+          <a:p xmlns:a="http://schemas.openxmlformats.org/drawingml/2006/main">
+            <a:pPr algn="l">
+              <a:defRPr sz="1425" b="1">
+                <a:solidFill>
+                  <a:srgbClr val="1677C8"/>
+                </a:solidFill>
+                <a:latin typeface="Microsoft YaHei"/>
+                <a:ea typeface="Microsoft YaHei"/>
+                <a:cs typeface="Microsoft YaHei"/>
+              </a:defRPr>
+            </a:pPr>
+            <a:r>
+              <a:rPr sz="1425" b="1">
+                <a:solidFill>
+                  <a:srgbClr val="1677C8"/>
+                </a:solidFill>
+                <a:latin typeface="Microsoft YaHei"/>
+                <a:ea typeface="Microsoft YaHei"/>
+                <a:cs typeface="Microsoft YaHei"/>
+              </a:rPr>
+              <a:t>资源整合</a:t>
+            </a:r>
+          </a:p>
+        </p:txBody>
+      </p:sp>
+      <p:sp>
+        <p:nvSpPr>
+          <p:cNvPr id="25" name="PPAGENT_CONNECTOR|from=radial-center|fromSide=right|to=radial-node-4|toSide=left">
+            <a:extLst xmlns:a="http://schemas.openxmlformats.org/drawingml/2006/main">
+              <a:ext uri="{FF2B5EF4-FFF2-40B4-BE49-F238E27FC236}">
+                <a16:creationId xmlns:a16="http://schemas.microsoft.com/office/drawing/2014/main" id="{43ED40E3-593E-4C47-A092-BBB006F0E90C}"/>
+              </a:ext>
+            </a:extLst>
+          </p:cNvPr>
+          <p:cNvSpPr>
+            <a:spLocks xmlns:a="http://schemas.openxmlformats.org/drawingml/2006/main" noGrp="1"/>
+          </p:cNvSpPr>
+          <p:nvPr/>
+        </p:nvSpPr>
+        <p:spPr>
+          <a:xfrm xmlns:a="http://schemas.openxmlformats.org/drawingml/2006/main" flipH="0" flipV="0">
+            <a:off x="7334250" y="3667125"/>
+            <a:ext cx="781050" cy="1047750"/>
+          </a:xfrm>
+          <a:prstGeom xmlns:a="http://schemas.openxmlformats.org/drawingml/2006/main" prst="line">
+            <a:avLst/>
+          </a:prstGeom>
+          <a:noFill xmlns:a="http://schemas.openxmlformats.org/drawingml/2006/main"/>
+          <a:ln xmlns:a="http://schemas.openxmlformats.org/drawingml/2006/main" w="14288">
+            <a:solidFill>
+              <a:srgbClr val="B7CCE0"/>
+            </a:solidFill>
+            <a:prstDash val="solid"/>
+          </a:ln>
+        </p:spPr>
+      </p:sp>
     </p:spTree>
     <p:extLst>
       <p:ext uri="{BB962C8B-B14F-4D97-AF65-F5344CB8AC3E}">
-        <p14:creationId xmlns:p14="http://schemas.microsoft.com/office/powerpoint/2010/main" val="1868207965"/>
+        <p14:creationId xmlns:p14="http://schemas.microsoft.com/office/powerpoint/2010/main" val="407352410"/>
+      </p:ext>
+    </p:extLst>
+  </p:cSld>
+</p:sld>
+</file>
+
+<file path=ppt/slides/slide4.xml><?xml version="1.0" encoding="utf-8"?>
+<p:sld xmlns:p="http://schemas.openxmlformats.org/presentationml/2006/main">
+  <p:cSld>
+    <p:bg>
+      <p:bgPr>
+        <a:solidFill xmlns:a="http://schemas.openxmlformats.org/drawingml/2006/main">
+          <a:srgbClr val="F7FAFC"/>
+        </a:solidFill>
+      </p:bgPr>
+    </p:bg>
+    <p:spTree>
+      <p:nvGrpSpPr>
+        <p:cNvPr id="1" name=""/>
+        <p:cNvGrpSpPr/>
+        <p:nvPr/>
+      </p:nvGrpSpPr>
+      <p:grpSpPr>
+        <a:xfrm xmlns:a="http://schemas.openxmlformats.org/drawingml/2006/main"/>
+      </p:grpSpPr>
+      <p:sp>
+        <p:nvSpPr>
+          <p:cNvPr id="30" name="">
+            <a:extLst xmlns:a="http://schemas.openxmlformats.org/drawingml/2006/main">
+              <a:ext uri="{FF2B5EF4-FFF2-40B4-BE49-F238E27FC236}">
+                <a16:creationId xmlns:a16="http://schemas.microsoft.com/office/drawing/2014/main" id="{B3518F80-807C-4023-8C76-479799CB3836}"/>
+              </a:ext>
+            </a:extLst>
+          </p:cNvPr>
+          <p:cNvSpPr>
+            <a:spLocks xmlns:a="http://schemas.openxmlformats.org/drawingml/2006/main" noGrp="1"/>
+          </p:cNvSpPr>
+          <p:nvPr/>
+        </p:nvSpPr>
+        <p:spPr>
+          <a:xfrm xmlns:a="http://schemas.openxmlformats.org/drawingml/2006/main">
+            <a:off x="685800" y="400050"/>
+            <a:ext cx="8382000" cy="457200"/>
+          </a:xfrm>
+          <a:prstGeom xmlns:a="http://schemas.openxmlformats.org/drawingml/2006/main" prst="rect">
+            <a:avLst/>
+          </a:prstGeom>
+          <a:noFill xmlns:a="http://schemas.openxmlformats.org/drawingml/2006/main"/>
+          <a:ln xmlns:a="http://schemas.openxmlformats.org/drawingml/2006/main" w="0">
+            <a:noFill/>
+            <a:prstDash val="solid"/>
+          </a:ln>
+        </p:spPr>
+        <p:txBody>
+          <a:bodyPr xmlns:a="http://schemas.openxmlformats.org/drawingml/2006/main" lIns="0" tIns="0" rIns="0" bIns="0" anchor="ctr">
+            <a:normAutofit fontScale="100000"/>
+          </a:bodyPr>
+          <a:lstStyle xmlns:a="http://schemas.openxmlformats.org/drawingml/2006/main"/>
+          <a:p xmlns:a="http://schemas.openxmlformats.org/drawingml/2006/main">
+            <a:pPr algn="l">
+              <a:defRPr sz="2700" b="1">
+                <a:solidFill>
+                  <a:srgbClr val="1677C8"/>
+                </a:solidFill>
+                <a:latin typeface="Microsoft YaHei"/>
+                <a:ea typeface="Microsoft YaHei"/>
+                <a:cs typeface="Microsoft YaHei"/>
+              </a:defRPr>
+            </a:pPr>
+            <a:r>
+              <a:rPr sz="2700" b="1">
+                <a:solidFill>
+                  <a:srgbClr val="1677C8"/>
+                </a:solidFill>
+                <a:latin typeface="Microsoft YaHei"/>
+                <a:ea typeface="Microsoft YaHei"/>
+                <a:cs typeface="Microsoft YaHei"/>
+              </a:rPr>
+              <a:t>中心辐射关系</a:t>
+            </a:r>
+          </a:p>
+        </p:txBody>
+      </p:sp>
+      <p:sp>
+        <p:nvSpPr>
+          <p:cNvPr id="2" name="">
+            <a:extLst xmlns:a="http://schemas.openxmlformats.org/drawingml/2006/main">
+              <a:ext uri="{FF2B5EF4-FFF2-40B4-BE49-F238E27FC236}">
+                <a16:creationId xmlns:a16="http://schemas.microsoft.com/office/drawing/2014/main" id="{49FA0154-5891-4F24-AC15-67D87DB5A5FA}"/>
+              </a:ext>
+            </a:extLst>
+          </p:cNvPr>
+          <p:cNvSpPr>
+            <a:spLocks xmlns:a="http://schemas.openxmlformats.org/drawingml/2006/main" noGrp="1"/>
+          </p:cNvSpPr>
+          <p:nvPr/>
+        </p:nvSpPr>
+        <p:spPr>
+          <a:xfrm xmlns:a="http://schemas.openxmlformats.org/drawingml/2006/main">
+            <a:off x="704850" y="876300"/>
+            <a:ext cx="4953000" cy="247650"/>
+          </a:xfrm>
+          <a:prstGeom xmlns:a="http://schemas.openxmlformats.org/drawingml/2006/main" prst="rect">
+            <a:avLst/>
+          </a:prstGeom>
+          <a:noFill xmlns:a="http://schemas.openxmlformats.org/drawingml/2006/main"/>
+          <a:ln xmlns:a="http://schemas.openxmlformats.org/drawingml/2006/main" w="0">
+            <a:noFill/>
+            <a:prstDash val="solid"/>
+          </a:ln>
+        </p:spPr>
+        <p:txBody>
+          <a:bodyPr xmlns:a="http://schemas.openxmlformats.org/drawingml/2006/main" lIns="0" tIns="0" rIns="0" bIns="0" anchor="ctr">
+            <a:normAutofit fontScale="100000"/>
+          </a:bodyPr>
+          <a:lstStyle xmlns:a="http://schemas.openxmlformats.org/drawingml/2006/main"/>
+          <a:p xmlns:a="http://schemas.openxmlformats.org/drawingml/2006/main">
+            <a:pPr algn="l">
+              <a:defRPr sz="1200" b="0">
+                <a:solidFill>
+                  <a:srgbClr val="7C8A9A"/>
+                </a:solidFill>
+                <a:latin typeface="Microsoft YaHei"/>
+                <a:ea typeface="Microsoft YaHei"/>
+                <a:cs typeface="Microsoft YaHei"/>
+              </a:defRPr>
+            </a:pPr>
+            <a:r>
+              <a:rPr sz="1200" b="0">
+                <a:solidFill>
+                  <a:srgbClr val="7C8A9A"/>
+                </a:solidFill>
+                <a:latin typeface="Microsoft YaHei"/>
+                <a:ea typeface="Microsoft YaHei"/>
+                <a:cs typeface="Microsoft YaHei"/>
+              </a:rPr>
+              <a:t>中心主题 · 多向展开</a:t>
+            </a:r>
+          </a:p>
+        </p:txBody>
+      </p:sp>
+      <p:sp>
+        <p:nvSpPr>
+          <p:cNvPr id="3" name="">
+            <a:extLst xmlns:a="http://schemas.openxmlformats.org/drawingml/2006/main">
+              <a:ext uri="{FF2B5EF4-FFF2-40B4-BE49-F238E27FC236}">
+                <a16:creationId xmlns:a16="http://schemas.microsoft.com/office/drawing/2014/main" id="{BA900D1B-F920-4A76-8227-0EB8E59AA73E}"/>
+              </a:ext>
+            </a:extLst>
+          </p:cNvPr>
+          <p:cNvSpPr>
+            <a:spLocks xmlns:a="http://schemas.openxmlformats.org/drawingml/2006/main" noGrp="1"/>
+          </p:cNvSpPr>
+          <p:nvPr/>
+        </p:nvSpPr>
+        <p:spPr>
+          <a:xfrm xmlns:a="http://schemas.openxmlformats.org/drawingml/2006/main">
+            <a:off x="4400550" y="1971675"/>
+            <a:ext cx="3390900" cy="3390900"/>
+          </a:xfrm>
+          <a:prstGeom xmlns:a="http://schemas.openxmlformats.org/drawingml/2006/main" prst="ellipse">
+            <a:avLst/>
+          </a:prstGeom>
+          <a:solidFill xmlns:a="http://schemas.openxmlformats.org/drawingml/2006/main">
+            <a:srgbClr val="DCEEFF"/>
+          </a:solidFill>
+          <a:ln xmlns:a="http://schemas.openxmlformats.org/drawingml/2006/main" w="0">
+            <a:noFill/>
+            <a:prstDash val="solid"/>
+          </a:ln>
+        </p:spPr>
+      </p:sp>
+      <p:sp>
+        <p:nvSpPr>
+          <p:cNvPr id="4" name="">
+            <a:extLst xmlns:a="http://schemas.openxmlformats.org/drawingml/2006/main">
+              <a:ext uri="{FF2B5EF4-FFF2-40B4-BE49-F238E27FC236}">
+                <a16:creationId xmlns:a16="http://schemas.microsoft.com/office/drawing/2014/main" id="{E909C41B-3236-41F6-B969-8EC2400FCFFF}"/>
+              </a:ext>
+            </a:extLst>
+          </p:cNvPr>
+          <p:cNvSpPr>
+            <a:spLocks xmlns:a="http://schemas.openxmlformats.org/drawingml/2006/main" noGrp="1"/>
+          </p:cNvSpPr>
+          <p:nvPr/>
+        </p:nvSpPr>
+        <p:spPr>
+          <a:xfrm xmlns:a="http://schemas.openxmlformats.org/drawingml/2006/main">
+            <a:off x="4629150" y="2200275"/>
+            <a:ext cx="2933700" cy="2933700"/>
+          </a:xfrm>
+          <a:prstGeom xmlns:a="http://schemas.openxmlformats.org/drawingml/2006/main" prst="ellipse">
+            <a:avLst/>
+          </a:prstGeom>
+          <a:solidFill xmlns:a="http://schemas.openxmlformats.org/drawingml/2006/main">
+            <a:srgbClr val="FFFFFF"/>
+          </a:solidFill>
+          <a:ln xmlns:a="http://schemas.openxmlformats.org/drawingml/2006/main" w="19050">
+            <a:solidFill>
+              <a:srgbClr val="B7D8F3"/>
+            </a:solidFill>
+            <a:prstDash val="solid"/>
+          </a:ln>
+        </p:spPr>
+        <p:style>
+          <a:lnRef xmlns:a="http://schemas.openxmlformats.org/drawingml/2006/main" idx="0"/>
+          <a:fillRef xmlns:a="http://schemas.openxmlformats.org/drawingml/2006/main" idx="0"/>
+          <a:effectRef xmlns:a="http://schemas.openxmlformats.org/drawingml/2006/main" idx="6"/>
+          <a:fontRef xmlns:a="http://schemas.openxmlformats.org/drawingml/2006/main" idx="major"/>
+        </p:style>
+      </p:sp>
+      <p:sp>
+        <p:nvSpPr>
+          <p:cNvPr id="5" name="PPAGENT_QA|parent=radial-center|domains=radial-shape,radial-content">
+            <a:extLst xmlns:a="http://schemas.openxmlformats.org/drawingml/2006/main">
+              <a:ext uri="{FF2B5EF4-FFF2-40B4-BE49-F238E27FC236}">
+                <a16:creationId xmlns:a16="http://schemas.microsoft.com/office/drawing/2014/main" id="{F1CD96E0-5958-40AE-8B58-E6378F5F8C5E}"/>
+              </a:ext>
+            </a:extLst>
+          </p:cNvPr>
+          <p:cNvSpPr>
+            <a:spLocks xmlns:a="http://schemas.openxmlformats.org/drawingml/2006/main" noGrp="1"/>
+          </p:cNvSpPr>
+          <p:nvPr/>
+        </p:nvSpPr>
+        <p:spPr>
+          <a:xfrm xmlns:a="http://schemas.openxmlformats.org/drawingml/2006/main">
+            <a:off x="4857750" y="2428875"/>
+            <a:ext cx="2476500" cy="2476500"/>
+          </a:xfrm>
+          <a:prstGeom xmlns:a="http://schemas.openxmlformats.org/drawingml/2006/main" prst="ellipse">
+            <a:avLst/>
+          </a:prstGeom>
+          <a:solidFill xmlns:a="http://schemas.openxmlformats.org/drawingml/2006/main">
+            <a:srgbClr val="1677C8"/>
+          </a:solidFill>
+          <a:ln xmlns:a="http://schemas.openxmlformats.org/drawingml/2006/main" w="38100">
+            <a:solidFill>
+              <a:srgbClr val="FFFFFF"/>
+            </a:solidFill>
+            <a:prstDash val="solid"/>
+          </a:ln>
+        </p:spPr>
+        <p:style>
+          <a:lnRef xmlns:a="http://schemas.openxmlformats.org/drawingml/2006/main" idx="0"/>
+          <a:fillRef xmlns:a="http://schemas.openxmlformats.org/drawingml/2006/main" idx="0"/>
+          <a:effectRef xmlns:a="http://schemas.openxmlformats.org/drawingml/2006/main" idx="7"/>
+          <a:fontRef xmlns:a="http://schemas.openxmlformats.org/drawingml/2006/main" idx="major"/>
+        </p:style>
+        <p:txBody>
+          <a:bodyPr xmlns:a="http://schemas.openxmlformats.org/drawingml/2006/main" lIns="114300" tIns="76200" rIns="114300" bIns="76200" anchor="ctr">
+            <a:normAutofit fontScale="100000"/>
+          </a:bodyPr>
+          <a:lstStyle xmlns:a="http://schemas.openxmlformats.org/drawingml/2006/main"/>
+          <a:p xmlns:a="http://schemas.openxmlformats.org/drawingml/2006/main">
+            <a:pPr algn="ctr">
+              <a:defRPr sz="2175" b="1">
+                <a:solidFill>
+                  <a:srgbClr val="FFFFFF"/>
+                </a:solidFill>
+                <a:latin typeface="Microsoft YaHei"/>
+                <a:ea typeface="Microsoft YaHei"/>
+                <a:cs typeface="Microsoft YaHei"/>
+              </a:defRPr>
+            </a:pPr>
+            <a:r>
+              <a:rPr sz="2175" b="1">
+                <a:solidFill>
+                  <a:srgbClr val="FFFFFF"/>
+                </a:solidFill>
+                <a:latin typeface="Microsoft YaHei"/>
+                <a:ea typeface="Microsoft YaHei"/>
+                <a:cs typeface="Microsoft YaHei"/>
+              </a:rPr>
+              <a:t>协同能力</a:t>
+            </a:r>
+          </a:p>
+        </p:txBody>
+      </p:sp>
+      <p:sp>
+        <p:nvSpPr>
+          <p:cNvPr id="6" name="PPAGENT_QA|parent=radial-node-0|domains=radial-shape">
+            <a:extLst xmlns:a="http://schemas.openxmlformats.org/drawingml/2006/main">
+              <a:ext uri="{FF2B5EF4-FFF2-40B4-BE49-F238E27FC236}">
+                <a16:creationId xmlns:a16="http://schemas.microsoft.com/office/drawing/2014/main" id="{3F3A14B9-B07F-419B-8D00-2BA5A9ACC118}"/>
+              </a:ext>
+            </a:extLst>
+          </p:cNvPr>
+          <p:cNvSpPr>
+            <a:spLocks xmlns:a="http://schemas.openxmlformats.org/drawingml/2006/main" noGrp="1"/>
+          </p:cNvSpPr>
+          <p:nvPr/>
+        </p:nvSpPr>
+        <p:spPr>
+          <a:xfrm xmlns:a="http://schemas.openxmlformats.org/drawingml/2006/main">
+            <a:off x="3638550" y="2051050"/>
+            <a:ext cx="438150" cy="438150"/>
+          </a:xfrm>
+          <a:prstGeom xmlns:a="http://schemas.openxmlformats.org/drawingml/2006/main" prst="ellipse">
+            <a:avLst/>
+          </a:prstGeom>
+          <a:solidFill xmlns:a="http://schemas.openxmlformats.org/drawingml/2006/main">
+            <a:srgbClr val="14CBD1"/>
+          </a:solidFill>
+          <a:ln xmlns:a="http://schemas.openxmlformats.org/drawingml/2006/main" w="28575">
+            <a:solidFill>
+              <a:srgbClr val="FFFFFF"/>
+            </a:solidFill>
+            <a:prstDash val="solid"/>
+          </a:ln>
+        </p:spPr>
+        <p:style>
+          <a:lnRef xmlns:a="http://schemas.openxmlformats.org/drawingml/2006/main" idx="0"/>
+          <a:fillRef xmlns:a="http://schemas.openxmlformats.org/drawingml/2006/main" idx="0"/>
+          <a:effectRef xmlns:a="http://schemas.openxmlformats.org/drawingml/2006/main" idx="4"/>
+          <a:fontRef xmlns:a="http://schemas.openxmlformats.org/drawingml/2006/main" idx="major"/>
+        </p:style>
+        <p:txBody>
+          <a:bodyPr xmlns:a="http://schemas.openxmlformats.org/drawingml/2006/main" lIns="0" tIns="0" rIns="0" bIns="0" anchor="ctr">
+            <a:normAutofit fontScale="100000"/>
+          </a:bodyPr>
+          <a:lstStyle xmlns:a="http://schemas.openxmlformats.org/drawingml/2006/main"/>
+          <a:p xmlns:a="http://schemas.openxmlformats.org/drawingml/2006/main">
+            <a:pPr algn="ctr">
+              <a:defRPr sz="1200" b="1">
+                <a:solidFill>
+                  <a:srgbClr val="FFFFFF"/>
+                </a:solidFill>
+                <a:latin typeface="Microsoft YaHei"/>
+                <a:ea typeface="Microsoft YaHei"/>
+                <a:cs typeface="Microsoft YaHei"/>
+              </a:defRPr>
+            </a:pPr>
+            <a:r>
+              <a:rPr sz="1200" b="1">
+                <a:solidFill>
+                  <a:srgbClr val="FFFFFF"/>
+                </a:solidFill>
+                <a:latin typeface="Microsoft YaHei"/>
+                <a:ea typeface="Microsoft YaHei"/>
+                <a:cs typeface="Microsoft YaHei"/>
+              </a:rPr>
+              <a:t>01</a:t>
+            </a:r>
+          </a:p>
+        </p:txBody>
+      </p:sp>
+      <p:sp>
+        <p:nvSpPr>
+          <p:cNvPr id="7" name="PPAGENT_QA|parent=radial-card-0|domains=radial-content">
+            <a:extLst xmlns:a="http://schemas.openxmlformats.org/drawingml/2006/main">
+              <a:ext uri="{FF2B5EF4-FFF2-40B4-BE49-F238E27FC236}">
+                <a16:creationId xmlns:a16="http://schemas.microsoft.com/office/drawing/2014/main" id="{44E7C391-74B4-442D-B9CE-438B72898052}"/>
+              </a:ext>
+            </a:extLst>
+          </p:cNvPr>
+          <p:cNvSpPr>
+            <a:spLocks xmlns:a="http://schemas.openxmlformats.org/drawingml/2006/main" noGrp="1"/>
+          </p:cNvSpPr>
+          <p:nvPr/>
+        </p:nvSpPr>
+        <p:spPr>
+          <a:xfrm xmlns:a="http://schemas.openxmlformats.org/drawingml/2006/main">
+            <a:off x="647700" y="1889125"/>
+            <a:ext cx="2857500" cy="762000"/>
+          </a:xfrm>
+          <a:prstGeom xmlns:a="http://schemas.openxmlformats.org/drawingml/2006/main" prst="roundRect">
+            <a:avLst>
+              <a:gd name="adj" fmla="val 15000"/>
+            </a:avLst>
+          </a:prstGeom>
+          <a:noFill xmlns:a="http://schemas.openxmlformats.org/drawingml/2006/main"/>
+          <a:ln xmlns:a="http://schemas.openxmlformats.org/drawingml/2006/main" w="0">
+            <a:noFill/>
+            <a:prstDash val="solid"/>
+          </a:ln>
+        </p:spPr>
+      </p:sp>
+      <p:sp>
+        <p:nvSpPr>
+          <p:cNvPr id="8" name="PPAGENT_QA|within=radial-card-0|role=title">
+            <a:extLst xmlns:a="http://schemas.openxmlformats.org/drawingml/2006/main">
+              <a:ext uri="{FF2B5EF4-FFF2-40B4-BE49-F238E27FC236}">
+                <a16:creationId xmlns:a16="http://schemas.microsoft.com/office/drawing/2014/main" id="{944D383D-4765-414B-A9FF-6BBCDE7E3BF9}"/>
+              </a:ext>
+            </a:extLst>
+          </p:cNvPr>
+          <p:cNvSpPr>
+            <a:spLocks xmlns:a="http://schemas.openxmlformats.org/drawingml/2006/main" noGrp="1"/>
+          </p:cNvSpPr>
+          <p:nvPr/>
+        </p:nvSpPr>
+        <p:spPr>
+          <a:xfrm xmlns:a="http://schemas.openxmlformats.org/drawingml/2006/main">
+            <a:off x="647700" y="1889125"/>
+            <a:ext cx="2857500" cy="285750"/>
+          </a:xfrm>
+          <a:prstGeom xmlns:a="http://schemas.openxmlformats.org/drawingml/2006/main" prst="rect">
+            <a:avLst/>
+          </a:prstGeom>
+          <a:noFill xmlns:a="http://schemas.openxmlformats.org/drawingml/2006/main"/>
+          <a:ln xmlns:a="http://schemas.openxmlformats.org/drawingml/2006/main" w="0">
+            <a:noFill/>
+            <a:prstDash val="solid"/>
+          </a:ln>
+        </p:spPr>
+        <p:txBody>
+          <a:bodyPr xmlns:a="http://schemas.openxmlformats.org/drawingml/2006/main" lIns="0" tIns="0" rIns="0" bIns="0" anchor="ctr">
+            <a:normAutofit fontScale="100000"/>
+          </a:bodyPr>
+          <a:lstStyle xmlns:a="http://schemas.openxmlformats.org/drawingml/2006/main"/>
+          <a:p xmlns:a="http://schemas.openxmlformats.org/drawingml/2006/main">
+            <a:pPr algn="r">
+              <a:defRPr sz="1425" b="1">
+                <a:solidFill>
+                  <a:srgbClr val="1677C8"/>
+                </a:solidFill>
+                <a:latin typeface="Microsoft YaHei"/>
+                <a:ea typeface="Microsoft YaHei"/>
+                <a:cs typeface="Microsoft YaHei"/>
+              </a:defRPr>
+            </a:pPr>
+            <a:r>
+              <a:rPr sz="1425" b="1">
+                <a:solidFill>
+                  <a:srgbClr val="1677C8"/>
+                </a:solidFill>
+                <a:latin typeface="Microsoft YaHei"/>
+                <a:ea typeface="Microsoft YaHei"/>
+                <a:cs typeface="Microsoft YaHei"/>
+              </a:rPr>
+              <a:t>统一标准</a:t>
+            </a:r>
+          </a:p>
+        </p:txBody>
+      </p:sp>
+      <p:sp>
+        <p:nvSpPr>
+          <p:cNvPr id="9" name="PPAGENT_CONNECTOR|from=radial-center|fromSide=left|to=radial-node-0|toSide=right">
+            <a:extLst xmlns:a="http://schemas.openxmlformats.org/drawingml/2006/main">
+              <a:ext uri="{FF2B5EF4-FFF2-40B4-BE49-F238E27FC236}">
+                <a16:creationId xmlns:a16="http://schemas.microsoft.com/office/drawing/2014/main" id="{8CBDA9C5-204B-460E-A09F-E52134657770}"/>
+              </a:ext>
+            </a:extLst>
+          </p:cNvPr>
+          <p:cNvSpPr>
+            <a:spLocks xmlns:a="http://schemas.openxmlformats.org/drawingml/2006/main" noGrp="1"/>
+          </p:cNvSpPr>
+          <p:nvPr/>
+        </p:nvSpPr>
+        <p:spPr>
+          <a:xfrm xmlns:a="http://schemas.openxmlformats.org/drawingml/2006/main" flipH="1" flipV="1">
+            <a:off x="4076700" y="2270125"/>
+            <a:ext cx="781050" cy="1397000"/>
+          </a:xfrm>
+          <a:prstGeom xmlns:a="http://schemas.openxmlformats.org/drawingml/2006/main" prst="line">
+            <a:avLst/>
+          </a:prstGeom>
+          <a:noFill xmlns:a="http://schemas.openxmlformats.org/drawingml/2006/main"/>
+          <a:ln xmlns:a="http://schemas.openxmlformats.org/drawingml/2006/main" w="14288">
+            <a:solidFill>
+              <a:srgbClr val="B7CCE0"/>
+            </a:solidFill>
+            <a:prstDash val="solid"/>
+          </a:ln>
+        </p:spPr>
+      </p:sp>
+      <p:sp>
+        <p:nvSpPr>
+          <p:cNvPr id="10" name="PPAGENT_QA|parent=radial-node-1|domains=radial-shape">
+            <a:extLst xmlns:a="http://schemas.openxmlformats.org/drawingml/2006/main">
+              <a:ext uri="{FF2B5EF4-FFF2-40B4-BE49-F238E27FC236}">
+                <a16:creationId xmlns:a16="http://schemas.microsoft.com/office/drawing/2014/main" id="{7F90A431-F92B-488B-A7A7-9BBCB37F70F7}"/>
+              </a:ext>
+            </a:extLst>
+          </p:cNvPr>
+          <p:cNvSpPr>
+            <a:spLocks xmlns:a="http://schemas.openxmlformats.org/drawingml/2006/main" noGrp="1"/>
+          </p:cNvSpPr>
+          <p:nvPr/>
+        </p:nvSpPr>
+        <p:spPr>
+          <a:xfrm xmlns:a="http://schemas.openxmlformats.org/drawingml/2006/main">
+            <a:off x="8115300" y="2051050"/>
+            <a:ext cx="438150" cy="438150"/>
+          </a:xfrm>
+          <a:prstGeom xmlns:a="http://schemas.openxmlformats.org/drawingml/2006/main" prst="ellipse">
+            <a:avLst/>
+          </a:prstGeom>
+          <a:solidFill xmlns:a="http://schemas.openxmlformats.org/drawingml/2006/main">
+            <a:srgbClr val="00A8D8"/>
+          </a:solidFill>
+          <a:ln xmlns:a="http://schemas.openxmlformats.org/drawingml/2006/main" w="28575">
+            <a:solidFill>
+              <a:srgbClr val="FFFFFF"/>
+            </a:solidFill>
+            <a:prstDash val="solid"/>
+          </a:ln>
+        </p:spPr>
+        <p:style>
+          <a:lnRef xmlns:a="http://schemas.openxmlformats.org/drawingml/2006/main" idx="0"/>
+          <a:fillRef xmlns:a="http://schemas.openxmlformats.org/drawingml/2006/main" idx="0"/>
+          <a:effectRef xmlns:a="http://schemas.openxmlformats.org/drawingml/2006/main" idx="4"/>
+          <a:fontRef xmlns:a="http://schemas.openxmlformats.org/drawingml/2006/main" idx="major"/>
+        </p:style>
+        <p:txBody>
+          <a:bodyPr xmlns:a="http://schemas.openxmlformats.org/drawingml/2006/main" lIns="0" tIns="0" rIns="0" bIns="0" anchor="ctr">
+            <a:normAutofit fontScale="100000"/>
+          </a:bodyPr>
+          <a:lstStyle xmlns:a="http://schemas.openxmlformats.org/drawingml/2006/main"/>
+          <a:p xmlns:a="http://schemas.openxmlformats.org/drawingml/2006/main">
+            <a:pPr algn="ctr">
+              <a:defRPr sz="1200" b="1">
+                <a:solidFill>
+                  <a:srgbClr val="FFFFFF"/>
+                </a:solidFill>
+                <a:latin typeface="Microsoft YaHei"/>
+                <a:ea typeface="Microsoft YaHei"/>
+                <a:cs typeface="Microsoft YaHei"/>
+              </a:defRPr>
+            </a:pPr>
+            <a:r>
+              <a:rPr sz="1200" b="1">
+                <a:solidFill>
+                  <a:srgbClr val="FFFFFF"/>
+                </a:solidFill>
+                <a:latin typeface="Microsoft YaHei"/>
+                <a:ea typeface="Microsoft YaHei"/>
+                <a:cs typeface="Microsoft YaHei"/>
+              </a:rPr>
+              <a:t>02</a:t>
+            </a:r>
+          </a:p>
+        </p:txBody>
+      </p:sp>
+      <p:sp>
+        <p:nvSpPr>
+          <p:cNvPr id="11" name="PPAGENT_QA|parent=radial-card-1|domains=radial-content">
+            <a:extLst xmlns:a="http://schemas.openxmlformats.org/drawingml/2006/main">
+              <a:ext uri="{FF2B5EF4-FFF2-40B4-BE49-F238E27FC236}">
+                <a16:creationId xmlns:a16="http://schemas.microsoft.com/office/drawing/2014/main" id="{7ABE9175-E189-4E20-BE3A-C311B1FA9888}"/>
+              </a:ext>
+            </a:extLst>
+          </p:cNvPr>
+          <p:cNvSpPr>
+            <a:spLocks xmlns:a="http://schemas.openxmlformats.org/drawingml/2006/main" noGrp="1"/>
+          </p:cNvSpPr>
+          <p:nvPr/>
+        </p:nvSpPr>
+        <p:spPr>
+          <a:xfrm xmlns:a="http://schemas.openxmlformats.org/drawingml/2006/main">
+            <a:off x="8686800" y="1889125"/>
+            <a:ext cx="2857500" cy="762000"/>
+          </a:xfrm>
+          <a:prstGeom xmlns:a="http://schemas.openxmlformats.org/drawingml/2006/main" prst="roundRect">
+            <a:avLst>
+              <a:gd name="adj" fmla="val 15000"/>
+            </a:avLst>
+          </a:prstGeom>
+          <a:noFill xmlns:a="http://schemas.openxmlformats.org/drawingml/2006/main"/>
+          <a:ln xmlns:a="http://schemas.openxmlformats.org/drawingml/2006/main" w="0">
+            <a:noFill/>
+            <a:prstDash val="solid"/>
+          </a:ln>
+        </p:spPr>
+      </p:sp>
+      <p:sp>
+        <p:nvSpPr>
+          <p:cNvPr id="12" name="PPAGENT_QA|within=radial-card-1|role=title">
+            <a:extLst xmlns:a="http://schemas.openxmlformats.org/drawingml/2006/main">
+              <a:ext uri="{FF2B5EF4-FFF2-40B4-BE49-F238E27FC236}">
+                <a16:creationId xmlns:a16="http://schemas.microsoft.com/office/drawing/2014/main" id="{51B10552-0450-401F-8FED-B31FB044F718}"/>
+              </a:ext>
+            </a:extLst>
+          </p:cNvPr>
+          <p:cNvSpPr>
+            <a:spLocks xmlns:a="http://schemas.openxmlformats.org/drawingml/2006/main" noGrp="1"/>
+          </p:cNvSpPr>
+          <p:nvPr/>
+        </p:nvSpPr>
+        <p:spPr>
+          <a:xfrm xmlns:a="http://schemas.openxmlformats.org/drawingml/2006/main">
+            <a:off x="8686800" y="1889125"/>
+            <a:ext cx="2857500" cy="285750"/>
+          </a:xfrm>
+          <a:prstGeom xmlns:a="http://schemas.openxmlformats.org/drawingml/2006/main" prst="rect">
+            <a:avLst/>
+          </a:prstGeom>
+          <a:noFill xmlns:a="http://schemas.openxmlformats.org/drawingml/2006/main"/>
+          <a:ln xmlns:a="http://schemas.openxmlformats.org/drawingml/2006/main" w="0">
+            <a:noFill/>
+            <a:prstDash val="solid"/>
+          </a:ln>
+        </p:spPr>
+        <p:txBody>
+          <a:bodyPr xmlns:a="http://schemas.openxmlformats.org/drawingml/2006/main" lIns="0" tIns="0" rIns="0" bIns="0" anchor="ctr">
+            <a:normAutofit fontScale="100000"/>
+          </a:bodyPr>
+          <a:lstStyle xmlns:a="http://schemas.openxmlformats.org/drawingml/2006/main"/>
+          <a:p xmlns:a="http://schemas.openxmlformats.org/drawingml/2006/main">
+            <a:pPr algn="l">
+              <a:defRPr sz="1425" b="1">
+                <a:solidFill>
+                  <a:srgbClr val="1677C8"/>
+                </a:solidFill>
+                <a:latin typeface="Microsoft YaHei"/>
+                <a:ea typeface="Microsoft YaHei"/>
+                <a:cs typeface="Microsoft YaHei"/>
+              </a:defRPr>
+            </a:pPr>
+            <a:r>
+              <a:rPr sz="1425" b="1">
+                <a:solidFill>
+                  <a:srgbClr val="1677C8"/>
+                </a:solidFill>
+                <a:latin typeface="Microsoft YaHei"/>
+                <a:ea typeface="Microsoft YaHei"/>
+                <a:cs typeface="Microsoft YaHei"/>
+              </a:rPr>
+              <a:t>快速响应</a:t>
+            </a:r>
+          </a:p>
+        </p:txBody>
+      </p:sp>
+      <p:sp>
+        <p:nvSpPr>
+          <p:cNvPr id="13" name="PPAGENT_CONNECTOR|from=radial-center|fromSide=right|to=radial-node-1|toSide=left">
+            <a:extLst xmlns:a="http://schemas.openxmlformats.org/drawingml/2006/main">
+              <a:ext uri="{FF2B5EF4-FFF2-40B4-BE49-F238E27FC236}">
+                <a16:creationId xmlns:a16="http://schemas.microsoft.com/office/drawing/2014/main" id="{D11CA716-FCAD-45B4-8722-4B140D7D9438}"/>
+              </a:ext>
+            </a:extLst>
+          </p:cNvPr>
+          <p:cNvSpPr>
+            <a:spLocks xmlns:a="http://schemas.openxmlformats.org/drawingml/2006/main" noGrp="1"/>
+          </p:cNvSpPr>
+          <p:nvPr/>
+        </p:nvSpPr>
+        <p:spPr>
+          <a:xfrm xmlns:a="http://schemas.openxmlformats.org/drawingml/2006/main" flipH="0" flipV="1">
+            <a:off x="7334250" y="2270125"/>
+            <a:ext cx="781050" cy="1397000"/>
+          </a:xfrm>
+          <a:prstGeom xmlns:a="http://schemas.openxmlformats.org/drawingml/2006/main" prst="line">
+            <a:avLst/>
+          </a:prstGeom>
+          <a:noFill xmlns:a="http://schemas.openxmlformats.org/drawingml/2006/main"/>
+          <a:ln xmlns:a="http://schemas.openxmlformats.org/drawingml/2006/main" w="14288">
+            <a:solidFill>
+              <a:srgbClr val="B7CCE0"/>
+            </a:solidFill>
+            <a:prstDash val="solid"/>
+          </a:ln>
+        </p:spPr>
+      </p:sp>
+      <p:sp>
+        <p:nvSpPr>
+          <p:cNvPr id="14" name="PPAGENT_QA|parent=radial-node-2|domains=radial-shape">
+            <a:extLst xmlns:a="http://schemas.openxmlformats.org/drawingml/2006/main">
+              <a:ext uri="{FF2B5EF4-FFF2-40B4-BE49-F238E27FC236}">
+                <a16:creationId xmlns:a16="http://schemas.microsoft.com/office/drawing/2014/main" id="{428AEA97-74F1-4537-AEF0-99438986C6CF}"/>
+              </a:ext>
+            </a:extLst>
+          </p:cNvPr>
+          <p:cNvSpPr>
+            <a:spLocks xmlns:a="http://schemas.openxmlformats.org/drawingml/2006/main" noGrp="1"/>
+          </p:cNvSpPr>
+          <p:nvPr/>
+        </p:nvSpPr>
+        <p:spPr>
+          <a:xfrm xmlns:a="http://schemas.openxmlformats.org/drawingml/2006/main">
+            <a:off x="3638550" y="3448050"/>
+            <a:ext cx="438150" cy="438150"/>
+          </a:xfrm>
+          <a:prstGeom xmlns:a="http://schemas.openxmlformats.org/drawingml/2006/main" prst="ellipse">
+            <a:avLst/>
+          </a:prstGeom>
+          <a:solidFill xmlns:a="http://schemas.openxmlformats.org/drawingml/2006/main">
+            <a:srgbClr val="14CBD1"/>
+          </a:solidFill>
+          <a:ln xmlns:a="http://schemas.openxmlformats.org/drawingml/2006/main" w="28575">
+            <a:solidFill>
+              <a:srgbClr val="FFFFFF"/>
+            </a:solidFill>
+            <a:prstDash val="solid"/>
+          </a:ln>
+        </p:spPr>
+        <p:style>
+          <a:lnRef xmlns:a="http://schemas.openxmlformats.org/drawingml/2006/main" idx="0"/>
+          <a:fillRef xmlns:a="http://schemas.openxmlformats.org/drawingml/2006/main" idx="0"/>
+          <a:effectRef xmlns:a="http://schemas.openxmlformats.org/drawingml/2006/main" idx="4"/>
+          <a:fontRef xmlns:a="http://schemas.openxmlformats.org/drawingml/2006/main" idx="major"/>
+        </p:style>
+        <p:txBody>
+          <a:bodyPr xmlns:a="http://schemas.openxmlformats.org/drawingml/2006/main" lIns="0" tIns="0" rIns="0" bIns="0" anchor="ctr">
+            <a:normAutofit fontScale="100000"/>
+          </a:bodyPr>
+          <a:lstStyle xmlns:a="http://schemas.openxmlformats.org/drawingml/2006/main"/>
+          <a:p xmlns:a="http://schemas.openxmlformats.org/drawingml/2006/main">
+            <a:pPr algn="ctr">
+              <a:defRPr sz="1200" b="1">
+                <a:solidFill>
+                  <a:srgbClr val="FFFFFF"/>
+                </a:solidFill>
+                <a:latin typeface="Microsoft YaHei"/>
+                <a:ea typeface="Microsoft YaHei"/>
+                <a:cs typeface="Microsoft YaHei"/>
+              </a:defRPr>
+            </a:pPr>
+            <a:r>
+              <a:rPr sz="1200" b="1">
+                <a:solidFill>
+                  <a:srgbClr val="FFFFFF"/>
+                </a:solidFill>
+                <a:latin typeface="Microsoft YaHei"/>
+                <a:ea typeface="Microsoft YaHei"/>
+                <a:cs typeface="Microsoft YaHei"/>
+              </a:rPr>
+              <a:t>03</a:t>
+            </a:r>
+          </a:p>
+        </p:txBody>
+      </p:sp>
+      <p:sp>
+        <p:nvSpPr>
+          <p:cNvPr id="15" name="PPAGENT_QA|parent=radial-card-2|domains=radial-content">
+            <a:extLst xmlns:a="http://schemas.openxmlformats.org/drawingml/2006/main">
+              <a:ext uri="{FF2B5EF4-FFF2-40B4-BE49-F238E27FC236}">
+                <a16:creationId xmlns:a16="http://schemas.microsoft.com/office/drawing/2014/main" id="{532D1608-56D6-4A12-AC10-7C7297FAEAE3}"/>
+              </a:ext>
+            </a:extLst>
+          </p:cNvPr>
+          <p:cNvSpPr>
+            <a:spLocks xmlns:a="http://schemas.openxmlformats.org/drawingml/2006/main" noGrp="1"/>
+          </p:cNvSpPr>
+          <p:nvPr/>
+        </p:nvSpPr>
+        <p:spPr>
+          <a:xfrm xmlns:a="http://schemas.openxmlformats.org/drawingml/2006/main">
+            <a:off x="647700" y="3286125"/>
+            <a:ext cx="2857500" cy="762000"/>
+          </a:xfrm>
+          <a:prstGeom xmlns:a="http://schemas.openxmlformats.org/drawingml/2006/main" prst="roundRect">
+            <a:avLst>
+              <a:gd name="adj" fmla="val 15000"/>
+            </a:avLst>
+          </a:prstGeom>
+          <a:noFill xmlns:a="http://schemas.openxmlformats.org/drawingml/2006/main"/>
+          <a:ln xmlns:a="http://schemas.openxmlformats.org/drawingml/2006/main" w="0">
+            <a:noFill/>
+            <a:prstDash val="solid"/>
+          </a:ln>
+        </p:spPr>
+      </p:sp>
+      <p:sp>
+        <p:nvSpPr>
+          <p:cNvPr id="16" name="PPAGENT_QA|within=radial-card-2|role=title">
+            <a:extLst xmlns:a="http://schemas.openxmlformats.org/drawingml/2006/main">
+              <a:ext uri="{FF2B5EF4-FFF2-40B4-BE49-F238E27FC236}">
+                <a16:creationId xmlns:a16="http://schemas.microsoft.com/office/drawing/2014/main" id="{6EC5A89C-7DB0-41A0-AA35-4C7886BE7775}"/>
+              </a:ext>
+            </a:extLst>
+          </p:cNvPr>
+          <p:cNvSpPr>
+            <a:spLocks xmlns:a="http://schemas.openxmlformats.org/drawingml/2006/main" noGrp="1"/>
+          </p:cNvSpPr>
+          <p:nvPr/>
+        </p:nvSpPr>
+        <p:spPr>
+          <a:xfrm xmlns:a="http://schemas.openxmlformats.org/drawingml/2006/main">
+            <a:off x="647700" y="3286125"/>
+            <a:ext cx="2857500" cy="285750"/>
+          </a:xfrm>
+          <a:prstGeom xmlns:a="http://schemas.openxmlformats.org/drawingml/2006/main" prst="rect">
+            <a:avLst/>
+          </a:prstGeom>
+          <a:noFill xmlns:a="http://schemas.openxmlformats.org/drawingml/2006/main"/>
+          <a:ln xmlns:a="http://schemas.openxmlformats.org/drawingml/2006/main" w="0">
+            <a:noFill/>
+            <a:prstDash val="solid"/>
+          </a:ln>
+        </p:spPr>
+        <p:txBody>
+          <a:bodyPr xmlns:a="http://schemas.openxmlformats.org/drawingml/2006/main" lIns="0" tIns="0" rIns="0" bIns="0" anchor="ctr">
+            <a:normAutofit fontScale="100000"/>
+          </a:bodyPr>
+          <a:lstStyle xmlns:a="http://schemas.openxmlformats.org/drawingml/2006/main"/>
+          <a:p xmlns:a="http://schemas.openxmlformats.org/drawingml/2006/main">
+            <a:pPr algn="r">
+              <a:defRPr sz="1425" b="1">
+                <a:solidFill>
+                  <a:srgbClr val="1677C8"/>
+                </a:solidFill>
+                <a:latin typeface="Microsoft YaHei"/>
+                <a:ea typeface="Microsoft YaHei"/>
+                <a:cs typeface="Microsoft YaHei"/>
+              </a:defRPr>
+            </a:pPr>
+            <a:r>
+              <a:rPr sz="1425" b="1">
+                <a:solidFill>
+                  <a:srgbClr val="1677C8"/>
+                </a:solidFill>
+                <a:latin typeface="Microsoft YaHei"/>
+                <a:ea typeface="Microsoft YaHei"/>
+                <a:cs typeface="Microsoft YaHei"/>
+              </a:rPr>
+              <a:t>质量可控</a:t>
+            </a:r>
+          </a:p>
+        </p:txBody>
+      </p:sp>
+      <p:sp>
+        <p:nvSpPr>
+          <p:cNvPr id="17" name="PPAGENT_CONNECTOR|from=radial-center|fromSide=left|to=radial-node-2|toSide=right">
+            <a:extLst xmlns:a="http://schemas.openxmlformats.org/drawingml/2006/main">
+              <a:ext uri="{FF2B5EF4-FFF2-40B4-BE49-F238E27FC236}">
+                <a16:creationId xmlns:a16="http://schemas.microsoft.com/office/drawing/2014/main" id="{FBBF35B4-76CE-4117-A8B3-7C44A86D4181}"/>
+              </a:ext>
+            </a:extLst>
+          </p:cNvPr>
+          <p:cNvSpPr>
+            <a:spLocks xmlns:a="http://schemas.openxmlformats.org/drawingml/2006/main" noGrp="1"/>
+          </p:cNvSpPr>
+          <p:nvPr/>
+        </p:nvSpPr>
+        <p:spPr>
+          <a:xfrm xmlns:a="http://schemas.openxmlformats.org/drawingml/2006/main" flipH="1" flipV="0">
+            <a:off x="4076700" y="3667125"/>
+            <a:ext cx="781050" cy="0"/>
+          </a:xfrm>
+          <a:prstGeom xmlns:a="http://schemas.openxmlformats.org/drawingml/2006/main" prst="line">
+            <a:avLst/>
+          </a:prstGeom>
+          <a:noFill xmlns:a="http://schemas.openxmlformats.org/drawingml/2006/main"/>
+          <a:ln xmlns:a="http://schemas.openxmlformats.org/drawingml/2006/main" w="14288">
+            <a:solidFill>
+              <a:srgbClr val="B7CCE0"/>
+            </a:solidFill>
+            <a:prstDash val="solid"/>
+          </a:ln>
+        </p:spPr>
+      </p:sp>
+      <p:sp>
+        <p:nvSpPr>
+          <p:cNvPr id="18" name="PPAGENT_QA|parent=radial-node-3|domains=radial-shape">
+            <a:extLst xmlns:a="http://schemas.openxmlformats.org/drawingml/2006/main">
+              <a:ext uri="{FF2B5EF4-FFF2-40B4-BE49-F238E27FC236}">
+                <a16:creationId xmlns:a16="http://schemas.microsoft.com/office/drawing/2014/main" id="{10E2E0F6-C29A-4F17-A310-559B68197896}"/>
+              </a:ext>
+            </a:extLst>
+          </p:cNvPr>
+          <p:cNvSpPr>
+            <a:spLocks xmlns:a="http://schemas.openxmlformats.org/drawingml/2006/main" noGrp="1"/>
+          </p:cNvSpPr>
+          <p:nvPr/>
+        </p:nvSpPr>
+        <p:spPr>
+          <a:xfrm xmlns:a="http://schemas.openxmlformats.org/drawingml/2006/main">
+            <a:off x="8115300" y="3448050"/>
+            <a:ext cx="438150" cy="438150"/>
+          </a:xfrm>
+          <a:prstGeom xmlns:a="http://schemas.openxmlformats.org/drawingml/2006/main" prst="ellipse">
+            <a:avLst/>
+          </a:prstGeom>
+          <a:solidFill xmlns:a="http://schemas.openxmlformats.org/drawingml/2006/main">
+            <a:srgbClr val="00A8D8"/>
+          </a:solidFill>
+          <a:ln xmlns:a="http://schemas.openxmlformats.org/drawingml/2006/main" w="28575">
+            <a:solidFill>
+              <a:srgbClr val="FFFFFF"/>
+            </a:solidFill>
+            <a:prstDash val="solid"/>
+          </a:ln>
+        </p:spPr>
+        <p:style>
+          <a:lnRef xmlns:a="http://schemas.openxmlformats.org/drawingml/2006/main" idx="0"/>
+          <a:fillRef xmlns:a="http://schemas.openxmlformats.org/drawingml/2006/main" idx="0"/>
+          <a:effectRef xmlns:a="http://schemas.openxmlformats.org/drawingml/2006/main" idx="4"/>
+          <a:fontRef xmlns:a="http://schemas.openxmlformats.org/drawingml/2006/main" idx="major"/>
+        </p:style>
+        <p:txBody>
+          <a:bodyPr xmlns:a="http://schemas.openxmlformats.org/drawingml/2006/main" lIns="0" tIns="0" rIns="0" bIns="0" anchor="ctr">
+            <a:normAutofit fontScale="100000"/>
+          </a:bodyPr>
+          <a:lstStyle xmlns:a="http://schemas.openxmlformats.org/drawingml/2006/main"/>
+          <a:p xmlns:a="http://schemas.openxmlformats.org/drawingml/2006/main">
+            <a:pPr algn="ctr">
+              <a:defRPr sz="1200" b="1">
+                <a:solidFill>
+                  <a:srgbClr val="FFFFFF"/>
+                </a:solidFill>
+                <a:latin typeface="Microsoft YaHei"/>
+                <a:ea typeface="Microsoft YaHei"/>
+                <a:cs typeface="Microsoft YaHei"/>
+              </a:defRPr>
+            </a:pPr>
+            <a:r>
+              <a:rPr sz="1200" b="1">
+                <a:solidFill>
+                  <a:srgbClr val="FFFFFF"/>
+                </a:solidFill>
+                <a:latin typeface="Microsoft YaHei"/>
+                <a:ea typeface="Microsoft YaHei"/>
+                <a:cs typeface="Microsoft YaHei"/>
+              </a:rPr>
+              <a:t>04</a:t>
+            </a:r>
+          </a:p>
+        </p:txBody>
+      </p:sp>
+      <p:sp>
+        <p:nvSpPr>
+          <p:cNvPr id="19" name="PPAGENT_QA|parent=radial-card-3|domains=radial-content">
+            <a:extLst xmlns:a="http://schemas.openxmlformats.org/drawingml/2006/main">
+              <a:ext uri="{FF2B5EF4-FFF2-40B4-BE49-F238E27FC236}">
+                <a16:creationId xmlns:a16="http://schemas.microsoft.com/office/drawing/2014/main" id="{B574F3C9-AE04-4811-8BB9-BC07DE999C2C}"/>
+              </a:ext>
+            </a:extLst>
+          </p:cNvPr>
+          <p:cNvSpPr>
+            <a:spLocks xmlns:a="http://schemas.openxmlformats.org/drawingml/2006/main" noGrp="1"/>
+          </p:cNvSpPr>
+          <p:nvPr/>
+        </p:nvSpPr>
+        <p:spPr>
+          <a:xfrm xmlns:a="http://schemas.openxmlformats.org/drawingml/2006/main">
+            <a:off x="8686800" y="3286125"/>
+            <a:ext cx="2857500" cy="762000"/>
+          </a:xfrm>
+          <a:prstGeom xmlns:a="http://schemas.openxmlformats.org/drawingml/2006/main" prst="roundRect">
+            <a:avLst>
+              <a:gd name="adj" fmla="val 15000"/>
+            </a:avLst>
+          </a:prstGeom>
+          <a:noFill xmlns:a="http://schemas.openxmlformats.org/drawingml/2006/main"/>
+          <a:ln xmlns:a="http://schemas.openxmlformats.org/drawingml/2006/main" w="0">
+            <a:noFill/>
+            <a:prstDash val="solid"/>
+          </a:ln>
+        </p:spPr>
+      </p:sp>
+      <p:sp>
+        <p:nvSpPr>
+          <p:cNvPr id="20" name="PPAGENT_QA|within=radial-card-3|role=title">
+            <a:extLst xmlns:a="http://schemas.openxmlformats.org/drawingml/2006/main">
+              <a:ext uri="{FF2B5EF4-FFF2-40B4-BE49-F238E27FC236}">
+                <a16:creationId xmlns:a16="http://schemas.microsoft.com/office/drawing/2014/main" id="{52CDAA40-B8AE-4493-B005-D87765AA817E}"/>
+              </a:ext>
+            </a:extLst>
+          </p:cNvPr>
+          <p:cNvSpPr>
+            <a:spLocks xmlns:a="http://schemas.openxmlformats.org/drawingml/2006/main" noGrp="1"/>
+          </p:cNvSpPr>
+          <p:nvPr/>
+        </p:nvSpPr>
+        <p:spPr>
+          <a:xfrm xmlns:a="http://schemas.openxmlformats.org/drawingml/2006/main">
+            <a:off x="8686800" y="3286125"/>
+            <a:ext cx="2857500" cy="285750"/>
+          </a:xfrm>
+          <a:prstGeom xmlns:a="http://schemas.openxmlformats.org/drawingml/2006/main" prst="rect">
+            <a:avLst/>
+          </a:prstGeom>
+          <a:noFill xmlns:a="http://schemas.openxmlformats.org/drawingml/2006/main"/>
+          <a:ln xmlns:a="http://schemas.openxmlformats.org/drawingml/2006/main" w="0">
+            <a:noFill/>
+            <a:prstDash val="solid"/>
+          </a:ln>
+        </p:spPr>
+        <p:txBody>
+          <a:bodyPr xmlns:a="http://schemas.openxmlformats.org/drawingml/2006/main" lIns="0" tIns="0" rIns="0" bIns="0" anchor="ctr">
+            <a:normAutofit fontScale="100000"/>
+          </a:bodyPr>
+          <a:lstStyle xmlns:a="http://schemas.openxmlformats.org/drawingml/2006/main"/>
+          <a:p xmlns:a="http://schemas.openxmlformats.org/drawingml/2006/main">
+            <a:pPr algn="l">
+              <a:defRPr sz="1425" b="1">
+                <a:solidFill>
+                  <a:srgbClr val="1677C8"/>
+                </a:solidFill>
+                <a:latin typeface="Microsoft YaHei"/>
+                <a:ea typeface="Microsoft YaHei"/>
+                <a:cs typeface="Microsoft YaHei"/>
+              </a:defRPr>
+            </a:pPr>
+            <a:r>
+              <a:rPr sz="1425" b="1">
+                <a:solidFill>
+                  <a:srgbClr val="1677C8"/>
+                </a:solidFill>
+                <a:latin typeface="Microsoft YaHei"/>
+                <a:ea typeface="Microsoft YaHei"/>
+                <a:cs typeface="Microsoft YaHei"/>
+              </a:rPr>
+              <a:t>持续积累</a:t>
+            </a:r>
+          </a:p>
+        </p:txBody>
+      </p:sp>
+      <p:sp>
+        <p:nvSpPr>
+          <p:cNvPr id="21" name="PPAGENT_CONNECTOR|from=radial-center|fromSide=right|to=radial-node-3|toSide=left">
+            <a:extLst xmlns:a="http://schemas.openxmlformats.org/drawingml/2006/main">
+              <a:ext uri="{FF2B5EF4-FFF2-40B4-BE49-F238E27FC236}">
+                <a16:creationId xmlns:a16="http://schemas.microsoft.com/office/drawing/2014/main" id="{09753FBE-FBE0-434A-AA36-F7F72525D136}"/>
+              </a:ext>
+            </a:extLst>
+          </p:cNvPr>
+          <p:cNvSpPr>
+            <a:spLocks xmlns:a="http://schemas.openxmlformats.org/drawingml/2006/main" noGrp="1"/>
+          </p:cNvSpPr>
+          <p:nvPr/>
+        </p:nvSpPr>
+        <p:spPr>
+          <a:xfrm xmlns:a="http://schemas.openxmlformats.org/drawingml/2006/main" flipH="0" flipV="0">
+            <a:off x="7334250" y="3667125"/>
+            <a:ext cx="781050" cy="0"/>
+          </a:xfrm>
+          <a:prstGeom xmlns:a="http://schemas.openxmlformats.org/drawingml/2006/main" prst="line">
+            <a:avLst/>
+          </a:prstGeom>
+          <a:noFill xmlns:a="http://schemas.openxmlformats.org/drawingml/2006/main"/>
+          <a:ln xmlns:a="http://schemas.openxmlformats.org/drawingml/2006/main" w="14288">
+            <a:solidFill>
+              <a:srgbClr val="B7CCE0"/>
+            </a:solidFill>
+            <a:prstDash val="solid"/>
+          </a:ln>
+        </p:spPr>
+      </p:sp>
+      <p:sp>
+        <p:nvSpPr>
+          <p:cNvPr id="22" name="PPAGENT_QA|parent=radial-node-4|domains=radial-shape">
+            <a:extLst xmlns:a="http://schemas.openxmlformats.org/drawingml/2006/main">
+              <a:ext uri="{FF2B5EF4-FFF2-40B4-BE49-F238E27FC236}">
+                <a16:creationId xmlns:a16="http://schemas.microsoft.com/office/drawing/2014/main" id="{003C6DEE-8BAE-4222-BEDB-C901D37E9336}"/>
+              </a:ext>
+            </a:extLst>
+          </p:cNvPr>
+          <p:cNvSpPr>
+            <a:spLocks xmlns:a="http://schemas.openxmlformats.org/drawingml/2006/main" noGrp="1"/>
+          </p:cNvSpPr>
+          <p:nvPr/>
+        </p:nvSpPr>
+        <p:spPr>
+          <a:xfrm xmlns:a="http://schemas.openxmlformats.org/drawingml/2006/main">
+            <a:off x="3638550" y="4845050"/>
+            <a:ext cx="438150" cy="438150"/>
+          </a:xfrm>
+          <a:prstGeom xmlns:a="http://schemas.openxmlformats.org/drawingml/2006/main" prst="ellipse">
+            <a:avLst/>
+          </a:prstGeom>
+          <a:solidFill xmlns:a="http://schemas.openxmlformats.org/drawingml/2006/main">
+            <a:srgbClr val="14CBD1"/>
+          </a:solidFill>
+          <a:ln xmlns:a="http://schemas.openxmlformats.org/drawingml/2006/main" w="28575">
+            <a:solidFill>
+              <a:srgbClr val="FFFFFF"/>
+            </a:solidFill>
+            <a:prstDash val="solid"/>
+          </a:ln>
+        </p:spPr>
+        <p:style>
+          <a:lnRef xmlns:a="http://schemas.openxmlformats.org/drawingml/2006/main" idx="0"/>
+          <a:fillRef xmlns:a="http://schemas.openxmlformats.org/drawingml/2006/main" idx="0"/>
+          <a:effectRef xmlns:a="http://schemas.openxmlformats.org/drawingml/2006/main" idx="4"/>
+          <a:fontRef xmlns:a="http://schemas.openxmlformats.org/drawingml/2006/main" idx="major"/>
+        </p:style>
+        <p:txBody>
+          <a:bodyPr xmlns:a="http://schemas.openxmlformats.org/drawingml/2006/main" lIns="0" tIns="0" rIns="0" bIns="0" anchor="ctr">
+            <a:normAutofit fontScale="100000"/>
+          </a:bodyPr>
+          <a:lstStyle xmlns:a="http://schemas.openxmlformats.org/drawingml/2006/main"/>
+          <a:p xmlns:a="http://schemas.openxmlformats.org/drawingml/2006/main">
+            <a:pPr algn="ctr">
+              <a:defRPr sz="1200" b="1">
+                <a:solidFill>
+                  <a:srgbClr val="FFFFFF"/>
+                </a:solidFill>
+                <a:latin typeface="Microsoft YaHei"/>
+                <a:ea typeface="Microsoft YaHei"/>
+                <a:cs typeface="Microsoft YaHei"/>
+              </a:defRPr>
+            </a:pPr>
+            <a:r>
+              <a:rPr sz="1200" b="1">
+                <a:solidFill>
+                  <a:srgbClr val="FFFFFF"/>
+                </a:solidFill>
+                <a:latin typeface="Microsoft YaHei"/>
+                <a:ea typeface="Microsoft YaHei"/>
+                <a:cs typeface="Microsoft YaHei"/>
+              </a:rPr>
+              <a:t>05</a:t>
+            </a:r>
+          </a:p>
+        </p:txBody>
+      </p:sp>
+      <p:sp>
+        <p:nvSpPr>
+          <p:cNvPr id="23" name="PPAGENT_QA|parent=radial-card-4|domains=radial-content">
+            <a:extLst xmlns:a="http://schemas.openxmlformats.org/drawingml/2006/main">
+              <a:ext uri="{FF2B5EF4-FFF2-40B4-BE49-F238E27FC236}">
+                <a16:creationId xmlns:a16="http://schemas.microsoft.com/office/drawing/2014/main" id="{5F5028B8-74E3-404F-B683-00DC5E260115}"/>
+              </a:ext>
+            </a:extLst>
+          </p:cNvPr>
+          <p:cNvSpPr>
+            <a:spLocks xmlns:a="http://schemas.openxmlformats.org/drawingml/2006/main" noGrp="1"/>
+          </p:cNvSpPr>
+          <p:nvPr/>
+        </p:nvSpPr>
+        <p:spPr>
+          <a:xfrm xmlns:a="http://schemas.openxmlformats.org/drawingml/2006/main">
+            <a:off x="647700" y="4683125"/>
+            <a:ext cx="2857500" cy="762000"/>
+          </a:xfrm>
+          <a:prstGeom xmlns:a="http://schemas.openxmlformats.org/drawingml/2006/main" prst="roundRect">
+            <a:avLst>
+              <a:gd name="adj" fmla="val 15000"/>
+            </a:avLst>
+          </a:prstGeom>
+          <a:noFill xmlns:a="http://schemas.openxmlformats.org/drawingml/2006/main"/>
+          <a:ln xmlns:a="http://schemas.openxmlformats.org/drawingml/2006/main" w="0">
+            <a:noFill/>
+            <a:prstDash val="solid"/>
+          </a:ln>
+        </p:spPr>
+      </p:sp>
+      <p:sp>
+        <p:nvSpPr>
+          <p:cNvPr id="24" name="PPAGENT_QA|within=radial-card-4|role=title">
+            <a:extLst xmlns:a="http://schemas.openxmlformats.org/drawingml/2006/main">
+              <a:ext uri="{FF2B5EF4-FFF2-40B4-BE49-F238E27FC236}">
+                <a16:creationId xmlns:a16="http://schemas.microsoft.com/office/drawing/2014/main" id="{DABF183D-9D54-4B7D-9E3C-CE496EC4FC82}"/>
+              </a:ext>
+            </a:extLst>
+          </p:cNvPr>
+          <p:cNvSpPr>
+            <a:spLocks xmlns:a="http://schemas.openxmlformats.org/drawingml/2006/main" noGrp="1"/>
+          </p:cNvSpPr>
+          <p:nvPr/>
+        </p:nvSpPr>
+        <p:spPr>
+          <a:xfrm xmlns:a="http://schemas.openxmlformats.org/drawingml/2006/main">
+            <a:off x="647700" y="4683125"/>
+            <a:ext cx="2857500" cy="285750"/>
+          </a:xfrm>
+          <a:prstGeom xmlns:a="http://schemas.openxmlformats.org/drawingml/2006/main" prst="rect">
+            <a:avLst/>
+          </a:prstGeom>
+          <a:noFill xmlns:a="http://schemas.openxmlformats.org/drawingml/2006/main"/>
+          <a:ln xmlns:a="http://schemas.openxmlformats.org/drawingml/2006/main" w="0">
+            <a:noFill/>
+            <a:prstDash val="solid"/>
+          </a:ln>
+        </p:spPr>
+        <p:txBody>
+          <a:bodyPr xmlns:a="http://schemas.openxmlformats.org/drawingml/2006/main" lIns="0" tIns="0" rIns="0" bIns="0" anchor="ctr">
+            <a:normAutofit fontScale="100000"/>
+          </a:bodyPr>
+          <a:lstStyle xmlns:a="http://schemas.openxmlformats.org/drawingml/2006/main"/>
+          <a:p xmlns:a="http://schemas.openxmlformats.org/drawingml/2006/main">
+            <a:pPr algn="r">
+              <a:defRPr sz="1425" b="1">
+                <a:solidFill>
+                  <a:srgbClr val="1677C8"/>
+                </a:solidFill>
+                <a:latin typeface="Microsoft YaHei"/>
+                <a:ea typeface="Microsoft YaHei"/>
+                <a:cs typeface="Microsoft YaHei"/>
+              </a:defRPr>
+            </a:pPr>
+            <a:r>
+              <a:rPr sz="1425" b="1">
+                <a:solidFill>
+                  <a:srgbClr val="1677C8"/>
+                </a:solidFill>
+                <a:latin typeface="Microsoft YaHei"/>
+                <a:ea typeface="Microsoft YaHei"/>
+                <a:cs typeface="Microsoft YaHei"/>
+              </a:rPr>
+              <a:t>资源整合</a:t>
+            </a:r>
+          </a:p>
+        </p:txBody>
+      </p:sp>
+      <p:sp>
+        <p:nvSpPr>
+          <p:cNvPr id="25" name="PPAGENT_CONNECTOR|from=radial-center|fromSide=left|to=radial-node-4|toSide=right">
+            <a:extLst xmlns:a="http://schemas.openxmlformats.org/drawingml/2006/main">
+              <a:ext uri="{FF2B5EF4-FFF2-40B4-BE49-F238E27FC236}">
+                <a16:creationId xmlns:a16="http://schemas.microsoft.com/office/drawing/2014/main" id="{AE1191AA-6AC8-4FF8-B736-ADD33F233C78}"/>
+              </a:ext>
+            </a:extLst>
+          </p:cNvPr>
+          <p:cNvSpPr>
+            <a:spLocks xmlns:a="http://schemas.openxmlformats.org/drawingml/2006/main" noGrp="1"/>
+          </p:cNvSpPr>
+          <p:nvPr/>
+        </p:nvSpPr>
+        <p:spPr>
+          <a:xfrm xmlns:a="http://schemas.openxmlformats.org/drawingml/2006/main" flipH="1" flipV="0">
+            <a:off x="4076700" y="3667125"/>
+            <a:ext cx="781050" cy="1397000"/>
+          </a:xfrm>
+          <a:prstGeom xmlns:a="http://schemas.openxmlformats.org/drawingml/2006/main" prst="line">
+            <a:avLst/>
+          </a:prstGeom>
+          <a:noFill xmlns:a="http://schemas.openxmlformats.org/drawingml/2006/main"/>
+          <a:ln xmlns:a="http://schemas.openxmlformats.org/drawingml/2006/main" w="14288">
+            <a:solidFill>
+              <a:srgbClr val="B7CCE0"/>
+            </a:solidFill>
+            <a:prstDash val="solid"/>
+          </a:ln>
+        </p:spPr>
+      </p:sp>
+      <p:sp>
+        <p:nvSpPr>
+          <p:cNvPr id="26" name="PPAGENT_QA|parent=radial-node-5|domains=radial-shape">
+            <a:extLst xmlns:a="http://schemas.openxmlformats.org/drawingml/2006/main">
+              <a:ext uri="{FF2B5EF4-FFF2-40B4-BE49-F238E27FC236}">
+                <a16:creationId xmlns:a16="http://schemas.microsoft.com/office/drawing/2014/main" id="{D6D509BB-95C9-4B43-B4ED-E5F11D9E9EC9}"/>
+              </a:ext>
+            </a:extLst>
+          </p:cNvPr>
+          <p:cNvSpPr>
+            <a:spLocks xmlns:a="http://schemas.openxmlformats.org/drawingml/2006/main" noGrp="1"/>
+          </p:cNvSpPr>
+          <p:nvPr/>
+        </p:nvSpPr>
+        <p:spPr>
+          <a:xfrm xmlns:a="http://schemas.openxmlformats.org/drawingml/2006/main">
+            <a:off x="8115300" y="4845050"/>
+            <a:ext cx="438150" cy="438150"/>
+          </a:xfrm>
+          <a:prstGeom xmlns:a="http://schemas.openxmlformats.org/drawingml/2006/main" prst="ellipse">
+            <a:avLst/>
+          </a:prstGeom>
+          <a:solidFill xmlns:a="http://schemas.openxmlformats.org/drawingml/2006/main">
+            <a:srgbClr val="00A8D8"/>
+          </a:solidFill>
+          <a:ln xmlns:a="http://schemas.openxmlformats.org/drawingml/2006/main" w="28575">
+            <a:solidFill>
+              <a:srgbClr val="FFFFFF"/>
+            </a:solidFill>
+            <a:prstDash val="solid"/>
+          </a:ln>
+        </p:spPr>
+        <p:style>
+          <a:lnRef xmlns:a="http://schemas.openxmlformats.org/drawingml/2006/main" idx="0"/>
+          <a:fillRef xmlns:a="http://schemas.openxmlformats.org/drawingml/2006/main" idx="0"/>
+          <a:effectRef xmlns:a="http://schemas.openxmlformats.org/drawingml/2006/main" idx="4"/>
+          <a:fontRef xmlns:a="http://schemas.openxmlformats.org/drawingml/2006/main" idx="major"/>
+        </p:style>
+        <p:txBody>
+          <a:bodyPr xmlns:a="http://schemas.openxmlformats.org/drawingml/2006/main" lIns="0" tIns="0" rIns="0" bIns="0" anchor="ctr">
+            <a:normAutofit fontScale="100000"/>
+          </a:bodyPr>
+          <a:lstStyle xmlns:a="http://schemas.openxmlformats.org/drawingml/2006/main"/>
+          <a:p xmlns:a="http://schemas.openxmlformats.org/drawingml/2006/main">
+            <a:pPr algn="ctr">
+              <a:defRPr sz="1200" b="1">
+                <a:solidFill>
+                  <a:srgbClr val="FFFFFF"/>
+                </a:solidFill>
+                <a:latin typeface="Microsoft YaHei"/>
+                <a:ea typeface="Microsoft YaHei"/>
+                <a:cs typeface="Microsoft YaHei"/>
+              </a:defRPr>
+            </a:pPr>
+            <a:r>
+              <a:rPr sz="1200" b="1">
+                <a:solidFill>
+                  <a:srgbClr val="FFFFFF"/>
+                </a:solidFill>
+                <a:latin typeface="Microsoft YaHei"/>
+                <a:ea typeface="Microsoft YaHei"/>
+                <a:cs typeface="Microsoft YaHei"/>
+              </a:rPr>
+              <a:t>06</a:t>
+            </a:r>
+          </a:p>
+        </p:txBody>
+      </p:sp>
+      <p:sp>
+        <p:nvSpPr>
+          <p:cNvPr id="27" name="PPAGENT_QA|parent=radial-card-5|domains=radial-content">
+            <a:extLst xmlns:a="http://schemas.openxmlformats.org/drawingml/2006/main">
+              <a:ext uri="{FF2B5EF4-FFF2-40B4-BE49-F238E27FC236}">
+                <a16:creationId xmlns:a16="http://schemas.microsoft.com/office/drawing/2014/main" id="{D9E82D75-D48D-4250-9D5B-C1905A5A92A7}"/>
+              </a:ext>
+            </a:extLst>
+          </p:cNvPr>
+          <p:cNvSpPr>
+            <a:spLocks xmlns:a="http://schemas.openxmlformats.org/drawingml/2006/main" noGrp="1"/>
+          </p:cNvSpPr>
+          <p:nvPr/>
+        </p:nvSpPr>
+        <p:spPr>
+          <a:xfrm xmlns:a="http://schemas.openxmlformats.org/drawingml/2006/main">
+            <a:off x="8686800" y="4683125"/>
+            <a:ext cx="2857500" cy="762000"/>
+          </a:xfrm>
+          <a:prstGeom xmlns:a="http://schemas.openxmlformats.org/drawingml/2006/main" prst="roundRect">
+            <a:avLst>
+              <a:gd name="adj" fmla="val 15000"/>
+            </a:avLst>
+          </a:prstGeom>
+          <a:noFill xmlns:a="http://schemas.openxmlformats.org/drawingml/2006/main"/>
+          <a:ln xmlns:a="http://schemas.openxmlformats.org/drawingml/2006/main" w="0">
+            <a:noFill/>
+            <a:prstDash val="solid"/>
+          </a:ln>
+        </p:spPr>
+      </p:sp>
+      <p:sp>
+        <p:nvSpPr>
+          <p:cNvPr id="28" name="PPAGENT_QA|within=radial-card-5|role=title">
+            <a:extLst xmlns:a="http://schemas.openxmlformats.org/drawingml/2006/main">
+              <a:ext uri="{FF2B5EF4-FFF2-40B4-BE49-F238E27FC236}">
+                <a16:creationId xmlns:a16="http://schemas.microsoft.com/office/drawing/2014/main" id="{C778F3E4-13C8-4620-B745-70190F7ADC34}"/>
+              </a:ext>
+            </a:extLst>
+          </p:cNvPr>
+          <p:cNvSpPr>
+            <a:spLocks xmlns:a="http://schemas.openxmlformats.org/drawingml/2006/main" noGrp="1"/>
+          </p:cNvSpPr>
+          <p:nvPr/>
+        </p:nvSpPr>
+        <p:spPr>
+          <a:xfrm xmlns:a="http://schemas.openxmlformats.org/drawingml/2006/main">
+            <a:off x="8686800" y="4683125"/>
+            <a:ext cx="2857500" cy="285750"/>
+          </a:xfrm>
+          <a:prstGeom xmlns:a="http://schemas.openxmlformats.org/drawingml/2006/main" prst="rect">
+            <a:avLst/>
+          </a:prstGeom>
+          <a:noFill xmlns:a="http://schemas.openxmlformats.org/drawingml/2006/main"/>
+          <a:ln xmlns:a="http://schemas.openxmlformats.org/drawingml/2006/main" w="0">
+            <a:noFill/>
+            <a:prstDash val="solid"/>
+          </a:ln>
+        </p:spPr>
+        <p:txBody>
+          <a:bodyPr xmlns:a="http://schemas.openxmlformats.org/drawingml/2006/main" lIns="0" tIns="0" rIns="0" bIns="0" anchor="ctr">
+            <a:normAutofit fontScale="100000"/>
+          </a:bodyPr>
+          <a:lstStyle xmlns:a="http://schemas.openxmlformats.org/drawingml/2006/main"/>
+          <a:p xmlns:a="http://schemas.openxmlformats.org/drawingml/2006/main">
+            <a:pPr algn="l">
+              <a:defRPr sz="1425" b="1">
+                <a:solidFill>
+                  <a:srgbClr val="1677C8"/>
+                </a:solidFill>
+                <a:latin typeface="Microsoft YaHei"/>
+                <a:ea typeface="Microsoft YaHei"/>
+                <a:cs typeface="Microsoft YaHei"/>
+              </a:defRPr>
+            </a:pPr>
+            <a:r>
+              <a:rPr sz="1425" b="1">
+                <a:solidFill>
+                  <a:srgbClr val="1677C8"/>
+                </a:solidFill>
+                <a:latin typeface="Microsoft YaHei"/>
+                <a:ea typeface="Microsoft YaHei"/>
+                <a:cs typeface="Microsoft YaHei"/>
+              </a:rPr>
+              <a:t>跨域协作</a:t>
+            </a:r>
+          </a:p>
+        </p:txBody>
+      </p:sp>
+      <p:sp>
+        <p:nvSpPr>
+          <p:cNvPr id="29" name="PPAGENT_CONNECTOR|from=radial-center|fromSide=right|to=radial-node-5|toSide=left">
+            <a:extLst xmlns:a="http://schemas.openxmlformats.org/drawingml/2006/main">
+              <a:ext uri="{FF2B5EF4-FFF2-40B4-BE49-F238E27FC236}">
+                <a16:creationId xmlns:a16="http://schemas.microsoft.com/office/drawing/2014/main" id="{30D67F3D-BCAD-4AF2-B04B-65AEC8331CC5}"/>
+              </a:ext>
+            </a:extLst>
+          </p:cNvPr>
+          <p:cNvSpPr>
+            <a:spLocks xmlns:a="http://schemas.openxmlformats.org/drawingml/2006/main" noGrp="1"/>
+          </p:cNvSpPr>
+          <p:nvPr/>
+        </p:nvSpPr>
+        <p:spPr>
+          <a:xfrm xmlns:a="http://schemas.openxmlformats.org/drawingml/2006/main" flipH="0" flipV="0">
+            <a:off x="7334250" y="3667125"/>
+            <a:ext cx="781050" cy="1397000"/>
+          </a:xfrm>
+          <a:prstGeom xmlns:a="http://schemas.openxmlformats.org/drawingml/2006/main" prst="line">
+            <a:avLst/>
+          </a:prstGeom>
+          <a:noFill xmlns:a="http://schemas.openxmlformats.org/drawingml/2006/main"/>
+          <a:ln xmlns:a="http://schemas.openxmlformats.org/drawingml/2006/main" w="14288">
+            <a:solidFill>
+              <a:srgbClr val="B7CCE0"/>
+            </a:solidFill>
+            <a:prstDash val="solid"/>
+          </a:ln>
+        </p:spPr>
+      </p:sp>
+    </p:spTree>
+    <p:extLst>
+      <p:ext uri="{BB962C8B-B14F-4D97-AF65-F5344CB8AC3E}">
+        <p14:creationId xmlns:p14="http://schemas.microsoft.com/office/powerpoint/2010/main" val="492291521"/>
+      </p:ext>
+    </p:extLst>
+  </p:cSld>
+</p:sld>
+</file>
+
+<file path=ppt/slides/slide5.xml><?xml version="1.0" encoding="utf-8"?>
+<p:sld xmlns:p="http://schemas.openxmlformats.org/presentationml/2006/main">
+  <p:cSld>
+    <p:bg>
+      <p:bgPr>
+        <a:solidFill xmlns:a="http://schemas.openxmlformats.org/drawingml/2006/main">
+          <a:srgbClr val="F7FAFC"/>
+        </a:solidFill>
+      </p:bgPr>
+    </p:bg>
+    <p:spTree>
+      <p:nvGrpSpPr>
+        <p:cNvPr id="1" name=""/>
+        <p:cNvGrpSpPr/>
+        <p:nvPr/>
+      </p:nvGrpSpPr>
+      <p:grpSpPr>
+        <a:xfrm xmlns:a="http://schemas.openxmlformats.org/drawingml/2006/main"/>
+      </p:grpSpPr>
+      <p:sp>
+        <p:nvSpPr>
+          <p:cNvPr id="34" name="">
+            <a:extLst xmlns:a="http://schemas.openxmlformats.org/drawingml/2006/main">
+              <a:ext uri="{FF2B5EF4-FFF2-40B4-BE49-F238E27FC236}">
+                <a16:creationId xmlns:a16="http://schemas.microsoft.com/office/drawing/2014/main" id="{AEFE3939-02EF-4F8C-82A1-A16DC24FDDCC}"/>
+              </a:ext>
+            </a:extLst>
+          </p:cNvPr>
+          <p:cNvSpPr>
+            <a:spLocks xmlns:a="http://schemas.openxmlformats.org/drawingml/2006/main" noGrp="1"/>
+          </p:cNvSpPr>
+          <p:nvPr/>
+        </p:nvSpPr>
+        <p:spPr>
+          <a:xfrm xmlns:a="http://schemas.openxmlformats.org/drawingml/2006/main">
+            <a:off x="685800" y="400050"/>
+            <a:ext cx="8382000" cy="457200"/>
+          </a:xfrm>
+          <a:prstGeom xmlns:a="http://schemas.openxmlformats.org/drawingml/2006/main" prst="rect">
+            <a:avLst/>
+          </a:prstGeom>
+          <a:noFill xmlns:a="http://schemas.openxmlformats.org/drawingml/2006/main"/>
+          <a:ln xmlns:a="http://schemas.openxmlformats.org/drawingml/2006/main" w="0">
+            <a:noFill/>
+            <a:prstDash val="solid"/>
+          </a:ln>
+        </p:spPr>
+        <p:txBody>
+          <a:bodyPr xmlns:a="http://schemas.openxmlformats.org/drawingml/2006/main" lIns="0" tIns="0" rIns="0" bIns="0" anchor="ctr">
+            <a:normAutofit fontScale="100000"/>
+          </a:bodyPr>
+          <a:lstStyle xmlns:a="http://schemas.openxmlformats.org/drawingml/2006/main"/>
+          <a:p xmlns:a="http://schemas.openxmlformats.org/drawingml/2006/main">
+            <a:pPr algn="l">
+              <a:defRPr sz="2700" b="1">
+                <a:solidFill>
+                  <a:srgbClr val="1677C8"/>
+                </a:solidFill>
+                <a:latin typeface="Microsoft YaHei"/>
+                <a:ea typeface="Microsoft YaHei"/>
+                <a:cs typeface="Microsoft YaHei"/>
+              </a:defRPr>
+            </a:pPr>
+            <a:r>
+              <a:rPr sz="2700" b="1">
+                <a:solidFill>
+                  <a:srgbClr val="1677C8"/>
+                </a:solidFill>
+                <a:latin typeface="Microsoft YaHei"/>
+                <a:ea typeface="Microsoft YaHei"/>
+                <a:cs typeface="Microsoft YaHei"/>
+              </a:rPr>
+              <a:t>中心辐射关系</a:t>
+            </a:r>
+          </a:p>
+        </p:txBody>
+      </p:sp>
+      <p:sp>
+        <p:nvSpPr>
+          <p:cNvPr id="2" name="">
+            <a:extLst xmlns:a="http://schemas.openxmlformats.org/drawingml/2006/main">
+              <a:ext uri="{FF2B5EF4-FFF2-40B4-BE49-F238E27FC236}">
+                <a16:creationId xmlns:a16="http://schemas.microsoft.com/office/drawing/2014/main" id="{33815B06-8D2C-4C82-99B7-8FC43B099FF9}"/>
+              </a:ext>
+            </a:extLst>
+          </p:cNvPr>
+          <p:cNvSpPr>
+            <a:spLocks xmlns:a="http://schemas.openxmlformats.org/drawingml/2006/main" noGrp="1"/>
+          </p:cNvSpPr>
+          <p:nvPr/>
+        </p:nvSpPr>
+        <p:spPr>
+          <a:xfrm xmlns:a="http://schemas.openxmlformats.org/drawingml/2006/main">
+            <a:off x="704850" y="876300"/>
+            <a:ext cx="4953000" cy="247650"/>
+          </a:xfrm>
+          <a:prstGeom xmlns:a="http://schemas.openxmlformats.org/drawingml/2006/main" prst="rect">
+            <a:avLst/>
+          </a:prstGeom>
+          <a:noFill xmlns:a="http://schemas.openxmlformats.org/drawingml/2006/main"/>
+          <a:ln xmlns:a="http://schemas.openxmlformats.org/drawingml/2006/main" w="0">
+            <a:noFill/>
+            <a:prstDash val="solid"/>
+          </a:ln>
+        </p:spPr>
+        <p:txBody>
+          <a:bodyPr xmlns:a="http://schemas.openxmlformats.org/drawingml/2006/main" lIns="0" tIns="0" rIns="0" bIns="0" anchor="ctr">
+            <a:normAutofit fontScale="100000"/>
+          </a:bodyPr>
+          <a:lstStyle xmlns:a="http://schemas.openxmlformats.org/drawingml/2006/main"/>
+          <a:p xmlns:a="http://schemas.openxmlformats.org/drawingml/2006/main">
+            <a:pPr algn="l">
+              <a:defRPr sz="1200" b="0">
+                <a:solidFill>
+                  <a:srgbClr val="7C8A9A"/>
+                </a:solidFill>
+                <a:latin typeface="Microsoft YaHei"/>
+                <a:ea typeface="Microsoft YaHei"/>
+                <a:cs typeface="Microsoft YaHei"/>
+              </a:defRPr>
+            </a:pPr>
+            <a:r>
+              <a:rPr sz="1200" b="0">
+                <a:solidFill>
+                  <a:srgbClr val="7C8A9A"/>
+                </a:solidFill>
+                <a:latin typeface="Microsoft YaHei"/>
+                <a:ea typeface="Microsoft YaHei"/>
+                <a:cs typeface="Microsoft YaHei"/>
+              </a:rPr>
+              <a:t>中心主题 · 多向展开</a:t>
+            </a:r>
+          </a:p>
+        </p:txBody>
+      </p:sp>
+      <p:sp>
+        <p:nvSpPr>
+          <p:cNvPr id="3" name="">
+            <a:extLst xmlns:a="http://schemas.openxmlformats.org/drawingml/2006/main">
+              <a:ext uri="{FF2B5EF4-FFF2-40B4-BE49-F238E27FC236}">
+                <a16:creationId xmlns:a16="http://schemas.microsoft.com/office/drawing/2014/main" id="{6CFE69E8-A1F7-49A1-BFC3-DD77E4E748FF}"/>
+              </a:ext>
+            </a:extLst>
+          </p:cNvPr>
+          <p:cNvSpPr>
+            <a:spLocks xmlns:a="http://schemas.openxmlformats.org/drawingml/2006/main" noGrp="1"/>
+          </p:cNvSpPr>
+          <p:nvPr/>
+        </p:nvSpPr>
+        <p:spPr>
+          <a:xfrm xmlns:a="http://schemas.openxmlformats.org/drawingml/2006/main">
+            <a:off x="4400550" y="1971675"/>
+            <a:ext cx="3390900" cy="3390900"/>
+          </a:xfrm>
+          <a:prstGeom xmlns:a="http://schemas.openxmlformats.org/drawingml/2006/main" prst="ellipse">
+            <a:avLst/>
+          </a:prstGeom>
+          <a:solidFill xmlns:a="http://schemas.openxmlformats.org/drawingml/2006/main">
+            <a:srgbClr val="DCEEFF"/>
+          </a:solidFill>
+          <a:ln xmlns:a="http://schemas.openxmlformats.org/drawingml/2006/main" w="0">
+            <a:noFill/>
+            <a:prstDash val="solid"/>
+          </a:ln>
+        </p:spPr>
+      </p:sp>
+      <p:sp>
+        <p:nvSpPr>
+          <p:cNvPr id="4" name="">
+            <a:extLst xmlns:a="http://schemas.openxmlformats.org/drawingml/2006/main">
+              <a:ext uri="{FF2B5EF4-FFF2-40B4-BE49-F238E27FC236}">
+                <a16:creationId xmlns:a16="http://schemas.microsoft.com/office/drawing/2014/main" id="{341FD8E0-1D04-402A-AACE-1EC9FBFD11DB}"/>
+              </a:ext>
+            </a:extLst>
+          </p:cNvPr>
+          <p:cNvSpPr>
+            <a:spLocks xmlns:a="http://schemas.openxmlformats.org/drawingml/2006/main" noGrp="1"/>
+          </p:cNvSpPr>
+          <p:nvPr/>
+        </p:nvSpPr>
+        <p:spPr>
+          <a:xfrm xmlns:a="http://schemas.openxmlformats.org/drawingml/2006/main">
+            <a:off x="4629150" y="2200275"/>
+            <a:ext cx="2933700" cy="2933700"/>
+          </a:xfrm>
+          <a:prstGeom xmlns:a="http://schemas.openxmlformats.org/drawingml/2006/main" prst="ellipse">
+            <a:avLst/>
+          </a:prstGeom>
+          <a:solidFill xmlns:a="http://schemas.openxmlformats.org/drawingml/2006/main">
+            <a:srgbClr val="FFFFFF"/>
+          </a:solidFill>
+          <a:ln xmlns:a="http://schemas.openxmlformats.org/drawingml/2006/main" w="19050">
+            <a:solidFill>
+              <a:srgbClr val="B7D8F3"/>
+            </a:solidFill>
+            <a:prstDash val="solid"/>
+          </a:ln>
+        </p:spPr>
+        <p:style>
+          <a:lnRef xmlns:a="http://schemas.openxmlformats.org/drawingml/2006/main" idx="0"/>
+          <a:fillRef xmlns:a="http://schemas.openxmlformats.org/drawingml/2006/main" idx="0"/>
+          <a:effectRef xmlns:a="http://schemas.openxmlformats.org/drawingml/2006/main" idx="6"/>
+          <a:fontRef xmlns:a="http://schemas.openxmlformats.org/drawingml/2006/main" idx="major"/>
+        </p:style>
+      </p:sp>
+      <p:sp>
+        <p:nvSpPr>
+          <p:cNvPr id="5" name="PPAGENT_QA|parent=radial-center|domains=radial-shape,radial-content">
+            <a:extLst xmlns:a="http://schemas.openxmlformats.org/drawingml/2006/main">
+              <a:ext uri="{FF2B5EF4-FFF2-40B4-BE49-F238E27FC236}">
+                <a16:creationId xmlns:a16="http://schemas.microsoft.com/office/drawing/2014/main" id="{5C08C6E2-CA47-461F-A692-CF33C96B639D}"/>
+              </a:ext>
+            </a:extLst>
+          </p:cNvPr>
+          <p:cNvSpPr>
+            <a:spLocks xmlns:a="http://schemas.openxmlformats.org/drawingml/2006/main" noGrp="1"/>
+          </p:cNvSpPr>
+          <p:nvPr/>
+        </p:nvSpPr>
+        <p:spPr>
+          <a:xfrm xmlns:a="http://schemas.openxmlformats.org/drawingml/2006/main">
+            <a:off x="4857750" y="2428875"/>
+            <a:ext cx="2476500" cy="2476500"/>
+          </a:xfrm>
+          <a:prstGeom xmlns:a="http://schemas.openxmlformats.org/drawingml/2006/main" prst="ellipse">
+            <a:avLst/>
+          </a:prstGeom>
+          <a:solidFill xmlns:a="http://schemas.openxmlformats.org/drawingml/2006/main">
+            <a:srgbClr val="1677C8"/>
+          </a:solidFill>
+          <a:ln xmlns:a="http://schemas.openxmlformats.org/drawingml/2006/main" w="38100">
+            <a:solidFill>
+              <a:srgbClr val="FFFFFF"/>
+            </a:solidFill>
+            <a:prstDash val="solid"/>
+          </a:ln>
+        </p:spPr>
+        <p:style>
+          <a:lnRef xmlns:a="http://schemas.openxmlformats.org/drawingml/2006/main" idx="0"/>
+          <a:fillRef xmlns:a="http://schemas.openxmlformats.org/drawingml/2006/main" idx="0"/>
+          <a:effectRef xmlns:a="http://schemas.openxmlformats.org/drawingml/2006/main" idx="7"/>
+          <a:fontRef xmlns:a="http://schemas.openxmlformats.org/drawingml/2006/main" idx="major"/>
+        </p:style>
+        <p:txBody>
+          <a:bodyPr xmlns:a="http://schemas.openxmlformats.org/drawingml/2006/main" lIns="114300" tIns="76200" rIns="114300" bIns="76200" anchor="ctr">
+            <a:normAutofit fontScale="100000"/>
+          </a:bodyPr>
+          <a:lstStyle xmlns:a="http://schemas.openxmlformats.org/drawingml/2006/main"/>
+          <a:p xmlns:a="http://schemas.openxmlformats.org/drawingml/2006/main">
+            <a:pPr algn="ctr">
+              <a:defRPr sz="2175" b="1">
+                <a:solidFill>
+                  <a:srgbClr val="FFFFFF"/>
+                </a:solidFill>
+                <a:latin typeface="Microsoft YaHei"/>
+                <a:ea typeface="Microsoft YaHei"/>
+                <a:cs typeface="Microsoft YaHei"/>
+              </a:defRPr>
+            </a:pPr>
+            <a:r>
+              <a:rPr sz="2175" b="1">
+                <a:solidFill>
+                  <a:srgbClr val="FFFFFF"/>
+                </a:solidFill>
+                <a:latin typeface="Microsoft YaHei"/>
+                <a:ea typeface="Microsoft YaHei"/>
+                <a:cs typeface="Microsoft YaHei"/>
+              </a:rPr>
+              <a:t>协同能力</a:t>
+            </a:r>
+          </a:p>
+        </p:txBody>
+      </p:sp>
+      <p:sp>
+        <p:nvSpPr>
+          <p:cNvPr id="6" name="PPAGENT_QA|parent=radial-node-0|domains=radial-shape">
+            <a:extLst xmlns:a="http://schemas.openxmlformats.org/drawingml/2006/main">
+              <a:ext uri="{FF2B5EF4-FFF2-40B4-BE49-F238E27FC236}">
+                <a16:creationId xmlns:a16="http://schemas.microsoft.com/office/drawing/2014/main" id="{DCFC3B0D-33CF-45E5-8F99-8EE95F23A8E9}"/>
+              </a:ext>
+            </a:extLst>
+          </p:cNvPr>
+          <p:cNvSpPr>
+            <a:spLocks xmlns:a="http://schemas.openxmlformats.org/drawingml/2006/main" noGrp="1"/>
+          </p:cNvSpPr>
+          <p:nvPr/>
+        </p:nvSpPr>
+        <p:spPr>
+          <a:xfrm xmlns:a="http://schemas.openxmlformats.org/drawingml/2006/main">
+            <a:off x="5876925" y="1590675"/>
+            <a:ext cx="438150" cy="438150"/>
+          </a:xfrm>
+          <a:prstGeom xmlns:a="http://schemas.openxmlformats.org/drawingml/2006/main" prst="ellipse">
+            <a:avLst/>
+          </a:prstGeom>
+          <a:solidFill xmlns:a="http://schemas.openxmlformats.org/drawingml/2006/main">
+            <a:srgbClr val="14CBD1"/>
+          </a:solidFill>
+          <a:ln xmlns:a="http://schemas.openxmlformats.org/drawingml/2006/main" w="28575">
+            <a:solidFill>
+              <a:srgbClr val="FFFFFF"/>
+            </a:solidFill>
+            <a:prstDash val="solid"/>
+          </a:ln>
+        </p:spPr>
+        <p:style>
+          <a:lnRef xmlns:a="http://schemas.openxmlformats.org/drawingml/2006/main" idx="0"/>
+          <a:fillRef xmlns:a="http://schemas.openxmlformats.org/drawingml/2006/main" idx="0"/>
+          <a:effectRef xmlns:a="http://schemas.openxmlformats.org/drawingml/2006/main" idx="4"/>
+          <a:fontRef xmlns:a="http://schemas.openxmlformats.org/drawingml/2006/main" idx="major"/>
+        </p:style>
+        <p:txBody>
+          <a:bodyPr xmlns:a="http://schemas.openxmlformats.org/drawingml/2006/main" lIns="0" tIns="0" rIns="0" bIns="0" anchor="ctr">
+            <a:normAutofit fontScale="100000"/>
+          </a:bodyPr>
+          <a:lstStyle xmlns:a="http://schemas.openxmlformats.org/drawingml/2006/main"/>
+          <a:p xmlns:a="http://schemas.openxmlformats.org/drawingml/2006/main">
+            <a:pPr algn="ctr">
+              <a:defRPr sz="1200" b="1">
+                <a:solidFill>
+                  <a:srgbClr val="FFFFFF"/>
+                </a:solidFill>
+                <a:latin typeface="Microsoft YaHei"/>
+                <a:ea typeface="Microsoft YaHei"/>
+                <a:cs typeface="Microsoft YaHei"/>
+              </a:defRPr>
+            </a:pPr>
+            <a:r>
+              <a:rPr sz="1200" b="1">
+                <a:solidFill>
+                  <a:srgbClr val="FFFFFF"/>
+                </a:solidFill>
+                <a:latin typeface="Microsoft YaHei"/>
+                <a:ea typeface="Microsoft YaHei"/>
+                <a:cs typeface="Microsoft YaHei"/>
+              </a:rPr>
+              <a:t>01</a:t>
+            </a:r>
+          </a:p>
+        </p:txBody>
+      </p:sp>
+      <p:sp>
+        <p:nvSpPr>
+          <p:cNvPr id="7" name="PPAGENT_QA|parent=radial-card-0|domains=radial-content">
+            <a:extLst xmlns:a="http://schemas.openxmlformats.org/drawingml/2006/main">
+              <a:ext uri="{FF2B5EF4-FFF2-40B4-BE49-F238E27FC236}">
+                <a16:creationId xmlns:a16="http://schemas.microsoft.com/office/drawing/2014/main" id="{24815359-B801-434B-B0D3-020CD158F59A}"/>
+              </a:ext>
+            </a:extLst>
+          </p:cNvPr>
+          <p:cNvSpPr>
+            <a:spLocks xmlns:a="http://schemas.openxmlformats.org/drawingml/2006/main" noGrp="1"/>
+          </p:cNvSpPr>
+          <p:nvPr/>
+        </p:nvSpPr>
+        <p:spPr>
+          <a:xfrm xmlns:a="http://schemas.openxmlformats.org/drawingml/2006/main">
+            <a:off x="4762500" y="1285875"/>
+            <a:ext cx="2667000" cy="457200"/>
+          </a:xfrm>
+          <a:prstGeom xmlns:a="http://schemas.openxmlformats.org/drawingml/2006/main" prst="roundRect">
+            <a:avLst>
+              <a:gd name="adj" fmla="val 25000"/>
+            </a:avLst>
+          </a:prstGeom>
+          <a:noFill xmlns:a="http://schemas.openxmlformats.org/drawingml/2006/main"/>
+          <a:ln xmlns:a="http://schemas.openxmlformats.org/drawingml/2006/main" w="0">
+            <a:noFill/>
+            <a:prstDash val="solid"/>
+          </a:ln>
+        </p:spPr>
+      </p:sp>
+      <p:sp>
+        <p:nvSpPr>
+          <p:cNvPr id="8" name="PPAGENT_QA|within=radial-card-0|role=title">
+            <a:extLst xmlns:a="http://schemas.openxmlformats.org/drawingml/2006/main">
+              <a:ext uri="{FF2B5EF4-FFF2-40B4-BE49-F238E27FC236}">
+                <a16:creationId xmlns:a16="http://schemas.microsoft.com/office/drawing/2014/main" id="{2218868C-2E41-4D88-B140-D4E94DB7109E}"/>
+              </a:ext>
+            </a:extLst>
+          </p:cNvPr>
+          <p:cNvSpPr>
+            <a:spLocks xmlns:a="http://schemas.openxmlformats.org/drawingml/2006/main" noGrp="1"/>
+          </p:cNvSpPr>
+          <p:nvPr/>
+        </p:nvSpPr>
+        <p:spPr>
+          <a:xfrm xmlns:a="http://schemas.openxmlformats.org/drawingml/2006/main">
+            <a:off x="4762500" y="1285875"/>
+            <a:ext cx="2667000" cy="285750"/>
+          </a:xfrm>
+          <a:prstGeom xmlns:a="http://schemas.openxmlformats.org/drawingml/2006/main" prst="rect">
+            <a:avLst/>
+          </a:prstGeom>
+          <a:noFill xmlns:a="http://schemas.openxmlformats.org/drawingml/2006/main"/>
+          <a:ln xmlns:a="http://schemas.openxmlformats.org/drawingml/2006/main" w="0">
+            <a:noFill/>
+            <a:prstDash val="solid"/>
+          </a:ln>
+        </p:spPr>
+        <p:txBody>
+          <a:bodyPr xmlns:a="http://schemas.openxmlformats.org/drawingml/2006/main" lIns="0" tIns="0" rIns="0" bIns="0" anchor="ctr">
+            <a:normAutofit fontScale="100000"/>
+          </a:bodyPr>
+          <a:lstStyle xmlns:a="http://schemas.openxmlformats.org/drawingml/2006/main"/>
+          <a:p xmlns:a="http://schemas.openxmlformats.org/drawingml/2006/main">
+            <a:pPr algn="ctr">
+              <a:defRPr sz="1425" b="1">
+                <a:solidFill>
+                  <a:srgbClr val="1677C8"/>
+                </a:solidFill>
+                <a:latin typeface="Microsoft YaHei"/>
+                <a:ea typeface="Microsoft YaHei"/>
+                <a:cs typeface="Microsoft YaHei"/>
+              </a:defRPr>
+            </a:pPr>
+            <a:r>
+              <a:rPr sz="1425" b="1">
+                <a:solidFill>
+                  <a:srgbClr val="1677C8"/>
+                </a:solidFill>
+                <a:latin typeface="Microsoft YaHei"/>
+                <a:ea typeface="Microsoft YaHei"/>
+                <a:cs typeface="Microsoft YaHei"/>
+              </a:rPr>
+              <a:t>统一标准</a:t>
+            </a:r>
+          </a:p>
+        </p:txBody>
+      </p:sp>
+      <p:sp>
+        <p:nvSpPr>
+          <p:cNvPr id="9" name="PPAGENT_CONNECTOR|from=radial-center|fromSide=top|to=radial-node-0|toSide=bottom">
+            <a:extLst xmlns:a="http://schemas.openxmlformats.org/drawingml/2006/main">
+              <a:ext uri="{FF2B5EF4-FFF2-40B4-BE49-F238E27FC236}">
+                <a16:creationId xmlns:a16="http://schemas.microsoft.com/office/drawing/2014/main" id="{DD366318-523D-4796-AD57-605FF4571441}"/>
+              </a:ext>
+            </a:extLst>
+          </p:cNvPr>
+          <p:cNvSpPr>
+            <a:spLocks xmlns:a="http://schemas.openxmlformats.org/drawingml/2006/main" noGrp="1"/>
+          </p:cNvSpPr>
+          <p:nvPr/>
+        </p:nvSpPr>
+        <p:spPr>
+          <a:xfrm xmlns:a="http://schemas.openxmlformats.org/drawingml/2006/main" flipH="0" flipV="1">
+            <a:off x="6096000" y="2028825"/>
+            <a:ext cx="0" cy="400050"/>
+          </a:xfrm>
+          <a:prstGeom xmlns:a="http://schemas.openxmlformats.org/drawingml/2006/main" prst="line">
+            <a:avLst/>
+          </a:prstGeom>
+          <a:noFill xmlns:a="http://schemas.openxmlformats.org/drawingml/2006/main"/>
+          <a:ln xmlns:a="http://schemas.openxmlformats.org/drawingml/2006/main" w="14288">
+            <a:solidFill>
+              <a:srgbClr val="B7CCE0"/>
+            </a:solidFill>
+            <a:prstDash val="solid"/>
+          </a:ln>
+        </p:spPr>
+      </p:sp>
+      <p:sp>
+        <p:nvSpPr>
+          <p:cNvPr id="10" name="PPAGENT_QA|parent=radial-node-1|domains=radial-shape">
+            <a:extLst xmlns:a="http://schemas.openxmlformats.org/drawingml/2006/main">
+              <a:ext uri="{FF2B5EF4-FFF2-40B4-BE49-F238E27FC236}">
+                <a16:creationId xmlns:a16="http://schemas.microsoft.com/office/drawing/2014/main" id="{9A1AAF5A-1E9F-4360-B922-3FA90C190597}"/>
+              </a:ext>
+            </a:extLst>
+          </p:cNvPr>
+          <p:cNvSpPr>
+            <a:spLocks xmlns:a="http://schemas.openxmlformats.org/drawingml/2006/main" noGrp="1"/>
+          </p:cNvSpPr>
+          <p:nvPr/>
+        </p:nvSpPr>
+        <p:spPr>
+          <a:xfrm xmlns:a="http://schemas.openxmlformats.org/drawingml/2006/main">
+            <a:off x="3638550" y="2051050"/>
+            <a:ext cx="438150" cy="438150"/>
+          </a:xfrm>
+          <a:prstGeom xmlns:a="http://schemas.openxmlformats.org/drawingml/2006/main" prst="ellipse">
+            <a:avLst/>
+          </a:prstGeom>
+          <a:solidFill xmlns:a="http://schemas.openxmlformats.org/drawingml/2006/main">
+            <a:srgbClr val="00A8D8"/>
+          </a:solidFill>
+          <a:ln xmlns:a="http://schemas.openxmlformats.org/drawingml/2006/main" w="28575">
+            <a:solidFill>
+              <a:srgbClr val="FFFFFF"/>
+            </a:solidFill>
+            <a:prstDash val="solid"/>
+          </a:ln>
+        </p:spPr>
+        <p:style>
+          <a:lnRef xmlns:a="http://schemas.openxmlformats.org/drawingml/2006/main" idx="0"/>
+          <a:fillRef xmlns:a="http://schemas.openxmlformats.org/drawingml/2006/main" idx="0"/>
+          <a:effectRef xmlns:a="http://schemas.openxmlformats.org/drawingml/2006/main" idx="4"/>
+          <a:fontRef xmlns:a="http://schemas.openxmlformats.org/drawingml/2006/main" idx="major"/>
+        </p:style>
+        <p:txBody>
+          <a:bodyPr xmlns:a="http://schemas.openxmlformats.org/drawingml/2006/main" lIns="0" tIns="0" rIns="0" bIns="0" anchor="ctr">
+            <a:normAutofit fontScale="100000"/>
+          </a:bodyPr>
+          <a:lstStyle xmlns:a="http://schemas.openxmlformats.org/drawingml/2006/main"/>
+          <a:p xmlns:a="http://schemas.openxmlformats.org/drawingml/2006/main">
+            <a:pPr algn="ctr">
+              <a:defRPr sz="1200" b="1">
+                <a:solidFill>
+                  <a:srgbClr val="FFFFFF"/>
+                </a:solidFill>
+                <a:latin typeface="Microsoft YaHei"/>
+                <a:ea typeface="Microsoft YaHei"/>
+                <a:cs typeface="Microsoft YaHei"/>
+              </a:defRPr>
+            </a:pPr>
+            <a:r>
+              <a:rPr sz="1200" b="1">
+                <a:solidFill>
+                  <a:srgbClr val="FFFFFF"/>
+                </a:solidFill>
+                <a:latin typeface="Microsoft YaHei"/>
+                <a:ea typeface="Microsoft YaHei"/>
+                <a:cs typeface="Microsoft YaHei"/>
+              </a:rPr>
+              <a:t>02</a:t>
+            </a:r>
+          </a:p>
+        </p:txBody>
+      </p:sp>
+      <p:sp>
+        <p:nvSpPr>
+          <p:cNvPr id="11" name="PPAGENT_QA|parent=radial-card-1|domains=radial-content">
+            <a:extLst xmlns:a="http://schemas.openxmlformats.org/drawingml/2006/main">
+              <a:ext uri="{FF2B5EF4-FFF2-40B4-BE49-F238E27FC236}">
+                <a16:creationId xmlns:a16="http://schemas.microsoft.com/office/drawing/2014/main" id="{25767705-037E-4924-AA28-8696578D2486}"/>
+              </a:ext>
+            </a:extLst>
+          </p:cNvPr>
+          <p:cNvSpPr>
+            <a:spLocks xmlns:a="http://schemas.openxmlformats.org/drawingml/2006/main" noGrp="1"/>
+          </p:cNvSpPr>
+          <p:nvPr/>
+        </p:nvSpPr>
+        <p:spPr>
+          <a:xfrm xmlns:a="http://schemas.openxmlformats.org/drawingml/2006/main">
+            <a:off x="647700" y="1889125"/>
+            <a:ext cx="2857500" cy="762000"/>
+          </a:xfrm>
+          <a:prstGeom xmlns:a="http://schemas.openxmlformats.org/drawingml/2006/main" prst="roundRect">
+            <a:avLst>
+              <a:gd name="adj" fmla="val 15000"/>
+            </a:avLst>
+          </a:prstGeom>
+          <a:noFill xmlns:a="http://schemas.openxmlformats.org/drawingml/2006/main"/>
+          <a:ln xmlns:a="http://schemas.openxmlformats.org/drawingml/2006/main" w="0">
+            <a:noFill/>
+            <a:prstDash val="solid"/>
+          </a:ln>
+        </p:spPr>
+      </p:sp>
+      <p:sp>
+        <p:nvSpPr>
+          <p:cNvPr id="12" name="PPAGENT_QA|within=radial-card-1|role=title">
+            <a:extLst xmlns:a="http://schemas.openxmlformats.org/drawingml/2006/main">
+              <a:ext uri="{FF2B5EF4-FFF2-40B4-BE49-F238E27FC236}">
+                <a16:creationId xmlns:a16="http://schemas.microsoft.com/office/drawing/2014/main" id="{277B65CD-971D-4248-9E29-9D24660DD6F8}"/>
+              </a:ext>
+            </a:extLst>
+          </p:cNvPr>
+          <p:cNvSpPr>
+            <a:spLocks xmlns:a="http://schemas.openxmlformats.org/drawingml/2006/main" noGrp="1"/>
+          </p:cNvSpPr>
+          <p:nvPr/>
+        </p:nvSpPr>
+        <p:spPr>
+          <a:xfrm xmlns:a="http://schemas.openxmlformats.org/drawingml/2006/main">
+            <a:off x="647700" y="1889125"/>
+            <a:ext cx="2857500" cy="285750"/>
+          </a:xfrm>
+          <a:prstGeom xmlns:a="http://schemas.openxmlformats.org/drawingml/2006/main" prst="rect">
+            <a:avLst/>
+          </a:prstGeom>
+          <a:noFill xmlns:a="http://schemas.openxmlformats.org/drawingml/2006/main"/>
+          <a:ln xmlns:a="http://schemas.openxmlformats.org/drawingml/2006/main" w="0">
+            <a:noFill/>
+            <a:prstDash val="solid"/>
+          </a:ln>
+        </p:spPr>
+        <p:txBody>
+          <a:bodyPr xmlns:a="http://schemas.openxmlformats.org/drawingml/2006/main" lIns="0" tIns="0" rIns="0" bIns="0" anchor="ctr">
+            <a:normAutofit fontScale="100000"/>
+          </a:bodyPr>
+          <a:lstStyle xmlns:a="http://schemas.openxmlformats.org/drawingml/2006/main"/>
+          <a:p xmlns:a="http://schemas.openxmlformats.org/drawingml/2006/main">
+            <a:pPr algn="r">
+              <a:defRPr sz="1425" b="1">
+                <a:solidFill>
+                  <a:srgbClr val="1677C8"/>
+                </a:solidFill>
+                <a:latin typeface="Microsoft YaHei"/>
+                <a:ea typeface="Microsoft YaHei"/>
+                <a:cs typeface="Microsoft YaHei"/>
+              </a:defRPr>
+            </a:pPr>
+            <a:r>
+              <a:rPr sz="1425" b="1">
+                <a:solidFill>
+                  <a:srgbClr val="1677C8"/>
+                </a:solidFill>
+                <a:latin typeface="Microsoft YaHei"/>
+                <a:ea typeface="Microsoft YaHei"/>
+                <a:cs typeface="Microsoft YaHei"/>
+              </a:rPr>
+              <a:t>快速响应</a:t>
+            </a:r>
+          </a:p>
+        </p:txBody>
+      </p:sp>
+      <p:sp>
+        <p:nvSpPr>
+          <p:cNvPr id="13" name="PPAGENT_CONNECTOR|from=radial-center|fromSide=left|to=radial-node-1|toSide=right">
+            <a:extLst xmlns:a="http://schemas.openxmlformats.org/drawingml/2006/main">
+              <a:ext uri="{FF2B5EF4-FFF2-40B4-BE49-F238E27FC236}">
+                <a16:creationId xmlns:a16="http://schemas.microsoft.com/office/drawing/2014/main" id="{B91B6043-5F82-4E6F-AEC4-1754007B7F89}"/>
+              </a:ext>
+            </a:extLst>
+          </p:cNvPr>
+          <p:cNvSpPr>
+            <a:spLocks xmlns:a="http://schemas.openxmlformats.org/drawingml/2006/main" noGrp="1"/>
+          </p:cNvSpPr>
+          <p:nvPr/>
+        </p:nvSpPr>
+        <p:spPr>
+          <a:xfrm xmlns:a="http://schemas.openxmlformats.org/drawingml/2006/main" flipH="1" flipV="1">
+            <a:off x="4076700" y="2270125"/>
+            <a:ext cx="781050" cy="1397000"/>
+          </a:xfrm>
+          <a:prstGeom xmlns:a="http://schemas.openxmlformats.org/drawingml/2006/main" prst="line">
+            <a:avLst/>
+          </a:prstGeom>
+          <a:noFill xmlns:a="http://schemas.openxmlformats.org/drawingml/2006/main"/>
+          <a:ln xmlns:a="http://schemas.openxmlformats.org/drawingml/2006/main" w="14288">
+            <a:solidFill>
+              <a:srgbClr val="B7CCE0"/>
+            </a:solidFill>
+            <a:prstDash val="solid"/>
+          </a:ln>
+        </p:spPr>
+      </p:sp>
+      <p:sp>
+        <p:nvSpPr>
+          <p:cNvPr id="14" name="PPAGENT_QA|parent=radial-node-2|domains=radial-shape">
+            <a:extLst xmlns:a="http://schemas.openxmlformats.org/drawingml/2006/main">
+              <a:ext uri="{FF2B5EF4-FFF2-40B4-BE49-F238E27FC236}">
+                <a16:creationId xmlns:a16="http://schemas.microsoft.com/office/drawing/2014/main" id="{10F650B6-BB39-44BC-93A0-27B3264289DE}"/>
+              </a:ext>
+            </a:extLst>
+          </p:cNvPr>
+          <p:cNvSpPr>
+            <a:spLocks xmlns:a="http://schemas.openxmlformats.org/drawingml/2006/main" noGrp="1"/>
+          </p:cNvSpPr>
+          <p:nvPr/>
+        </p:nvSpPr>
+        <p:spPr>
+          <a:xfrm xmlns:a="http://schemas.openxmlformats.org/drawingml/2006/main">
+            <a:off x="8115300" y="2051050"/>
+            <a:ext cx="438150" cy="438150"/>
+          </a:xfrm>
+          <a:prstGeom xmlns:a="http://schemas.openxmlformats.org/drawingml/2006/main" prst="ellipse">
+            <a:avLst/>
+          </a:prstGeom>
+          <a:solidFill xmlns:a="http://schemas.openxmlformats.org/drawingml/2006/main">
+            <a:srgbClr val="14CBD1"/>
+          </a:solidFill>
+          <a:ln xmlns:a="http://schemas.openxmlformats.org/drawingml/2006/main" w="28575">
+            <a:solidFill>
+              <a:srgbClr val="FFFFFF"/>
+            </a:solidFill>
+            <a:prstDash val="solid"/>
+          </a:ln>
+        </p:spPr>
+        <p:style>
+          <a:lnRef xmlns:a="http://schemas.openxmlformats.org/drawingml/2006/main" idx="0"/>
+          <a:fillRef xmlns:a="http://schemas.openxmlformats.org/drawingml/2006/main" idx="0"/>
+          <a:effectRef xmlns:a="http://schemas.openxmlformats.org/drawingml/2006/main" idx="4"/>
+          <a:fontRef xmlns:a="http://schemas.openxmlformats.org/drawingml/2006/main" idx="major"/>
+        </p:style>
+        <p:txBody>
+          <a:bodyPr xmlns:a="http://schemas.openxmlformats.org/drawingml/2006/main" lIns="0" tIns="0" rIns="0" bIns="0" anchor="ctr">
+            <a:normAutofit fontScale="100000"/>
+          </a:bodyPr>
+          <a:lstStyle xmlns:a="http://schemas.openxmlformats.org/drawingml/2006/main"/>
+          <a:p xmlns:a="http://schemas.openxmlformats.org/drawingml/2006/main">
+            <a:pPr algn="ctr">
+              <a:defRPr sz="1200" b="1">
+                <a:solidFill>
+                  <a:srgbClr val="FFFFFF"/>
+                </a:solidFill>
+                <a:latin typeface="Microsoft YaHei"/>
+                <a:ea typeface="Microsoft YaHei"/>
+                <a:cs typeface="Microsoft YaHei"/>
+              </a:defRPr>
+            </a:pPr>
+            <a:r>
+              <a:rPr sz="1200" b="1">
+                <a:solidFill>
+                  <a:srgbClr val="FFFFFF"/>
+                </a:solidFill>
+                <a:latin typeface="Microsoft YaHei"/>
+                <a:ea typeface="Microsoft YaHei"/>
+                <a:cs typeface="Microsoft YaHei"/>
+              </a:rPr>
+              <a:t>03</a:t>
+            </a:r>
+          </a:p>
+        </p:txBody>
+      </p:sp>
+      <p:sp>
+        <p:nvSpPr>
+          <p:cNvPr id="15" name="PPAGENT_QA|parent=radial-card-2|domains=radial-content">
+            <a:extLst xmlns:a="http://schemas.openxmlformats.org/drawingml/2006/main">
+              <a:ext uri="{FF2B5EF4-FFF2-40B4-BE49-F238E27FC236}">
+                <a16:creationId xmlns:a16="http://schemas.microsoft.com/office/drawing/2014/main" id="{483CE078-0E55-4EE5-9AD3-79E6ADB05FA1}"/>
+              </a:ext>
+            </a:extLst>
+          </p:cNvPr>
+          <p:cNvSpPr>
+            <a:spLocks xmlns:a="http://schemas.openxmlformats.org/drawingml/2006/main" noGrp="1"/>
+          </p:cNvSpPr>
+          <p:nvPr/>
+        </p:nvSpPr>
+        <p:spPr>
+          <a:xfrm xmlns:a="http://schemas.openxmlformats.org/drawingml/2006/main">
+            <a:off x="8686800" y="1889125"/>
+            <a:ext cx="2857500" cy="762000"/>
+          </a:xfrm>
+          <a:prstGeom xmlns:a="http://schemas.openxmlformats.org/drawingml/2006/main" prst="roundRect">
+            <a:avLst>
+              <a:gd name="adj" fmla="val 15000"/>
+            </a:avLst>
+          </a:prstGeom>
+          <a:noFill xmlns:a="http://schemas.openxmlformats.org/drawingml/2006/main"/>
+          <a:ln xmlns:a="http://schemas.openxmlformats.org/drawingml/2006/main" w="0">
+            <a:noFill/>
+            <a:prstDash val="solid"/>
+          </a:ln>
+        </p:spPr>
+      </p:sp>
+      <p:sp>
+        <p:nvSpPr>
+          <p:cNvPr id="16" name="PPAGENT_QA|within=radial-card-2|role=title">
+            <a:extLst xmlns:a="http://schemas.openxmlformats.org/drawingml/2006/main">
+              <a:ext uri="{FF2B5EF4-FFF2-40B4-BE49-F238E27FC236}">
+                <a16:creationId xmlns:a16="http://schemas.microsoft.com/office/drawing/2014/main" id="{093745B9-6FD8-4736-B2D8-1EEBD2638D91}"/>
+              </a:ext>
+            </a:extLst>
+          </p:cNvPr>
+          <p:cNvSpPr>
+            <a:spLocks xmlns:a="http://schemas.openxmlformats.org/drawingml/2006/main" noGrp="1"/>
+          </p:cNvSpPr>
+          <p:nvPr/>
+        </p:nvSpPr>
+        <p:spPr>
+          <a:xfrm xmlns:a="http://schemas.openxmlformats.org/drawingml/2006/main">
+            <a:off x="8686800" y="1889125"/>
+            <a:ext cx="2857500" cy="285750"/>
+          </a:xfrm>
+          <a:prstGeom xmlns:a="http://schemas.openxmlformats.org/drawingml/2006/main" prst="rect">
+            <a:avLst/>
+          </a:prstGeom>
+          <a:noFill xmlns:a="http://schemas.openxmlformats.org/drawingml/2006/main"/>
+          <a:ln xmlns:a="http://schemas.openxmlformats.org/drawingml/2006/main" w="0">
+            <a:noFill/>
+            <a:prstDash val="solid"/>
+          </a:ln>
+        </p:spPr>
+        <p:txBody>
+          <a:bodyPr xmlns:a="http://schemas.openxmlformats.org/drawingml/2006/main" lIns="0" tIns="0" rIns="0" bIns="0" anchor="ctr">
+            <a:normAutofit fontScale="100000"/>
+          </a:bodyPr>
+          <a:lstStyle xmlns:a="http://schemas.openxmlformats.org/drawingml/2006/main"/>
+          <a:p xmlns:a="http://schemas.openxmlformats.org/drawingml/2006/main">
+            <a:pPr algn="l">
+              <a:defRPr sz="1425" b="1">
+                <a:solidFill>
+                  <a:srgbClr val="1677C8"/>
+                </a:solidFill>
+                <a:latin typeface="Microsoft YaHei"/>
+                <a:ea typeface="Microsoft YaHei"/>
+                <a:cs typeface="Microsoft YaHei"/>
+              </a:defRPr>
+            </a:pPr>
+            <a:r>
+              <a:rPr sz="1425" b="1">
+                <a:solidFill>
+                  <a:srgbClr val="1677C8"/>
+                </a:solidFill>
+                <a:latin typeface="Microsoft YaHei"/>
+                <a:ea typeface="Microsoft YaHei"/>
+                <a:cs typeface="Microsoft YaHei"/>
+              </a:rPr>
+              <a:t>质量可控</a:t>
+            </a:r>
+          </a:p>
+        </p:txBody>
+      </p:sp>
+      <p:sp>
+        <p:nvSpPr>
+          <p:cNvPr id="17" name="PPAGENT_CONNECTOR|from=radial-center|fromSide=right|to=radial-node-2|toSide=left">
+            <a:extLst xmlns:a="http://schemas.openxmlformats.org/drawingml/2006/main">
+              <a:ext uri="{FF2B5EF4-FFF2-40B4-BE49-F238E27FC236}">
+                <a16:creationId xmlns:a16="http://schemas.microsoft.com/office/drawing/2014/main" id="{1E9DE282-D633-4D60-87F4-BBF7304DD75D}"/>
+              </a:ext>
+            </a:extLst>
+          </p:cNvPr>
+          <p:cNvSpPr>
+            <a:spLocks xmlns:a="http://schemas.openxmlformats.org/drawingml/2006/main" noGrp="1"/>
+          </p:cNvSpPr>
+          <p:nvPr/>
+        </p:nvSpPr>
+        <p:spPr>
+          <a:xfrm xmlns:a="http://schemas.openxmlformats.org/drawingml/2006/main" flipH="0" flipV="1">
+            <a:off x="7334250" y="2270125"/>
+            <a:ext cx="781050" cy="1397000"/>
+          </a:xfrm>
+          <a:prstGeom xmlns:a="http://schemas.openxmlformats.org/drawingml/2006/main" prst="line">
+            <a:avLst/>
+          </a:prstGeom>
+          <a:noFill xmlns:a="http://schemas.openxmlformats.org/drawingml/2006/main"/>
+          <a:ln xmlns:a="http://schemas.openxmlformats.org/drawingml/2006/main" w="14288">
+            <a:solidFill>
+              <a:srgbClr val="B7CCE0"/>
+            </a:solidFill>
+            <a:prstDash val="solid"/>
+          </a:ln>
+        </p:spPr>
+      </p:sp>
+      <p:sp>
+        <p:nvSpPr>
+          <p:cNvPr id="18" name="PPAGENT_QA|parent=radial-node-3|domains=radial-shape">
+            <a:extLst xmlns:a="http://schemas.openxmlformats.org/drawingml/2006/main">
+              <a:ext uri="{FF2B5EF4-FFF2-40B4-BE49-F238E27FC236}">
+                <a16:creationId xmlns:a16="http://schemas.microsoft.com/office/drawing/2014/main" id="{838D611B-80AD-4F97-BBE5-18FA490BC102}"/>
+              </a:ext>
+            </a:extLst>
+          </p:cNvPr>
+          <p:cNvSpPr>
+            <a:spLocks xmlns:a="http://schemas.openxmlformats.org/drawingml/2006/main" noGrp="1"/>
+          </p:cNvSpPr>
+          <p:nvPr/>
+        </p:nvSpPr>
+        <p:spPr>
+          <a:xfrm xmlns:a="http://schemas.openxmlformats.org/drawingml/2006/main">
+            <a:off x="3638550" y="3448050"/>
+            <a:ext cx="438150" cy="438150"/>
+          </a:xfrm>
+          <a:prstGeom xmlns:a="http://schemas.openxmlformats.org/drawingml/2006/main" prst="ellipse">
+            <a:avLst/>
+          </a:prstGeom>
+          <a:solidFill xmlns:a="http://schemas.openxmlformats.org/drawingml/2006/main">
+            <a:srgbClr val="00A8D8"/>
+          </a:solidFill>
+          <a:ln xmlns:a="http://schemas.openxmlformats.org/drawingml/2006/main" w="28575">
+            <a:solidFill>
+              <a:srgbClr val="FFFFFF"/>
+            </a:solidFill>
+            <a:prstDash val="solid"/>
+          </a:ln>
+        </p:spPr>
+        <p:style>
+          <a:lnRef xmlns:a="http://schemas.openxmlformats.org/drawingml/2006/main" idx="0"/>
+          <a:fillRef xmlns:a="http://schemas.openxmlformats.org/drawingml/2006/main" idx="0"/>
+          <a:effectRef xmlns:a="http://schemas.openxmlformats.org/drawingml/2006/main" idx="4"/>
+          <a:fontRef xmlns:a="http://schemas.openxmlformats.org/drawingml/2006/main" idx="major"/>
+        </p:style>
+        <p:txBody>
+          <a:bodyPr xmlns:a="http://schemas.openxmlformats.org/drawingml/2006/main" lIns="0" tIns="0" rIns="0" bIns="0" anchor="ctr">
+            <a:normAutofit fontScale="100000"/>
+          </a:bodyPr>
+          <a:lstStyle xmlns:a="http://schemas.openxmlformats.org/drawingml/2006/main"/>
+          <a:p xmlns:a="http://schemas.openxmlformats.org/drawingml/2006/main">
+            <a:pPr algn="ctr">
+              <a:defRPr sz="1200" b="1">
+                <a:solidFill>
+                  <a:srgbClr val="FFFFFF"/>
+                </a:solidFill>
+                <a:latin typeface="Microsoft YaHei"/>
+                <a:ea typeface="Microsoft YaHei"/>
+                <a:cs typeface="Microsoft YaHei"/>
+              </a:defRPr>
+            </a:pPr>
+            <a:r>
+              <a:rPr sz="1200" b="1">
+                <a:solidFill>
+                  <a:srgbClr val="FFFFFF"/>
+                </a:solidFill>
+                <a:latin typeface="Microsoft YaHei"/>
+                <a:ea typeface="Microsoft YaHei"/>
+                <a:cs typeface="Microsoft YaHei"/>
+              </a:rPr>
+              <a:t>04</a:t>
+            </a:r>
+          </a:p>
+        </p:txBody>
+      </p:sp>
+      <p:sp>
+        <p:nvSpPr>
+          <p:cNvPr id="19" name="PPAGENT_QA|parent=radial-card-3|domains=radial-content">
+            <a:extLst xmlns:a="http://schemas.openxmlformats.org/drawingml/2006/main">
+              <a:ext uri="{FF2B5EF4-FFF2-40B4-BE49-F238E27FC236}">
+                <a16:creationId xmlns:a16="http://schemas.microsoft.com/office/drawing/2014/main" id="{2424495E-658E-4471-9EEC-A3E03B420879}"/>
+              </a:ext>
+            </a:extLst>
+          </p:cNvPr>
+          <p:cNvSpPr>
+            <a:spLocks xmlns:a="http://schemas.openxmlformats.org/drawingml/2006/main" noGrp="1"/>
+          </p:cNvSpPr>
+          <p:nvPr/>
+        </p:nvSpPr>
+        <p:spPr>
+          <a:xfrm xmlns:a="http://schemas.openxmlformats.org/drawingml/2006/main">
+            <a:off x="647700" y="3286125"/>
+            <a:ext cx="2857500" cy="762000"/>
+          </a:xfrm>
+          <a:prstGeom xmlns:a="http://schemas.openxmlformats.org/drawingml/2006/main" prst="roundRect">
+            <a:avLst>
+              <a:gd name="adj" fmla="val 15000"/>
+            </a:avLst>
+          </a:prstGeom>
+          <a:noFill xmlns:a="http://schemas.openxmlformats.org/drawingml/2006/main"/>
+          <a:ln xmlns:a="http://schemas.openxmlformats.org/drawingml/2006/main" w="0">
+            <a:noFill/>
+            <a:prstDash val="solid"/>
+          </a:ln>
+        </p:spPr>
+      </p:sp>
+      <p:sp>
+        <p:nvSpPr>
+          <p:cNvPr id="20" name="PPAGENT_QA|within=radial-card-3|role=title">
+            <a:extLst xmlns:a="http://schemas.openxmlformats.org/drawingml/2006/main">
+              <a:ext uri="{FF2B5EF4-FFF2-40B4-BE49-F238E27FC236}">
+                <a16:creationId xmlns:a16="http://schemas.microsoft.com/office/drawing/2014/main" id="{2E8056FE-5E80-431E-9218-B4045376749E}"/>
+              </a:ext>
+            </a:extLst>
+          </p:cNvPr>
+          <p:cNvSpPr>
+            <a:spLocks xmlns:a="http://schemas.openxmlformats.org/drawingml/2006/main" noGrp="1"/>
+          </p:cNvSpPr>
+          <p:nvPr/>
+        </p:nvSpPr>
+        <p:spPr>
+          <a:xfrm xmlns:a="http://schemas.openxmlformats.org/drawingml/2006/main">
+            <a:off x="647700" y="3286125"/>
+            <a:ext cx="2857500" cy="285750"/>
+          </a:xfrm>
+          <a:prstGeom xmlns:a="http://schemas.openxmlformats.org/drawingml/2006/main" prst="rect">
+            <a:avLst/>
+          </a:prstGeom>
+          <a:noFill xmlns:a="http://schemas.openxmlformats.org/drawingml/2006/main"/>
+          <a:ln xmlns:a="http://schemas.openxmlformats.org/drawingml/2006/main" w="0">
+            <a:noFill/>
+            <a:prstDash val="solid"/>
+          </a:ln>
+        </p:spPr>
+        <p:txBody>
+          <a:bodyPr xmlns:a="http://schemas.openxmlformats.org/drawingml/2006/main" lIns="0" tIns="0" rIns="0" bIns="0" anchor="ctr">
+            <a:normAutofit fontScale="100000"/>
+          </a:bodyPr>
+          <a:lstStyle xmlns:a="http://schemas.openxmlformats.org/drawingml/2006/main"/>
+          <a:p xmlns:a="http://schemas.openxmlformats.org/drawingml/2006/main">
+            <a:pPr algn="r">
+              <a:defRPr sz="1425" b="1">
+                <a:solidFill>
+                  <a:srgbClr val="1677C8"/>
+                </a:solidFill>
+                <a:latin typeface="Microsoft YaHei"/>
+                <a:ea typeface="Microsoft YaHei"/>
+                <a:cs typeface="Microsoft YaHei"/>
+              </a:defRPr>
+            </a:pPr>
+            <a:r>
+              <a:rPr sz="1425" b="1">
+                <a:solidFill>
+                  <a:srgbClr val="1677C8"/>
+                </a:solidFill>
+                <a:latin typeface="Microsoft YaHei"/>
+                <a:ea typeface="Microsoft YaHei"/>
+                <a:cs typeface="Microsoft YaHei"/>
+              </a:rPr>
+              <a:t>持续积累</a:t>
+            </a:r>
+          </a:p>
+        </p:txBody>
+      </p:sp>
+      <p:sp>
+        <p:nvSpPr>
+          <p:cNvPr id="21" name="PPAGENT_CONNECTOR|from=radial-center|fromSide=left|to=radial-node-3|toSide=right">
+            <a:extLst xmlns:a="http://schemas.openxmlformats.org/drawingml/2006/main">
+              <a:ext uri="{FF2B5EF4-FFF2-40B4-BE49-F238E27FC236}">
+                <a16:creationId xmlns:a16="http://schemas.microsoft.com/office/drawing/2014/main" id="{7DBBC450-38F3-4ED5-AA5C-19EC16F45BAA}"/>
+              </a:ext>
+            </a:extLst>
+          </p:cNvPr>
+          <p:cNvSpPr>
+            <a:spLocks xmlns:a="http://schemas.openxmlformats.org/drawingml/2006/main" noGrp="1"/>
+          </p:cNvSpPr>
+          <p:nvPr/>
+        </p:nvSpPr>
+        <p:spPr>
+          <a:xfrm xmlns:a="http://schemas.openxmlformats.org/drawingml/2006/main" flipH="1" flipV="0">
+            <a:off x="4076700" y="3667125"/>
+            <a:ext cx="781050" cy="0"/>
+          </a:xfrm>
+          <a:prstGeom xmlns:a="http://schemas.openxmlformats.org/drawingml/2006/main" prst="line">
+            <a:avLst/>
+          </a:prstGeom>
+          <a:noFill xmlns:a="http://schemas.openxmlformats.org/drawingml/2006/main"/>
+          <a:ln xmlns:a="http://schemas.openxmlformats.org/drawingml/2006/main" w="14288">
+            <a:solidFill>
+              <a:srgbClr val="B7CCE0"/>
+            </a:solidFill>
+            <a:prstDash val="solid"/>
+          </a:ln>
+        </p:spPr>
+      </p:sp>
+      <p:sp>
+        <p:nvSpPr>
+          <p:cNvPr id="22" name="PPAGENT_QA|parent=radial-node-4|domains=radial-shape">
+            <a:extLst xmlns:a="http://schemas.openxmlformats.org/drawingml/2006/main">
+              <a:ext uri="{FF2B5EF4-FFF2-40B4-BE49-F238E27FC236}">
+                <a16:creationId xmlns:a16="http://schemas.microsoft.com/office/drawing/2014/main" id="{EB780BD4-DD36-465B-9800-499DEA2D7D70}"/>
+              </a:ext>
+            </a:extLst>
+          </p:cNvPr>
+          <p:cNvSpPr>
+            <a:spLocks xmlns:a="http://schemas.openxmlformats.org/drawingml/2006/main" noGrp="1"/>
+          </p:cNvSpPr>
+          <p:nvPr/>
+        </p:nvSpPr>
+        <p:spPr>
+          <a:xfrm xmlns:a="http://schemas.openxmlformats.org/drawingml/2006/main">
+            <a:off x="8115300" y="3448050"/>
+            <a:ext cx="438150" cy="438150"/>
+          </a:xfrm>
+          <a:prstGeom xmlns:a="http://schemas.openxmlformats.org/drawingml/2006/main" prst="ellipse">
+            <a:avLst/>
+          </a:prstGeom>
+          <a:solidFill xmlns:a="http://schemas.openxmlformats.org/drawingml/2006/main">
+            <a:srgbClr val="14CBD1"/>
+          </a:solidFill>
+          <a:ln xmlns:a="http://schemas.openxmlformats.org/drawingml/2006/main" w="28575">
+            <a:solidFill>
+              <a:srgbClr val="FFFFFF"/>
+            </a:solidFill>
+            <a:prstDash val="solid"/>
+          </a:ln>
+        </p:spPr>
+        <p:style>
+          <a:lnRef xmlns:a="http://schemas.openxmlformats.org/drawingml/2006/main" idx="0"/>
+          <a:fillRef xmlns:a="http://schemas.openxmlformats.org/drawingml/2006/main" idx="0"/>
+          <a:effectRef xmlns:a="http://schemas.openxmlformats.org/drawingml/2006/main" idx="4"/>
+          <a:fontRef xmlns:a="http://schemas.openxmlformats.org/drawingml/2006/main" idx="major"/>
+        </p:style>
+        <p:txBody>
+          <a:bodyPr xmlns:a="http://schemas.openxmlformats.org/drawingml/2006/main" lIns="0" tIns="0" rIns="0" bIns="0" anchor="ctr">
+            <a:normAutofit fontScale="100000"/>
+          </a:bodyPr>
+          <a:lstStyle xmlns:a="http://schemas.openxmlformats.org/drawingml/2006/main"/>
+          <a:p xmlns:a="http://schemas.openxmlformats.org/drawingml/2006/main">
+            <a:pPr algn="ctr">
+              <a:defRPr sz="1200" b="1">
+                <a:solidFill>
+                  <a:srgbClr val="FFFFFF"/>
+                </a:solidFill>
+                <a:latin typeface="Microsoft YaHei"/>
+                <a:ea typeface="Microsoft YaHei"/>
+                <a:cs typeface="Microsoft YaHei"/>
+              </a:defRPr>
+            </a:pPr>
+            <a:r>
+              <a:rPr sz="1200" b="1">
+                <a:solidFill>
+                  <a:srgbClr val="FFFFFF"/>
+                </a:solidFill>
+                <a:latin typeface="Microsoft YaHei"/>
+                <a:ea typeface="Microsoft YaHei"/>
+                <a:cs typeface="Microsoft YaHei"/>
+              </a:rPr>
+              <a:t>05</a:t>
+            </a:r>
+          </a:p>
+        </p:txBody>
+      </p:sp>
+      <p:sp>
+        <p:nvSpPr>
+          <p:cNvPr id="23" name="PPAGENT_QA|parent=radial-card-4|domains=radial-content">
+            <a:extLst xmlns:a="http://schemas.openxmlformats.org/drawingml/2006/main">
+              <a:ext uri="{FF2B5EF4-FFF2-40B4-BE49-F238E27FC236}">
+                <a16:creationId xmlns:a16="http://schemas.microsoft.com/office/drawing/2014/main" id="{406824DE-2A9B-47C3-B682-F70DC550FB5A}"/>
+              </a:ext>
+            </a:extLst>
+          </p:cNvPr>
+          <p:cNvSpPr>
+            <a:spLocks xmlns:a="http://schemas.openxmlformats.org/drawingml/2006/main" noGrp="1"/>
+          </p:cNvSpPr>
+          <p:nvPr/>
+        </p:nvSpPr>
+        <p:spPr>
+          <a:xfrm xmlns:a="http://schemas.openxmlformats.org/drawingml/2006/main">
+            <a:off x="8686800" y="3286125"/>
+            <a:ext cx="2857500" cy="762000"/>
+          </a:xfrm>
+          <a:prstGeom xmlns:a="http://schemas.openxmlformats.org/drawingml/2006/main" prst="roundRect">
+            <a:avLst>
+              <a:gd name="adj" fmla="val 15000"/>
+            </a:avLst>
+          </a:prstGeom>
+          <a:noFill xmlns:a="http://schemas.openxmlformats.org/drawingml/2006/main"/>
+          <a:ln xmlns:a="http://schemas.openxmlformats.org/drawingml/2006/main" w="0">
+            <a:noFill/>
+            <a:prstDash val="solid"/>
+          </a:ln>
+        </p:spPr>
+      </p:sp>
+      <p:sp>
+        <p:nvSpPr>
+          <p:cNvPr id="24" name="PPAGENT_QA|within=radial-card-4|role=title">
+            <a:extLst xmlns:a="http://schemas.openxmlformats.org/drawingml/2006/main">
+              <a:ext uri="{FF2B5EF4-FFF2-40B4-BE49-F238E27FC236}">
+                <a16:creationId xmlns:a16="http://schemas.microsoft.com/office/drawing/2014/main" id="{806B79FC-84D5-4EFD-A31C-7B331ACEF587}"/>
+              </a:ext>
+            </a:extLst>
+          </p:cNvPr>
+          <p:cNvSpPr>
+            <a:spLocks xmlns:a="http://schemas.openxmlformats.org/drawingml/2006/main" noGrp="1"/>
+          </p:cNvSpPr>
+          <p:nvPr/>
+        </p:nvSpPr>
+        <p:spPr>
+          <a:xfrm xmlns:a="http://schemas.openxmlformats.org/drawingml/2006/main">
+            <a:off x="8686800" y="3286125"/>
+            <a:ext cx="2857500" cy="285750"/>
+          </a:xfrm>
+          <a:prstGeom xmlns:a="http://schemas.openxmlformats.org/drawingml/2006/main" prst="rect">
+            <a:avLst/>
+          </a:prstGeom>
+          <a:noFill xmlns:a="http://schemas.openxmlformats.org/drawingml/2006/main"/>
+          <a:ln xmlns:a="http://schemas.openxmlformats.org/drawingml/2006/main" w="0">
+            <a:noFill/>
+            <a:prstDash val="solid"/>
+          </a:ln>
+        </p:spPr>
+        <p:txBody>
+          <a:bodyPr xmlns:a="http://schemas.openxmlformats.org/drawingml/2006/main" lIns="0" tIns="0" rIns="0" bIns="0" anchor="ctr">
+            <a:normAutofit fontScale="100000"/>
+          </a:bodyPr>
+          <a:lstStyle xmlns:a="http://schemas.openxmlformats.org/drawingml/2006/main"/>
+          <a:p xmlns:a="http://schemas.openxmlformats.org/drawingml/2006/main">
+            <a:pPr algn="l">
+              <a:defRPr sz="1425" b="1">
+                <a:solidFill>
+                  <a:srgbClr val="1677C8"/>
+                </a:solidFill>
+                <a:latin typeface="Microsoft YaHei"/>
+                <a:ea typeface="Microsoft YaHei"/>
+                <a:cs typeface="Microsoft YaHei"/>
+              </a:defRPr>
+            </a:pPr>
+            <a:r>
+              <a:rPr sz="1425" b="1">
+                <a:solidFill>
+                  <a:srgbClr val="1677C8"/>
+                </a:solidFill>
+                <a:latin typeface="Microsoft YaHei"/>
+                <a:ea typeface="Microsoft YaHei"/>
+                <a:cs typeface="Microsoft YaHei"/>
+              </a:rPr>
+              <a:t>资源整合</a:t>
+            </a:r>
+          </a:p>
+        </p:txBody>
+      </p:sp>
+      <p:sp>
+        <p:nvSpPr>
+          <p:cNvPr id="25" name="PPAGENT_CONNECTOR|from=radial-center|fromSide=right|to=radial-node-4|toSide=left">
+            <a:extLst xmlns:a="http://schemas.openxmlformats.org/drawingml/2006/main">
+              <a:ext uri="{FF2B5EF4-FFF2-40B4-BE49-F238E27FC236}">
+                <a16:creationId xmlns:a16="http://schemas.microsoft.com/office/drawing/2014/main" id="{E809393B-F803-4C67-A8AE-791693A6CFA1}"/>
+              </a:ext>
+            </a:extLst>
+          </p:cNvPr>
+          <p:cNvSpPr>
+            <a:spLocks xmlns:a="http://schemas.openxmlformats.org/drawingml/2006/main" noGrp="1"/>
+          </p:cNvSpPr>
+          <p:nvPr/>
+        </p:nvSpPr>
+        <p:spPr>
+          <a:xfrm xmlns:a="http://schemas.openxmlformats.org/drawingml/2006/main" flipH="0" flipV="0">
+            <a:off x="7334250" y="3667125"/>
+            <a:ext cx="781050" cy="0"/>
+          </a:xfrm>
+          <a:prstGeom xmlns:a="http://schemas.openxmlformats.org/drawingml/2006/main" prst="line">
+            <a:avLst/>
+          </a:prstGeom>
+          <a:noFill xmlns:a="http://schemas.openxmlformats.org/drawingml/2006/main"/>
+          <a:ln xmlns:a="http://schemas.openxmlformats.org/drawingml/2006/main" w="14288">
+            <a:solidFill>
+              <a:srgbClr val="B7CCE0"/>
+            </a:solidFill>
+            <a:prstDash val="solid"/>
+          </a:ln>
+        </p:spPr>
+      </p:sp>
+      <p:sp>
+        <p:nvSpPr>
+          <p:cNvPr id="26" name="PPAGENT_QA|parent=radial-node-5|domains=radial-shape">
+            <a:extLst xmlns:a="http://schemas.openxmlformats.org/drawingml/2006/main">
+              <a:ext uri="{FF2B5EF4-FFF2-40B4-BE49-F238E27FC236}">
+                <a16:creationId xmlns:a16="http://schemas.microsoft.com/office/drawing/2014/main" id="{02D462C8-6C54-41C8-9796-0F306144D776}"/>
+              </a:ext>
+            </a:extLst>
+          </p:cNvPr>
+          <p:cNvSpPr>
+            <a:spLocks xmlns:a="http://schemas.openxmlformats.org/drawingml/2006/main" noGrp="1"/>
+          </p:cNvSpPr>
+          <p:nvPr/>
+        </p:nvSpPr>
+        <p:spPr>
+          <a:xfrm xmlns:a="http://schemas.openxmlformats.org/drawingml/2006/main">
+            <a:off x="3638550" y="4845050"/>
+            <a:ext cx="438150" cy="438150"/>
+          </a:xfrm>
+          <a:prstGeom xmlns:a="http://schemas.openxmlformats.org/drawingml/2006/main" prst="ellipse">
+            <a:avLst/>
+          </a:prstGeom>
+          <a:solidFill xmlns:a="http://schemas.openxmlformats.org/drawingml/2006/main">
+            <a:srgbClr val="00A8D8"/>
+          </a:solidFill>
+          <a:ln xmlns:a="http://schemas.openxmlformats.org/drawingml/2006/main" w="28575">
+            <a:solidFill>
+              <a:srgbClr val="FFFFFF"/>
+            </a:solidFill>
+            <a:prstDash val="solid"/>
+          </a:ln>
+        </p:spPr>
+        <p:style>
+          <a:lnRef xmlns:a="http://schemas.openxmlformats.org/drawingml/2006/main" idx="0"/>
+          <a:fillRef xmlns:a="http://schemas.openxmlformats.org/drawingml/2006/main" idx="0"/>
+          <a:effectRef xmlns:a="http://schemas.openxmlformats.org/drawingml/2006/main" idx="4"/>
+          <a:fontRef xmlns:a="http://schemas.openxmlformats.org/drawingml/2006/main" idx="major"/>
+        </p:style>
+        <p:txBody>
+          <a:bodyPr xmlns:a="http://schemas.openxmlformats.org/drawingml/2006/main" lIns="0" tIns="0" rIns="0" bIns="0" anchor="ctr">
+            <a:normAutofit fontScale="100000"/>
+          </a:bodyPr>
+          <a:lstStyle xmlns:a="http://schemas.openxmlformats.org/drawingml/2006/main"/>
+          <a:p xmlns:a="http://schemas.openxmlformats.org/drawingml/2006/main">
+            <a:pPr algn="ctr">
+              <a:defRPr sz="1200" b="1">
+                <a:solidFill>
+                  <a:srgbClr val="FFFFFF"/>
+                </a:solidFill>
+                <a:latin typeface="Microsoft YaHei"/>
+                <a:ea typeface="Microsoft YaHei"/>
+                <a:cs typeface="Microsoft YaHei"/>
+              </a:defRPr>
+            </a:pPr>
+            <a:r>
+              <a:rPr sz="1200" b="1">
+                <a:solidFill>
+                  <a:srgbClr val="FFFFFF"/>
+                </a:solidFill>
+                <a:latin typeface="Microsoft YaHei"/>
+                <a:ea typeface="Microsoft YaHei"/>
+                <a:cs typeface="Microsoft YaHei"/>
+              </a:rPr>
+              <a:t>06</a:t>
+            </a:r>
+          </a:p>
+        </p:txBody>
+      </p:sp>
+      <p:sp>
+        <p:nvSpPr>
+          <p:cNvPr id="27" name="PPAGENT_QA|parent=radial-card-5|domains=radial-content">
+            <a:extLst xmlns:a="http://schemas.openxmlformats.org/drawingml/2006/main">
+              <a:ext uri="{FF2B5EF4-FFF2-40B4-BE49-F238E27FC236}">
+                <a16:creationId xmlns:a16="http://schemas.microsoft.com/office/drawing/2014/main" id="{8E087D06-31EE-4AA3-9DA5-009E32A59716}"/>
+              </a:ext>
+            </a:extLst>
+          </p:cNvPr>
+          <p:cNvSpPr>
+            <a:spLocks xmlns:a="http://schemas.openxmlformats.org/drawingml/2006/main" noGrp="1"/>
+          </p:cNvSpPr>
+          <p:nvPr/>
+        </p:nvSpPr>
+        <p:spPr>
+          <a:xfrm xmlns:a="http://schemas.openxmlformats.org/drawingml/2006/main">
+            <a:off x="647700" y="4683125"/>
+            <a:ext cx="2857500" cy="762000"/>
+          </a:xfrm>
+          <a:prstGeom xmlns:a="http://schemas.openxmlformats.org/drawingml/2006/main" prst="roundRect">
+            <a:avLst>
+              <a:gd name="adj" fmla="val 15000"/>
+            </a:avLst>
+          </a:prstGeom>
+          <a:noFill xmlns:a="http://schemas.openxmlformats.org/drawingml/2006/main"/>
+          <a:ln xmlns:a="http://schemas.openxmlformats.org/drawingml/2006/main" w="0">
+            <a:noFill/>
+            <a:prstDash val="solid"/>
+          </a:ln>
+        </p:spPr>
+      </p:sp>
+      <p:sp>
+        <p:nvSpPr>
+          <p:cNvPr id="28" name="PPAGENT_QA|within=radial-card-5|role=title">
+            <a:extLst xmlns:a="http://schemas.openxmlformats.org/drawingml/2006/main">
+              <a:ext uri="{FF2B5EF4-FFF2-40B4-BE49-F238E27FC236}">
+                <a16:creationId xmlns:a16="http://schemas.microsoft.com/office/drawing/2014/main" id="{64F851B6-E867-4615-AABC-9AEE0676C405}"/>
+              </a:ext>
+            </a:extLst>
+          </p:cNvPr>
+          <p:cNvSpPr>
+            <a:spLocks xmlns:a="http://schemas.openxmlformats.org/drawingml/2006/main" noGrp="1"/>
+          </p:cNvSpPr>
+          <p:nvPr/>
+        </p:nvSpPr>
+        <p:spPr>
+          <a:xfrm xmlns:a="http://schemas.openxmlformats.org/drawingml/2006/main">
+            <a:off x="647700" y="4683125"/>
+            <a:ext cx="2857500" cy="285750"/>
+          </a:xfrm>
+          <a:prstGeom xmlns:a="http://schemas.openxmlformats.org/drawingml/2006/main" prst="rect">
+            <a:avLst/>
+          </a:prstGeom>
+          <a:noFill xmlns:a="http://schemas.openxmlformats.org/drawingml/2006/main"/>
+          <a:ln xmlns:a="http://schemas.openxmlformats.org/drawingml/2006/main" w="0">
+            <a:noFill/>
+            <a:prstDash val="solid"/>
+          </a:ln>
+        </p:spPr>
+        <p:txBody>
+          <a:bodyPr xmlns:a="http://schemas.openxmlformats.org/drawingml/2006/main" lIns="0" tIns="0" rIns="0" bIns="0" anchor="ctr">
+            <a:normAutofit fontScale="100000"/>
+          </a:bodyPr>
+          <a:lstStyle xmlns:a="http://schemas.openxmlformats.org/drawingml/2006/main"/>
+          <a:p xmlns:a="http://schemas.openxmlformats.org/drawingml/2006/main">
+            <a:pPr algn="r">
+              <a:defRPr sz="1425" b="1">
+                <a:solidFill>
+                  <a:srgbClr val="1677C8"/>
+                </a:solidFill>
+                <a:latin typeface="Microsoft YaHei"/>
+                <a:ea typeface="Microsoft YaHei"/>
+                <a:cs typeface="Microsoft YaHei"/>
+              </a:defRPr>
+            </a:pPr>
+            <a:r>
+              <a:rPr sz="1425" b="1">
+                <a:solidFill>
+                  <a:srgbClr val="1677C8"/>
+                </a:solidFill>
+                <a:latin typeface="Microsoft YaHei"/>
+                <a:ea typeface="Microsoft YaHei"/>
+                <a:cs typeface="Microsoft YaHei"/>
+              </a:rPr>
+              <a:t>跨域协作</a:t>
+            </a:r>
+          </a:p>
+        </p:txBody>
+      </p:sp>
+      <p:sp>
+        <p:nvSpPr>
+          <p:cNvPr id="29" name="PPAGENT_CONNECTOR|from=radial-center|fromSide=left|to=radial-node-5|toSide=right">
+            <a:extLst xmlns:a="http://schemas.openxmlformats.org/drawingml/2006/main">
+              <a:ext uri="{FF2B5EF4-FFF2-40B4-BE49-F238E27FC236}">
+                <a16:creationId xmlns:a16="http://schemas.microsoft.com/office/drawing/2014/main" id="{57EDFC38-A648-461A-91E0-1D2D6D74AE74}"/>
+              </a:ext>
+            </a:extLst>
+          </p:cNvPr>
+          <p:cNvSpPr>
+            <a:spLocks xmlns:a="http://schemas.openxmlformats.org/drawingml/2006/main" noGrp="1"/>
+          </p:cNvSpPr>
+          <p:nvPr/>
+        </p:nvSpPr>
+        <p:spPr>
+          <a:xfrm xmlns:a="http://schemas.openxmlformats.org/drawingml/2006/main" flipH="1" flipV="0">
+            <a:off x="4076700" y="3667125"/>
+            <a:ext cx="781050" cy="1397000"/>
+          </a:xfrm>
+          <a:prstGeom xmlns:a="http://schemas.openxmlformats.org/drawingml/2006/main" prst="line">
+            <a:avLst/>
+          </a:prstGeom>
+          <a:noFill xmlns:a="http://schemas.openxmlformats.org/drawingml/2006/main"/>
+          <a:ln xmlns:a="http://schemas.openxmlformats.org/drawingml/2006/main" w="14288">
+            <a:solidFill>
+              <a:srgbClr val="B7CCE0"/>
+            </a:solidFill>
+            <a:prstDash val="solid"/>
+          </a:ln>
+        </p:spPr>
+      </p:sp>
+      <p:sp>
+        <p:nvSpPr>
+          <p:cNvPr id="30" name="PPAGENT_QA|parent=radial-node-6|domains=radial-shape">
+            <a:extLst xmlns:a="http://schemas.openxmlformats.org/drawingml/2006/main">
+              <a:ext uri="{FF2B5EF4-FFF2-40B4-BE49-F238E27FC236}">
+                <a16:creationId xmlns:a16="http://schemas.microsoft.com/office/drawing/2014/main" id="{5C6F3F2F-6D3A-4A58-8906-0E5BADE23A0F}"/>
+              </a:ext>
+            </a:extLst>
+          </p:cNvPr>
+          <p:cNvSpPr>
+            <a:spLocks xmlns:a="http://schemas.openxmlformats.org/drawingml/2006/main" noGrp="1"/>
+          </p:cNvSpPr>
+          <p:nvPr/>
+        </p:nvSpPr>
+        <p:spPr>
+          <a:xfrm xmlns:a="http://schemas.openxmlformats.org/drawingml/2006/main">
+            <a:off x="8115300" y="4845050"/>
+            <a:ext cx="438150" cy="438150"/>
+          </a:xfrm>
+          <a:prstGeom xmlns:a="http://schemas.openxmlformats.org/drawingml/2006/main" prst="ellipse">
+            <a:avLst/>
+          </a:prstGeom>
+          <a:solidFill xmlns:a="http://schemas.openxmlformats.org/drawingml/2006/main">
+            <a:srgbClr val="14CBD1"/>
+          </a:solidFill>
+          <a:ln xmlns:a="http://schemas.openxmlformats.org/drawingml/2006/main" w="28575">
+            <a:solidFill>
+              <a:srgbClr val="FFFFFF"/>
+            </a:solidFill>
+            <a:prstDash val="solid"/>
+          </a:ln>
+        </p:spPr>
+        <p:style>
+          <a:lnRef xmlns:a="http://schemas.openxmlformats.org/drawingml/2006/main" idx="0"/>
+          <a:fillRef xmlns:a="http://schemas.openxmlformats.org/drawingml/2006/main" idx="0"/>
+          <a:effectRef xmlns:a="http://schemas.openxmlformats.org/drawingml/2006/main" idx="4"/>
+          <a:fontRef xmlns:a="http://schemas.openxmlformats.org/drawingml/2006/main" idx="major"/>
+        </p:style>
+        <p:txBody>
+          <a:bodyPr xmlns:a="http://schemas.openxmlformats.org/drawingml/2006/main" lIns="0" tIns="0" rIns="0" bIns="0" anchor="ctr">
+            <a:normAutofit fontScale="100000"/>
+          </a:bodyPr>
+          <a:lstStyle xmlns:a="http://schemas.openxmlformats.org/drawingml/2006/main"/>
+          <a:p xmlns:a="http://schemas.openxmlformats.org/drawingml/2006/main">
+            <a:pPr algn="ctr">
+              <a:defRPr sz="1200" b="1">
+                <a:solidFill>
+                  <a:srgbClr val="FFFFFF"/>
+                </a:solidFill>
+                <a:latin typeface="Microsoft YaHei"/>
+                <a:ea typeface="Microsoft YaHei"/>
+                <a:cs typeface="Microsoft YaHei"/>
+              </a:defRPr>
+            </a:pPr>
+            <a:r>
+              <a:rPr sz="1200" b="1">
+                <a:solidFill>
+                  <a:srgbClr val="FFFFFF"/>
+                </a:solidFill>
+                <a:latin typeface="Microsoft YaHei"/>
+                <a:ea typeface="Microsoft YaHei"/>
+                <a:cs typeface="Microsoft YaHei"/>
+              </a:rPr>
+              <a:t>07</a:t>
+            </a:r>
+          </a:p>
+        </p:txBody>
+      </p:sp>
+      <p:sp>
+        <p:nvSpPr>
+          <p:cNvPr id="31" name="PPAGENT_QA|parent=radial-card-6|domains=radial-content">
+            <a:extLst xmlns:a="http://schemas.openxmlformats.org/drawingml/2006/main">
+              <a:ext uri="{FF2B5EF4-FFF2-40B4-BE49-F238E27FC236}">
+                <a16:creationId xmlns:a16="http://schemas.microsoft.com/office/drawing/2014/main" id="{2C08AA31-623D-4F09-86F1-480C5D01EE51}"/>
+              </a:ext>
+            </a:extLst>
+          </p:cNvPr>
+          <p:cNvSpPr>
+            <a:spLocks xmlns:a="http://schemas.openxmlformats.org/drawingml/2006/main" noGrp="1"/>
+          </p:cNvSpPr>
+          <p:nvPr/>
+        </p:nvSpPr>
+        <p:spPr>
+          <a:xfrm xmlns:a="http://schemas.openxmlformats.org/drawingml/2006/main">
+            <a:off x="8686800" y="4683125"/>
+            <a:ext cx="2857500" cy="762000"/>
+          </a:xfrm>
+          <a:prstGeom xmlns:a="http://schemas.openxmlformats.org/drawingml/2006/main" prst="roundRect">
+            <a:avLst>
+              <a:gd name="adj" fmla="val 15000"/>
+            </a:avLst>
+          </a:prstGeom>
+          <a:noFill xmlns:a="http://schemas.openxmlformats.org/drawingml/2006/main"/>
+          <a:ln xmlns:a="http://schemas.openxmlformats.org/drawingml/2006/main" w="0">
+            <a:noFill/>
+            <a:prstDash val="solid"/>
+          </a:ln>
+        </p:spPr>
+      </p:sp>
+      <p:sp>
+        <p:nvSpPr>
+          <p:cNvPr id="32" name="PPAGENT_QA|within=radial-card-6|role=title">
+            <a:extLst xmlns:a="http://schemas.openxmlformats.org/drawingml/2006/main">
+              <a:ext uri="{FF2B5EF4-FFF2-40B4-BE49-F238E27FC236}">
+                <a16:creationId xmlns:a16="http://schemas.microsoft.com/office/drawing/2014/main" id="{74E7DBCD-3867-42C6-A58A-7D126D553554}"/>
+              </a:ext>
+            </a:extLst>
+          </p:cNvPr>
+          <p:cNvSpPr>
+            <a:spLocks xmlns:a="http://schemas.openxmlformats.org/drawingml/2006/main" noGrp="1"/>
+          </p:cNvSpPr>
+          <p:nvPr/>
+        </p:nvSpPr>
+        <p:spPr>
+          <a:xfrm xmlns:a="http://schemas.openxmlformats.org/drawingml/2006/main">
+            <a:off x="8686800" y="4683125"/>
+            <a:ext cx="2857500" cy="285750"/>
+          </a:xfrm>
+          <a:prstGeom xmlns:a="http://schemas.openxmlformats.org/drawingml/2006/main" prst="rect">
+            <a:avLst/>
+          </a:prstGeom>
+          <a:noFill xmlns:a="http://schemas.openxmlformats.org/drawingml/2006/main"/>
+          <a:ln xmlns:a="http://schemas.openxmlformats.org/drawingml/2006/main" w="0">
+            <a:noFill/>
+            <a:prstDash val="solid"/>
+          </a:ln>
+        </p:spPr>
+        <p:txBody>
+          <a:bodyPr xmlns:a="http://schemas.openxmlformats.org/drawingml/2006/main" lIns="0" tIns="0" rIns="0" bIns="0" anchor="ctr">
+            <a:normAutofit fontScale="100000"/>
+          </a:bodyPr>
+          <a:lstStyle xmlns:a="http://schemas.openxmlformats.org/drawingml/2006/main"/>
+          <a:p xmlns:a="http://schemas.openxmlformats.org/drawingml/2006/main">
+            <a:pPr algn="l">
+              <a:defRPr sz="1425" b="1">
+                <a:solidFill>
+                  <a:srgbClr val="1677C8"/>
+                </a:solidFill>
+                <a:latin typeface="Microsoft YaHei"/>
+                <a:ea typeface="Microsoft YaHei"/>
+                <a:cs typeface="Microsoft YaHei"/>
+              </a:defRPr>
+            </a:pPr>
+            <a:r>
+              <a:rPr sz="1425" b="1">
+                <a:solidFill>
+                  <a:srgbClr val="1677C8"/>
+                </a:solidFill>
+                <a:latin typeface="Microsoft YaHei"/>
+                <a:ea typeface="Microsoft YaHei"/>
+                <a:cs typeface="Microsoft YaHei"/>
+              </a:rPr>
+              <a:t>风险识别</a:t>
+            </a:r>
+          </a:p>
+        </p:txBody>
+      </p:sp>
+      <p:sp>
+        <p:nvSpPr>
+          <p:cNvPr id="33" name="PPAGENT_CONNECTOR|from=radial-center|fromSide=right|to=radial-node-6|toSide=left">
+            <a:extLst xmlns:a="http://schemas.openxmlformats.org/drawingml/2006/main">
+              <a:ext uri="{FF2B5EF4-FFF2-40B4-BE49-F238E27FC236}">
+                <a16:creationId xmlns:a16="http://schemas.microsoft.com/office/drawing/2014/main" id="{B14135EA-131E-4422-9AB2-691E70E5B483}"/>
+              </a:ext>
+            </a:extLst>
+          </p:cNvPr>
+          <p:cNvSpPr>
+            <a:spLocks xmlns:a="http://schemas.openxmlformats.org/drawingml/2006/main" noGrp="1"/>
+          </p:cNvSpPr>
+          <p:nvPr/>
+        </p:nvSpPr>
+        <p:spPr>
+          <a:xfrm xmlns:a="http://schemas.openxmlformats.org/drawingml/2006/main" flipH="0" flipV="0">
+            <a:off x="7334250" y="3667125"/>
+            <a:ext cx="781050" cy="1397000"/>
+          </a:xfrm>
+          <a:prstGeom xmlns:a="http://schemas.openxmlformats.org/drawingml/2006/main" prst="line">
+            <a:avLst/>
+          </a:prstGeom>
+          <a:noFill xmlns:a="http://schemas.openxmlformats.org/drawingml/2006/main"/>
+          <a:ln xmlns:a="http://schemas.openxmlformats.org/drawingml/2006/main" w="14288">
+            <a:solidFill>
+              <a:srgbClr val="B7CCE0"/>
+            </a:solidFill>
+            <a:prstDash val="solid"/>
+          </a:ln>
+        </p:spPr>
+      </p:sp>
+    </p:spTree>
+    <p:extLst>
+      <p:ext uri="{BB962C8B-B14F-4D97-AF65-F5344CB8AC3E}">
+        <p14:creationId xmlns:p14="http://schemas.microsoft.com/office/powerpoint/2010/main" val="1598419635"/>
+      </p:ext>
+    </p:extLst>
+  </p:cSld>
+</p:sld>
+</file>
+
+<file path=ppt/slides/slide6.xml><?xml version="1.0" encoding="utf-8"?>
+<p:sld xmlns:p="http://schemas.openxmlformats.org/presentationml/2006/main">
+  <p:cSld>
+    <p:bg>
+      <p:bgPr>
+        <a:solidFill xmlns:a="http://schemas.openxmlformats.org/drawingml/2006/main">
+          <a:srgbClr val="F7FAFC"/>
+        </a:solidFill>
+      </p:bgPr>
+    </p:bg>
+    <p:spTree>
+      <p:nvGrpSpPr>
+        <p:cNvPr id="1" name=""/>
+        <p:cNvGrpSpPr/>
+        <p:nvPr/>
+      </p:nvGrpSpPr>
+      <p:grpSpPr>
+        <a:xfrm xmlns:a="http://schemas.openxmlformats.org/drawingml/2006/main"/>
+      </p:grpSpPr>
+      <p:sp>
+        <p:nvSpPr>
+          <p:cNvPr id="38" name="">
+            <a:extLst xmlns:a="http://schemas.openxmlformats.org/drawingml/2006/main">
+              <a:ext uri="{FF2B5EF4-FFF2-40B4-BE49-F238E27FC236}">
+                <a16:creationId xmlns:a16="http://schemas.microsoft.com/office/drawing/2014/main" id="{EEBDED95-B9DC-470C-9A65-1BC7B8F15CB2}"/>
+              </a:ext>
+            </a:extLst>
+          </p:cNvPr>
+          <p:cNvSpPr>
+            <a:spLocks xmlns:a="http://schemas.openxmlformats.org/drawingml/2006/main" noGrp="1"/>
+          </p:cNvSpPr>
+          <p:nvPr/>
+        </p:nvSpPr>
+        <p:spPr>
+          <a:xfrm xmlns:a="http://schemas.openxmlformats.org/drawingml/2006/main">
+            <a:off x="685800" y="400050"/>
+            <a:ext cx="8382000" cy="457200"/>
+          </a:xfrm>
+          <a:prstGeom xmlns:a="http://schemas.openxmlformats.org/drawingml/2006/main" prst="rect">
+            <a:avLst/>
+          </a:prstGeom>
+          <a:noFill xmlns:a="http://schemas.openxmlformats.org/drawingml/2006/main"/>
+          <a:ln xmlns:a="http://schemas.openxmlformats.org/drawingml/2006/main" w="0">
+            <a:noFill/>
+            <a:prstDash val="solid"/>
+          </a:ln>
+        </p:spPr>
+        <p:txBody>
+          <a:bodyPr xmlns:a="http://schemas.openxmlformats.org/drawingml/2006/main" lIns="0" tIns="0" rIns="0" bIns="0" anchor="ctr">
+            <a:normAutofit fontScale="100000"/>
+          </a:bodyPr>
+          <a:lstStyle xmlns:a="http://schemas.openxmlformats.org/drawingml/2006/main"/>
+          <a:p xmlns:a="http://schemas.openxmlformats.org/drawingml/2006/main">
+            <a:pPr algn="l">
+              <a:defRPr sz="2700" b="1">
+                <a:solidFill>
+                  <a:srgbClr val="1677C8"/>
+                </a:solidFill>
+                <a:latin typeface="Microsoft YaHei"/>
+                <a:ea typeface="Microsoft YaHei"/>
+                <a:cs typeface="Microsoft YaHei"/>
+              </a:defRPr>
+            </a:pPr>
+            <a:r>
+              <a:rPr sz="2700" b="1">
+                <a:solidFill>
+                  <a:srgbClr val="1677C8"/>
+                </a:solidFill>
+                <a:latin typeface="Microsoft YaHei"/>
+                <a:ea typeface="Microsoft YaHei"/>
+                <a:cs typeface="Microsoft YaHei"/>
+              </a:rPr>
+              <a:t>中心辐射关系</a:t>
+            </a:r>
+          </a:p>
+        </p:txBody>
+      </p:sp>
+      <p:sp>
+        <p:nvSpPr>
+          <p:cNvPr id="2" name="">
+            <a:extLst xmlns:a="http://schemas.openxmlformats.org/drawingml/2006/main">
+              <a:ext uri="{FF2B5EF4-FFF2-40B4-BE49-F238E27FC236}">
+                <a16:creationId xmlns:a16="http://schemas.microsoft.com/office/drawing/2014/main" id="{5FDA0A69-12FB-432D-A967-41A99C7C40F8}"/>
+              </a:ext>
+            </a:extLst>
+          </p:cNvPr>
+          <p:cNvSpPr>
+            <a:spLocks xmlns:a="http://schemas.openxmlformats.org/drawingml/2006/main" noGrp="1"/>
+          </p:cNvSpPr>
+          <p:nvPr/>
+        </p:nvSpPr>
+        <p:spPr>
+          <a:xfrm xmlns:a="http://schemas.openxmlformats.org/drawingml/2006/main">
+            <a:off x="704850" y="876300"/>
+            <a:ext cx="4953000" cy="247650"/>
+          </a:xfrm>
+          <a:prstGeom xmlns:a="http://schemas.openxmlformats.org/drawingml/2006/main" prst="rect">
+            <a:avLst/>
+          </a:prstGeom>
+          <a:noFill xmlns:a="http://schemas.openxmlformats.org/drawingml/2006/main"/>
+          <a:ln xmlns:a="http://schemas.openxmlformats.org/drawingml/2006/main" w="0">
+            <a:noFill/>
+            <a:prstDash val="solid"/>
+          </a:ln>
+        </p:spPr>
+        <p:txBody>
+          <a:bodyPr xmlns:a="http://schemas.openxmlformats.org/drawingml/2006/main" lIns="0" tIns="0" rIns="0" bIns="0" anchor="ctr">
+            <a:normAutofit fontScale="100000"/>
+          </a:bodyPr>
+          <a:lstStyle xmlns:a="http://schemas.openxmlformats.org/drawingml/2006/main"/>
+          <a:p xmlns:a="http://schemas.openxmlformats.org/drawingml/2006/main">
+            <a:pPr algn="l">
+              <a:defRPr sz="1200" b="0">
+                <a:solidFill>
+                  <a:srgbClr val="7C8A9A"/>
+                </a:solidFill>
+                <a:latin typeface="Microsoft YaHei"/>
+                <a:ea typeface="Microsoft YaHei"/>
+                <a:cs typeface="Microsoft YaHei"/>
+              </a:defRPr>
+            </a:pPr>
+            <a:r>
+              <a:rPr sz="1200" b="0">
+                <a:solidFill>
+                  <a:srgbClr val="7C8A9A"/>
+                </a:solidFill>
+                <a:latin typeface="Microsoft YaHei"/>
+                <a:ea typeface="Microsoft YaHei"/>
+                <a:cs typeface="Microsoft YaHei"/>
+              </a:rPr>
+              <a:t>中心主题 · 多向展开</a:t>
+            </a:r>
+          </a:p>
+        </p:txBody>
+      </p:sp>
+      <p:sp>
+        <p:nvSpPr>
+          <p:cNvPr id="3" name="">
+            <a:extLst xmlns:a="http://schemas.openxmlformats.org/drawingml/2006/main">
+              <a:ext uri="{FF2B5EF4-FFF2-40B4-BE49-F238E27FC236}">
+                <a16:creationId xmlns:a16="http://schemas.microsoft.com/office/drawing/2014/main" id="{4DC53062-7343-4F8A-904E-8B73E507F50F}"/>
+              </a:ext>
+            </a:extLst>
+          </p:cNvPr>
+          <p:cNvSpPr>
+            <a:spLocks xmlns:a="http://schemas.openxmlformats.org/drawingml/2006/main" noGrp="1"/>
+          </p:cNvSpPr>
+          <p:nvPr/>
+        </p:nvSpPr>
+        <p:spPr>
+          <a:xfrm xmlns:a="http://schemas.openxmlformats.org/drawingml/2006/main">
+            <a:off x="4400550" y="1971675"/>
+            <a:ext cx="3390900" cy="3390900"/>
+          </a:xfrm>
+          <a:prstGeom xmlns:a="http://schemas.openxmlformats.org/drawingml/2006/main" prst="ellipse">
+            <a:avLst/>
+          </a:prstGeom>
+          <a:solidFill xmlns:a="http://schemas.openxmlformats.org/drawingml/2006/main">
+            <a:srgbClr val="DCEEFF"/>
+          </a:solidFill>
+          <a:ln xmlns:a="http://schemas.openxmlformats.org/drawingml/2006/main" w="0">
+            <a:noFill/>
+            <a:prstDash val="solid"/>
+          </a:ln>
+        </p:spPr>
+      </p:sp>
+      <p:sp>
+        <p:nvSpPr>
+          <p:cNvPr id="4" name="">
+            <a:extLst xmlns:a="http://schemas.openxmlformats.org/drawingml/2006/main">
+              <a:ext uri="{FF2B5EF4-FFF2-40B4-BE49-F238E27FC236}">
+                <a16:creationId xmlns:a16="http://schemas.microsoft.com/office/drawing/2014/main" id="{6DF87E2F-75EF-415B-A428-60D7C8F83F2E}"/>
+              </a:ext>
+            </a:extLst>
+          </p:cNvPr>
+          <p:cNvSpPr>
+            <a:spLocks xmlns:a="http://schemas.openxmlformats.org/drawingml/2006/main" noGrp="1"/>
+          </p:cNvSpPr>
+          <p:nvPr/>
+        </p:nvSpPr>
+        <p:spPr>
+          <a:xfrm xmlns:a="http://schemas.openxmlformats.org/drawingml/2006/main">
+            <a:off x="4629150" y="2200275"/>
+            <a:ext cx="2933700" cy="2933700"/>
+          </a:xfrm>
+          <a:prstGeom xmlns:a="http://schemas.openxmlformats.org/drawingml/2006/main" prst="ellipse">
+            <a:avLst/>
+          </a:prstGeom>
+          <a:solidFill xmlns:a="http://schemas.openxmlformats.org/drawingml/2006/main">
+            <a:srgbClr val="FFFFFF"/>
+          </a:solidFill>
+          <a:ln xmlns:a="http://schemas.openxmlformats.org/drawingml/2006/main" w="19050">
+            <a:solidFill>
+              <a:srgbClr val="B7D8F3"/>
+            </a:solidFill>
+            <a:prstDash val="solid"/>
+          </a:ln>
+        </p:spPr>
+        <p:style>
+          <a:lnRef xmlns:a="http://schemas.openxmlformats.org/drawingml/2006/main" idx="0"/>
+          <a:fillRef xmlns:a="http://schemas.openxmlformats.org/drawingml/2006/main" idx="0"/>
+          <a:effectRef xmlns:a="http://schemas.openxmlformats.org/drawingml/2006/main" idx="6"/>
+          <a:fontRef xmlns:a="http://schemas.openxmlformats.org/drawingml/2006/main" idx="major"/>
+        </p:style>
+      </p:sp>
+      <p:sp>
+        <p:nvSpPr>
+          <p:cNvPr id="5" name="PPAGENT_QA|parent=radial-center|domains=radial-shape,radial-content">
+            <a:extLst xmlns:a="http://schemas.openxmlformats.org/drawingml/2006/main">
+              <a:ext uri="{FF2B5EF4-FFF2-40B4-BE49-F238E27FC236}">
+                <a16:creationId xmlns:a16="http://schemas.microsoft.com/office/drawing/2014/main" id="{E0293457-2795-4255-9743-57716E96AA0F}"/>
+              </a:ext>
+            </a:extLst>
+          </p:cNvPr>
+          <p:cNvSpPr>
+            <a:spLocks xmlns:a="http://schemas.openxmlformats.org/drawingml/2006/main" noGrp="1"/>
+          </p:cNvSpPr>
+          <p:nvPr/>
+        </p:nvSpPr>
+        <p:spPr>
+          <a:xfrm xmlns:a="http://schemas.openxmlformats.org/drawingml/2006/main">
+            <a:off x="4857750" y="2428875"/>
+            <a:ext cx="2476500" cy="2476500"/>
+          </a:xfrm>
+          <a:prstGeom xmlns:a="http://schemas.openxmlformats.org/drawingml/2006/main" prst="ellipse">
+            <a:avLst/>
+          </a:prstGeom>
+          <a:solidFill xmlns:a="http://schemas.openxmlformats.org/drawingml/2006/main">
+            <a:srgbClr val="1677C8"/>
+          </a:solidFill>
+          <a:ln xmlns:a="http://schemas.openxmlformats.org/drawingml/2006/main" w="38100">
+            <a:solidFill>
+              <a:srgbClr val="FFFFFF"/>
+            </a:solidFill>
+            <a:prstDash val="solid"/>
+          </a:ln>
+        </p:spPr>
+        <p:style>
+          <a:lnRef xmlns:a="http://schemas.openxmlformats.org/drawingml/2006/main" idx="0"/>
+          <a:fillRef xmlns:a="http://schemas.openxmlformats.org/drawingml/2006/main" idx="0"/>
+          <a:effectRef xmlns:a="http://schemas.openxmlformats.org/drawingml/2006/main" idx="7"/>
+          <a:fontRef xmlns:a="http://schemas.openxmlformats.org/drawingml/2006/main" idx="major"/>
+        </p:style>
+        <p:txBody>
+          <a:bodyPr xmlns:a="http://schemas.openxmlformats.org/drawingml/2006/main" lIns="114300" tIns="76200" rIns="114300" bIns="76200" anchor="ctr">
+            <a:normAutofit fontScale="100000"/>
+          </a:bodyPr>
+          <a:lstStyle xmlns:a="http://schemas.openxmlformats.org/drawingml/2006/main"/>
+          <a:p xmlns:a="http://schemas.openxmlformats.org/drawingml/2006/main">
+            <a:pPr algn="ctr">
+              <a:defRPr sz="2175" b="1">
+                <a:solidFill>
+                  <a:srgbClr val="FFFFFF"/>
+                </a:solidFill>
+                <a:latin typeface="Microsoft YaHei"/>
+                <a:ea typeface="Microsoft YaHei"/>
+                <a:cs typeface="Microsoft YaHei"/>
+              </a:defRPr>
+            </a:pPr>
+            <a:r>
+              <a:rPr sz="2175" b="1">
+                <a:solidFill>
+                  <a:srgbClr val="FFFFFF"/>
+                </a:solidFill>
+                <a:latin typeface="Microsoft YaHei"/>
+                <a:ea typeface="Microsoft YaHei"/>
+                <a:cs typeface="Microsoft YaHei"/>
+              </a:rPr>
+              <a:t>协同能力</a:t>
+            </a:r>
+          </a:p>
+        </p:txBody>
+      </p:sp>
+      <p:sp>
+        <p:nvSpPr>
+          <p:cNvPr id="6" name="PPAGENT_QA|parent=radial-node-0|domains=radial-shape">
+            <a:extLst xmlns:a="http://schemas.openxmlformats.org/drawingml/2006/main">
+              <a:ext uri="{FF2B5EF4-FFF2-40B4-BE49-F238E27FC236}">
+                <a16:creationId xmlns:a16="http://schemas.microsoft.com/office/drawing/2014/main" id="{12F049E3-26C0-45F1-9362-C572A9E7A9BB}"/>
+              </a:ext>
+            </a:extLst>
+          </p:cNvPr>
+          <p:cNvSpPr>
+            <a:spLocks xmlns:a="http://schemas.openxmlformats.org/drawingml/2006/main" noGrp="1"/>
+          </p:cNvSpPr>
+          <p:nvPr/>
+        </p:nvSpPr>
+        <p:spPr>
+          <a:xfrm xmlns:a="http://schemas.openxmlformats.org/drawingml/2006/main">
+            <a:off x="3638550" y="1876425"/>
+            <a:ext cx="438150" cy="438150"/>
+          </a:xfrm>
+          <a:prstGeom xmlns:a="http://schemas.openxmlformats.org/drawingml/2006/main" prst="ellipse">
+            <a:avLst/>
+          </a:prstGeom>
+          <a:solidFill xmlns:a="http://schemas.openxmlformats.org/drawingml/2006/main">
+            <a:srgbClr val="14CBD1"/>
+          </a:solidFill>
+          <a:ln xmlns:a="http://schemas.openxmlformats.org/drawingml/2006/main" w="28575">
+            <a:solidFill>
+              <a:srgbClr val="FFFFFF"/>
+            </a:solidFill>
+            <a:prstDash val="solid"/>
+          </a:ln>
+        </p:spPr>
+        <p:style>
+          <a:lnRef xmlns:a="http://schemas.openxmlformats.org/drawingml/2006/main" idx="0"/>
+          <a:fillRef xmlns:a="http://schemas.openxmlformats.org/drawingml/2006/main" idx="0"/>
+          <a:effectRef xmlns:a="http://schemas.openxmlformats.org/drawingml/2006/main" idx="4"/>
+          <a:fontRef xmlns:a="http://schemas.openxmlformats.org/drawingml/2006/main" idx="major"/>
+        </p:style>
+        <p:txBody>
+          <a:bodyPr xmlns:a="http://schemas.openxmlformats.org/drawingml/2006/main" lIns="0" tIns="0" rIns="0" bIns="0" anchor="ctr">
+            <a:normAutofit fontScale="100000"/>
+          </a:bodyPr>
+          <a:lstStyle xmlns:a="http://schemas.openxmlformats.org/drawingml/2006/main"/>
+          <a:p xmlns:a="http://schemas.openxmlformats.org/drawingml/2006/main">
+            <a:pPr algn="ctr">
+              <a:defRPr sz="1200" b="1">
+                <a:solidFill>
+                  <a:srgbClr val="FFFFFF"/>
+                </a:solidFill>
+                <a:latin typeface="Microsoft YaHei"/>
+                <a:ea typeface="Microsoft YaHei"/>
+                <a:cs typeface="Microsoft YaHei"/>
+              </a:defRPr>
+            </a:pPr>
+            <a:r>
+              <a:rPr sz="1200" b="1">
+                <a:solidFill>
+                  <a:srgbClr val="FFFFFF"/>
+                </a:solidFill>
+                <a:latin typeface="Microsoft YaHei"/>
+                <a:ea typeface="Microsoft YaHei"/>
+                <a:cs typeface="Microsoft YaHei"/>
+              </a:rPr>
+              <a:t>01</a:t>
+            </a:r>
+          </a:p>
+        </p:txBody>
+      </p:sp>
+      <p:sp>
+        <p:nvSpPr>
+          <p:cNvPr id="7" name="PPAGENT_QA|parent=radial-card-0|domains=radial-content">
+            <a:extLst xmlns:a="http://schemas.openxmlformats.org/drawingml/2006/main">
+              <a:ext uri="{FF2B5EF4-FFF2-40B4-BE49-F238E27FC236}">
+                <a16:creationId xmlns:a16="http://schemas.microsoft.com/office/drawing/2014/main" id="{877FE00E-76E3-44FD-B197-A29D6824F43F}"/>
+              </a:ext>
+            </a:extLst>
+          </p:cNvPr>
+          <p:cNvSpPr>
+            <a:spLocks xmlns:a="http://schemas.openxmlformats.org/drawingml/2006/main" noGrp="1"/>
+          </p:cNvSpPr>
+          <p:nvPr/>
+        </p:nvSpPr>
+        <p:spPr>
+          <a:xfrm xmlns:a="http://schemas.openxmlformats.org/drawingml/2006/main">
+            <a:off x="647700" y="1714500"/>
+            <a:ext cx="2857500" cy="762000"/>
+          </a:xfrm>
+          <a:prstGeom xmlns:a="http://schemas.openxmlformats.org/drawingml/2006/main" prst="roundRect">
+            <a:avLst>
+              <a:gd name="adj" fmla="val 15000"/>
+            </a:avLst>
+          </a:prstGeom>
+          <a:noFill xmlns:a="http://schemas.openxmlformats.org/drawingml/2006/main"/>
+          <a:ln xmlns:a="http://schemas.openxmlformats.org/drawingml/2006/main" w="0">
+            <a:noFill/>
+            <a:prstDash val="solid"/>
+          </a:ln>
+        </p:spPr>
+      </p:sp>
+      <p:sp>
+        <p:nvSpPr>
+          <p:cNvPr id="8" name="PPAGENT_QA|within=radial-card-0|role=title">
+            <a:extLst xmlns:a="http://schemas.openxmlformats.org/drawingml/2006/main">
+              <a:ext uri="{FF2B5EF4-FFF2-40B4-BE49-F238E27FC236}">
+                <a16:creationId xmlns:a16="http://schemas.microsoft.com/office/drawing/2014/main" id="{C989E7CE-2A15-422C-8BDA-D9B04B188703}"/>
+              </a:ext>
+            </a:extLst>
+          </p:cNvPr>
+          <p:cNvSpPr>
+            <a:spLocks xmlns:a="http://schemas.openxmlformats.org/drawingml/2006/main" noGrp="1"/>
+          </p:cNvSpPr>
+          <p:nvPr/>
+        </p:nvSpPr>
+        <p:spPr>
+          <a:xfrm xmlns:a="http://schemas.openxmlformats.org/drawingml/2006/main">
+            <a:off x="647700" y="1714500"/>
+            <a:ext cx="2857500" cy="285750"/>
+          </a:xfrm>
+          <a:prstGeom xmlns:a="http://schemas.openxmlformats.org/drawingml/2006/main" prst="rect">
+            <a:avLst/>
+          </a:prstGeom>
+          <a:noFill xmlns:a="http://schemas.openxmlformats.org/drawingml/2006/main"/>
+          <a:ln xmlns:a="http://schemas.openxmlformats.org/drawingml/2006/main" w="0">
+            <a:noFill/>
+            <a:prstDash val="solid"/>
+          </a:ln>
+        </p:spPr>
+        <p:txBody>
+          <a:bodyPr xmlns:a="http://schemas.openxmlformats.org/drawingml/2006/main" lIns="0" tIns="0" rIns="0" bIns="0" anchor="ctr">
+            <a:normAutofit fontScale="100000"/>
+          </a:bodyPr>
+          <a:lstStyle xmlns:a="http://schemas.openxmlformats.org/drawingml/2006/main"/>
+          <a:p xmlns:a="http://schemas.openxmlformats.org/drawingml/2006/main">
+            <a:pPr algn="r">
+              <a:defRPr sz="1425" b="1">
+                <a:solidFill>
+                  <a:srgbClr val="1677C8"/>
+                </a:solidFill>
+                <a:latin typeface="Microsoft YaHei"/>
+                <a:ea typeface="Microsoft YaHei"/>
+                <a:cs typeface="Microsoft YaHei"/>
+              </a:defRPr>
+            </a:pPr>
+            <a:r>
+              <a:rPr sz="1425" b="1">
+                <a:solidFill>
+                  <a:srgbClr val="1677C8"/>
+                </a:solidFill>
+                <a:latin typeface="Microsoft YaHei"/>
+                <a:ea typeface="Microsoft YaHei"/>
+                <a:cs typeface="Microsoft YaHei"/>
+              </a:rPr>
+              <a:t>统一标准</a:t>
+            </a:r>
+          </a:p>
+        </p:txBody>
+      </p:sp>
+      <p:sp>
+        <p:nvSpPr>
+          <p:cNvPr id="9" name="PPAGENT_CONNECTOR|from=radial-center|fromSide=left|to=radial-node-0|toSide=right">
+            <a:extLst xmlns:a="http://schemas.openxmlformats.org/drawingml/2006/main">
+              <a:ext uri="{FF2B5EF4-FFF2-40B4-BE49-F238E27FC236}">
+                <a16:creationId xmlns:a16="http://schemas.microsoft.com/office/drawing/2014/main" id="{A8590677-3A09-4F7C-8176-8B4825792B71}"/>
+              </a:ext>
+            </a:extLst>
+          </p:cNvPr>
+          <p:cNvSpPr>
+            <a:spLocks xmlns:a="http://schemas.openxmlformats.org/drawingml/2006/main" noGrp="1"/>
+          </p:cNvSpPr>
+          <p:nvPr/>
+        </p:nvSpPr>
+        <p:spPr>
+          <a:xfrm xmlns:a="http://schemas.openxmlformats.org/drawingml/2006/main" flipH="1" flipV="1">
+            <a:off x="4076700" y="2095500"/>
+            <a:ext cx="781050" cy="1571625"/>
+          </a:xfrm>
+          <a:prstGeom xmlns:a="http://schemas.openxmlformats.org/drawingml/2006/main" prst="line">
+            <a:avLst/>
+          </a:prstGeom>
+          <a:noFill xmlns:a="http://schemas.openxmlformats.org/drawingml/2006/main"/>
+          <a:ln xmlns:a="http://schemas.openxmlformats.org/drawingml/2006/main" w="14288">
+            <a:solidFill>
+              <a:srgbClr val="B7CCE0"/>
+            </a:solidFill>
+            <a:prstDash val="solid"/>
+          </a:ln>
+        </p:spPr>
+      </p:sp>
+      <p:sp>
+        <p:nvSpPr>
+          <p:cNvPr id="10" name="PPAGENT_QA|parent=radial-node-1|domains=radial-shape">
+            <a:extLst xmlns:a="http://schemas.openxmlformats.org/drawingml/2006/main">
+              <a:ext uri="{FF2B5EF4-FFF2-40B4-BE49-F238E27FC236}">
+                <a16:creationId xmlns:a16="http://schemas.microsoft.com/office/drawing/2014/main" id="{AF293A40-CCE9-414A-9898-46A98D47A248}"/>
+              </a:ext>
+            </a:extLst>
+          </p:cNvPr>
+          <p:cNvSpPr>
+            <a:spLocks xmlns:a="http://schemas.openxmlformats.org/drawingml/2006/main" noGrp="1"/>
+          </p:cNvSpPr>
+          <p:nvPr/>
+        </p:nvSpPr>
+        <p:spPr>
+          <a:xfrm xmlns:a="http://schemas.openxmlformats.org/drawingml/2006/main">
+            <a:off x="8115300" y="1876425"/>
+            <a:ext cx="438150" cy="438150"/>
+          </a:xfrm>
+          <a:prstGeom xmlns:a="http://schemas.openxmlformats.org/drawingml/2006/main" prst="ellipse">
+            <a:avLst/>
+          </a:prstGeom>
+          <a:solidFill xmlns:a="http://schemas.openxmlformats.org/drawingml/2006/main">
+            <a:srgbClr val="00A8D8"/>
+          </a:solidFill>
+          <a:ln xmlns:a="http://schemas.openxmlformats.org/drawingml/2006/main" w="28575">
+            <a:solidFill>
+              <a:srgbClr val="FFFFFF"/>
+            </a:solidFill>
+            <a:prstDash val="solid"/>
+          </a:ln>
+        </p:spPr>
+        <p:style>
+          <a:lnRef xmlns:a="http://schemas.openxmlformats.org/drawingml/2006/main" idx="0"/>
+          <a:fillRef xmlns:a="http://schemas.openxmlformats.org/drawingml/2006/main" idx="0"/>
+          <a:effectRef xmlns:a="http://schemas.openxmlformats.org/drawingml/2006/main" idx="4"/>
+          <a:fontRef xmlns:a="http://schemas.openxmlformats.org/drawingml/2006/main" idx="major"/>
+        </p:style>
+        <p:txBody>
+          <a:bodyPr xmlns:a="http://schemas.openxmlformats.org/drawingml/2006/main" lIns="0" tIns="0" rIns="0" bIns="0" anchor="ctr">
+            <a:normAutofit fontScale="100000"/>
+          </a:bodyPr>
+          <a:lstStyle xmlns:a="http://schemas.openxmlformats.org/drawingml/2006/main"/>
+          <a:p xmlns:a="http://schemas.openxmlformats.org/drawingml/2006/main">
+            <a:pPr algn="ctr">
+              <a:defRPr sz="1200" b="1">
+                <a:solidFill>
+                  <a:srgbClr val="FFFFFF"/>
+                </a:solidFill>
+                <a:latin typeface="Microsoft YaHei"/>
+                <a:ea typeface="Microsoft YaHei"/>
+                <a:cs typeface="Microsoft YaHei"/>
+              </a:defRPr>
+            </a:pPr>
+            <a:r>
+              <a:rPr sz="1200" b="1">
+                <a:solidFill>
+                  <a:srgbClr val="FFFFFF"/>
+                </a:solidFill>
+                <a:latin typeface="Microsoft YaHei"/>
+                <a:ea typeface="Microsoft YaHei"/>
+                <a:cs typeface="Microsoft YaHei"/>
+              </a:rPr>
+              <a:t>02</a:t>
+            </a:r>
+          </a:p>
+        </p:txBody>
+      </p:sp>
+      <p:sp>
+        <p:nvSpPr>
+          <p:cNvPr id="11" name="PPAGENT_QA|parent=radial-card-1|domains=radial-content">
+            <a:extLst xmlns:a="http://schemas.openxmlformats.org/drawingml/2006/main">
+              <a:ext uri="{FF2B5EF4-FFF2-40B4-BE49-F238E27FC236}">
+                <a16:creationId xmlns:a16="http://schemas.microsoft.com/office/drawing/2014/main" id="{F3D977B6-4EE3-40ED-8C44-D0AB91639B8A}"/>
+              </a:ext>
+            </a:extLst>
+          </p:cNvPr>
+          <p:cNvSpPr>
+            <a:spLocks xmlns:a="http://schemas.openxmlformats.org/drawingml/2006/main" noGrp="1"/>
+          </p:cNvSpPr>
+          <p:nvPr/>
+        </p:nvSpPr>
+        <p:spPr>
+          <a:xfrm xmlns:a="http://schemas.openxmlformats.org/drawingml/2006/main">
+            <a:off x="8686800" y="1714500"/>
+            <a:ext cx="2857500" cy="762000"/>
+          </a:xfrm>
+          <a:prstGeom xmlns:a="http://schemas.openxmlformats.org/drawingml/2006/main" prst="roundRect">
+            <a:avLst>
+              <a:gd name="adj" fmla="val 15000"/>
+            </a:avLst>
+          </a:prstGeom>
+          <a:noFill xmlns:a="http://schemas.openxmlformats.org/drawingml/2006/main"/>
+          <a:ln xmlns:a="http://schemas.openxmlformats.org/drawingml/2006/main" w="0">
+            <a:noFill/>
+            <a:prstDash val="solid"/>
+          </a:ln>
+        </p:spPr>
+      </p:sp>
+      <p:sp>
+        <p:nvSpPr>
+          <p:cNvPr id="12" name="PPAGENT_QA|within=radial-card-1|role=title">
+            <a:extLst xmlns:a="http://schemas.openxmlformats.org/drawingml/2006/main">
+              <a:ext uri="{FF2B5EF4-FFF2-40B4-BE49-F238E27FC236}">
+                <a16:creationId xmlns:a16="http://schemas.microsoft.com/office/drawing/2014/main" id="{4D4FEF38-4E3E-4D2A-A57A-A684D208E9F6}"/>
+              </a:ext>
+            </a:extLst>
+          </p:cNvPr>
+          <p:cNvSpPr>
+            <a:spLocks xmlns:a="http://schemas.openxmlformats.org/drawingml/2006/main" noGrp="1"/>
+          </p:cNvSpPr>
+          <p:nvPr/>
+        </p:nvSpPr>
+        <p:spPr>
+          <a:xfrm xmlns:a="http://schemas.openxmlformats.org/drawingml/2006/main">
+            <a:off x="8686800" y="1714500"/>
+            <a:ext cx="2857500" cy="285750"/>
+          </a:xfrm>
+          <a:prstGeom xmlns:a="http://schemas.openxmlformats.org/drawingml/2006/main" prst="rect">
+            <a:avLst/>
+          </a:prstGeom>
+          <a:noFill xmlns:a="http://schemas.openxmlformats.org/drawingml/2006/main"/>
+          <a:ln xmlns:a="http://schemas.openxmlformats.org/drawingml/2006/main" w="0">
+            <a:noFill/>
+            <a:prstDash val="solid"/>
+          </a:ln>
+        </p:spPr>
+        <p:txBody>
+          <a:bodyPr xmlns:a="http://schemas.openxmlformats.org/drawingml/2006/main" lIns="0" tIns="0" rIns="0" bIns="0" anchor="ctr">
+            <a:normAutofit fontScale="100000"/>
+          </a:bodyPr>
+          <a:lstStyle xmlns:a="http://schemas.openxmlformats.org/drawingml/2006/main"/>
+          <a:p xmlns:a="http://schemas.openxmlformats.org/drawingml/2006/main">
+            <a:pPr algn="l">
+              <a:defRPr sz="1425" b="1">
+                <a:solidFill>
+                  <a:srgbClr val="1677C8"/>
+                </a:solidFill>
+                <a:latin typeface="Microsoft YaHei"/>
+                <a:ea typeface="Microsoft YaHei"/>
+                <a:cs typeface="Microsoft YaHei"/>
+              </a:defRPr>
+            </a:pPr>
+            <a:r>
+              <a:rPr sz="1425" b="1">
+                <a:solidFill>
+                  <a:srgbClr val="1677C8"/>
+                </a:solidFill>
+                <a:latin typeface="Microsoft YaHei"/>
+                <a:ea typeface="Microsoft YaHei"/>
+                <a:cs typeface="Microsoft YaHei"/>
+              </a:rPr>
+              <a:t>快速响应</a:t>
+            </a:r>
+          </a:p>
+        </p:txBody>
+      </p:sp>
+      <p:sp>
+        <p:nvSpPr>
+          <p:cNvPr id="13" name="PPAGENT_CONNECTOR|from=radial-center|fromSide=right|to=radial-node-1|toSide=left">
+            <a:extLst xmlns:a="http://schemas.openxmlformats.org/drawingml/2006/main">
+              <a:ext uri="{FF2B5EF4-FFF2-40B4-BE49-F238E27FC236}">
+                <a16:creationId xmlns:a16="http://schemas.microsoft.com/office/drawing/2014/main" id="{A0584843-6B87-4C58-AC56-F358779BC1A8}"/>
+              </a:ext>
+            </a:extLst>
+          </p:cNvPr>
+          <p:cNvSpPr>
+            <a:spLocks xmlns:a="http://schemas.openxmlformats.org/drawingml/2006/main" noGrp="1"/>
+          </p:cNvSpPr>
+          <p:nvPr/>
+        </p:nvSpPr>
+        <p:spPr>
+          <a:xfrm xmlns:a="http://schemas.openxmlformats.org/drawingml/2006/main" flipH="0" flipV="1">
+            <a:off x="7334250" y="2095500"/>
+            <a:ext cx="781050" cy="1571625"/>
+          </a:xfrm>
+          <a:prstGeom xmlns:a="http://schemas.openxmlformats.org/drawingml/2006/main" prst="line">
+            <a:avLst/>
+          </a:prstGeom>
+          <a:noFill xmlns:a="http://schemas.openxmlformats.org/drawingml/2006/main"/>
+          <a:ln xmlns:a="http://schemas.openxmlformats.org/drawingml/2006/main" w="14288">
+            <a:solidFill>
+              <a:srgbClr val="B7CCE0"/>
+            </a:solidFill>
+            <a:prstDash val="solid"/>
+          </a:ln>
+        </p:spPr>
+      </p:sp>
+      <p:sp>
+        <p:nvSpPr>
+          <p:cNvPr id="14" name="PPAGENT_QA|parent=radial-node-2|domains=radial-shape">
+            <a:extLst xmlns:a="http://schemas.openxmlformats.org/drawingml/2006/main">
+              <a:ext uri="{FF2B5EF4-FFF2-40B4-BE49-F238E27FC236}">
+                <a16:creationId xmlns:a16="http://schemas.microsoft.com/office/drawing/2014/main" id="{7172E4C2-75C1-45EF-B3A7-FDEDD92375B9}"/>
+              </a:ext>
+            </a:extLst>
+          </p:cNvPr>
+          <p:cNvSpPr>
+            <a:spLocks xmlns:a="http://schemas.openxmlformats.org/drawingml/2006/main" noGrp="1"/>
+          </p:cNvSpPr>
+          <p:nvPr/>
+        </p:nvSpPr>
+        <p:spPr>
+          <a:xfrm xmlns:a="http://schemas.openxmlformats.org/drawingml/2006/main">
+            <a:off x="3638550" y="2924175"/>
+            <a:ext cx="438150" cy="438150"/>
+          </a:xfrm>
+          <a:prstGeom xmlns:a="http://schemas.openxmlformats.org/drawingml/2006/main" prst="ellipse">
+            <a:avLst/>
+          </a:prstGeom>
+          <a:solidFill xmlns:a="http://schemas.openxmlformats.org/drawingml/2006/main">
+            <a:srgbClr val="14CBD1"/>
+          </a:solidFill>
+          <a:ln xmlns:a="http://schemas.openxmlformats.org/drawingml/2006/main" w="28575">
+            <a:solidFill>
+              <a:srgbClr val="FFFFFF"/>
+            </a:solidFill>
+            <a:prstDash val="solid"/>
+          </a:ln>
+        </p:spPr>
+        <p:style>
+          <a:lnRef xmlns:a="http://schemas.openxmlformats.org/drawingml/2006/main" idx="0"/>
+          <a:fillRef xmlns:a="http://schemas.openxmlformats.org/drawingml/2006/main" idx="0"/>
+          <a:effectRef xmlns:a="http://schemas.openxmlformats.org/drawingml/2006/main" idx="4"/>
+          <a:fontRef xmlns:a="http://schemas.openxmlformats.org/drawingml/2006/main" idx="major"/>
+        </p:style>
+        <p:txBody>
+          <a:bodyPr xmlns:a="http://schemas.openxmlformats.org/drawingml/2006/main" lIns="0" tIns="0" rIns="0" bIns="0" anchor="ctr">
+            <a:normAutofit fontScale="100000"/>
+          </a:bodyPr>
+          <a:lstStyle xmlns:a="http://schemas.openxmlformats.org/drawingml/2006/main"/>
+          <a:p xmlns:a="http://schemas.openxmlformats.org/drawingml/2006/main">
+            <a:pPr algn="ctr">
+              <a:defRPr sz="1200" b="1">
+                <a:solidFill>
+                  <a:srgbClr val="FFFFFF"/>
+                </a:solidFill>
+                <a:latin typeface="Microsoft YaHei"/>
+                <a:ea typeface="Microsoft YaHei"/>
+                <a:cs typeface="Microsoft YaHei"/>
+              </a:defRPr>
+            </a:pPr>
+            <a:r>
+              <a:rPr sz="1200" b="1">
+                <a:solidFill>
+                  <a:srgbClr val="FFFFFF"/>
+                </a:solidFill>
+                <a:latin typeface="Microsoft YaHei"/>
+                <a:ea typeface="Microsoft YaHei"/>
+                <a:cs typeface="Microsoft YaHei"/>
+              </a:rPr>
+              <a:t>03</a:t>
+            </a:r>
+          </a:p>
+        </p:txBody>
+      </p:sp>
+      <p:sp>
+        <p:nvSpPr>
+          <p:cNvPr id="15" name="PPAGENT_QA|parent=radial-card-2|domains=radial-content">
+            <a:extLst xmlns:a="http://schemas.openxmlformats.org/drawingml/2006/main">
+              <a:ext uri="{FF2B5EF4-FFF2-40B4-BE49-F238E27FC236}">
+                <a16:creationId xmlns:a16="http://schemas.microsoft.com/office/drawing/2014/main" id="{72B714D6-2665-4616-8F09-34BCA2F47B0B}"/>
+              </a:ext>
+            </a:extLst>
+          </p:cNvPr>
+          <p:cNvSpPr>
+            <a:spLocks xmlns:a="http://schemas.openxmlformats.org/drawingml/2006/main" noGrp="1"/>
+          </p:cNvSpPr>
+          <p:nvPr/>
+        </p:nvSpPr>
+        <p:spPr>
+          <a:xfrm xmlns:a="http://schemas.openxmlformats.org/drawingml/2006/main">
+            <a:off x="647700" y="2762250"/>
+            <a:ext cx="2857500" cy="762000"/>
+          </a:xfrm>
+          <a:prstGeom xmlns:a="http://schemas.openxmlformats.org/drawingml/2006/main" prst="roundRect">
+            <a:avLst>
+              <a:gd name="adj" fmla="val 15000"/>
+            </a:avLst>
+          </a:prstGeom>
+          <a:noFill xmlns:a="http://schemas.openxmlformats.org/drawingml/2006/main"/>
+          <a:ln xmlns:a="http://schemas.openxmlformats.org/drawingml/2006/main" w="0">
+            <a:noFill/>
+            <a:prstDash val="solid"/>
+          </a:ln>
+        </p:spPr>
+      </p:sp>
+      <p:sp>
+        <p:nvSpPr>
+          <p:cNvPr id="16" name="PPAGENT_QA|within=radial-card-2|role=title">
+            <a:extLst xmlns:a="http://schemas.openxmlformats.org/drawingml/2006/main">
+              <a:ext uri="{FF2B5EF4-FFF2-40B4-BE49-F238E27FC236}">
+                <a16:creationId xmlns:a16="http://schemas.microsoft.com/office/drawing/2014/main" id="{12529F03-A590-4A51-80C7-5D8B30F42A86}"/>
+              </a:ext>
+            </a:extLst>
+          </p:cNvPr>
+          <p:cNvSpPr>
+            <a:spLocks xmlns:a="http://schemas.openxmlformats.org/drawingml/2006/main" noGrp="1"/>
+          </p:cNvSpPr>
+          <p:nvPr/>
+        </p:nvSpPr>
+        <p:spPr>
+          <a:xfrm xmlns:a="http://schemas.openxmlformats.org/drawingml/2006/main">
+            <a:off x="647700" y="2762250"/>
+            <a:ext cx="2857500" cy="285750"/>
+          </a:xfrm>
+          <a:prstGeom xmlns:a="http://schemas.openxmlformats.org/drawingml/2006/main" prst="rect">
+            <a:avLst/>
+          </a:prstGeom>
+          <a:noFill xmlns:a="http://schemas.openxmlformats.org/drawingml/2006/main"/>
+          <a:ln xmlns:a="http://schemas.openxmlformats.org/drawingml/2006/main" w="0">
+            <a:noFill/>
+            <a:prstDash val="solid"/>
+          </a:ln>
+        </p:spPr>
+        <p:txBody>
+          <a:bodyPr xmlns:a="http://schemas.openxmlformats.org/drawingml/2006/main" lIns="0" tIns="0" rIns="0" bIns="0" anchor="ctr">
+            <a:normAutofit fontScale="100000"/>
+          </a:bodyPr>
+          <a:lstStyle xmlns:a="http://schemas.openxmlformats.org/drawingml/2006/main"/>
+          <a:p xmlns:a="http://schemas.openxmlformats.org/drawingml/2006/main">
+            <a:pPr algn="r">
+              <a:defRPr sz="1425" b="1">
+                <a:solidFill>
+                  <a:srgbClr val="1677C8"/>
+                </a:solidFill>
+                <a:latin typeface="Microsoft YaHei"/>
+                <a:ea typeface="Microsoft YaHei"/>
+                <a:cs typeface="Microsoft YaHei"/>
+              </a:defRPr>
+            </a:pPr>
+            <a:r>
+              <a:rPr sz="1425" b="1">
+                <a:solidFill>
+                  <a:srgbClr val="1677C8"/>
+                </a:solidFill>
+                <a:latin typeface="Microsoft YaHei"/>
+                <a:ea typeface="Microsoft YaHei"/>
+                <a:cs typeface="Microsoft YaHei"/>
+              </a:rPr>
+              <a:t>质量可控</a:t>
+            </a:r>
+          </a:p>
+        </p:txBody>
+      </p:sp>
+      <p:sp>
+        <p:nvSpPr>
+          <p:cNvPr id="17" name="PPAGENT_CONNECTOR|from=radial-center|fromSide=left|to=radial-node-2|toSide=right">
+            <a:extLst xmlns:a="http://schemas.openxmlformats.org/drawingml/2006/main">
+              <a:ext uri="{FF2B5EF4-FFF2-40B4-BE49-F238E27FC236}">
+                <a16:creationId xmlns:a16="http://schemas.microsoft.com/office/drawing/2014/main" id="{2EB776ED-787A-42E9-BD1C-F857ED804298}"/>
+              </a:ext>
+            </a:extLst>
+          </p:cNvPr>
+          <p:cNvSpPr>
+            <a:spLocks xmlns:a="http://schemas.openxmlformats.org/drawingml/2006/main" noGrp="1"/>
+          </p:cNvSpPr>
+          <p:nvPr/>
+        </p:nvSpPr>
+        <p:spPr>
+          <a:xfrm xmlns:a="http://schemas.openxmlformats.org/drawingml/2006/main" flipH="1" flipV="1">
+            <a:off x="4076700" y="3143250"/>
+            <a:ext cx="781050" cy="523875"/>
+          </a:xfrm>
+          <a:prstGeom xmlns:a="http://schemas.openxmlformats.org/drawingml/2006/main" prst="line">
+            <a:avLst/>
+          </a:prstGeom>
+          <a:noFill xmlns:a="http://schemas.openxmlformats.org/drawingml/2006/main"/>
+          <a:ln xmlns:a="http://schemas.openxmlformats.org/drawingml/2006/main" w="14288">
+            <a:solidFill>
+              <a:srgbClr val="B7CCE0"/>
+            </a:solidFill>
+            <a:prstDash val="solid"/>
+          </a:ln>
+        </p:spPr>
+      </p:sp>
+      <p:sp>
+        <p:nvSpPr>
+          <p:cNvPr id="18" name="PPAGENT_QA|parent=radial-node-3|domains=radial-shape">
+            <a:extLst xmlns:a="http://schemas.openxmlformats.org/drawingml/2006/main">
+              <a:ext uri="{FF2B5EF4-FFF2-40B4-BE49-F238E27FC236}">
+                <a16:creationId xmlns:a16="http://schemas.microsoft.com/office/drawing/2014/main" id="{B74BB642-100A-4102-BB14-F06480509F8C}"/>
+              </a:ext>
+            </a:extLst>
+          </p:cNvPr>
+          <p:cNvSpPr>
+            <a:spLocks xmlns:a="http://schemas.openxmlformats.org/drawingml/2006/main" noGrp="1"/>
+          </p:cNvSpPr>
+          <p:nvPr/>
+        </p:nvSpPr>
+        <p:spPr>
+          <a:xfrm xmlns:a="http://schemas.openxmlformats.org/drawingml/2006/main">
+            <a:off x="8115300" y="2924175"/>
+            <a:ext cx="438150" cy="438150"/>
+          </a:xfrm>
+          <a:prstGeom xmlns:a="http://schemas.openxmlformats.org/drawingml/2006/main" prst="ellipse">
+            <a:avLst/>
+          </a:prstGeom>
+          <a:solidFill xmlns:a="http://schemas.openxmlformats.org/drawingml/2006/main">
+            <a:srgbClr val="00A8D8"/>
+          </a:solidFill>
+          <a:ln xmlns:a="http://schemas.openxmlformats.org/drawingml/2006/main" w="28575">
+            <a:solidFill>
+              <a:srgbClr val="FFFFFF"/>
+            </a:solidFill>
+            <a:prstDash val="solid"/>
+          </a:ln>
+        </p:spPr>
+        <p:style>
+          <a:lnRef xmlns:a="http://schemas.openxmlformats.org/drawingml/2006/main" idx="0"/>
+          <a:fillRef xmlns:a="http://schemas.openxmlformats.org/drawingml/2006/main" idx="0"/>
+          <a:effectRef xmlns:a="http://schemas.openxmlformats.org/drawingml/2006/main" idx="4"/>
+          <a:fontRef xmlns:a="http://schemas.openxmlformats.org/drawingml/2006/main" idx="major"/>
+        </p:style>
+        <p:txBody>
+          <a:bodyPr xmlns:a="http://schemas.openxmlformats.org/drawingml/2006/main" lIns="0" tIns="0" rIns="0" bIns="0" anchor="ctr">
+            <a:normAutofit fontScale="100000"/>
+          </a:bodyPr>
+          <a:lstStyle xmlns:a="http://schemas.openxmlformats.org/drawingml/2006/main"/>
+          <a:p xmlns:a="http://schemas.openxmlformats.org/drawingml/2006/main">
+            <a:pPr algn="ctr">
+              <a:defRPr sz="1200" b="1">
+                <a:solidFill>
+                  <a:srgbClr val="FFFFFF"/>
+                </a:solidFill>
+                <a:latin typeface="Microsoft YaHei"/>
+                <a:ea typeface="Microsoft YaHei"/>
+                <a:cs typeface="Microsoft YaHei"/>
+              </a:defRPr>
+            </a:pPr>
+            <a:r>
+              <a:rPr sz="1200" b="1">
+                <a:solidFill>
+                  <a:srgbClr val="FFFFFF"/>
+                </a:solidFill>
+                <a:latin typeface="Microsoft YaHei"/>
+                <a:ea typeface="Microsoft YaHei"/>
+                <a:cs typeface="Microsoft YaHei"/>
+              </a:rPr>
+              <a:t>04</a:t>
+            </a:r>
+          </a:p>
+        </p:txBody>
+      </p:sp>
+      <p:sp>
+        <p:nvSpPr>
+          <p:cNvPr id="19" name="PPAGENT_QA|parent=radial-card-3|domains=radial-content">
+            <a:extLst xmlns:a="http://schemas.openxmlformats.org/drawingml/2006/main">
+              <a:ext uri="{FF2B5EF4-FFF2-40B4-BE49-F238E27FC236}">
+                <a16:creationId xmlns:a16="http://schemas.microsoft.com/office/drawing/2014/main" id="{DD7846CD-A33A-48EF-B182-2607D46702C0}"/>
+              </a:ext>
+            </a:extLst>
+          </p:cNvPr>
+          <p:cNvSpPr>
+            <a:spLocks xmlns:a="http://schemas.openxmlformats.org/drawingml/2006/main" noGrp="1"/>
+          </p:cNvSpPr>
+          <p:nvPr/>
+        </p:nvSpPr>
+        <p:spPr>
+          <a:xfrm xmlns:a="http://schemas.openxmlformats.org/drawingml/2006/main">
+            <a:off x="8686800" y="2762250"/>
+            <a:ext cx="2857500" cy="762000"/>
+          </a:xfrm>
+          <a:prstGeom xmlns:a="http://schemas.openxmlformats.org/drawingml/2006/main" prst="roundRect">
+            <a:avLst>
+              <a:gd name="adj" fmla="val 15000"/>
+            </a:avLst>
+          </a:prstGeom>
+          <a:noFill xmlns:a="http://schemas.openxmlformats.org/drawingml/2006/main"/>
+          <a:ln xmlns:a="http://schemas.openxmlformats.org/drawingml/2006/main" w="0">
+            <a:noFill/>
+            <a:prstDash val="solid"/>
+          </a:ln>
+        </p:spPr>
+      </p:sp>
+      <p:sp>
+        <p:nvSpPr>
+          <p:cNvPr id="20" name="PPAGENT_QA|within=radial-card-3|role=title">
+            <a:extLst xmlns:a="http://schemas.openxmlformats.org/drawingml/2006/main">
+              <a:ext uri="{FF2B5EF4-FFF2-40B4-BE49-F238E27FC236}">
+                <a16:creationId xmlns:a16="http://schemas.microsoft.com/office/drawing/2014/main" id="{DB21FFC5-B865-48B2-A820-A1E5EAB4F301}"/>
+              </a:ext>
+            </a:extLst>
+          </p:cNvPr>
+          <p:cNvSpPr>
+            <a:spLocks xmlns:a="http://schemas.openxmlformats.org/drawingml/2006/main" noGrp="1"/>
+          </p:cNvSpPr>
+          <p:nvPr/>
+        </p:nvSpPr>
+        <p:spPr>
+          <a:xfrm xmlns:a="http://schemas.openxmlformats.org/drawingml/2006/main">
+            <a:off x="8686800" y="2762250"/>
+            <a:ext cx="2857500" cy="285750"/>
+          </a:xfrm>
+          <a:prstGeom xmlns:a="http://schemas.openxmlformats.org/drawingml/2006/main" prst="rect">
+            <a:avLst/>
+          </a:prstGeom>
+          <a:noFill xmlns:a="http://schemas.openxmlformats.org/drawingml/2006/main"/>
+          <a:ln xmlns:a="http://schemas.openxmlformats.org/drawingml/2006/main" w="0">
+            <a:noFill/>
+            <a:prstDash val="solid"/>
+          </a:ln>
+        </p:spPr>
+        <p:txBody>
+          <a:bodyPr xmlns:a="http://schemas.openxmlformats.org/drawingml/2006/main" lIns="0" tIns="0" rIns="0" bIns="0" anchor="ctr">
+            <a:normAutofit fontScale="100000"/>
+          </a:bodyPr>
+          <a:lstStyle xmlns:a="http://schemas.openxmlformats.org/drawingml/2006/main"/>
+          <a:p xmlns:a="http://schemas.openxmlformats.org/drawingml/2006/main">
+            <a:pPr algn="l">
+              <a:defRPr sz="1425" b="1">
+                <a:solidFill>
+                  <a:srgbClr val="1677C8"/>
+                </a:solidFill>
+                <a:latin typeface="Microsoft YaHei"/>
+                <a:ea typeface="Microsoft YaHei"/>
+                <a:cs typeface="Microsoft YaHei"/>
+              </a:defRPr>
+            </a:pPr>
+            <a:r>
+              <a:rPr sz="1425" b="1">
+                <a:solidFill>
+                  <a:srgbClr val="1677C8"/>
+                </a:solidFill>
+                <a:latin typeface="Microsoft YaHei"/>
+                <a:ea typeface="Microsoft YaHei"/>
+                <a:cs typeface="Microsoft YaHei"/>
+              </a:rPr>
+              <a:t>持续积累</a:t>
+            </a:r>
+          </a:p>
+        </p:txBody>
+      </p:sp>
+      <p:sp>
+        <p:nvSpPr>
+          <p:cNvPr id="21" name="PPAGENT_CONNECTOR|from=radial-center|fromSide=right|to=radial-node-3|toSide=left">
+            <a:extLst xmlns:a="http://schemas.openxmlformats.org/drawingml/2006/main">
+              <a:ext uri="{FF2B5EF4-FFF2-40B4-BE49-F238E27FC236}">
+                <a16:creationId xmlns:a16="http://schemas.microsoft.com/office/drawing/2014/main" id="{A2F9C4CD-8EF8-4A6D-9388-B1CFB80848CC}"/>
+              </a:ext>
+            </a:extLst>
+          </p:cNvPr>
+          <p:cNvSpPr>
+            <a:spLocks xmlns:a="http://schemas.openxmlformats.org/drawingml/2006/main" noGrp="1"/>
+          </p:cNvSpPr>
+          <p:nvPr/>
+        </p:nvSpPr>
+        <p:spPr>
+          <a:xfrm xmlns:a="http://schemas.openxmlformats.org/drawingml/2006/main" flipH="0" flipV="1">
+            <a:off x="7334250" y="3143250"/>
+            <a:ext cx="781050" cy="523875"/>
+          </a:xfrm>
+          <a:prstGeom xmlns:a="http://schemas.openxmlformats.org/drawingml/2006/main" prst="line">
+            <a:avLst/>
+          </a:prstGeom>
+          <a:noFill xmlns:a="http://schemas.openxmlformats.org/drawingml/2006/main"/>
+          <a:ln xmlns:a="http://schemas.openxmlformats.org/drawingml/2006/main" w="14288">
+            <a:solidFill>
+              <a:srgbClr val="B7CCE0"/>
+            </a:solidFill>
+            <a:prstDash val="solid"/>
+          </a:ln>
+        </p:spPr>
+      </p:sp>
+      <p:sp>
+        <p:nvSpPr>
+          <p:cNvPr id="22" name="PPAGENT_QA|parent=radial-node-4|domains=radial-shape">
+            <a:extLst xmlns:a="http://schemas.openxmlformats.org/drawingml/2006/main">
+              <a:ext uri="{FF2B5EF4-FFF2-40B4-BE49-F238E27FC236}">
+                <a16:creationId xmlns:a16="http://schemas.microsoft.com/office/drawing/2014/main" id="{94D3BA0B-78B7-4AFF-8EBB-A8BF53AE1919}"/>
+              </a:ext>
+            </a:extLst>
+          </p:cNvPr>
+          <p:cNvSpPr>
+            <a:spLocks xmlns:a="http://schemas.openxmlformats.org/drawingml/2006/main" noGrp="1"/>
+          </p:cNvSpPr>
+          <p:nvPr/>
+        </p:nvSpPr>
+        <p:spPr>
+          <a:xfrm xmlns:a="http://schemas.openxmlformats.org/drawingml/2006/main">
+            <a:off x="3638550" y="3971925"/>
+            <a:ext cx="438150" cy="438150"/>
+          </a:xfrm>
+          <a:prstGeom xmlns:a="http://schemas.openxmlformats.org/drawingml/2006/main" prst="ellipse">
+            <a:avLst/>
+          </a:prstGeom>
+          <a:solidFill xmlns:a="http://schemas.openxmlformats.org/drawingml/2006/main">
+            <a:srgbClr val="14CBD1"/>
+          </a:solidFill>
+          <a:ln xmlns:a="http://schemas.openxmlformats.org/drawingml/2006/main" w="28575">
+            <a:solidFill>
+              <a:srgbClr val="FFFFFF"/>
+            </a:solidFill>
+            <a:prstDash val="solid"/>
+          </a:ln>
+        </p:spPr>
+        <p:style>
+          <a:lnRef xmlns:a="http://schemas.openxmlformats.org/drawingml/2006/main" idx="0"/>
+          <a:fillRef xmlns:a="http://schemas.openxmlformats.org/drawingml/2006/main" idx="0"/>
+          <a:effectRef xmlns:a="http://schemas.openxmlformats.org/drawingml/2006/main" idx="4"/>
+          <a:fontRef xmlns:a="http://schemas.openxmlformats.org/drawingml/2006/main" idx="major"/>
+        </p:style>
+        <p:txBody>
+          <a:bodyPr xmlns:a="http://schemas.openxmlformats.org/drawingml/2006/main" lIns="0" tIns="0" rIns="0" bIns="0" anchor="ctr">
+            <a:normAutofit fontScale="100000"/>
+          </a:bodyPr>
+          <a:lstStyle xmlns:a="http://schemas.openxmlformats.org/drawingml/2006/main"/>
+          <a:p xmlns:a="http://schemas.openxmlformats.org/drawingml/2006/main">
+            <a:pPr algn="ctr">
+              <a:defRPr sz="1200" b="1">
+                <a:solidFill>
+                  <a:srgbClr val="FFFFFF"/>
+                </a:solidFill>
+                <a:latin typeface="Microsoft YaHei"/>
+                <a:ea typeface="Microsoft YaHei"/>
+                <a:cs typeface="Microsoft YaHei"/>
+              </a:defRPr>
+            </a:pPr>
+            <a:r>
+              <a:rPr sz="1200" b="1">
+                <a:solidFill>
+                  <a:srgbClr val="FFFFFF"/>
+                </a:solidFill>
+                <a:latin typeface="Microsoft YaHei"/>
+                <a:ea typeface="Microsoft YaHei"/>
+                <a:cs typeface="Microsoft YaHei"/>
+              </a:rPr>
+              <a:t>05</a:t>
+            </a:r>
+          </a:p>
+        </p:txBody>
+      </p:sp>
+      <p:sp>
+        <p:nvSpPr>
+          <p:cNvPr id="23" name="PPAGENT_QA|parent=radial-card-4|domains=radial-content">
+            <a:extLst xmlns:a="http://schemas.openxmlformats.org/drawingml/2006/main">
+              <a:ext uri="{FF2B5EF4-FFF2-40B4-BE49-F238E27FC236}">
+                <a16:creationId xmlns:a16="http://schemas.microsoft.com/office/drawing/2014/main" id="{CDDD9FA3-D0E8-400F-9004-4730551FFF35}"/>
+              </a:ext>
+            </a:extLst>
+          </p:cNvPr>
+          <p:cNvSpPr>
+            <a:spLocks xmlns:a="http://schemas.openxmlformats.org/drawingml/2006/main" noGrp="1"/>
+          </p:cNvSpPr>
+          <p:nvPr/>
+        </p:nvSpPr>
+        <p:spPr>
+          <a:xfrm xmlns:a="http://schemas.openxmlformats.org/drawingml/2006/main">
+            <a:off x="647700" y="3810000"/>
+            <a:ext cx="2857500" cy="762000"/>
+          </a:xfrm>
+          <a:prstGeom xmlns:a="http://schemas.openxmlformats.org/drawingml/2006/main" prst="roundRect">
+            <a:avLst>
+              <a:gd name="adj" fmla="val 15000"/>
+            </a:avLst>
+          </a:prstGeom>
+          <a:noFill xmlns:a="http://schemas.openxmlformats.org/drawingml/2006/main"/>
+          <a:ln xmlns:a="http://schemas.openxmlformats.org/drawingml/2006/main" w="0">
+            <a:noFill/>
+            <a:prstDash val="solid"/>
+          </a:ln>
+        </p:spPr>
+      </p:sp>
+      <p:sp>
+        <p:nvSpPr>
+          <p:cNvPr id="24" name="PPAGENT_QA|within=radial-card-4|role=title">
+            <a:extLst xmlns:a="http://schemas.openxmlformats.org/drawingml/2006/main">
+              <a:ext uri="{FF2B5EF4-FFF2-40B4-BE49-F238E27FC236}">
+                <a16:creationId xmlns:a16="http://schemas.microsoft.com/office/drawing/2014/main" id="{D2EA0D29-6ABD-42EB-A938-BA61CBA13ED4}"/>
+              </a:ext>
+            </a:extLst>
+          </p:cNvPr>
+          <p:cNvSpPr>
+            <a:spLocks xmlns:a="http://schemas.openxmlformats.org/drawingml/2006/main" noGrp="1"/>
+          </p:cNvSpPr>
+          <p:nvPr/>
+        </p:nvSpPr>
+        <p:spPr>
+          <a:xfrm xmlns:a="http://schemas.openxmlformats.org/drawingml/2006/main">
+            <a:off x="647700" y="3810000"/>
+            <a:ext cx="2857500" cy="285750"/>
+          </a:xfrm>
+          <a:prstGeom xmlns:a="http://schemas.openxmlformats.org/drawingml/2006/main" prst="rect">
+            <a:avLst/>
+          </a:prstGeom>
+          <a:noFill xmlns:a="http://schemas.openxmlformats.org/drawingml/2006/main"/>
+          <a:ln xmlns:a="http://schemas.openxmlformats.org/drawingml/2006/main" w="0">
+            <a:noFill/>
+            <a:prstDash val="solid"/>
+          </a:ln>
+        </p:spPr>
+        <p:txBody>
+          <a:bodyPr xmlns:a="http://schemas.openxmlformats.org/drawingml/2006/main" lIns="0" tIns="0" rIns="0" bIns="0" anchor="ctr">
+            <a:normAutofit fontScale="100000"/>
+          </a:bodyPr>
+          <a:lstStyle xmlns:a="http://schemas.openxmlformats.org/drawingml/2006/main"/>
+          <a:p xmlns:a="http://schemas.openxmlformats.org/drawingml/2006/main">
+            <a:pPr algn="r">
+              <a:defRPr sz="1425" b="1">
+                <a:solidFill>
+                  <a:srgbClr val="1677C8"/>
+                </a:solidFill>
+                <a:latin typeface="Microsoft YaHei"/>
+                <a:ea typeface="Microsoft YaHei"/>
+                <a:cs typeface="Microsoft YaHei"/>
+              </a:defRPr>
+            </a:pPr>
+            <a:r>
+              <a:rPr sz="1425" b="1">
+                <a:solidFill>
+                  <a:srgbClr val="1677C8"/>
+                </a:solidFill>
+                <a:latin typeface="Microsoft YaHei"/>
+                <a:ea typeface="Microsoft YaHei"/>
+                <a:cs typeface="Microsoft YaHei"/>
+              </a:rPr>
+              <a:t>资源整合</a:t>
+            </a:r>
+          </a:p>
+        </p:txBody>
+      </p:sp>
+      <p:sp>
+        <p:nvSpPr>
+          <p:cNvPr id="25" name="PPAGENT_CONNECTOR|from=radial-center|fromSide=left|to=radial-node-4|toSide=right">
+            <a:extLst xmlns:a="http://schemas.openxmlformats.org/drawingml/2006/main">
+              <a:ext uri="{FF2B5EF4-FFF2-40B4-BE49-F238E27FC236}">
+                <a16:creationId xmlns:a16="http://schemas.microsoft.com/office/drawing/2014/main" id="{4B18665E-B218-43A2-9C79-3B8ECC69F300}"/>
+              </a:ext>
+            </a:extLst>
+          </p:cNvPr>
+          <p:cNvSpPr>
+            <a:spLocks xmlns:a="http://schemas.openxmlformats.org/drawingml/2006/main" noGrp="1"/>
+          </p:cNvSpPr>
+          <p:nvPr/>
+        </p:nvSpPr>
+        <p:spPr>
+          <a:xfrm xmlns:a="http://schemas.openxmlformats.org/drawingml/2006/main" flipH="1" flipV="0">
+            <a:off x="4076700" y="3667125"/>
+            <a:ext cx="781050" cy="523875"/>
+          </a:xfrm>
+          <a:prstGeom xmlns:a="http://schemas.openxmlformats.org/drawingml/2006/main" prst="line">
+            <a:avLst/>
+          </a:prstGeom>
+          <a:noFill xmlns:a="http://schemas.openxmlformats.org/drawingml/2006/main"/>
+          <a:ln xmlns:a="http://schemas.openxmlformats.org/drawingml/2006/main" w="14288">
+            <a:solidFill>
+              <a:srgbClr val="B7CCE0"/>
+            </a:solidFill>
+            <a:prstDash val="solid"/>
+          </a:ln>
+        </p:spPr>
+      </p:sp>
+      <p:sp>
+        <p:nvSpPr>
+          <p:cNvPr id="26" name="PPAGENT_QA|parent=radial-node-5|domains=radial-shape">
+            <a:extLst xmlns:a="http://schemas.openxmlformats.org/drawingml/2006/main">
+              <a:ext uri="{FF2B5EF4-FFF2-40B4-BE49-F238E27FC236}">
+                <a16:creationId xmlns:a16="http://schemas.microsoft.com/office/drawing/2014/main" id="{1052BFA5-07DF-4491-B83B-09C766E4EBA9}"/>
+              </a:ext>
+            </a:extLst>
+          </p:cNvPr>
+          <p:cNvSpPr>
+            <a:spLocks xmlns:a="http://schemas.openxmlformats.org/drawingml/2006/main" noGrp="1"/>
+          </p:cNvSpPr>
+          <p:nvPr/>
+        </p:nvSpPr>
+        <p:spPr>
+          <a:xfrm xmlns:a="http://schemas.openxmlformats.org/drawingml/2006/main">
+            <a:off x="8115300" y="3971925"/>
+            <a:ext cx="438150" cy="438150"/>
+          </a:xfrm>
+          <a:prstGeom xmlns:a="http://schemas.openxmlformats.org/drawingml/2006/main" prst="ellipse">
+            <a:avLst/>
+          </a:prstGeom>
+          <a:solidFill xmlns:a="http://schemas.openxmlformats.org/drawingml/2006/main">
+            <a:srgbClr val="00A8D8"/>
+          </a:solidFill>
+          <a:ln xmlns:a="http://schemas.openxmlformats.org/drawingml/2006/main" w="28575">
+            <a:solidFill>
+              <a:srgbClr val="FFFFFF"/>
+            </a:solidFill>
+            <a:prstDash val="solid"/>
+          </a:ln>
+        </p:spPr>
+        <p:style>
+          <a:lnRef xmlns:a="http://schemas.openxmlformats.org/drawingml/2006/main" idx="0"/>
+          <a:fillRef xmlns:a="http://schemas.openxmlformats.org/drawingml/2006/main" idx="0"/>
+          <a:effectRef xmlns:a="http://schemas.openxmlformats.org/drawingml/2006/main" idx="4"/>
+          <a:fontRef xmlns:a="http://schemas.openxmlformats.org/drawingml/2006/main" idx="major"/>
+        </p:style>
+        <p:txBody>
+          <a:bodyPr xmlns:a="http://schemas.openxmlformats.org/drawingml/2006/main" lIns="0" tIns="0" rIns="0" bIns="0" anchor="ctr">
+            <a:normAutofit fontScale="100000"/>
+          </a:bodyPr>
+          <a:lstStyle xmlns:a="http://schemas.openxmlformats.org/drawingml/2006/main"/>
+          <a:p xmlns:a="http://schemas.openxmlformats.org/drawingml/2006/main">
+            <a:pPr algn="ctr">
+              <a:defRPr sz="1200" b="1">
+                <a:solidFill>
+                  <a:srgbClr val="FFFFFF"/>
+                </a:solidFill>
+                <a:latin typeface="Microsoft YaHei"/>
+                <a:ea typeface="Microsoft YaHei"/>
+                <a:cs typeface="Microsoft YaHei"/>
+              </a:defRPr>
+            </a:pPr>
+            <a:r>
+              <a:rPr sz="1200" b="1">
+                <a:solidFill>
+                  <a:srgbClr val="FFFFFF"/>
+                </a:solidFill>
+                <a:latin typeface="Microsoft YaHei"/>
+                <a:ea typeface="Microsoft YaHei"/>
+                <a:cs typeface="Microsoft YaHei"/>
+              </a:rPr>
+              <a:t>06</a:t>
+            </a:r>
+          </a:p>
+        </p:txBody>
+      </p:sp>
+      <p:sp>
+        <p:nvSpPr>
+          <p:cNvPr id="27" name="PPAGENT_QA|parent=radial-card-5|domains=radial-content">
+            <a:extLst xmlns:a="http://schemas.openxmlformats.org/drawingml/2006/main">
+              <a:ext uri="{FF2B5EF4-FFF2-40B4-BE49-F238E27FC236}">
+                <a16:creationId xmlns:a16="http://schemas.microsoft.com/office/drawing/2014/main" id="{5BD645FE-95C6-444B-B1F8-BDD055CF1AE5}"/>
+              </a:ext>
+            </a:extLst>
+          </p:cNvPr>
+          <p:cNvSpPr>
+            <a:spLocks xmlns:a="http://schemas.openxmlformats.org/drawingml/2006/main" noGrp="1"/>
+          </p:cNvSpPr>
+          <p:nvPr/>
+        </p:nvSpPr>
+        <p:spPr>
+          <a:xfrm xmlns:a="http://schemas.openxmlformats.org/drawingml/2006/main">
+            <a:off x="8686800" y="3810000"/>
+            <a:ext cx="2857500" cy="762000"/>
+          </a:xfrm>
+          <a:prstGeom xmlns:a="http://schemas.openxmlformats.org/drawingml/2006/main" prst="roundRect">
+            <a:avLst>
+              <a:gd name="adj" fmla="val 15000"/>
+            </a:avLst>
+          </a:prstGeom>
+          <a:noFill xmlns:a="http://schemas.openxmlformats.org/drawingml/2006/main"/>
+          <a:ln xmlns:a="http://schemas.openxmlformats.org/drawingml/2006/main" w="0">
+            <a:noFill/>
+            <a:prstDash val="solid"/>
+          </a:ln>
+        </p:spPr>
+      </p:sp>
+      <p:sp>
+        <p:nvSpPr>
+          <p:cNvPr id="28" name="PPAGENT_QA|within=radial-card-5|role=title">
+            <a:extLst xmlns:a="http://schemas.openxmlformats.org/drawingml/2006/main">
+              <a:ext uri="{FF2B5EF4-FFF2-40B4-BE49-F238E27FC236}">
+                <a16:creationId xmlns:a16="http://schemas.microsoft.com/office/drawing/2014/main" id="{521BA9C6-EA16-49E8-9586-93D34FB44700}"/>
+              </a:ext>
+            </a:extLst>
+          </p:cNvPr>
+          <p:cNvSpPr>
+            <a:spLocks xmlns:a="http://schemas.openxmlformats.org/drawingml/2006/main" noGrp="1"/>
+          </p:cNvSpPr>
+          <p:nvPr/>
+        </p:nvSpPr>
+        <p:spPr>
+          <a:xfrm xmlns:a="http://schemas.openxmlformats.org/drawingml/2006/main">
+            <a:off x="8686800" y="3810000"/>
+            <a:ext cx="2857500" cy="285750"/>
+          </a:xfrm>
+          <a:prstGeom xmlns:a="http://schemas.openxmlformats.org/drawingml/2006/main" prst="rect">
+            <a:avLst/>
+          </a:prstGeom>
+          <a:noFill xmlns:a="http://schemas.openxmlformats.org/drawingml/2006/main"/>
+          <a:ln xmlns:a="http://schemas.openxmlformats.org/drawingml/2006/main" w="0">
+            <a:noFill/>
+            <a:prstDash val="solid"/>
+          </a:ln>
+        </p:spPr>
+        <p:txBody>
+          <a:bodyPr xmlns:a="http://schemas.openxmlformats.org/drawingml/2006/main" lIns="0" tIns="0" rIns="0" bIns="0" anchor="ctr">
+            <a:normAutofit fontScale="100000"/>
+          </a:bodyPr>
+          <a:lstStyle xmlns:a="http://schemas.openxmlformats.org/drawingml/2006/main"/>
+          <a:p xmlns:a="http://schemas.openxmlformats.org/drawingml/2006/main">
+            <a:pPr algn="l">
+              <a:defRPr sz="1425" b="1">
+                <a:solidFill>
+                  <a:srgbClr val="1677C8"/>
+                </a:solidFill>
+                <a:latin typeface="Microsoft YaHei"/>
+                <a:ea typeface="Microsoft YaHei"/>
+                <a:cs typeface="Microsoft YaHei"/>
+              </a:defRPr>
+            </a:pPr>
+            <a:r>
+              <a:rPr sz="1425" b="1">
+                <a:solidFill>
+                  <a:srgbClr val="1677C8"/>
+                </a:solidFill>
+                <a:latin typeface="Microsoft YaHei"/>
+                <a:ea typeface="Microsoft YaHei"/>
+                <a:cs typeface="Microsoft YaHei"/>
+              </a:rPr>
+              <a:t>跨域协作</a:t>
+            </a:r>
+          </a:p>
+        </p:txBody>
+      </p:sp>
+      <p:sp>
+        <p:nvSpPr>
+          <p:cNvPr id="29" name="PPAGENT_CONNECTOR|from=radial-center|fromSide=right|to=radial-node-5|toSide=left">
+            <a:extLst xmlns:a="http://schemas.openxmlformats.org/drawingml/2006/main">
+              <a:ext uri="{FF2B5EF4-FFF2-40B4-BE49-F238E27FC236}">
+                <a16:creationId xmlns:a16="http://schemas.microsoft.com/office/drawing/2014/main" id="{6BD0141A-7BE0-4935-8624-0C0025883A9D}"/>
+              </a:ext>
+            </a:extLst>
+          </p:cNvPr>
+          <p:cNvSpPr>
+            <a:spLocks xmlns:a="http://schemas.openxmlformats.org/drawingml/2006/main" noGrp="1"/>
+          </p:cNvSpPr>
+          <p:nvPr/>
+        </p:nvSpPr>
+        <p:spPr>
+          <a:xfrm xmlns:a="http://schemas.openxmlformats.org/drawingml/2006/main" flipH="0" flipV="0">
+            <a:off x="7334250" y="3667125"/>
+            <a:ext cx="781050" cy="523875"/>
+          </a:xfrm>
+          <a:prstGeom xmlns:a="http://schemas.openxmlformats.org/drawingml/2006/main" prst="line">
+            <a:avLst/>
+          </a:prstGeom>
+          <a:noFill xmlns:a="http://schemas.openxmlformats.org/drawingml/2006/main"/>
+          <a:ln xmlns:a="http://schemas.openxmlformats.org/drawingml/2006/main" w="14288">
+            <a:solidFill>
+              <a:srgbClr val="B7CCE0"/>
+            </a:solidFill>
+            <a:prstDash val="solid"/>
+          </a:ln>
+        </p:spPr>
+      </p:sp>
+      <p:sp>
+        <p:nvSpPr>
+          <p:cNvPr id="30" name="PPAGENT_QA|parent=radial-node-6|domains=radial-shape">
+            <a:extLst xmlns:a="http://schemas.openxmlformats.org/drawingml/2006/main">
+              <a:ext uri="{FF2B5EF4-FFF2-40B4-BE49-F238E27FC236}">
+                <a16:creationId xmlns:a16="http://schemas.microsoft.com/office/drawing/2014/main" id="{F03D8F7C-A452-4663-8CDF-DE9B4B7D7BBA}"/>
+              </a:ext>
+            </a:extLst>
+          </p:cNvPr>
+          <p:cNvSpPr>
+            <a:spLocks xmlns:a="http://schemas.openxmlformats.org/drawingml/2006/main" noGrp="1"/>
+          </p:cNvSpPr>
+          <p:nvPr/>
+        </p:nvSpPr>
+        <p:spPr>
+          <a:xfrm xmlns:a="http://schemas.openxmlformats.org/drawingml/2006/main">
+            <a:off x="3638550" y="5019675"/>
+            <a:ext cx="438150" cy="438150"/>
+          </a:xfrm>
+          <a:prstGeom xmlns:a="http://schemas.openxmlformats.org/drawingml/2006/main" prst="ellipse">
+            <a:avLst/>
+          </a:prstGeom>
+          <a:solidFill xmlns:a="http://schemas.openxmlformats.org/drawingml/2006/main">
+            <a:srgbClr val="14CBD1"/>
+          </a:solidFill>
+          <a:ln xmlns:a="http://schemas.openxmlformats.org/drawingml/2006/main" w="28575">
+            <a:solidFill>
+              <a:srgbClr val="FFFFFF"/>
+            </a:solidFill>
+            <a:prstDash val="solid"/>
+          </a:ln>
+        </p:spPr>
+        <p:style>
+          <a:lnRef xmlns:a="http://schemas.openxmlformats.org/drawingml/2006/main" idx="0"/>
+          <a:fillRef xmlns:a="http://schemas.openxmlformats.org/drawingml/2006/main" idx="0"/>
+          <a:effectRef xmlns:a="http://schemas.openxmlformats.org/drawingml/2006/main" idx="4"/>
+          <a:fontRef xmlns:a="http://schemas.openxmlformats.org/drawingml/2006/main" idx="major"/>
+        </p:style>
+        <p:txBody>
+          <a:bodyPr xmlns:a="http://schemas.openxmlformats.org/drawingml/2006/main" lIns="0" tIns="0" rIns="0" bIns="0" anchor="ctr">
+            <a:normAutofit fontScale="100000"/>
+          </a:bodyPr>
+          <a:lstStyle xmlns:a="http://schemas.openxmlformats.org/drawingml/2006/main"/>
+          <a:p xmlns:a="http://schemas.openxmlformats.org/drawingml/2006/main">
+            <a:pPr algn="ctr">
+              <a:defRPr sz="1200" b="1">
+                <a:solidFill>
+                  <a:srgbClr val="FFFFFF"/>
+                </a:solidFill>
+                <a:latin typeface="Microsoft YaHei"/>
+                <a:ea typeface="Microsoft YaHei"/>
+                <a:cs typeface="Microsoft YaHei"/>
+              </a:defRPr>
+            </a:pPr>
+            <a:r>
+              <a:rPr sz="1200" b="1">
+                <a:solidFill>
+                  <a:srgbClr val="FFFFFF"/>
+                </a:solidFill>
+                <a:latin typeface="Microsoft YaHei"/>
+                <a:ea typeface="Microsoft YaHei"/>
+                <a:cs typeface="Microsoft YaHei"/>
+              </a:rPr>
+              <a:t>07</a:t>
+            </a:r>
+          </a:p>
+        </p:txBody>
+      </p:sp>
+      <p:sp>
+        <p:nvSpPr>
+          <p:cNvPr id="31" name="PPAGENT_QA|parent=radial-card-6|domains=radial-content">
+            <a:extLst xmlns:a="http://schemas.openxmlformats.org/drawingml/2006/main">
+              <a:ext uri="{FF2B5EF4-FFF2-40B4-BE49-F238E27FC236}">
+                <a16:creationId xmlns:a16="http://schemas.microsoft.com/office/drawing/2014/main" id="{8953443C-1FC4-4371-99BC-A9C205077FDD}"/>
+              </a:ext>
+            </a:extLst>
+          </p:cNvPr>
+          <p:cNvSpPr>
+            <a:spLocks xmlns:a="http://schemas.openxmlformats.org/drawingml/2006/main" noGrp="1"/>
+          </p:cNvSpPr>
+          <p:nvPr/>
+        </p:nvSpPr>
+        <p:spPr>
+          <a:xfrm xmlns:a="http://schemas.openxmlformats.org/drawingml/2006/main">
+            <a:off x="647700" y="4857750"/>
+            <a:ext cx="2857500" cy="762000"/>
+          </a:xfrm>
+          <a:prstGeom xmlns:a="http://schemas.openxmlformats.org/drawingml/2006/main" prst="roundRect">
+            <a:avLst>
+              <a:gd name="adj" fmla="val 15000"/>
+            </a:avLst>
+          </a:prstGeom>
+          <a:noFill xmlns:a="http://schemas.openxmlformats.org/drawingml/2006/main"/>
+          <a:ln xmlns:a="http://schemas.openxmlformats.org/drawingml/2006/main" w="0">
+            <a:noFill/>
+            <a:prstDash val="solid"/>
+          </a:ln>
+        </p:spPr>
+      </p:sp>
+      <p:sp>
+        <p:nvSpPr>
+          <p:cNvPr id="32" name="PPAGENT_QA|within=radial-card-6|role=title">
+            <a:extLst xmlns:a="http://schemas.openxmlformats.org/drawingml/2006/main">
+              <a:ext uri="{FF2B5EF4-FFF2-40B4-BE49-F238E27FC236}">
+                <a16:creationId xmlns:a16="http://schemas.microsoft.com/office/drawing/2014/main" id="{C4AB97C9-4F00-4859-8BA9-9B4197255665}"/>
+              </a:ext>
+            </a:extLst>
+          </p:cNvPr>
+          <p:cNvSpPr>
+            <a:spLocks xmlns:a="http://schemas.openxmlformats.org/drawingml/2006/main" noGrp="1"/>
+          </p:cNvSpPr>
+          <p:nvPr/>
+        </p:nvSpPr>
+        <p:spPr>
+          <a:xfrm xmlns:a="http://schemas.openxmlformats.org/drawingml/2006/main">
+            <a:off x="647700" y="4857750"/>
+            <a:ext cx="2857500" cy="285750"/>
+          </a:xfrm>
+          <a:prstGeom xmlns:a="http://schemas.openxmlformats.org/drawingml/2006/main" prst="rect">
+            <a:avLst/>
+          </a:prstGeom>
+          <a:noFill xmlns:a="http://schemas.openxmlformats.org/drawingml/2006/main"/>
+          <a:ln xmlns:a="http://schemas.openxmlformats.org/drawingml/2006/main" w="0">
+            <a:noFill/>
+            <a:prstDash val="solid"/>
+          </a:ln>
+        </p:spPr>
+        <p:txBody>
+          <a:bodyPr xmlns:a="http://schemas.openxmlformats.org/drawingml/2006/main" lIns="0" tIns="0" rIns="0" bIns="0" anchor="ctr">
+            <a:normAutofit fontScale="100000"/>
+          </a:bodyPr>
+          <a:lstStyle xmlns:a="http://schemas.openxmlformats.org/drawingml/2006/main"/>
+          <a:p xmlns:a="http://schemas.openxmlformats.org/drawingml/2006/main">
+            <a:pPr algn="r">
+              <a:defRPr sz="1425" b="1">
+                <a:solidFill>
+                  <a:srgbClr val="1677C8"/>
+                </a:solidFill>
+                <a:latin typeface="Microsoft YaHei"/>
+                <a:ea typeface="Microsoft YaHei"/>
+                <a:cs typeface="Microsoft YaHei"/>
+              </a:defRPr>
+            </a:pPr>
+            <a:r>
+              <a:rPr sz="1425" b="1">
+                <a:solidFill>
+                  <a:srgbClr val="1677C8"/>
+                </a:solidFill>
+                <a:latin typeface="Microsoft YaHei"/>
+                <a:ea typeface="Microsoft YaHei"/>
+                <a:cs typeface="Microsoft YaHei"/>
+              </a:rPr>
+              <a:t>风险识别</a:t>
+            </a:r>
+          </a:p>
+        </p:txBody>
+      </p:sp>
+      <p:sp>
+        <p:nvSpPr>
+          <p:cNvPr id="33" name="PPAGENT_CONNECTOR|from=radial-center|fromSide=left|to=radial-node-6|toSide=right">
+            <a:extLst xmlns:a="http://schemas.openxmlformats.org/drawingml/2006/main">
+              <a:ext uri="{FF2B5EF4-FFF2-40B4-BE49-F238E27FC236}">
+                <a16:creationId xmlns:a16="http://schemas.microsoft.com/office/drawing/2014/main" id="{98AB1C9F-41DE-4986-8765-D9E6562509CF}"/>
+              </a:ext>
+            </a:extLst>
+          </p:cNvPr>
+          <p:cNvSpPr>
+            <a:spLocks xmlns:a="http://schemas.openxmlformats.org/drawingml/2006/main" noGrp="1"/>
+          </p:cNvSpPr>
+          <p:nvPr/>
+        </p:nvSpPr>
+        <p:spPr>
+          <a:xfrm xmlns:a="http://schemas.openxmlformats.org/drawingml/2006/main" flipH="1" flipV="0">
+            <a:off x="4076700" y="3667125"/>
+            <a:ext cx="781050" cy="1571625"/>
+          </a:xfrm>
+          <a:prstGeom xmlns:a="http://schemas.openxmlformats.org/drawingml/2006/main" prst="line">
+            <a:avLst/>
+          </a:prstGeom>
+          <a:noFill xmlns:a="http://schemas.openxmlformats.org/drawingml/2006/main"/>
+          <a:ln xmlns:a="http://schemas.openxmlformats.org/drawingml/2006/main" w="14288">
+            <a:solidFill>
+              <a:srgbClr val="B7CCE0"/>
+            </a:solidFill>
+            <a:prstDash val="solid"/>
+          </a:ln>
+        </p:spPr>
+      </p:sp>
+      <p:sp>
+        <p:nvSpPr>
+          <p:cNvPr id="34" name="PPAGENT_QA|parent=radial-node-7|domains=radial-shape">
+            <a:extLst xmlns:a="http://schemas.openxmlformats.org/drawingml/2006/main">
+              <a:ext uri="{FF2B5EF4-FFF2-40B4-BE49-F238E27FC236}">
+                <a16:creationId xmlns:a16="http://schemas.microsoft.com/office/drawing/2014/main" id="{0408A04D-E6D4-4CA5-9D5C-6D56BE4AE30F}"/>
+              </a:ext>
+            </a:extLst>
+          </p:cNvPr>
+          <p:cNvSpPr>
+            <a:spLocks xmlns:a="http://schemas.openxmlformats.org/drawingml/2006/main" noGrp="1"/>
+          </p:cNvSpPr>
+          <p:nvPr/>
+        </p:nvSpPr>
+        <p:spPr>
+          <a:xfrm xmlns:a="http://schemas.openxmlformats.org/drawingml/2006/main">
+            <a:off x="8115300" y="5019675"/>
+            <a:ext cx="438150" cy="438150"/>
+          </a:xfrm>
+          <a:prstGeom xmlns:a="http://schemas.openxmlformats.org/drawingml/2006/main" prst="ellipse">
+            <a:avLst/>
+          </a:prstGeom>
+          <a:solidFill xmlns:a="http://schemas.openxmlformats.org/drawingml/2006/main">
+            <a:srgbClr val="00A8D8"/>
+          </a:solidFill>
+          <a:ln xmlns:a="http://schemas.openxmlformats.org/drawingml/2006/main" w="28575">
+            <a:solidFill>
+              <a:srgbClr val="FFFFFF"/>
+            </a:solidFill>
+            <a:prstDash val="solid"/>
+          </a:ln>
+        </p:spPr>
+        <p:style>
+          <a:lnRef xmlns:a="http://schemas.openxmlformats.org/drawingml/2006/main" idx="0"/>
+          <a:fillRef xmlns:a="http://schemas.openxmlformats.org/drawingml/2006/main" idx="0"/>
+          <a:effectRef xmlns:a="http://schemas.openxmlformats.org/drawingml/2006/main" idx="4"/>
+          <a:fontRef xmlns:a="http://schemas.openxmlformats.org/drawingml/2006/main" idx="major"/>
+        </p:style>
+        <p:txBody>
+          <a:bodyPr xmlns:a="http://schemas.openxmlformats.org/drawingml/2006/main" lIns="0" tIns="0" rIns="0" bIns="0" anchor="ctr">
+            <a:normAutofit fontScale="100000"/>
+          </a:bodyPr>
+          <a:lstStyle xmlns:a="http://schemas.openxmlformats.org/drawingml/2006/main"/>
+          <a:p xmlns:a="http://schemas.openxmlformats.org/drawingml/2006/main">
+            <a:pPr algn="ctr">
+              <a:defRPr sz="1200" b="1">
+                <a:solidFill>
+                  <a:srgbClr val="FFFFFF"/>
+                </a:solidFill>
+                <a:latin typeface="Microsoft YaHei"/>
+                <a:ea typeface="Microsoft YaHei"/>
+                <a:cs typeface="Microsoft YaHei"/>
+              </a:defRPr>
+            </a:pPr>
+            <a:r>
+              <a:rPr sz="1200" b="1">
+                <a:solidFill>
+                  <a:srgbClr val="FFFFFF"/>
+                </a:solidFill>
+                <a:latin typeface="Microsoft YaHei"/>
+                <a:ea typeface="Microsoft YaHei"/>
+                <a:cs typeface="Microsoft YaHei"/>
+              </a:rPr>
+              <a:t>08</a:t>
+            </a:r>
+          </a:p>
+        </p:txBody>
+      </p:sp>
+      <p:sp>
+        <p:nvSpPr>
+          <p:cNvPr id="35" name="PPAGENT_QA|parent=radial-card-7|domains=radial-content">
+            <a:extLst xmlns:a="http://schemas.openxmlformats.org/drawingml/2006/main">
+              <a:ext uri="{FF2B5EF4-FFF2-40B4-BE49-F238E27FC236}">
+                <a16:creationId xmlns:a16="http://schemas.microsoft.com/office/drawing/2014/main" id="{0345A847-8D79-4962-816F-1CF6B483B0DE}"/>
+              </a:ext>
+            </a:extLst>
+          </p:cNvPr>
+          <p:cNvSpPr>
+            <a:spLocks xmlns:a="http://schemas.openxmlformats.org/drawingml/2006/main" noGrp="1"/>
+          </p:cNvSpPr>
+          <p:nvPr/>
+        </p:nvSpPr>
+        <p:spPr>
+          <a:xfrm xmlns:a="http://schemas.openxmlformats.org/drawingml/2006/main">
+            <a:off x="8686800" y="4857750"/>
+            <a:ext cx="2857500" cy="762000"/>
+          </a:xfrm>
+          <a:prstGeom xmlns:a="http://schemas.openxmlformats.org/drawingml/2006/main" prst="roundRect">
+            <a:avLst>
+              <a:gd name="adj" fmla="val 15000"/>
+            </a:avLst>
+          </a:prstGeom>
+          <a:noFill xmlns:a="http://schemas.openxmlformats.org/drawingml/2006/main"/>
+          <a:ln xmlns:a="http://schemas.openxmlformats.org/drawingml/2006/main" w="0">
+            <a:noFill/>
+            <a:prstDash val="solid"/>
+          </a:ln>
+        </p:spPr>
+      </p:sp>
+      <p:sp>
+        <p:nvSpPr>
+          <p:cNvPr id="36" name="PPAGENT_QA|within=radial-card-7|role=title">
+            <a:extLst xmlns:a="http://schemas.openxmlformats.org/drawingml/2006/main">
+              <a:ext uri="{FF2B5EF4-FFF2-40B4-BE49-F238E27FC236}">
+                <a16:creationId xmlns:a16="http://schemas.microsoft.com/office/drawing/2014/main" id="{002B342E-7E51-446A-9DD4-9883499883BC}"/>
+              </a:ext>
+            </a:extLst>
+          </p:cNvPr>
+          <p:cNvSpPr>
+            <a:spLocks xmlns:a="http://schemas.openxmlformats.org/drawingml/2006/main" noGrp="1"/>
+          </p:cNvSpPr>
+          <p:nvPr/>
+        </p:nvSpPr>
+        <p:spPr>
+          <a:xfrm xmlns:a="http://schemas.openxmlformats.org/drawingml/2006/main">
+            <a:off x="8686800" y="4857750"/>
+            <a:ext cx="2857500" cy="285750"/>
+          </a:xfrm>
+          <a:prstGeom xmlns:a="http://schemas.openxmlformats.org/drawingml/2006/main" prst="rect">
+            <a:avLst/>
+          </a:prstGeom>
+          <a:noFill xmlns:a="http://schemas.openxmlformats.org/drawingml/2006/main"/>
+          <a:ln xmlns:a="http://schemas.openxmlformats.org/drawingml/2006/main" w="0">
+            <a:noFill/>
+            <a:prstDash val="solid"/>
+          </a:ln>
+        </p:spPr>
+        <p:txBody>
+          <a:bodyPr xmlns:a="http://schemas.openxmlformats.org/drawingml/2006/main" lIns="0" tIns="0" rIns="0" bIns="0" anchor="ctr">
+            <a:normAutofit fontScale="100000"/>
+          </a:bodyPr>
+          <a:lstStyle xmlns:a="http://schemas.openxmlformats.org/drawingml/2006/main"/>
+          <a:p xmlns:a="http://schemas.openxmlformats.org/drawingml/2006/main">
+            <a:pPr algn="l">
+              <a:defRPr sz="1425" b="1">
+                <a:solidFill>
+                  <a:srgbClr val="1677C8"/>
+                </a:solidFill>
+                <a:latin typeface="Microsoft YaHei"/>
+                <a:ea typeface="Microsoft YaHei"/>
+                <a:cs typeface="Microsoft YaHei"/>
+              </a:defRPr>
+            </a:pPr>
+            <a:r>
+              <a:rPr sz="1425" b="1">
+                <a:solidFill>
+                  <a:srgbClr val="1677C8"/>
+                </a:solidFill>
+                <a:latin typeface="Microsoft YaHei"/>
+                <a:ea typeface="Microsoft YaHei"/>
+                <a:cs typeface="Microsoft YaHei"/>
+              </a:rPr>
+              <a:t>成果复用</a:t>
+            </a:r>
+          </a:p>
+        </p:txBody>
+      </p:sp>
+      <p:sp>
+        <p:nvSpPr>
+          <p:cNvPr id="37" name="PPAGENT_CONNECTOR|from=radial-center|fromSide=right|to=radial-node-7|toSide=left">
+            <a:extLst xmlns:a="http://schemas.openxmlformats.org/drawingml/2006/main">
+              <a:ext uri="{FF2B5EF4-FFF2-40B4-BE49-F238E27FC236}">
+                <a16:creationId xmlns:a16="http://schemas.microsoft.com/office/drawing/2014/main" id="{92D59C67-B8AA-458F-982E-324CDB24A165}"/>
+              </a:ext>
+            </a:extLst>
+          </p:cNvPr>
+          <p:cNvSpPr>
+            <a:spLocks xmlns:a="http://schemas.openxmlformats.org/drawingml/2006/main" noGrp="1"/>
+          </p:cNvSpPr>
+          <p:nvPr/>
+        </p:nvSpPr>
+        <p:spPr>
+          <a:xfrm xmlns:a="http://schemas.openxmlformats.org/drawingml/2006/main" flipH="0" flipV="0">
+            <a:off x="7334250" y="3667125"/>
+            <a:ext cx="781050" cy="1571625"/>
+          </a:xfrm>
+          <a:prstGeom xmlns:a="http://schemas.openxmlformats.org/drawingml/2006/main" prst="line">
+            <a:avLst/>
+          </a:prstGeom>
+          <a:noFill xmlns:a="http://schemas.openxmlformats.org/drawingml/2006/main"/>
+          <a:ln xmlns:a="http://schemas.openxmlformats.org/drawingml/2006/main" w="14288">
+            <a:solidFill>
+              <a:srgbClr val="B7CCE0"/>
+            </a:solidFill>
+            <a:prstDash val="solid"/>
+          </a:ln>
+        </p:spPr>
+      </p:sp>
+    </p:spTree>
+    <p:extLst>
+      <p:ext uri="{BB962C8B-B14F-4D97-AF65-F5344CB8AC3E}">
+        <p14:creationId xmlns:p14="http://schemas.microsoft.com/office/powerpoint/2010/main" val="2123144568"/>
       </p:ext>
     </p:extLst>
   </p:cSld>
